--- a/examples/recreations/05_Box_Website__Thermometer_Graphic/out_mat2ppt.pptx
+++ b/examples/recreations/05_Box_Website__Thermometer_Graphic/out_mat2ppt.pptx
@@ -3091,7 +3091,1191 @@
       <p:grpSpPr/>
       <p:sp>
         <p:nvSpPr>
-          <p:cNvPr id="2" name="Rectangle 1"/>
+          <p:cNvPr id="2" name="Oval 1"/>
+          <p:cNvSpPr/>
+          <p:nvPr/>
+        </p:nvSpPr>
+        <p:spPr>
+          <a:xfrm>
+            <a:off x="42976800" y="3396342"/>
+            <a:ext cx="1828800" cy="1828800"/>
+          </a:xfrm>
+          <a:prstGeom prst="ellipse">
+            <a:avLst/>
+          </a:prstGeom>
+        </p:spPr>
+        <p:style>
+          <a:lnRef idx="1">
+            <a:schemeClr val="accent1"/>
+          </a:lnRef>
+          <a:fillRef idx="3">
+            <a:schemeClr val="accent1"/>
+          </a:fillRef>
+          <a:effectRef idx="2">
+            <a:schemeClr val="accent1"/>
+          </a:effectRef>
+          <a:fontRef idx="minor">
+            <a:schemeClr val="lt1"/>
+          </a:fontRef>
+        </p:style>
+        <p:txBody>
+          <a:bodyPr rtlCol="0" anchor="ctr"/>
+          <a:lstStyle/>
+          <a:p>
+            <a:pPr algn="ctr"/>
+          </a:p>
+        </p:txBody>
+      </p:sp>
+      <p:sp>
+        <p:nvSpPr>
+          <p:cNvPr id="3" name="Rectangle 2"/>
+          <p:cNvSpPr/>
+          <p:nvPr/>
+        </p:nvSpPr>
+        <p:spPr>
+          <a:xfrm>
+            <a:off x="1828800" y="3396342"/>
+            <a:ext cx="42062400" cy="1828800"/>
+          </a:xfrm>
+          <a:prstGeom prst="rect">
+            <a:avLst/>
+          </a:prstGeom>
+        </p:spPr>
+        <p:style>
+          <a:lnRef idx="1">
+            <a:schemeClr val="accent1"/>
+          </a:lnRef>
+          <a:fillRef idx="3">
+            <a:schemeClr val="accent1"/>
+          </a:fillRef>
+          <a:effectRef idx="2">
+            <a:schemeClr val="accent1"/>
+          </a:effectRef>
+          <a:fontRef idx="minor">
+            <a:schemeClr val="lt1"/>
+          </a:fontRef>
+        </p:style>
+        <p:txBody>
+          <a:bodyPr rtlCol="0" anchor="ctr"/>
+          <a:lstStyle/>
+          <a:p>
+            <a:pPr algn="ctr"/>
+          </a:p>
+        </p:txBody>
+      </p:sp>
+      <p:sp>
+        <p:nvSpPr>
+          <p:cNvPr id="4" name="Oval 3"/>
+          <p:cNvSpPr/>
+          <p:nvPr/>
+        </p:nvSpPr>
+        <p:spPr>
+          <a:xfrm>
+            <a:off x="0" y="2481942"/>
+            <a:ext cx="3657600" cy="3657600"/>
+          </a:xfrm>
+          <a:prstGeom prst="ellipse">
+            <a:avLst/>
+          </a:prstGeom>
+        </p:spPr>
+        <p:style>
+          <a:lnRef idx="1">
+            <a:schemeClr val="accent1"/>
+          </a:lnRef>
+          <a:fillRef idx="3">
+            <a:schemeClr val="accent1"/>
+          </a:fillRef>
+          <a:effectRef idx="2">
+            <a:schemeClr val="accent1"/>
+          </a:effectRef>
+          <a:fontRef idx="minor">
+            <a:schemeClr val="lt1"/>
+          </a:fontRef>
+        </p:style>
+        <p:txBody>
+          <a:bodyPr rtlCol="0" anchor="ctr"/>
+          <a:lstStyle/>
+          <a:p>
+            <a:pPr algn="ctr"/>
+          </a:p>
+        </p:txBody>
+      </p:sp>
+      <p:sp>
+        <p:nvSpPr>
+          <p:cNvPr id="5" name="Rectangle 4"/>
+          <p:cNvSpPr/>
+          <p:nvPr/>
+        </p:nvSpPr>
+        <p:spPr>
+          <a:xfrm>
+            <a:off x="43760231" y="5165885"/>
+            <a:ext cx="238125" cy="1800224"/>
+          </a:xfrm>
+          <a:prstGeom prst="rect">
+            <a:avLst/>
+          </a:prstGeom>
+        </p:spPr>
+        <p:style>
+          <a:lnRef idx="1">
+            <a:schemeClr val="accent1"/>
+          </a:lnRef>
+          <a:fillRef idx="3">
+            <a:schemeClr val="accent1"/>
+          </a:fillRef>
+          <a:effectRef idx="2">
+            <a:schemeClr val="accent1"/>
+          </a:effectRef>
+          <a:fontRef idx="minor">
+            <a:schemeClr val="lt1"/>
+          </a:fontRef>
+        </p:style>
+        <p:txBody>
+          <a:bodyPr rtlCol="0" anchor="ctr"/>
+          <a:lstStyle/>
+          <a:p>
+            <a:pPr algn="ctr"/>
+          </a:p>
+        </p:txBody>
+      </p:sp>
+      <p:sp>
+        <p:nvSpPr>
+          <p:cNvPr id="6" name="Oval 5"/>
+          <p:cNvSpPr/>
+          <p:nvPr/>
+        </p:nvSpPr>
+        <p:spPr>
+          <a:xfrm>
+            <a:off x="42976800" y="3396342"/>
+            <a:ext cx="1828800" cy="1828800"/>
+          </a:xfrm>
+          <a:prstGeom prst="ellipse">
+            <a:avLst/>
+          </a:prstGeom>
+        </p:spPr>
+        <p:style>
+          <a:lnRef idx="1">
+            <a:schemeClr val="accent1"/>
+          </a:lnRef>
+          <a:fillRef idx="3">
+            <a:schemeClr val="accent1"/>
+          </a:fillRef>
+          <a:effectRef idx="2">
+            <a:schemeClr val="accent1"/>
+          </a:effectRef>
+          <a:fontRef idx="minor">
+            <a:schemeClr val="lt1"/>
+          </a:fontRef>
+        </p:style>
+        <p:txBody>
+          <a:bodyPr rtlCol="0" anchor="ctr"/>
+          <a:lstStyle/>
+          <a:p>
+            <a:pPr algn="ctr"/>
+          </a:p>
+        </p:txBody>
+      </p:sp>
+      <p:sp>
+        <p:nvSpPr>
+          <p:cNvPr id="7" name="Rectangle 6"/>
+          <p:cNvSpPr/>
+          <p:nvPr/>
+        </p:nvSpPr>
+        <p:spPr>
+          <a:xfrm>
+            <a:off x="1828800" y="3396342"/>
+            <a:ext cx="42062400" cy="1828800"/>
+          </a:xfrm>
+          <a:prstGeom prst="rect">
+            <a:avLst/>
+          </a:prstGeom>
+        </p:spPr>
+        <p:style>
+          <a:lnRef idx="1">
+            <a:schemeClr val="accent1"/>
+          </a:lnRef>
+          <a:fillRef idx="3">
+            <a:schemeClr val="accent1"/>
+          </a:fillRef>
+          <a:effectRef idx="2">
+            <a:schemeClr val="accent1"/>
+          </a:effectRef>
+          <a:fontRef idx="minor">
+            <a:schemeClr val="lt1"/>
+          </a:fontRef>
+        </p:style>
+        <p:txBody>
+          <a:bodyPr rtlCol="0" anchor="ctr"/>
+          <a:lstStyle/>
+          <a:p>
+            <a:pPr algn="ctr"/>
+          </a:p>
+        </p:txBody>
+      </p:sp>
+      <p:sp>
+        <p:nvSpPr>
+          <p:cNvPr id="8" name="Oval 7"/>
+          <p:cNvSpPr/>
+          <p:nvPr/>
+        </p:nvSpPr>
+        <p:spPr>
+          <a:xfrm>
+            <a:off x="0" y="2481942"/>
+            <a:ext cx="3657600" cy="3657600"/>
+          </a:xfrm>
+          <a:prstGeom prst="ellipse">
+            <a:avLst/>
+          </a:prstGeom>
+        </p:spPr>
+        <p:style>
+          <a:lnRef idx="1">
+            <a:schemeClr val="accent1"/>
+          </a:lnRef>
+          <a:fillRef idx="3">
+            <a:schemeClr val="accent1"/>
+          </a:fillRef>
+          <a:effectRef idx="2">
+            <a:schemeClr val="accent1"/>
+          </a:effectRef>
+          <a:fontRef idx="minor">
+            <a:schemeClr val="lt1"/>
+          </a:fontRef>
+        </p:style>
+        <p:txBody>
+          <a:bodyPr rtlCol="0" anchor="ctr"/>
+          <a:lstStyle/>
+          <a:p>
+            <a:pPr algn="ctr"/>
+          </a:p>
+        </p:txBody>
+      </p:sp>
+      <p:sp>
+        <p:nvSpPr>
+          <p:cNvPr id="9" name="Rectangle 8"/>
+          <p:cNvSpPr/>
+          <p:nvPr/>
+        </p:nvSpPr>
+        <p:spPr>
+          <a:xfrm>
+            <a:off x="43760231" y="5165885"/>
+            <a:ext cx="238125" cy="1800224"/>
+          </a:xfrm>
+          <a:prstGeom prst="rect">
+            <a:avLst/>
+          </a:prstGeom>
+        </p:spPr>
+        <p:style>
+          <a:lnRef idx="1">
+            <a:schemeClr val="accent1"/>
+          </a:lnRef>
+          <a:fillRef idx="3">
+            <a:schemeClr val="accent1"/>
+          </a:fillRef>
+          <a:effectRef idx="2">
+            <a:schemeClr val="accent1"/>
+          </a:effectRef>
+          <a:fontRef idx="minor">
+            <a:schemeClr val="lt1"/>
+          </a:fontRef>
+        </p:style>
+        <p:txBody>
+          <a:bodyPr rtlCol="0" anchor="ctr"/>
+          <a:lstStyle/>
+          <a:p>
+            <a:pPr algn="ctr"/>
+          </a:p>
+        </p:txBody>
+      </p:sp>
+      <p:sp>
+        <p:nvSpPr>
+          <p:cNvPr id="10" name="Oval 9"/>
+          <p:cNvSpPr/>
+          <p:nvPr/>
+        </p:nvSpPr>
+        <p:spPr>
+          <a:xfrm>
+            <a:off x="42976800" y="3396342"/>
+            <a:ext cx="1828800" cy="1828800"/>
+          </a:xfrm>
+          <a:prstGeom prst="ellipse">
+            <a:avLst/>
+          </a:prstGeom>
+        </p:spPr>
+        <p:style>
+          <a:lnRef idx="1">
+            <a:schemeClr val="accent1"/>
+          </a:lnRef>
+          <a:fillRef idx="3">
+            <a:schemeClr val="accent1"/>
+          </a:fillRef>
+          <a:effectRef idx="2">
+            <a:schemeClr val="accent1"/>
+          </a:effectRef>
+          <a:fontRef idx="minor">
+            <a:schemeClr val="lt1"/>
+          </a:fontRef>
+        </p:style>
+        <p:txBody>
+          <a:bodyPr rtlCol="0" anchor="ctr"/>
+          <a:lstStyle/>
+          <a:p>
+            <a:pPr algn="ctr"/>
+          </a:p>
+        </p:txBody>
+      </p:sp>
+      <p:sp>
+        <p:nvSpPr>
+          <p:cNvPr id="11" name="Rectangle 10"/>
+          <p:cNvSpPr/>
+          <p:nvPr/>
+        </p:nvSpPr>
+        <p:spPr>
+          <a:xfrm>
+            <a:off x="1828800" y="3396342"/>
+            <a:ext cx="42062400" cy="1828800"/>
+          </a:xfrm>
+          <a:prstGeom prst="rect">
+            <a:avLst/>
+          </a:prstGeom>
+        </p:spPr>
+        <p:style>
+          <a:lnRef idx="1">
+            <a:schemeClr val="accent1"/>
+          </a:lnRef>
+          <a:fillRef idx="3">
+            <a:schemeClr val="accent1"/>
+          </a:fillRef>
+          <a:effectRef idx="2">
+            <a:schemeClr val="accent1"/>
+          </a:effectRef>
+          <a:fontRef idx="minor">
+            <a:schemeClr val="lt1"/>
+          </a:fontRef>
+        </p:style>
+        <p:txBody>
+          <a:bodyPr rtlCol="0" anchor="ctr"/>
+          <a:lstStyle/>
+          <a:p>
+            <a:pPr algn="ctr"/>
+          </a:p>
+        </p:txBody>
+      </p:sp>
+      <p:sp>
+        <p:nvSpPr>
+          <p:cNvPr id="12" name="Oval 11"/>
+          <p:cNvSpPr/>
+          <p:nvPr/>
+        </p:nvSpPr>
+        <p:spPr>
+          <a:xfrm>
+            <a:off x="0" y="2481942"/>
+            <a:ext cx="3657600" cy="3657600"/>
+          </a:xfrm>
+          <a:prstGeom prst="ellipse">
+            <a:avLst/>
+          </a:prstGeom>
+        </p:spPr>
+        <p:style>
+          <a:lnRef idx="1">
+            <a:schemeClr val="accent1"/>
+          </a:lnRef>
+          <a:fillRef idx="3">
+            <a:schemeClr val="accent1"/>
+          </a:fillRef>
+          <a:effectRef idx="2">
+            <a:schemeClr val="accent1"/>
+          </a:effectRef>
+          <a:fontRef idx="minor">
+            <a:schemeClr val="lt1"/>
+          </a:fontRef>
+        </p:style>
+        <p:txBody>
+          <a:bodyPr rtlCol="0" anchor="ctr"/>
+          <a:lstStyle/>
+          <a:p>
+            <a:pPr algn="ctr"/>
+          </a:p>
+        </p:txBody>
+      </p:sp>
+      <p:sp>
+        <p:nvSpPr>
+          <p:cNvPr id="13" name="Rectangle 12"/>
+          <p:cNvSpPr/>
+          <p:nvPr/>
+        </p:nvSpPr>
+        <p:spPr>
+          <a:xfrm>
+            <a:off x="43760231" y="5165885"/>
+            <a:ext cx="238125" cy="1800224"/>
+          </a:xfrm>
+          <a:prstGeom prst="rect">
+            <a:avLst/>
+          </a:prstGeom>
+        </p:spPr>
+        <p:style>
+          <a:lnRef idx="1">
+            <a:schemeClr val="accent1"/>
+          </a:lnRef>
+          <a:fillRef idx="3">
+            <a:schemeClr val="accent1"/>
+          </a:fillRef>
+          <a:effectRef idx="2">
+            <a:schemeClr val="accent1"/>
+          </a:effectRef>
+          <a:fontRef idx="minor">
+            <a:schemeClr val="lt1"/>
+          </a:fontRef>
+        </p:style>
+        <p:txBody>
+          <a:bodyPr rtlCol="0" anchor="ctr"/>
+          <a:lstStyle/>
+          <a:p>
+            <a:pPr algn="ctr"/>
+          </a:p>
+        </p:txBody>
+      </p:sp>
+      <p:sp>
+        <p:nvSpPr>
+          <p:cNvPr id="14" name="Oval 13"/>
+          <p:cNvSpPr/>
+          <p:nvPr/>
+        </p:nvSpPr>
+        <p:spPr>
+          <a:xfrm>
+            <a:off x="42976800" y="3396342"/>
+            <a:ext cx="1828800" cy="1828800"/>
+          </a:xfrm>
+          <a:prstGeom prst="ellipse">
+            <a:avLst/>
+          </a:prstGeom>
+        </p:spPr>
+        <p:style>
+          <a:lnRef idx="1">
+            <a:schemeClr val="accent1"/>
+          </a:lnRef>
+          <a:fillRef idx="3">
+            <a:schemeClr val="accent1"/>
+          </a:fillRef>
+          <a:effectRef idx="2">
+            <a:schemeClr val="accent1"/>
+          </a:effectRef>
+          <a:fontRef idx="minor">
+            <a:schemeClr val="lt1"/>
+          </a:fontRef>
+        </p:style>
+        <p:txBody>
+          <a:bodyPr rtlCol="0" anchor="ctr"/>
+          <a:lstStyle/>
+          <a:p>
+            <a:pPr algn="ctr"/>
+          </a:p>
+        </p:txBody>
+      </p:sp>
+      <p:sp>
+        <p:nvSpPr>
+          <p:cNvPr id="15" name="Rectangle 14"/>
+          <p:cNvSpPr/>
+          <p:nvPr/>
+        </p:nvSpPr>
+        <p:spPr>
+          <a:xfrm>
+            <a:off x="1828800" y="3396342"/>
+            <a:ext cx="42062400" cy="1828800"/>
+          </a:xfrm>
+          <a:prstGeom prst="rect">
+            <a:avLst/>
+          </a:prstGeom>
+        </p:spPr>
+        <p:style>
+          <a:lnRef idx="1">
+            <a:schemeClr val="accent1"/>
+          </a:lnRef>
+          <a:fillRef idx="3">
+            <a:schemeClr val="accent1"/>
+          </a:fillRef>
+          <a:effectRef idx="2">
+            <a:schemeClr val="accent1"/>
+          </a:effectRef>
+          <a:fontRef idx="minor">
+            <a:schemeClr val="lt1"/>
+          </a:fontRef>
+        </p:style>
+        <p:txBody>
+          <a:bodyPr rtlCol="0" anchor="ctr"/>
+          <a:lstStyle/>
+          <a:p>
+            <a:pPr algn="ctr"/>
+          </a:p>
+        </p:txBody>
+      </p:sp>
+      <p:sp>
+        <p:nvSpPr>
+          <p:cNvPr id="16" name="Oval 15"/>
+          <p:cNvSpPr/>
+          <p:nvPr/>
+        </p:nvSpPr>
+        <p:spPr>
+          <a:xfrm>
+            <a:off x="0" y="2481942"/>
+            <a:ext cx="3657600" cy="3657600"/>
+          </a:xfrm>
+          <a:prstGeom prst="ellipse">
+            <a:avLst/>
+          </a:prstGeom>
+        </p:spPr>
+        <p:style>
+          <a:lnRef idx="1">
+            <a:schemeClr val="accent1"/>
+          </a:lnRef>
+          <a:fillRef idx="3">
+            <a:schemeClr val="accent1"/>
+          </a:fillRef>
+          <a:effectRef idx="2">
+            <a:schemeClr val="accent1"/>
+          </a:effectRef>
+          <a:fontRef idx="minor">
+            <a:schemeClr val="lt1"/>
+          </a:fontRef>
+        </p:style>
+        <p:txBody>
+          <a:bodyPr rtlCol="0" anchor="ctr"/>
+          <a:lstStyle/>
+          <a:p>
+            <a:pPr algn="ctr"/>
+          </a:p>
+        </p:txBody>
+      </p:sp>
+      <p:sp>
+        <p:nvSpPr>
+          <p:cNvPr id="17" name="Rectangle 16"/>
+          <p:cNvSpPr/>
+          <p:nvPr/>
+        </p:nvSpPr>
+        <p:spPr>
+          <a:xfrm>
+            <a:off x="43760231" y="5165885"/>
+            <a:ext cx="238125" cy="1800224"/>
+          </a:xfrm>
+          <a:prstGeom prst="rect">
+            <a:avLst/>
+          </a:prstGeom>
+        </p:spPr>
+        <p:style>
+          <a:lnRef idx="1">
+            <a:schemeClr val="accent1"/>
+          </a:lnRef>
+          <a:fillRef idx="3">
+            <a:schemeClr val="accent1"/>
+          </a:fillRef>
+          <a:effectRef idx="2">
+            <a:schemeClr val="accent1"/>
+          </a:effectRef>
+          <a:fontRef idx="minor">
+            <a:schemeClr val="lt1"/>
+          </a:fontRef>
+        </p:style>
+        <p:txBody>
+          <a:bodyPr rtlCol="0" anchor="ctr"/>
+          <a:lstStyle/>
+          <a:p>
+            <a:pPr algn="ctr"/>
+          </a:p>
+        </p:txBody>
+      </p:sp>
+      <p:sp>
+        <p:nvSpPr>
+          <p:cNvPr id="18" name="Oval 17"/>
+          <p:cNvSpPr/>
+          <p:nvPr/>
+        </p:nvSpPr>
+        <p:spPr>
+          <a:xfrm>
+            <a:off x="42976800" y="3396342"/>
+            <a:ext cx="1828800" cy="1828800"/>
+          </a:xfrm>
+          <a:prstGeom prst="ellipse">
+            <a:avLst/>
+          </a:prstGeom>
+        </p:spPr>
+        <p:style>
+          <a:lnRef idx="1">
+            <a:schemeClr val="accent1"/>
+          </a:lnRef>
+          <a:fillRef idx="3">
+            <a:schemeClr val="accent1"/>
+          </a:fillRef>
+          <a:effectRef idx="2">
+            <a:schemeClr val="accent1"/>
+          </a:effectRef>
+          <a:fontRef idx="minor">
+            <a:schemeClr val="lt1"/>
+          </a:fontRef>
+        </p:style>
+        <p:txBody>
+          <a:bodyPr rtlCol="0" anchor="ctr"/>
+          <a:lstStyle/>
+          <a:p>
+            <a:pPr algn="ctr"/>
+          </a:p>
+        </p:txBody>
+      </p:sp>
+      <p:sp>
+        <p:nvSpPr>
+          <p:cNvPr id="19" name="Rectangle 18"/>
+          <p:cNvSpPr/>
+          <p:nvPr/>
+        </p:nvSpPr>
+        <p:spPr>
+          <a:xfrm>
+            <a:off x="1828800" y="3396342"/>
+            <a:ext cx="42062400" cy="1828800"/>
+          </a:xfrm>
+          <a:prstGeom prst="rect">
+            <a:avLst/>
+          </a:prstGeom>
+        </p:spPr>
+        <p:style>
+          <a:lnRef idx="1">
+            <a:schemeClr val="accent1"/>
+          </a:lnRef>
+          <a:fillRef idx="3">
+            <a:schemeClr val="accent1"/>
+          </a:fillRef>
+          <a:effectRef idx="2">
+            <a:schemeClr val="accent1"/>
+          </a:effectRef>
+          <a:fontRef idx="minor">
+            <a:schemeClr val="lt1"/>
+          </a:fontRef>
+        </p:style>
+        <p:txBody>
+          <a:bodyPr rtlCol="0" anchor="ctr"/>
+          <a:lstStyle/>
+          <a:p>
+            <a:pPr algn="ctr"/>
+          </a:p>
+        </p:txBody>
+      </p:sp>
+      <p:sp>
+        <p:nvSpPr>
+          <p:cNvPr id="20" name="Oval 19"/>
+          <p:cNvSpPr/>
+          <p:nvPr/>
+        </p:nvSpPr>
+        <p:spPr>
+          <a:xfrm>
+            <a:off x="0" y="2481942"/>
+            <a:ext cx="3657600" cy="3657600"/>
+          </a:xfrm>
+          <a:prstGeom prst="ellipse">
+            <a:avLst/>
+          </a:prstGeom>
+        </p:spPr>
+        <p:style>
+          <a:lnRef idx="1">
+            <a:schemeClr val="accent1"/>
+          </a:lnRef>
+          <a:fillRef idx="3">
+            <a:schemeClr val="accent1"/>
+          </a:fillRef>
+          <a:effectRef idx="2">
+            <a:schemeClr val="accent1"/>
+          </a:effectRef>
+          <a:fontRef idx="minor">
+            <a:schemeClr val="lt1"/>
+          </a:fontRef>
+        </p:style>
+        <p:txBody>
+          <a:bodyPr rtlCol="0" anchor="ctr"/>
+          <a:lstStyle/>
+          <a:p>
+            <a:pPr algn="ctr"/>
+          </a:p>
+        </p:txBody>
+      </p:sp>
+      <p:sp>
+        <p:nvSpPr>
+          <p:cNvPr id="21" name="Rectangle 20"/>
+          <p:cNvSpPr/>
+          <p:nvPr/>
+        </p:nvSpPr>
+        <p:spPr>
+          <a:xfrm>
+            <a:off x="43760231" y="5165885"/>
+            <a:ext cx="238125" cy="1800224"/>
+          </a:xfrm>
+          <a:prstGeom prst="rect">
+            <a:avLst/>
+          </a:prstGeom>
+        </p:spPr>
+        <p:style>
+          <a:lnRef idx="1">
+            <a:schemeClr val="accent1"/>
+          </a:lnRef>
+          <a:fillRef idx="3">
+            <a:schemeClr val="accent1"/>
+          </a:fillRef>
+          <a:effectRef idx="2">
+            <a:schemeClr val="accent1"/>
+          </a:effectRef>
+          <a:fontRef idx="minor">
+            <a:schemeClr val="lt1"/>
+          </a:fontRef>
+        </p:style>
+        <p:txBody>
+          <a:bodyPr rtlCol="0" anchor="ctr"/>
+          <a:lstStyle/>
+          <a:p>
+            <a:pPr algn="ctr"/>
+          </a:p>
+        </p:txBody>
+      </p:sp>
+      <p:sp>
+        <p:nvSpPr>
+          <p:cNvPr id="22" name="Oval 21"/>
+          <p:cNvSpPr/>
+          <p:nvPr/>
+        </p:nvSpPr>
+        <p:spPr>
+          <a:xfrm>
+            <a:off x="42976800" y="3396342"/>
+            <a:ext cx="1828800" cy="1828800"/>
+          </a:xfrm>
+          <a:prstGeom prst="ellipse">
+            <a:avLst/>
+          </a:prstGeom>
+        </p:spPr>
+        <p:style>
+          <a:lnRef idx="1">
+            <a:schemeClr val="accent1"/>
+          </a:lnRef>
+          <a:fillRef idx="3">
+            <a:schemeClr val="accent1"/>
+          </a:fillRef>
+          <a:effectRef idx="2">
+            <a:schemeClr val="accent1"/>
+          </a:effectRef>
+          <a:fontRef idx="minor">
+            <a:schemeClr val="lt1"/>
+          </a:fontRef>
+        </p:style>
+        <p:txBody>
+          <a:bodyPr rtlCol="0" anchor="ctr"/>
+          <a:lstStyle/>
+          <a:p>
+            <a:pPr algn="ctr"/>
+          </a:p>
+        </p:txBody>
+      </p:sp>
+      <p:sp>
+        <p:nvSpPr>
+          <p:cNvPr id="23" name="Rectangle 22"/>
+          <p:cNvSpPr/>
+          <p:nvPr/>
+        </p:nvSpPr>
+        <p:spPr>
+          <a:xfrm>
+            <a:off x="1828800" y="3396342"/>
+            <a:ext cx="42062400" cy="1828800"/>
+          </a:xfrm>
+          <a:prstGeom prst="rect">
+            <a:avLst/>
+          </a:prstGeom>
+        </p:spPr>
+        <p:style>
+          <a:lnRef idx="1">
+            <a:schemeClr val="accent1"/>
+          </a:lnRef>
+          <a:fillRef idx="3">
+            <a:schemeClr val="accent1"/>
+          </a:fillRef>
+          <a:effectRef idx="2">
+            <a:schemeClr val="accent1"/>
+          </a:effectRef>
+          <a:fontRef idx="minor">
+            <a:schemeClr val="lt1"/>
+          </a:fontRef>
+        </p:style>
+        <p:txBody>
+          <a:bodyPr rtlCol="0" anchor="ctr"/>
+          <a:lstStyle/>
+          <a:p>
+            <a:pPr algn="ctr"/>
+          </a:p>
+        </p:txBody>
+      </p:sp>
+      <p:sp>
+        <p:nvSpPr>
+          <p:cNvPr id="24" name="Oval 23"/>
+          <p:cNvSpPr/>
+          <p:nvPr/>
+        </p:nvSpPr>
+        <p:spPr>
+          <a:xfrm>
+            <a:off x="0" y="2481942"/>
+            <a:ext cx="3657600" cy="3657600"/>
+          </a:xfrm>
+          <a:prstGeom prst="ellipse">
+            <a:avLst/>
+          </a:prstGeom>
+        </p:spPr>
+        <p:style>
+          <a:lnRef idx="1">
+            <a:schemeClr val="accent1"/>
+          </a:lnRef>
+          <a:fillRef idx="3">
+            <a:schemeClr val="accent1"/>
+          </a:fillRef>
+          <a:effectRef idx="2">
+            <a:schemeClr val="accent1"/>
+          </a:effectRef>
+          <a:fontRef idx="minor">
+            <a:schemeClr val="lt1"/>
+          </a:fontRef>
+        </p:style>
+        <p:txBody>
+          <a:bodyPr rtlCol="0" anchor="ctr"/>
+          <a:lstStyle/>
+          <a:p>
+            <a:pPr algn="ctr"/>
+          </a:p>
+        </p:txBody>
+      </p:sp>
+      <p:sp>
+        <p:nvSpPr>
+          <p:cNvPr id="25" name="Rectangle 24"/>
+          <p:cNvSpPr/>
+          <p:nvPr/>
+        </p:nvSpPr>
+        <p:spPr>
+          <a:xfrm>
+            <a:off x="43760231" y="5165885"/>
+            <a:ext cx="238125" cy="1800224"/>
+          </a:xfrm>
+          <a:prstGeom prst="rect">
+            <a:avLst/>
+          </a:prstGeom>
+        </p:spPr>
+        <p:style>
+          <a:lnRef idx="1">
+            <a:schemeClr val="accent1"/>
+          </a:lnRef>
+          <a:fillRef idx="3">
+            <a:schemeClr val="accent1"/>
+          </a:fillRef>
+          <a:effectRef idx="2">
+            <a:schemeClr val="accent1"/>
+          </a:effectRef>
+          <a:fontRef idx="minor">
+            <a:schemeClr val="lt1"/>
+          </a:fontRef>
+        </p:style>
+        <p:txBody>
+          <a:bodyPr rtlCol="0" anchor="ctr"/>
+          <a:lstStyle/>
+          <a:p>
+            <a:pPr algn="ctr"/>
+          </a:p>
+        </p:txBody>
+      </p:sp>
+      <p:sp>
+        <p:nvSpPr>
+          <p:cNvPr id="26" name="Oval 25"/>
+          <p:cNvSpPr/>
+          <p:nvPr/>
+        </p:nvSpPr>
+        <p:spPr>
+          <a:xfrm>
+            <a:off x="42976800" y="3396342"/>
+            <a:ext cx="1828800" cy="1828800"/>
+          </a:xfrm>
+          <a:prstGeom prst="ellipse">
+            <a:avLst/>
+          </a:prstGeom>
+        </p:spPr>
+        <p:style>
+          <a:lnRef idx="1">
+            <a:schemeClr val="accent1"/>
+          </a:lnRef>
+          <a:fillRef idx="3">
+            <a:schemeClr val="accent1"/>
+          </a:fillRef>
+          <a:effectRef idx="2">
+            <a:schemeClr val="accent1"/>
+          </a:effectRef>
+          <a:fontRef idx="minor">
+            <a:schemeClr val="lt1"/>
+          </a:fontRef>
+        </p:style>
+        <p:txBody>
+          <a:bodyPr rtlCol="0" anchor="ctr"/>
+          <a:lstStyle/>
+          <a:p>
+            <a:pPr algn="ctr"/>
+          </a:p>
+        </p:txBody>
+      </p:sp>
+      <p:sp>
+        <p:nvSpPr>
+          <p:cNvPr id="27" name="Rectangle 26"/>
+          <p:cNvSpPr/>
+          <p:nvPr/>
+        </p:nvSpPr>
+        <p:spPr>
+          <a:xfrm>
+            <a:off x="1828800" y="3396342"/>
+            <a:ext cx="42062400" cy="1828800"/>
+          </a:xfrm>
+          <a:prstGeom prst="rect">
+            <a:avLst/>
+          </a:prstGeom>
+        </p:spPr>
+        <p:style>
+          <a:lnRef idx="1">
+            <a:schemeClr val="accent1"/>
+          </a:lnRef>
+          <a:fillRef idx="3">
+            <a:schemeClr val="accent1"/>
+          </a:fillRef>
+          <a:effectRef idx="2">
+            <a:schemeClr val="accent1"/>
+          </a:effectRef>
+          <a:fontRef idx="minor">
+            <a:schemeClr val="lt1"/>
+          </a:fontRef>
+        </p:style>
+        <p:txBody>
+          <a:bodyPr rtlCol="0" anchor="ctr"/>
+          <a:lstStyle/>
+          <a:p>
+            <a:pPr algn="ctr"/>
+          </a:p>
+        </p:txBody>
+      </p:sp>
+      <p:sp>
+        <p:nvSpPr>
+          <p:cNvPr id="28" name="Oval 27"/>
+          <p:cNvSpPr/>
+          <p:nvPr/>
+        </p:nvSpPr>
+        <p:spPr>
+          <a:xfrm>
+            <a:off x="0" y="2481942"/>
+            <a:ext cx="3657600" cy="3657600"/>
+          </a:xfrm>
+          <a:prstGeom prst="ellipse">
+            <a:avLst/>
+          </a:prstGeom>
+        </p:spPr>
+        <p:style>
+          <a:lnRef idx="1">
+            <a:schemeClr val="accent1"/>
+          </a:lnRef>
+          <a:fillRef idx="3">
+            <a:schemeClr val="accent1"/>
+          </a:fillRef>
+          <a:effectRef idx="2">
+            <a:schemeClr val="accent1"/>
+          </a:effectRef>
+          <a:fontRef idx="minor">
+            <a:schemeClr val="lt1"/>
+          </a:fontRef>
+        </p:style>
+        <p:txBody>
+          <a:bodyPr rtlCol="0" anchor="ctr"/>
+          <a:lstStyle/>
+          <a:p>
+            <a:pPr algn="ctr"/>
+          </a:p>
+        </p:txBody>
+      </p:sp>
+      <p:sp>
+        <p:nvSpPr>
+          <p:cNvPr id="29" name="Rectangle 28"/>
+          <p:cNvSpPr/>
+          <p:nvPr/>
+        </p:nvSpPr>
+        <p:spPr>
+          <a:xfrm>
+            <a:off x="43760231" y="5165885"/>
+            <a:ext cx="238125" cy="1800224"/>
+          </a:xfrm>
+          <a:prstGeom prst="rect">
+            <a:avLst/>
+          </a:prstGeom>
+        </p:spPr>
+        <p:style>
+          <a:lnRef idx="1">
+            <a:schemeClr val="accent1"/>
+          </a:lnRef>
+          <a:fillRef idx="3">
+            <a:schemeClr val="accent1"/>
+          </a:fillRef>
+          <a:effectRef idx="2">
+            <a:schemeClr val="accent1"/>
+          </a:effectRef>
+          <a:fontRef idx="minor">
+            <a:schemeClr val="lt1"/>
+          </a:fontRef>
+        </p:style>
+        <p:txBody>
+          <a:bodyPr rtlCol="0" anchor="ctr"/>
+          <a:lstStyle/>
+          <a:p>
+            <a:pPr algn="ctr"/>
+          </a:p>
+        </p:txBody>
+      </p:sp>
+      <p:sp>
+        <p:nvSpPr>
+          <p:cNvPr id="30" name="Oval 29"/>
+          <p:cNvSpPr/>
+          <p:nvPr/>
+        </p:nvSpPr>
+        <p:spPr>
+          <a:xfrm>
+            <a:off x="42976800" y="3396342"/>
+            <a:ext cx="1828800" cy="1828800"/>
+          </a:xfrm>
+          <a:prstGeom prst="ellipse">
+            <a:avLst/>
+          </a:prstGeom>
+        </p:spPr>
+        <p:style>
+          <a:lnRef idx="1">
+            <a:schemeClr val="accent1"/>
+          </a:lnRef>
+          <a:fillRef idx="3">
+            <a:schemeClr val="accent1"/>
+          </a:fillRef>
+          <a:effectRef idx="2">
+            <a:schemeClr val="accent1"/>
+          </a:effectRef>
+          <a:fontRef idx="minor">
+            <a:schemeClr val="lt1"/>
+          </a:fontRef>
+        </p:style>
+        <p:txBody>
+          <a:bodyPr rtlCol="0" anchor="ctr"/>
+          <a:lstStyle/>
+          <a:p>
+            <a:pPr algn="ctr"/>
+          </a:p>
+        </p:txBody>
+      </p:sp>
+      <p:sp>
+        <p:nvSpPr>
+          <p:cNvPr id="31" name="Rectangle 30"/>
+          <p:cNvSpPr/>
+          <p:nvPr/>
+        </p:nvSpPr>
+        <p:spPr>
+          <a:xfrm>
+            <a:off x="1828800" y="3396342"/>
+            <a:ext cx="42062400" cy="1828800"/>
+          </a:xfrm>
+          <a:prstGeom prst="rect">
+            <a:avLst/>
+          </a:prstGeom>
+        </p:spPr>
+        <p:style>
+          <a:lnRef idx="1">
+            <a:schemeClr val="accent1"/>
+          </a:lnRef>
+          <a:fillRef idx="3">
+            <a:schemeClr val="accent1"/>
+          </a:fillRef>
+          <a:effectRef idx="2">
+            <a:schemeClr val="accent1"/>
+          </a:effectRef>
+          <a:fontRef idx="minor">
+            <a:schemeClr val="lt1"/>
+          </a:fontRef>
+        </p:style>
+        <p:txBody>
+          <a:bodyPr rtlCol="0" anchor="ctr"/>
+          <a:lstStyle/>
+          <a:p>
+            <a:pPr algn="ctr"/>
+          </a:p>
+        </p:txBody>
+      </p:sp>
+      <p:sp>
+        <p:nvSpPr>
+          <p:cNvPr id="32" name="Oval 31"/>
+          <p:cNvSpPr/>
+          <p:nvPr/>
+        </p:nvSpPr>
+        <p:spPr>
+          <a:xfrm>
+            <a:off x="0" y="2481942"/>
+            <a:ext cx="3657600" cy="3657600"/>
+          </a:xfrm>
+          <a:prstGeom prst="ellipse">
+            <a:avLst/>
+          </a:prstGeom>
+        </p:spPr>
+        <p:style>
+          <a:lnRef idx="1">
+            <a:schemeClr val="accent1"/>
+          </a:lnRef>
+          <a:fillRef idx="3">
+            <a:schemeClr val="accent1"/>
+          </a:fillRef>
+          <a:effectRef idx="2">
+            <a:schemeClr val="accent1"/>
+          </a:effectRef>
+          <a:fontRef idx="minor">
+            <a:schemeClr val="lt1"/>
+          </a:fontRef>
+        </p:style>
+        <p:txBody>
+          <a:bodyPr rtlCol="0" anchor="ctr"/>
+          <a:lstStyle/>
+          <a:p>
+            <a:pPr algn="ctr"/>
+          </a:p>
+        </p:txBody>
+      </p:sp>
+      <p:sp>
+        <p:nvSpPr>
+          <p:cNvPr id="33" name="Rectangle 32"/>
+          <p:cNvSpPr/>
+          <p:nvPr/>
+        </p:nvSpPr>
+        <p:spPr>
+          <a:xfrm>
+            <a:off x="43760231" y="5165885"/>
+            <a:ext cx="238125" cy="1800224"/>
+          </a:xfrm>
+          <a:prstGeom prst="rect">
+            <a:avLst/>
+          </a:prstGeom>
+        </p:spPr>
+        <p:style>
+          <a:lnRef idx="1">
+            <a:schemeClr val="accent1"/>
+          </a:lnRef>
+          <a:fillRef idx="3">
+            <a:schemeClr val="accent1"/>
+          </a:fillRef>
+          <a:effectRef idx="2">
+            <a:schemeClr val="accent1"/>
+          </a:effectRef>
+          <a:fontRef idx="minor">
+            <a:schemeClr val="lt1"/>
+          </a:fontRef>
+        </p:style>
+        <p:txBody>
+          <a:bodyPr rtlCol="0" anchor="ctr"/>
+          <a:lstStyle/>
+          <a:p>
+            <a:pPr algn="ctr"/>
+          </a:p>
+        </p:txBody>
+      </p:sp>
+      <p:sp>
+        <p:nvSpPr>
+          <p:cNvPr id="34" name="Rectangle 33"/>
           <p:cNvSpPr/>
           <p:nvPr/>
         </p:nvSpPr>
@@ -3130,7 +4314,7 @@
       </p:sp>
       <p:sp>
         <p:nvSpPr>
-          <p:cNvPr id="3" name="Rectangle 2"/>
+          <p:cNvPr id="35" name="Rectangle 34"/>
           <p:cNvSpPr/>
           <p:nvPr/>
         </p:nvSpPr>
@@ -3169,7 +4353,7 @@
       </p:sp>
       <p:sp>
         <p:nvSpPr>
-          <p:cNvPr id="4" name="Rectangle 3"/>
+          <p:cNvPr id="36" name="Rectangle 35"/>
           <p:cNvSpPr/>
           <p:nvPr/>
         </p:nvSpPr>
@@ -3208,7 +4392,7 @@
       </p:sp>
       <p:sp>
         <p:nvSpPr>
-          <p:cNvPr id="5" name="Rectangle 4"/>
+          <p:cNvPr id="37" name="Rectangle 36"/>
           <p:cNvSpPr/>
           <p:nvPr/>
         </p:nvSpPr>
@@ -3247,7 +4431,7 @@
       </p:sp>
       <p:sp>
         <p:nvSpPr>
-          <p:cNvPr id="6" name="Rectangle 5"/>
+          <p:cNvPr id="38" name="Rectangle 37"/>
           <p:cNvSpPr/>
           <p:nvPr/>
         </p:nvSpPr>
@@ -3286,7 +4470,7 @@
       </p:sp>
       <p:sp>
         <p:nvSpPr>
-          <p:cNvPr id="7" name="Rectangle 6"/>
+          <p:cNvPr id="39" name="Rectangle 38"/>
           <p:cNvSpPr/>
           <p:nvPr/>
         </p:nvSpPr>
@@ -3325,7 +4509,7 @@
       </p:sp>
       <p:sp>
         <p:nvSpPr>
-          <p:cNvPr id="8" name="Rectangle 7"/>
+          <p:cNvPr id="40" name="Rectangle 39"/>
           <p:cNvSpPr/>
           <p:nvPr/>
         </p:nvSpPr>
@@ -3364,7 +4548,7 @@
       </p:sp>
       <p:sp>
         <p:nvSpPr>
-          <p:cNvPr id="9" name="Rectangle 8"/>
+          <p:cNvPr id="41" name="Rectangle 40"/>
           <p:cNvSpPr/>
           <p:nvPr/>
         </p:nvSpPr>
@@ -3403,7 +4587,7 @@
       </p:sp>
       <p:sp>
         <p:nvSpPr>
-          <p:cNvPr id="10" name="Rectangle 9"/>
+          <p:cNvPr id="42" name="Rectangle 41"/>
           <p:cNvSpPr/>
           <p:nvPr/>
         </p:nvSpPr>
@@ -3442,7 +4626,7 @@
       </p:sp>
       <p:sp>
         <p:nvSpPr>
-          <p:cNvPr id="11" name="Rectangle 10"/>
+          <p:cNvPr id="43" name="Rectangle 42"/>
           <p:cNvSpPr/>
           <p:nvPr/>
         </p:nvSpPr>
@@ -3481,7 +4665,377 @@
       </p:sp>
       <p:sp>
         <p:nvSpPr>
-          <p:cNvPr id="12" name="Rectangle 11"/>
+          <p:cNvPr id="44" name="Oval 43"/>
+          <p:cNvSpPr/>
+          <p:nvPr/>
+        </p:nvSpPr>
+        <p:spPr>
+          <a:xfrm>
+            <a:off x="42976800" y="3396342"/>
+            <a:ext cx="1828800" cy="1828800"/>
+          </a:xfrm>
+          <a:prstGeom prst="ellipse">
+            <a:avLst/>
+          </a:prstGeom>
+        </p:spPr>
+        <p:style>
+          <a:lnRef idx="1">
+            <a:schemeClr val="accent1"/>
+          </a:lnRef>
+          <a:fillRef idx="3">
+            <a:schemeClr val="accent1"/>
+          </a:fillRef>
+          <a:effectRef idx="2">
+            <a:schemeClr val="accent1"/>
+          </a:effectRef>
+          <a:fontRef idx="minor">
+            <a:schemeClr val="lt1"/>
+          </a:fontRef>
+        </p:style>
+        <p:txBody>
+          <a:bodyPr rtlCol="0" anchor="ctr"/>
+          <a:lstStyle/>
+          <a:p>
+            <a:pPr algn="ctr"/>
+          </a:p>
+        </p:txBody>
+      </p:sp>
+      <p:sp>
+        <p:nvSpPr>
+          <p:cNvPr id="45" name="Rectangle 44"/>
+          <p:cNvSpPr/>
+          <p:nvPr/>
+        </p:nvSpPr>
+        <p:spPr>
+          <a:xfrm>
+            <a:off x="1828800" y="3396342"/>
+            <a:ext cx="42062400" cy="1828800"/>
+          </a:xfrm>
+          <a:prstGeom prst="rect">
+            <a:avLst/>
+          </a:prstGeom>
+        </p:spPr>
+        <p:style>
+          <a:lnRef idx="1">
+            <a:schemeClr val="accent1"/>
+          </a:lnRef>
+          <a:fillRef idx="3">
+            <a:schemeClr val="accent1"/>
+          </a:fillRef>
+          <a:effectRef idx="2">
+            <a:schemeClr val="accent1"/>
+          </a:effectRef>
+          <a:fontRef idx="minor">
+            <a:schemeClr val="lt1"/>
+          </a:fontRef>
+        </p:style>
+        <p:txBody>
+          <a:bodyPr rtlCol="0" anchor="ctr"/>
+          <a:lstStyle/>
+          <a:p>
+            <a:pPr algn="ctr"/>
+          </a:p>
+        </p:txBody>
+      </p:sp>
+      <p:sp>
+        <p:nvSpPr>
+          <p:cNvPr id="46" name="Oval 45"/>
+          <p:cNvSpPr/>
+          <p:nvPr/>
+        </p:nvSpPr>
+        <p:spPr>
+          <a:xfrm>
+            <a:off x="0" y="2481942"/>
+            <a:ext cx="3657600" cy="3657600"/>
+          </a:xfrm>
+          <a:prstGeom prst="ellipse">
+            <a:avLst/>
+          </a:prstGeom>
+        </p:spPr>
+        <p:style>
+          <a:lnRef idx="1">
+            <a:schemeClr val="accent1"/>
+          </a:lnRef>
+          <a:fillRef idx="3">
+            <a:schemeClr val="accent1"/>
+          </a:fillRef>
+          <a:effectRef idx="2">
+            <a:schemeClr val="accent1"/>
+          </a:effectRef>
+          <a:fontRef idx="minor">
+            <a:schemeClr val="lt1"/>
+          </a:fontRef>
+        </p:style>
+        <p:txBody>
+          <a:bodyPr rtlCol="0" anchor="ctr"/>
+          <a:lstStyle/>
+          <a:p>
+            <a:pPr algn="ctr"/>
+          </a:p>
+        </p:txBody>
+      </p:sp>
+      <p:sp>
+        <p:nvSpPr>
+          <p:cNvPr id="47" name="Rectangle 46"/>
+          <p:cNvSpPr/>
+          <p:nvPr/>
+        </p:nvSpPr>
+        <p:spPr>
+          <a:xfrm>
+            <a:off x="43760231" y="5165885"/>
+            <a:ext cx="238125" cy="1800224"/>
+          </a:xfrm>
+          <a:prstGeom prst="rect">
+            <a:avLst/>
+          </a:prstGeom>
+        </p:spPr>
+        <p:style>
+          <a:lnRef idx="1">
+            <a:schemeClr val="accent1"/>
+          </a:lnRef>
+          <a:fillRef idx="3">
+            <a:schemeClr val="accent1"/>
+          </a:fillRef>
+          <a:effectRef idx="2">
+            <a:schemeClr val="accent1"/>
+          </a:effectRef>
+          <a:fontRef idx="minor">
+            <a:schemeClr val="lt1"/>
+          </a:fontRef>
+        </p:style>
+        <p:txBody>
+          <a:bodyPr rtlCol="0" anchor="ctr"/>
+          <a:lstStyle/>
+          <a:p>
+            <a:pPr algn="ctr"/>
+          </a:p>
+        </p:txBody>
+      </p:sp>
+      <p:sp>
+        <p:nvSpPr>
+          <p:cNvPr id="48" name="Rectangle 47"/>
+          <p:cNvSpPr/>
+          <p:nvPr/>
+        </p:nvSpPr>
+        <p:spPr>
+          <a:xfrm>
+            <a:off x="3398042" y="5574350"/>
+            <a:ext cx="404814" cy="1800224"/>
+          </a:xfrm>
+          <a:prstGeom prst="rect">
+            <a:avLst/>
+          </a:prstGeom>
+        </p:spPr>
+        <p:style>
+          <a:lnRef idx="1">
+            <a:schemeClr val="accent1"/>
+          </a:lnRef>
+          <a:fillRef idx="3">
+            <a:schemeClr val="accent1"/>
+          </a:fillRef>
+          <a:effectRef idx="2">
+            <a:schemeClr val="accent1"/>
+          </a:effectRef>
+          <a:fontRef idx="minor">
+            <a:schemeClr val="lt1"/>
+          </a:fontRef>
+        </p:style>
+        <p:txBody>
+          <a:bodyPr rtlCol="0" anchor="ctr"/>
+          <a:lstStyle/>
+          <a:p>
+            <a:pPr algn="ctr"/>
+          </a:p>
+        </p:txBody>
+      </p:sp>
+      <p:sp>
+        <p:nvSpPr>
+          <p:cNvPr id="49" name="Oval 48"/>
+          <p:cNvSpPr/>
+          <p:nvPr/>
+        </p:nvSpPr>
+        <p:spPr>
+          <a:xfrm>
+            <a:off x="42976800" y="3396342"/>
+            <a:ext cx="1828800" cy="1828800"/>
+          </a:xfrm>
+          <a:prstGeom prst="ellipse">
+            <a:avLst/>
+          </a:prstGeom>
+        </p:spPr>
+        <p:style>
+          <a:lnRef idx="1">
+            <a:schemeClr val="accent1"/>
+          </a:lnRef>
+          <a:fillRef idx="3">
+            <a:schemeClr val="accent1"/>
+          </a:fillRef>
+          <a:effectRef idx="2">
+            <a:schemeClr val="accent1"/>
+          </a:effectRef>
+          <a:fontRef idx="minor">
+            <a:schemeClr val="lt1"/>
+          </a:fontRef>
+        </p:style>
+        <p:txBody>
+          <a:bodyPr rtlCol="0" anchor="ctr"/>
+          <a:lstStyle/>
+          <a:p>
+            <a:pPr algn="ctr"/>
+          </a:p>
+        </p:txBody>
+      </p:sp>
+      <p:sp>
+        <p:nvSpPr>
+          <p:cNvPr id="50" name="Rectangle 49"/>
+          <p:cNvSpPr/>
+          <p:nvPr/>
+        </p:nvSpPr>
+        <p:spPr>
+          <a:xfrm>
+            <a:off x="1828800" y="3396342"/>
+            <a:ext cx="42062400" cy="1828800"/>
+          </a:xfrm>
+          <a:prstGeom prst="rect">
+            <a:avLst/>
+          </a:prstGeom>
+        </p:spPr>
+        <p:style>
+          <a:lnRef idx="1">
+            <a:schemeClr val="accent1"/>
+          </a:lnRef>
+          <a:fillRef idx="3">
+            <a:schemeClr val="accent1"/>
+          </a:fillRef>
+          <a:effectRef idx="2">
+            <a:schemeClr val="accent1"/>
+          </a:effectRef>
+          <a:fontRef idx="minor">
+            <a:schemeClr val="lt1"/>
+          </a:fontRef>
+        </p:style>
+        <p:txBody>
+          <a:bodyPr rtlCol="0" anchor="ctr"/>
+          <a:lstStyle/>
+          <a:p>
+            <a:pPr algn="ctr"/>
+          </a:p>
+        </p:txBody>
+      </p:sp>
+      <p:sp>
+        <p:nvSpPr>
+          <p:cNvPr id="51" name="Oval 50"/>
+          <p:cNvSpPr/>
+          <p:nvPr/>
+        </p:nvSpPr>
+        <p:spPr>
+          <a:xfrm>
+            <a:off x="0" y="2481942"/>
+            <a:ext cx="3657600" cy="3657600"/>
+          </a:xfrm>
+          <a:prstGeom prst="ellipse">
+            <a:avLst/>
+          </a:prstGeom>
+        </p:spPr>
+        <p:style>
+          <a:lnRef idx="1">
+            <a:schemeClr val="accent1"/>
+          </a:lnRef>
+          <a:fillRef idx="3">
+            <a:schemeClr val="accent1"/>
+          </a:fillRef>
+          <a:effectRef idx="2">
+            <a:schemeClr val="accent1"/>
+          </a:effectRef>
+          <a:fontRef idx="minor">
+            <a:schemeClr val="lt1"/>
+          </a:fontRef>
+        </p:style>
+        <p:txBody>
+          <a:bodyPr rtlCol="0" anchor="ctr"/>
+          <a:lstStyle/>
+          <a:p>
+            <a:pPr algn="ctr"/>
+          </a:p>
+        </p:txBody>
+      </p:sp>
+      <p:sp>
+        <p:nvSpPr>
+          <p:cNvPr id="52" name="Rectangle 51"/>
+          <p:cNvSpPr/>
+          <p:nvPr/>
+        </p:nvSpPr>
+        <p:spPr>
+          <a:xfrm>
+            <a:off x="43760231" y="5165885"/>
+            <a:ext cx="238125" cy="1800224"/>
+          </a:xfrm>
+          <a:prstGeom prst="rect">
+            <a:avLst/>
+          </a:prstGeom>
+        </p:spPr>
+        <p:style>
+          <a:lnRef idx="1">
+            <a:schemeClr val="accent1"/>
+          </a:lnRef>
+          <a:fillRef idx="3">
+            <a:schemeClr val="accent1"/>
+          </a:fillRef>
+          <a:effectRef idx="2">
+            <a:schemeClr val="accent1"/>
+          </a:effectRef>
+          <a:fontRef idx="minor">
+            <a:schemeClr val="lt1"/>
+          </a:fontRef>
+        </p:style>
+        <p:txBody>
+          <a:bodyPr rtlCol="0" anchor="ctr"/>
+          <a:lstStyle/>
+          <a:p>
+            <a:pPr algn="ctr"/>
+          </a:p>
+        </p:txBody>
+      </p:sp>
+      <p:sp>
+        <p:nvSpPr>
+          <p:cNvPr id="53" name="Rectangle 52"/>
+          <p:cNvSpPr/>
+          <p:nvPr/>
+        </p:nvSpPr>
+        <p:spPr>
+          <a:xfrm>
+            <a:off x="3398042" y="5574350"/>
+            <a:ext cx="404814" cy="1800224"/>
+          </a:xfrm>
+          <a:prstGeom prst="rect">
+            <a:avLst/>
+          </a:prstGeom>
+        </p:spPr>
+        <p:style>
+          <a:lnRef idx="1">
+            <a:schemeClr val="accent1"/>
+          </a:lnRef>
+          <a:fillRef idx="3">
+            <a:schemeClr val="accent1"/>
+          </a:fillRef>
+          <a:effectRef idx="2">
+            <a:schemeClr val="accent1"/>
+          </a:effectRef>
+          <a:fontRef idx="minor">
+            <a:schemeClr val="lt1"/>
+          </a:fontRef>
+        </p:style>
+        <p:txBody>
+          <a:bodyPr rtlCol="0" anchor="ctr"/>
+          <a:lstStyle/>
+          <a:p>
+            <a:pPr algn="ctr"/>
+          </a:p>
+        </p:txBody>
+      </p:sp>
+      <p:sp>
+        <p:nvSpPr>
+          <p:cNvPr id="54" name="Rectangle 53"/>
           <p:cNvSpPr/>
           <p:nvPr/>
         </p:nvSpPr>
@@ -3520,7 +5074,192 @@
       </p:sp>
       <p:sp>
         <p:nvSpPr>
-          <p:cNvPr id="13" name="Rectangle 12"/>
+          <p:cNvPr id="55" name="Oval 54"/>
+          <p:cNvSpPr/>
+          <p:nvPr/>
+        </p:nvSpPr>
+        <p:spPr>
+          <a:xfrm>
+            <a:off x="42976800" y="3396342"/>
+            <a:ext cx="1828800" cy="1828800"/>
+          </a:xfrm>
+          <a:prstGeom prst="ellipse">
+            <a:avLst/>
+          </a:prstGeom>
+        </p:spPr>
+        <p:style>
+          <a:lnRef idx="1">
+            <a:schemeClr val="accent1"/>
+          </a:lnRef>
+          <a:fillRef idx="3">
+            <a:schemeClr val="accent1"/>
+          </a:fillRef>
+          <a:effectRef idx="2">
+            <a:schemeClr val="accent1"/>
+          </a:effectRef>
+          <a:fontRef idx="minor">
+            <a:schemeClr val="lt1"/>
+          </a:fontRef>
+        </p:style>
+        <p:txBody>
+          <a:bodyPr rtlCol="0" anchor="ctr"/>
+          <a:lstStyle/>
+          <a:p>
+            <a:pPr algn="ctr"/>
+          </a:p>
+        </p:txBody>
+      </p:sp>
+      <p:sp>
+        <p:nvSpPr>
+          <p:cNvPr id="56" name="Rectangle 55"/>
+          <p:cNvSpPr/>
+          <p:nvPr/>
+        </p:nvSpPr>
+        <p:spPr>
+          <a:xfrm>
+            <a:off x="1828800" y="3396342"/>
+            <a:ext cx="42062400" cy="1828800"/>
+          </a:xfrm>
+          <a:prstGeom prst="rect">
+            <a:avLst/>
+          </a:prstGeom>
+        </p:spPr>
+        <p:style>
+          <a:lnRef idx="1">
+            <a:schemeClr val="accent1"/>
+          </a:lnRef>
+          <a:fillRef idx="3">
+            <a:schemeClr val="accent1"/>
+          </a:fillRef>
+          <a:effectRef idx="2">
+            <a:schemeClr val="accent1"/>
+          </a:effectRef>
+          <a:fontRef idx="minor">
+            <a:schemeClr val="lt1"/>
+          </a:fontRef>
+        </p:style>
+        <p:txBody>
+          <a:bodyPr rtlCol="0" anchor="ctr"/>
+          <a:lstStyle/>
+          <a:p>
+            <a:pPr algn="ctr"/>
+          </a:p>
+        </p:txBody>
+      </p:sp>
+      <p:sp>
+        <p:nvSpPr>
+          <p:cNvPr id="57" name="Oval 56"/>
+          <p:cNvSpPr/>
+          <p:nvPr/>
+        </p:nvSpPr>
+        <p:spPr>
+          <a:xfrm>
+            <a:off x="0" y="2481942"/>
+            <a:ext cx="3657600" cy="3657600"/>
+          </a:xfrm>
+          <a:prstGeom prst="ellipse">
+            <a:avLst/>
+          </a:prstGeom>
+        </p:spPr>
+        <p:style>
+          <a:lnRef idx="1">
+            <a:schemeClr val="accent1"/>
+          </a:lnRef>
+          <a:fillRef idx="3">
+            <a:schemeClr val="accent1"/>
+          </a:fillRef>
+          <a:effectRef idx="2">
+            <a:schemeClr val="accent1"/>
+          </a:effectRef>
+          <a:fontRef idx="minor">
+            <a:schemeClr val="lt1"/>
+          </a:fontRef>
+        </p:style>
+        <p:txBody>
+          <a:bodyPr rtlCol="0" anchor="ctr"/>
+          <a:lstStyle/>
+          <a:p>
+            <a:pPr algn="ctr"/>
+          </a:p>
+        </p:txBody>
+      </p:sp>
+      <p:sp>
+        <p:nvSpPr>
+          <p:cNvPr id="58" name="Rectangle 57"/>
+          <p:cNvSpPr/>
+          <p:nvPr/>
+        </p:nvSpPr>
+        <p:spPr>
+          <a:xfrm>
+            <a:off x="43760231" y="5165885"/>
+            <a:ext cx="238125" cy="1800224"/>
+          </a:xfrm>
+          <a:prstGeom prst="rect">
+            <a:avLst/>
+          </a:prstGeom>
+        </p:spPr>
+        <p:style>
+          <a:lnRef idx="1">
+            <a:schemeClr val="accent1"/>
+          </a:lnRef>
+          <a:fillRef idx="3">
+            <a:schemeClr val="accent1"/>
+          </a:fillRef>
+          <a:effectRef idx="2">
+            <a:schemeClr val="accent1"/>
+          </a:effectRef>
+          <a:fontRef idx="minor">
+            <a:schemeClr val="lt1"/>
+          </a:fontRef>
+        </p:style>
+        <p:txBody>
+          <a:bodyPr rtlCol="0" anchor="ctr"/>
+          <a:lstStyle/>
+          <a:p>
+            <a:pPr algn="ctr"/>
+          </a:p>
+        </p:txBody>
+      </p:sp>
+      <p:sp>
+        <p:nvSpPr>
+          <p:cNvPr id="59" name="Rectangle 58"/>
+          <p:cNvSpPr/>
+          <p:nvPr/>
+        </p:nvSpPr>
+        <p:spPr>
+          <a:xfrm>
+            <a:off x="3398042" y="5574350"/>
+            <a:ext cx="404814" cy="1800224"/>
+          </a:xfrm>
+          <a:prstGeom prst="rect">
+            <a:avLst/>
+          </a:prstGeom>
+        </p:spPr>
+        <p:style>
+          <a:lnRef idx="1">
+            <a:schemeClr val="accent1"/>
+          </a:lnRef>
+          <a:fillRef idx="3">
+            <a:schemeClr val="accent1"/>
+          </a:fillRef>
+          <a:effectRef idx="2">
+            <a:schemeClr val="accent1"/>
+          </a:effectRef>
+          <a:fontRef idx="minor">
+            <a:schemeClr val="lt1"/>
+          </a:fontRef>
+        </p:style>
+        <p:txBody>
+          <a:bodyPr rtlCol="0" anchor="ctr"/>
+          <a:lstStyle/>
+          <a:p>
+            <a:pPr algn="ctr"/>
+          </a:p>
+        </p:txBody>
+      </p:sp>
+      <p:sp>
+        <p:nvSpPr>
+          <p:cNvPr id="60" name="Rectangle 59"/>
           <p:cNvSpPr/>
           <p:nvPr/>
         </p:nvSpPr>
@@ -3554,6 +5293,191 @@
             <a:r>
               <a:t>1%</a:t>
             </a:r>
+          </a:p>
+        </p:txBody>
+      </p:sp>
+      <p:sp>
+        <p:nvSpPr>
+          <p:cNvPr id="61" name="Oval 60"/>
+          <p:cNvSpPr/>
+          <p:nvPr/>
+        </p:nvSpPr>
+        <p:spPr>
+          <a:xfrm>
+            <a:off x="42976800" y="3396342"/>
+            <a:ext cx="1828800" cy="1828800"/>
+          </a:xfrm>
+          <a:prstGeom prst="ellipse">
+            <a:avLst/>
+          </a:prstGeom>
+        </p:spPr>
+        <p:style>
+          <a:lnRef idx="1">
+            <a:schemeClr val="accent1"/>
+          </a:lnRef>
+          <a:fillRef idx="3">
+            <a:schemeClr val="accent1"/>
+          </a:fillRef>
+          <a:effectRef idx="2">
+            <a:schemeClr val="accent1"/>
+          </a:effectRef>
+          <a:fontRef idx="minor">
+            <a:schemeClr val="lt1"/>
+          </a:fontRef>
+        </p:style>
+        <p:txBody>
+          <a:bodyPr rtlCol="0" anchor="ctr"/>
+          <a:lstStyle/>
+          <a:p>
+            <a:pPr algn="ctr"/>
+          </a:p>
+        </p:txBody>
+      </p:sp>
+      <p:sp>
+        <p:nvSpPr>
+          <p:cNvPr id="62" name="Rectangle 61"/>
+          <p:cNvSpPr/>
+          <p:nvPr/>
+        </p:nvSpPr>
+        <p:spPr>
+          <a:xfrm>
+            <a:off x="1828800" y="3396342"/>
+            <a:ext cx="42062400" cy="1828800"/>
+          </a:xfrm>
+          <a:prstGeom prst="rect">
+            <a:avLst/>
+          </a:prstGeom>
+        </p:spPr>
+        <p:style>
+          <a:lnRef idx="1">
+            <a:schemeClr val="accent1"/>
+          </a:lnRef>
+          <a:fillRef idx="3">
+            <a:schemeClr val="accent1"/>
+          </a:fillRef>
+          <a:effectRef idx="2">
+            <a:schemeClr val="accent1"/>
+          </a:effectRef>
+          <a:fontRef idx="minor">
+            <a:schemeClr val="lt1"/>
+          </a:fontRef>
+        </p:style>
+        <p:txBody>
+          <a:bodyPr rtlCol="0" anchor="ctr"/>
+          <a:lstStyle/>
+          <a:p>
+            <a:pPr algn="ctr"/>
+          </a:p>
+        </p:txBody>
+      </p:sp>
+      <p:sp>
+        <p:nvSpPr>
+          <p:cNvPr id="63" name="Oval 62"/>
+          <p:cNvSpPr/>
+          <p:nvPr/>
+        </p:nvSpPr>
+        <p:spPr>
+          <a:xfrm>
+            <a:off x="0" y="2481942"/>
+            <a:ext cx="3657600" cy="3657600"/>
+          </a:xfrm>
+          <a:prstGeom prst="ellipse">
+            <a:avLst/>
+          </a:prstGeom>
+        </p:spPr>
+        <p:style>
+          <a:lnRef idx="1">
+            <a:schemeClr val="accent1"/>
+          </a:lnRef>
+          <a:fillRef idx="3">
+            <a:schemeClr val="accent1"/>
+          </a:fillRef>
+          <a:effectRef idx="2">
+            <a:schemeClr val="accent1"/>
+          </a:effectRef>
+          <a:fontRef idx="minor">
+            <a:schemeClr val="lt1"/>
+          </a:fontRef>
+        </p:style>
+        <p:txBody>
+          <a:bodyPr rtlCol="0" anchor="ctr"/>
+          <a:lstStyle/>
+          <a:p>
+            <a:pPr algn="ctr"/>
+          </a:p>
+        </p:txBody>
+      </p:sp>
+      <p:sp>
+        <p:nvSpPr>
+          <p:cNvPr id="64" name="Rectangle 63"/>
+          <p:cNvSpPr/>
+          <p:nvPr/>
+        </p:nvSpPr>
+        <p:spPr>
+          <a:xfrm>
+            <a:off x="43760231" y="5165885"/>
+            <a:ext cx="238125" cy="1800224"/>
+          </a:xfrm>
+          <a:prstGeom prst="rect">
+            <a:avLst/>
+          </a:prstGeom>
+        </p:spPr>
+        <p:style>
+          <a:lnRef idx="1">
+            <a:schemeClr val="accent1"/>
+          </a:lnRef>
+          <a:fillRef idx="3">
+            <a:schemeClr val="accent1"/>
+          </a:fillRef>
+          <a:effectRef idx="2">
+            <a:schemeClr val="accent1"/>
+          </a:effectRef>
+          <a:fontRef idx="minor">
+            <a:schemeClr val="lt1"/>
+          </a:fontRef>
+        </p:style>
+        <p:txBody>
+          <a:bodyPr rtlCol="0" anchor="ctr"/>
+          <a:lstStyle/>
+          <a:p>
+            <a:pPr algn="ctr"/>
+          </a:p>
+        </p:txBody>
+      </p:sp>
+      <p:sp>
+        <p:nvSpPr>
+          <p:cNvPr id="65" name="Rectangle 64"/>
+          <p:cNvSpPr/>
+          <p:nvPr/>
+        </p:nvSpPr>
+        <p:spPr>
+          <a:xfrm>
+            <a:off x="3398042" y="5574350"/>
+            <a:ext cx="404814" cy="1800224"/>
+          </a:xfrm>
+          <a:prstGeom prst="rect">
+            <a:avLst/>
+          </a:prstGeom>
+        </p:spPr>
+        <p:style>
+          <a:lnRef idx="1">
+            <a:schemeClr val="accent1"/>
+          </a:lnRef>
+          <a:fillRef idx="3">
+            <a:schemeClr val="accent1"/>
+          </a:fillRef>
+          <a:effectRef idx="2">
+            <a:schemeClr val="accent1"/>
+          </a:effectRef>
+          <a:fontRef idx="minor">
+            <a:schemeClr val="lt1"/>
+          </a:fontRef>
+        </p:style>
+        <p:txBody>
+          <a:bodyPr rtlCol="0" anchor="ctr"/>
+          <a:lstStyle/>
+          <a:p>
+            <a:pPr algn="ctr"/>
           </a:p>
         </p:txBody>
       </p:sp>
@@ -3577,7 +5501,1339 @@
       <p:grpSpPr/>
       <p:sp>
         <p:nvSpPr>
-          <p:cNvPr id="2" name="Rectangle 1"/>
+          <p:cNvPr id="2" name="Oval 1"/>
+          <p:cNvSpPr/>
+          <p:nvPr/>
+        </p:nvSpPr>
+        <p:spPr>
+          <a:xfrm>
+            <a:off x="42976800" y="3396342"/>
+            <a:ext cx="1828800" cy="1828800"/>
+          </a:xfrm>
+          <a:prstGeom prst="ellipse">
+            <a:avLst/>
+          </a:prstGeom>
+        </p:spPr>
+        <p:style>
+          <a:lnRef idx="1">
+            <a:schemeClr val="accent1"/>
+          </a:lnRef>
+          <a:fillRef idx="3">
+            <a:schemeClr val="accent1"/>
+          </a:fillRef>
+          <a:effectRef idx="2">
+            <a:schemeClr val="accent1"/>
+          </a:effectRef>
+          <a:fontRef idx="minor">
+            <a:schemeClr val="lt1"/>
+          </a:fontRef>
+        </p:style>
+        <p:txBody>
+          <a:bodyPr rtlCol="0" anchor="ctr"/>
+          <a:lstStyle/>
+          <a:p>
+            <a:pPr algn="ctr"/>
+          </a:p>
+        </p:txBody>
+      </p:sp>
+      <p:sp>
+        <p:nvSpPr>
+          <p:cNvPr id="3" name="Rectangle 2"/>
+          <p:cNvSpPr/>
+          <p:nvPr/>
+        </p:nvSpPr>
+        <p:spPr>
+          <a:xfrm>
+            <a:off x="1828800" y="3396342"/>
+            <a:ext cx="42062400" cy="1828800"/>
+          </a:xfrm>
+          <a:prstGeom prst="rect">
+            <a:avLst/>
+          </a:prstGeom>
+        </p:spPr>
+        <p:style>
+          <a:lnRef idx="1">
+            <a:schemeClr val="accent1"/>
+          </a:lnRef>
+          <a:fillRef idx="3">
+            <a:schemeClr val="accent1"/>
+          </a:fillRef>
+          <a:effectRef idx="2">
+            <a:schemeClr val="accent1"/>
+          </a:effectRef>
+          <a:fontRef idx="minor">
+            <a:schemeClr val="lt1"/>
+          </a:fontRef>
+        </p:style>
+        <p:txBody>
+          <a:bodyPr rtlCol="0" anchor="ctr"/>
+          <a:lstStyle/>
+          <a:p>
+            <a:pPr algn="ctr"/>
+          </a:p>
+        </p:txBody>
+      </p:sp>
+      <p:sp>
+        <p:nvSpPr>
+          <p:cNvPr id="4" name="Oval 3"/>
+          <p:cNvSpPr/>
+          <p:nvPr/>
+        </p:nvSpPr>
+        <p:spPr>
+          <a:xfrm>
+            <a:off x="0" y="2481942"/>
+            <a:ext cx="3657600" cy="3657600"/>
+          </a:xfrm>
+          <a:prstGeom prst="ellipse">
+            <a:avLst/>
+          </a:prstGeom>
+        </p:spPr>
+        <p:style>
+          <a:lnRef idx="1">
+            <a:schemeClr val="accent1"/>
+          </a:lnRef>
+          <a:fillRef idx="3">
+            <a:schemeClr val="accent1"/>
+          </a:fillRef>
+          <a:effectRef idx="2">
+            <a:schemeClr val="accent1"/>
+          </a:effectRef>
+          <a:fontRef idx="minor">
+            <a:schemeClr val="lt1"/>
+          </a:fontRef>
+        </p:style>
+        <p:txBody>
+          <a:bodyPr rtlCol="0" anchor="ctr"/>
+          <a:lstStyle/>
+          <a:p>
+            <a:pPr algn="ctr"/>
+          </a:p>
+        </p:txBody>
+      </p:sp>
+      <p:sp>
+        <p:nvSpPr>
+          <p:cNvPr id="5" name="Rectangle 4"/>
+          <p:cNvSpPr/>
+          <p:nvPr/>
+        </p:nvSpPr>
+        <p:spPr>
+          <a:xfrm>
+            <a:off x="43760231" y="5165885"/>
+            <a:ext cx="238125" cy="1800224"/>
+          </a:xfrm>
+          <a:prstGeom prst="rect">
+            <a:avLst/>
+          </a:prstGeom>
+        </p:spPr>
+        <p:style>
+          <a:lnRef idx="1">
+            <a:schemeClr val="accent1"/>
+          </a:lnRef>
+          <a:fillRef idx="3">
+            <a:schemeClr val="accent1"/>
+          </a:fillRef>
+          <a:effectRef idx="2">
+            <a:schemeClr val="accent1"/>
+          </a:effectRef>
+          <a:fontRef idx="minor">
+            <a:schemeClr val="lt1"/>
+          </a:fontRef>
+        </p:style>
+        <p:txBody>
+          <a:bodyPr rtlCol="0" anchor="ctr"/>
+          <a:lstStyle/>
+          <a:p>
+            <a:pPr algn="ctr"/>
+          </a:p>
+        </p:txBody>
+      </p:sp>
+      <p:sp>
+        <p:nvSpPr>
+          <p:cNvPr id="6" name="Oval 5"/>
+          <p:cNvSpPr/>
+          <p:nvPr/>
+        </p:nvSpPr>
+        <p:spPr>
+          <a:xfrm>
+            <a:off x="42976800" y="3396342"/>
+            <a:ext cx="1828800" cy="1828800"/>
+          </a:xfrm>
+          <a:prstGeom prst="ellipse">
+            <a:avLst/>
+          </a:prstGeom>
+        </p:spPr>
+        <p:style>
+          <a:lnRef idx="1">
+            <a:schemeClr val="accent1"/>
+          </a:lnRef>
+          <a:fillRef idx="3">
+            <a:schemeClr val="accent1"/>
+          </a:fillRef>
+          <a:effectRef idx="2">
+            <a:schemeClr val="accent1"/>
+          </a:effectRef>
+          <a:fontRef idx="minor">
+            <a:schemeClr val="lt1"/>
+          </a:fontRef>
+        </p:style>
+        <p:txBody>
+          <a:bodyPr rtlCol="0" anchor="ctr"/>
+          <a:lstStyle/>
+          <a:p>
+            <a:pPr algn="ctr"/>
+          </a:p>
+        </p:txBody>
+      </p:sp>
+      <p:sp>
+        <p:nvSpPr>
+          <p:cNvPr id="7" name="Rectangle 6"/>
+          <p:cNvSpPr/>
+          <p:nvPr/>
+        </p:nvSpPr>
+        <p:spPr>
+          <a:xfrm>
+            <a:off x="1828800" y="3396342"/>
+            <a:ext cx="42062400" cy="1828800"/>
+          </a:xfrm>
+          <a:prstGeom prst="rect">
+            <a:avLst/>
+          </a:prstGeom>
+        </p:spPr>
+        <p:style>
+          <a:lnRef idx="1">
+            <a:schemeClr val="accent1"/>
+          </a:lnRef>
+          <a:fillRef idx="3">
+            <a:schemeClr val="accent1"/>
+          </a:fillRef>
+          <a:effectRef idx="2">
+            <a:schemeClr val="accent1"/>
+          </a:effectRef>
+          <a:fontRef idx="minor">
+            <a:schemeClr val="lt1"/>
+          </a:fontRef>
+        </p:style>
+        <p:txBody>
+          <a:bodyPr rtlCol="0" anchor="ctr"/>
+          <a:lstStyle/>
+          <a:p>
+            <a:pPr algn="ctr"/>
+          </a:p>
+        </p:txBody>
+      </p:sp>
+      <p:sp>
+        <p:nvSpPr>
+          <p:cNvPr id="8" name="Oval 7"/>
+          <p:cNvSpPr/>
+          <p:nvPr/>
+        </p:nvSpPr>
+        <p:spPr>
+          <a:xfrm>
+            <a:off x="0" y="2481942"/>
+            <a:ext cx="3657600" cy="3657600"/>
+          </a:xfrm>
+          <a:prstGeom prst="ellipse">
+            <a:avLst/>
+          </a:prstGeom>
+        </p:spPr>
+        <p:style>
+          <a:lnRef idx="1">
+            <a:schemeClr val="accent1"/>
+          </a:lnRef>
+          <a:fillRef idx="3">
+            <a:schemeClr val="accent1"/>
+          </a:fillRef>
+          <a:effectRef idx="2">
+            <a:schemeClr val="accent1"/>
+          </a:effectRef>
+          <a:fontRef idx="minor">
+            <a:schemeClr val="lt1"/>
+          </a:fontRef>
+        </p:style>
+        <p:txBody>
+          <a:bodyPr rtlCol="0" anchor="ctr"/>
+          <a:lstStyle/>
+          <a:p>
+            <a:pPr algn="ctr"/>
+          </a:p>
+        </p:txBody>
+      </p:sp>
+      <p:sp>
+        <p:nvSpPr>
+          <p:cNvPr id="9" name="Rectangle 8"/>
+          <p:cNvSpPr/>
+          <p:nvPr/>
+        </p:nvSpPr>
+        <p:spPr>
+          <a:xfrm>
+            <a:off x="43760231" y="5165885"/>
+            <a:ext cx="238125" cy="1800224"/>
+          </a:xfrm>
+          <a:prstGeom prst="rect">
+            <a:avLst/>
+          </a:prstGeom>
+        </p:spPr>
+        <p:style>
+          <a:lnRef idx="1">
+            <a:schemeClr val="accent1"/>
+          </a:lnRef>
+          <a:fillRef idx="3">
+            <a:schemeClr val="accent1"/>
+          </a:fillRef>
+          <a:effectRef idx="2">
+            <a:schemeClr val="accent1"/>
+          </a:effectRef>
+          <a:fontRef idx="minor">
+            <a:schemeClr val="lt1"/>
+          </a:fontRef>
+        </p:style>
+        <p:txBody>
+          <a:bodyPr rtlCol="0" anchor="ctr"/>
+          <a:lstStyle/>
+          <a:p>
+            <a:pPr algn="ctr"/>
+          </a:p>
+        </p:txBody>
+      </p:sp>
+      <p:sp>
+        <p:nvSpPr>
+          <p:cNvPr id="10" name="Oval 9"/>
+          <p:cNvSpPr/>
+          <p:nvPr/>
+        </p:nvSpPr>
+        <p:spPr>
+          <a:xfrm>
+            <a:off x="42976800" y="3396342"/>
+            <a:ext cx="1828800" cy="1828800"/>
+          </a:xfrm>
+          <a:prstGeom prst="ellipse">
+            <a:avLst/>
+          </a:prstGeom>
+        </p:spPr>
+        <p:style>
+          <a:lnRef idx="1">
+            <a:schemeClr val="accent1"/>
+          </a:lnRef>
+          <a:fillRef idx="3">
+            <a:schemeClr val="accent1"/>
+          </a:fillRef>
+          <a:effectRef idx="2">
+            <a:schemeClr val="accent1"/>
+          </a:effectRef>
+          <a:fontRef idx="minor">
+            <a:schemeClr val="lt1"/>
+          </a:fontRef>
+        </p:style>
+        <p:txBody>
+          <a:bodyPr rtlCol="0" anchor="ctr"/>
+          <a:lstStyle/>
+          <a:p>
+            <a:pPr algn="ctr"/>
+          </a:p>
+        </p:txBody>
+      </p:sp>
+      <p:sp>
+        <p:nvSpPr>
+          <p:cNvPr id="11" name="Rectangle 10"/>
+          <p:cNvSpPr/>
+          <p:nvPr/>
+        </p:nvSpPr>
+        <p:spPr>
+          <a:xfrm>
+            <a:off x="1828800" y="3396342"/>
+            <a:ext cx="42062400" cy="1828800"/>
+          </a:xfrm>
+          <a:prstGeom prst="rect">
+            <a:avLst/>
+          </a:prstGeom>
+        </p:spPr>
+        <p:style>
+          <a:lnRef idx="1">
+            <a:schemeClr val="accent1"/>
+          </a:lnRef>
+          <a:fillRef idx="3">
+            <a:schemeClr val="accent1"/>
+          </a:fillRef>
+          <a:effectRef idx="2">
+            <a:schemeClr val="accent1"/>
+          </a:effectRef>
+          <a:fontRef idx="minor">
+            <a:schemeClr val="lt1"/>
+          </a:fontRef>
+        </p:style>
+        <p:txBody>
+          <a:bodyPr rtlCol="0" anchor="ctr"/>
+          <a:lstStyle/>
+          <a:p>
+            <a:pPr algn="ctr"/>
+          </a:p>
+        </p:txBody>
+      </p:sp>
+      <p:sp>
+        <p:nvSpPr>
+          <p:cNvPr id="12" name="Oval 11"/>
+          <p:cNvSpPr/>
+          <p:nvPr/>
+        </p:nvSpPr>
+        <p:spPr>
+          <a:xfrm>
+            <a:off x="0" y="2481942"/>
+            <a:ext cx="3657600" cy="3657600"/>
+          </a:xfrm>
+          <a:prstGeom prst="ellipse">
+            <a:avLst/>
+          </a:prstGeom>
+        </p:spPr>
+        <p:style>
+          <a:lnRef idx="1">
+            <a:schemeClr val="accent1"/>
+          </a:lnRef>
+          <a:fillRef idx="3">
+            <a:schemeClr val="accent1"/>
+          </a:fillRef>
+          <a:effectRef idx="2">
+            <a:schemeClr val="accent1"/>
+          </a:effectRef>
+          <a:fontRef idx="minor">
+            <a:schemeClr val="lt1"/>
+          </a:fontRef>
+        </p:style>
+        <p:txBody>
+          <a:bodyPr rtlCol="0" anchor="ctr"/>
+          <a:lstStyle/>
+          <a:p>
+            <a:pPr algn="ctr"/>
+          </a:p>
+        </p:txBody>
+      </p:sp>
+      <p:sp>
+        <p:nvSpPr>
+          <p:cNvPr id="13" name="Rectangle 12"/>
+          <p:cNvSpPr/>
+          <p:nvPr/>
+        </p:nvSpPr>
+        <p:spPr>
+          <a:xfrm>
+            <a:off x="43760231" y="5165885"/>
+            <a:ext cx="238125" cy="1800224"/>
+          </a:xfrm>
+          <a:prstGeom prst="rect">
+            <a:avLst/>
+          </a:prstGeom>
+        </p:spPr>
+        <p:style>
+          <a:lnRef idx="1">
+            <a:schemeClr val="accent1"/>
+          </a:lnRef>
+          <a:fillRef idx="3">
+            <a:schemeClr val="accent1"/>
+          </a:fillRef>
+          <a:effectRef idx="2">
+            <a:schemeClr val="accent1"/>
+          </a:effectRef>
+          <a:fontRef idx="minor">
+            <a:schemeClr val="lt1"/>
+          </a:fontRef>
+        </p:style>
+        <p:txBody>
+          <a:bodyPr rtlCol="0" anchor="ctr"/>
+          <a:lstStyle/>
+          <a:p>
+            <a:pPr algn="ctr"/>
+          </a:p>
+        </p:txBody>
+      </p:sp>
+      <p:sp>
+        <p:nvSpPr>
+          <p:cNvPr id="14" name="Oval 13"/>
+          <p:cNvSpPr/>
+          <p:nvPr/>
+        </p:nvSpPr>
+        <p:spPr>
+          <a:xfrm>
+            <a:off x="42976800" y="3396342"/>
+            <a:ext cx="1828800" cy="1828800"/>
+          </a:xfrm>
+          <a:prstGeom prst="ellipse">
+            <a:avLst/>
+          </a:prstGeom>
+        </p:spPr>
+        <p:style>
+          <a:lnRef idx="1">
+            <a:schemeClr val="accent1"/>
+          </a:lnRef>
+          <a:fillRef idx="3">
+            <a:schemeClr val="accent1"/>
+          </a:fillRef>
+          <a:effectRef idx="2">
+            <a:schemeClr val="accent1"/>
+          </a:effectRef>
+          <a:fontRef idx="minor">
+            <a:schemeClr val="lt1"/>
+          </a:fontRef>
+        </p:style>
+        <p:txBody>
+          <a:bodyPr rtlCol="0" anchor="ctr"/>
+          <a:lstStyle/>
+          <a:p>
+            <a:pPr algn="ctr"/>
+          </a:p>
+        </p:txBody>
+      </p:sp>
+      <p:sp>
+        <p:nvSpPr>
+          <p:cNvPr id="15" name="Rectangle 14"/>
+          <p:cNvSpPr/>
+          <p:nvPr/>
+        </p:nvSpPr>
+        <p:spPr>
+          <a:xfrm>
+            <a:off x="1828800" y="3396342"/>
+            <a:ext cx="42062400" cy="1828800"/>
+          </a:xfrm>
+          <a:prstGeom prst="rect">
+            <a:avLst/>
+          </a:prstGeom>
+        </p:spPr>
+        <p:style>
+          <a:lnRef idx="1">
+            <a:schemeClr val="accent1"/>
+          </a:lnRef>
+          <a:fillRef idx="3">
+            <a:schemeClr val="accent1"/>
+          </a:fillRef>
+          <a:effectRef idx="2">
+            <a:schemeClr val="accent1"/>
+          </a:effectRef>
+          <a:fontRef idx="minor">
+            <a:schemeClr val="lt1"/>
+          </a:fontRef>
+        </p:style>
+        <p:txBody>
+          <a:bodyPr rtlCol="0" anchor="ctr"/>
+          <a:lstStyle/>
+          <a:p>
+            <a:pPr algn="ctr"/>
+          </a:p>
+        </p:txBody>
+      </p:sp>
+      <p:sp>
+        <p:nvSpPr>
+          <p:cNvPr id="16" name="Oval 15"/>
+          <p:cNvSpPr/>
+          <p:nvPr/>
+        </p:nvSpPr>
+        <p:spPr>
+          <a:xfrm>
+            <a:off x="0" y="2481942"/>
+            <a:ext cx="3657600" cy="3657600"/>
+          </a:xfrm>
+          <a:prstGeom prst="ellipse">
+            <a:avLst/>
+          </a:prstGeom>
+        </p:spPr>
+        <p:style>
+          <a:lnRef idx="1">
+            <a:schemeClr val="accent1"/>
+          </a:lnRef>
+          <a:fillRef idx="3">
+            <a:schemeClr val="accent1"/>
+          </a:fillRef>
+          <a:effectRef idx="2">
+            <a:schemeClr val="accent1"/>
+          </a:effectRef>
+          <a:fontRef idx="minor">
+            <a:schemeClr val="lt1"/>
+          </a:fontRef>
+        </p:style>
+        <p:txBody>
+          <a:bodyPr rtlCol="0" anchor="ctr"/>
+          <a:lstStyle/>
+          <a:p>
+            <a:pPr algn="ctr"/>
+          </a:p>
+        </p:txBody>
+      </p:sp>
+      <p:sp>
+        <p:nvSpPr>
+          <p:cNvPr id="17" name="Rectangle 16"/>
+          <p:cNvSpPr/>
+          <p:nvPr/>
+        </p:nvSpPr>
+        <p:spPr>
+          <a:xfrm>
+            <a:off x="43760231" y="5165885"/>
+            <a:ext cx="238125" cy="1800224"/>
+          </a:xfrm>
+          <a:prstGeom prst="rect">
+            <a:avLst/>
+          </a:prstGeom>
+        </p:spPr>
+        <p:style>
+          <a:lnRef idx="1">
+            <a:schemeClr val="accent1"/>
+          </a:lnRef>
+          <a:fillRef idx="3">
+            <a:schemeClr val="accent1"/>
+          </a:fillRef>
+          <a:effectRef idx="2">
+            <a:schemeClr val="accent1"/>
+          </a:effectRef>
+          <a:fontRef idx="minor">
+            <a:schemeClr val="lt1"/>
+          </a:fontRef>
+        </p:style>
+        <p:txBody>
+          <a:bodyPr rtlCol="0" anchor="ctr"/>
+          <a:lstStyle/>
+          <a:p>
+            <a:pPr algn="ctr"/>
+          </a:p>
+        </p:txBody>
+      </p:sp>
+      <p:sp>
+        <p:nvSpPr>
+          <p:cNvPr id="18" name="Oval 17"/>
+          <p:cNvSpPr/>
+          <p:nvPr/>
+        </p:nvSpPr>
+        <p:spPr>
+          <a:xfrm>
+            <a:off x="42976800" y="3396342"/>
+            <a:ext cx="1828800" cy="1828800"/>
+          </a:xfrm>
+          <a:prstGeom prst="ellipse">
+            <a:avLst/>
+          </a:prstGeom>
+        </p:spPr>
+        <p:style>
+          <a:lnRef idx="1">
+            <a:schemeClr val="accent1"/>
+          </a:lnRef>
+          <a:fillRef idx="3">
+            <a:schemeClr val="accent1"/>
+          </a:fillRef>
+          <a:effectRef idx="2">
+            <a:schemeClr val="accent1"/>
+          </a:effectRef>
+          <a:fontRef idx="minor">
+            <a:schemeClr val="lt1"/>
+          </a:fontRef>
+        </p:style>
+        <p:txBody>
+          <a:bodyPr rtlCol="0" anchor="ctr"/>
+          <a:lstStyle/>
+          <a:p>
+            <a:pPr algn="ctr"/>
+          </a:p>
+        </p:txBody>
+      </p:sp>
+      <p:sp>
+        <p:nvSpPr>
+          <p:cNvPr id="19" name="Rectangle 18"/>
+          <p:cNvSpPr/>
+          <p:nvPr/>
+        </p:nvSpPr>
+        <p:spPr>
+          <a:xfrm>
+            <a:off x="1828800" y="3396342"/>
+            <a:ext cx="42062400" cy="1828800"/>
+          </a:xfrm>
+          <a:prstGeom prst="rect">
+            <a:avLst/>
+          </a:prstGeom>
+        </p:spPr>
+        <p:style>
+          <a:lnRef idx="1">
+            <a:schemeClr val="accent1"/>
+          </a:lnRef>
+          <a:fillRef idx="3">
+            <a:schemeClr val="accent1"/>
+          </a:fillRef>
+          <a:effectRef idx="2">
+            <a:schemeClr val="accent1"/>
+          </a:effectRef>
+          <a:fontRef idx="minor">
+            <a:schemeClr val="lt1"/>
+          </a:fontRef>
+        </p:style>
+        <p:txBody>
+          <a:bodyPr rtlCol="0" anchor="ctr"/>
+          <a:lstStyle/>
+          <a:p>
+            <a:pPr algn="ctr"/>
+          </a:p>
+        </p:txBody>
+      </p:sp>
+      <p:sp>
+        <p:nvSpPr>
+          <p:cNvPr id="20" name="Oval 19"/>
+          <p:cNvSpPr/>
+          <p:nvPr/>
+        </p:nvSpPr>
+        <p:spPr>
+          <a:xfrm>
+            <a:off x="0" y="2481942"/>
+            <a:ext cx="3657600" cy="3657600"/>
+          </a:xfrm>
+          <a:prstGeom prst="ellipse">
+            <a:avLst/>
+          </a:prstGeom>
+        </p:spPr>
+        <p:style>
+          <a:lnRef idx="1">
+            <a:schemeClr val="accent1"/>
+          </a:lnRef>
+          <a:fillRef idx="3">
+            <a:schemeClr val="accent1"/>
+          </a:fillRef>
+          <a:effectRef idx="2">
+            <a:schemeClr val="accent1"/>
+          </a:effectRef>
+          <a:fontRef idx="minor">
+            <a:schemeClr val="lt1"/>
+          </a:fontRef>
+        </p:style>
+        <p:txBody>
+          <a:bodyPr rtlCol="0" anchor="ctr"/>
+          <a:lstStyle/>
+          <a:p>
+            <a:pPr algn="ctr"/>
+          </a:p>
+        </p:txBody>
+      </p:sp>
+      <p:sp>
+        <p:nvSpPr>
+          <p:cNvPr id="21" name="Rectangle 20"/>
+          <p:cNvSpPr/>
+          <p:nvPr/>
+        </p:nvSpPr>
+        <p:spPr>
+          <a:xfrm>
+            <a:off x="43760231" y="5165885"/>
+            <a:ext cx="238125" cy="1800224"/>
+          </a:xfrm>
+          <a:prstGeom prst="rect">
+            <a:avLst/>
+          </a:prstGeom>
+        </p:spPr>
+        <p:style>
+          <a:lnRef idx="1">
+            <a:schemeClr val="accent1"/>
+          </a:lnRef>
+          <a:fillRef idx="3">
+            <a:schemeClr val="accent1"/>
+          </a:fillRef>
+          <a:effectRef idx="2">
+            <a:schemeClr val="accent1"/>
+          </a:effectRef>
+          <a:fontRef idx="minor">
+            <a:schemeClr val="lt1"/>
+          </a:fontRef>
+        </p:style>
+        <p:txBody>
+          <a:bodyPr rtlCol="0" anchor="ctr"/>
+          <a:lstStyle/>
+          <a:p>
+            <a:pPr algn="ctr"/>
+          </a:p>
+        </p:txBody>
+      </p:sp>
+      <p:sp>
+        <p:nvSpPr>
+          <p:cNvPr id="22" name="Oval 21"/>
+          <p:cNvSpPr/>
+          <p:nvPr/>
+        </p:nvSpPr>
+        <p:spPr>
+          <a:xfrm>
+            <a:off x="42976800" y="3396342"/>
+            <a:ext cx="1828800" cy="1828800"/>
+          </a:xfrm>
+          <a:prstGeom prst="ellipse">
+            <a:avLst/>
+          </a:prstGeom>
+        </p:spPr>
+        <p:style>
+          <a:lnRef idx="1">
+            <a:schemeClr val="accent1"/>
+          </a:lnRef>
+          <a:fillRef idx="3">
+            <a:schemeClr val="accent1"/>
+          </a:fillRef>
+          <a:effectRef idx="2">
+            <a:schemeClr val="accent1"/>
+          </a:effectRef>
+          <a:fontRef idx="minor">
+            <a:schemeClr val="lt1"/>
+          </a:fontRef>
+        </p:style>
+        <p:txBody>
+          <a:bodyPr rtlCol="0" anchor="ctr"/>
+          <a:lstStyle/>
+          <a:p>
+            <a:pPr algn="ctr"/>
+          </a:p>
+        </p:txBody>
+      </p:sp>
+      <p:sp>
+        <p:nvSpPr>
+          <p:cNvPr id="23" name="Rectangle 22"/>
+          <p:cNvSpPr/>
+          <p:nvPr/>
+        </p:nvSpPr>
+        <p:spPr>
+          <a:xfrm>
+            <a:off x="1828800" y="3396342"/>
+            <a:ext cx="42062400" cy="1828800"/>
+          </a:xfrm>
+          <a:prstGeom prst="rect">
+            <a:avLst/>
+          </a:prstGeom>
+        </p:spPr>
+        <p:style>
+          <a:lnRef idx="1">
+            <a:schemeClr val="accent1"/>
+          </a:lnRef>
+          <a:fillRef idx="3">
+            <a:schemeClr val="accent1"/>
+          </a:fillRef>
+          <a:effectRef idx="2">
+            <a:schemeClr val="accent1"/>
+          </a:effectRef>
+          <a:fontRef idx="minor">
+            <a:schemeClr val="lt1"/>
+          </a:fontRef>
+        </p:style>
+        <p:txBody>
+          <a:bodyPr rtlCol="0" anchor="ctr"/>
+          <a:lstStyle/>
+          <a:p>
+            <a:pPr algn="ctr"/>
+          </a:p>
+        </p:txBody>
+      </p:sp>
+      <p:sp>
+        <p:nvSpPr>
+          <p:cNvPr id="24" name="Oval 23"/>
+          <p:cNvSpPr/>
+          <p:nvPr/>
+        </p:nvSpPr>
+        <p:spPr>
+          <a:xfrm>
+            <a:off x="0" y="2481942"/>
+            <a:ext cx="3657600" cy="3657600"/>
+          </a:xfrm>
+          <a:prstGeom prst="ellipse">
+            <a:avLst/>
+          </a:prstGeom>
+        </p:spPr>
+        <p:style>
+          <a:lnRef idx="1">
+            <a:schemeClr val="accent1"/>
+          </a:lnRef>
+          <a:fillRef idx="3">
+            <a:schemeClr val="accent1"/>
+          </a:fillRef>
+          <a:effectRef idx="2">
+            <a:schemeClr val="accent1"/>
+          </a:effectRef>
+          <a:fontRef idx="minor">
+            <a:schemeClr val="lt1"/>
+          </a:fontRef>
+        </p:style>
+        <p:txBody>
+          <a:bodyPr rtlCol="0" anchor="ctr"/>
+          <a:lstStyle/>
+          <a:p>
+            <a:pPr algn="ctr"/>
+          </a:p>
+        </p:txBody>
+      </p:sp>
+      <p:sp>
+        <p:nvSpPr>
+          <p:cNvPr id="25" name="Rectangle 24"/>
+          <p:cNvSpPr/>
+          <p:nvPr/>
+        </p:nvSpPr>
+        <p:spPr>
+          <a:xfrm>
+            <a:off x="43760231" y="5165885"/>
+            <a:ext cx="238125" cy="1800224"/>
+          </a:xfrm>
+          <a:prstGeom prst="rect">
+            <a:avLst/>
+          </a:prstGeom>
+        </p:spPr>
+        <p:style>
+          <a:lnRef idx="1">
+            <a:schemeClr val="accent1"/>
+          </a:lnRef>
+          <a:fillRef idx="3">
+            <a:schemeClr val="accent1"/>
+          </a:fillRef>
+          <a:effectRef idx="2">
+            <a:schemeClr val="accent1"/>
+          </a:effectRef>
+          <a:fontRef idx="minor">
+            <a:schemeClr val="lt1"/>
+          </a:fontRef>
+        </p:style>
+        <p:txBody>
+          <a:bodyPr rtlCol="0" anchor="ctr"/>
+          <a:lstStyle/>
+          <a:p>
+            <a:pPr algn="ctr"/>
+          </a:p>
+        </p:txBody>
+      </p:sp>
+      <p:sp>
+        <p:nvSpPr>
+          <p:cNvPr id="26" name="Oval 25"/>
+          <p:cNvSpPr/>
+          <p:nvPr/>
+        </p:nvSpPr>
+        <p:spPr>
+          <a:xfrm>
+            <a:off x="42976800" y="3396342"/>
+            <a:ext cx="1828800" cy="1828800"/>
+          </a:xfrm>
+          <a:prstGeom prst="ellipse">
+            <a:avLst/>
+          </a:prstGeom>
+        </p:spPr>
+        <p:style>
+          <a:lnRef idx="1">
+            <a:schemeClr val="accent1"/>
+          </a:lnRef>
+          <a:fillRef idx="3">
+            <a:schemeClr val="accent1"/>
+          </a:fillRef>
+          <a:effectRef idx="2">
+            <a:schemeClr val="accent1"/>
+          </a:effectRef>
+          <a:fontRef idx="minor">
+            <a:schemeClr val="lt1"/>
+          </a:fontRef>
+        </p:style>
+        <p:txBody>
+          <a:bodyPr rtlCol="0" anchor="ctr"/>
+          <a:lstStyle/>
+          <a:p>
+            <a:pPr algn="ctr"/>
+          </a:p>
+        </p:txBody>
+      </p:sp>
+      <p:sp>
+        <p:nvSpPr>
+          <p:cNvPr id="27" name="Rectangle 26"/>
+          <p:cNvSpPr/>
+          <p:nvPr/>
+        </p:nvSpPr>
+        <p:spPr>
+          <a:xfrm>
+            <a:off x="1828800" y="3396342"/>
+            <a:ext cx="42062400" cy="1828800"/>
+          </a:xfrm>
+          <a:prstGeom prst="rect">
+            <a:avLst/>
+          </a:prstGeom>
+        </p:spPr>
+        <p:style>
+          <a:lnRef idx="1">
+            <a:schemeClr val="accent1"/>
+          </a:lnRef>
+          <a:fillRef idx="3">
+            <a:schemeClr val="accent1"/>
+          </a:fillRef>
+          <a:effectRef idx="2">
+            <a:schemeClr val="accent1"/>
+          </a:effectRef>
+          <a:fontRef idx="minor">
+            <a:schemeClr val="lt1"/>
+          </a:fontRef>
+        </p:style>
+        <p:txBody>
+          <a:bodyPr rtlCol="0" anchor="ctr"/>
+          <a:lstStyle/>
+          <a:p>
+            <a:pPr algn="ctr"/>
+          </a:p>
+        </p:txBody>
+      </p:sp>
+      <p:sp>
+        <p:nvSpPr>
+          <p:cNvPr id="28" name="Oval 27"/>
+          <p:cNvSpPr/>
+          <p:nvPr/>
+        </p:nvSpPr>
+        <p:spPr>
+          <a:xfrm>
+            <a:off x="0" y="2481942"/>
+            <a:ext cx="3657600" cy="3657600"/>
+          </a:xfrm>
+          <a:prstGeom prst="ellipse">
+            <a:avLst/>
+          </a:prstGeom>
+        </p:spPr>
+        <p:style>
+          <a:lnRef idx="1">
+            <a:schemeClr val="accent1"/>
+          </a:lnRef>
+          <a:fillRef idx="3">
+            <a:schemeClr val="accent1"/>
+          </a:fillRef>
+          <a:effectRef idx="2">
+            <a:schemeClr val="accent1"/>
+          </a:effectRef>
+          <a:fontRef idx="minor">
+            <a:schemeClr val="lt1"/>
+          </a:fontRef>
+        </p:style>
+        <p:txBody>
+          <a:bodyPr rtlCol="0" anchor="ctr"/>
+          <a:lstStyle/>
+          <a:p>
+            <a:pPr algn="ctr"/>
+          </a:p>
+        </p:txBody>
+      </p:sp>
+      <p:sp>
+        <p:nvSpPr>
+          <p:cNvPr id="29" name="Rectangle 28"/>
+          <p:cNvSpPr/>
+          <p:nvPr/>
+        </p:nvSpPr>
+        <p:spPr>
+          <a:xfrm>
+            <a:off x="43760231" y="5165885"/>
+            <a:ext cx="238125" cy="1800224"/>
+          </a:xfrm>
+          <a:prstGeom prst="rect">
+            <a:avLst/>
+          </a:prstGeom>
+        </p:spPr>
+        <p:style>
+          <a:lnRef idx="1">
+            <a:schemeClr val="accent1"/>
+          </a:lnRef>
+          <a:fillRef idx="3">
+            <a:schemeClr val="accent1"/>
+          </a:fillRef>
+          <a:effectRef idx="2">
+            <a:schemeClr val="accent1"/>
+          </a:effectRef>
+          <a:fontRef idx="minor">
+            <a:schemeClr val="lt1"/>
+          </a:fontRef>
+        </p:style>
+        <p:txBody>
+          <a:bodyPr rtlCol="0" anchor="ctr"/>
+          <a:lstStyle/>
+          <a:p>
+            <a:pPr algn="ctr"/>
+          </a:p>
+        </p:txBody>
+      </p:sp>
+      <p:sp>
+        <p:nvSpPr>
+          <p:cNvPr id="30" name="Oval 29"/>
+          <p:cNvSpPr/>
+          <p:nvPr/>
+        </p:nvSpPr>
+        <p:spPr>
+          <a:xfrm>
+            <a:off x="42976800" y="3396342"/>
+            <a:ext cx="1828800" cy="1828800"/>
+          </a:xfrm>
+          <a:prstGeom prst="ellipse">
+            <a:avLst/>
+          </a:prstGeom>
+        </p:spPr>
+        <p:style>
+          <a:lnRef idx="1">
+            <a:schemeClr val="accent1"/>
+          </a:lnRef>
+          <a:fillRef idx="3">
+            <a:schemeClr val="accent1"/>
+          </a:fillRef>
+          <a:effectRef idx="2">
+            <a:schemeClr val="accent1"/>
+          </a:effectRef>
+          <a:fontRef idx="minor">
+            <a:schemeClr val="lt1"/>
+          </a:fontRef>
+        </p:style>
+        <p:txBody>
+          <a:bodyPr rtlCol="0" anchor="ctr"/>
+          <a:lstStyle/>
+          <a:p>
+            <a:pPr algn="ctr"/>
+          </a:p>
+        </p:txBody>
+      </p:sp>
+      <p:sp>
+        <p:nvSpPr>
+          <p:cNvPr id="31" name="Rectangle 30"/>
+          <p:cNvSpPr/>
+          <p:nvPr/>
+        </p:nvSpPr>
+        <p:spPr>
+          <a:xfrm>
+            <a:off x="1828800" y="3396342"/>
+            <a:ext cx="42062400" cy="1828800"/>
+          </a:xfrm>
+          <a:prstGeom prst="rect">
+            <a:avLst/>
+          </a:prstGeom>
+        </p:spPr>
+        <p:style>
+          <a:lnRef idx="1">
+            <a:schemeClr val="accent1"/>
+          </a:lnRef>
+          <a:fillRef idx="3">
+            <a:schemeClr val="accent1"/>
+          </a:fillRef>
+          <a:effectRef idx="2">
+            <a:schemeClr val="accent1"/>
+          </a:effectRef>
+          <a:fontRef idx="minor">
+            <a:schemeClr val="lt1"/>
+          </a:fontRef>
+        </p:style>
+        <p:txBody>
+          <a:bodyPr rtlCol="0" anchor="ctr"/>
+          <a:lstStyle/>
+          <a:p>
+            <a:pPr algn="ctr"/>
+          </a:p>
+        </p:txBody>
+      </p:sp>
+      <p:sp>
+        <p:nvSpPr>
+          <p:cNvPr id="32" name="Oval 31"/>
+          <p:cNvSpPr/>
+          <p:nvPr/>
+        </p:nvSpPr>
+        <p:spPr>
+          <a:xfrm>
+            <a:off x="0" y="2481942"/>
+            <a:ext cx="3657600" cy="3657600"/>
+          </a:xfrm>
+          <a:prstGeom prst="ellipse">
+            <a:avLst/>
+          </a:prstGeom>
+        </p:spPr>
+        <p:style>
+          <a:lnRef idx="1">
+            <a:schemeClr val="accent1"/>
+          </a:lnRef>
+          <a:fillRef idx="3">
+            <a:schemeClr val="accent1"/>
+          </a:fillRef>
+          <a:effectRef idx="2">
+            <a:schemeClr val="accent1"/>
+          </a:effectRef>
+          <a:fontRef idx="minor">
+            <a:schemeClr val="lt1"/>
+          </a:fontRef>
+        </p:style>
+        <p:txBody>
+          <a:bodyPr rtlCol="0" anchor="ctr"/>
+          <a:lstStyle/>
+          <a:p>
+            <a:pPr algn="ctr"/>
+          </a:p>
+        </p:txBody>
+      </p:sp>
+      <p:sp>
+        <p:nvSpPr>
+          <p:cNvPr id="33" name="Rectangle 32"/>
+          <p:cNvSpPr/>
+          <p:nvPr/>
+        </p:nvSpPr>
+        <p:spPr>
+          <a:xfrm>
+            <a:off x="43760231" y="5165885"/>
+            <a:ext cx="238125" cy="1800224"/>
+          </a:xfrm>
+          <a:prstGeom prst="rect">
+            <a:avLst/>
+          </a:prstGeom>
+        </p:spPr>
+        <p:style>
+          <a:lnRef idx="1">
+            <a:schemeClr val="accent1"/>
+          </a:lnRef>
+          <a:fillRef idx="3">
+            <a:schemeClr val="accent1"/>
+          </a:fillRef>
+          <a:effectRef idx="2">
+            <a:schemeClr val="accent1"/>
+          </a:effectRef>
+          <a:fontRef idx="minor">
+            <a:schemeClr val="lt1"/>
+          </a:fontRef>
+        </p:style>
+        <p:txBody>
+          <a:bodyPr rtlCol="0" anchor="ctr"/>
+          <a:lstStyle/>
+          <a:p>
+            <a:pPr algn="ctr"/>
+          </a:p>
+        </p:txBody>
+      </p:sp>
+      <p:sp>
+        <p:nvSpPr>
+          <p:cNvPr id="34" name="Oval 33"/>
+          <p:cNvSpPr/>
+          <p:nvPr/>
+        </p:nvSpPr>
+        <p:spPr>
+          <a:xfrm>
+            <a:off x="42976800" y="3396342"/>
+            <a:ext cx="1828800" cy="1828800"/>
+          </a:xfrm>
+          <a:prstGeom prst="ellipse">
+            <a:avLst/>
+          </a:prstGeom>
+        </p:spPr>
+        <p:style>
+          <a:lnRef idx="1">
+            <a:schemeClr val="accent1"/>
+          </a:lnRef>
+          <a:fillRef idx="3">
+            <a:schemeClr val="accent1"/>
+          </a:fillRef>
+          <a:effectRef idx="2">
+            <a:schemeClr val="accent1"/>
+          </a:effectRef>
+          <a:fontRef idx="minor">
+            <a:schemeClr val="lt1"/>
+          </a:fontRef>
+        </p:style>
+        <p:txBody>
+          <a:bodyPr rtlCol="0" anchor="ctr"/>
+          <a:lstStyle/>
+          <a:p>
+            <a:pPr algn="ctr"/>
+          </a:p>
+        </p:txBody>
+      </p:sp>
+      <p:sp>
+        <p:nvSpPr>
+          <p:cNvPr id="35" name="Rectangle 34"/>
+          <p:cNvSpPr/>
+          <p:nvPr/>
+        </p:nvSpPr>
+        <p:spPr>
+          <a:xfrm>
+            <a:off x="1828800" y="3396342"/>
+            <a:ext cx="42062400" cy="1828800"/>
+          </a:xfrm>
+          <a:prstGeom prst="rect">
+            <a:avLst/>
+          </a:prstGeom>
+        </p:spPr>
+        <p:style>
+          <a:lnRef idx="1">
+            <a:schemeClr val="accent1"/>
+          </a:lnRef>
+          <a:fillRef idx="3">
+            <a:schemeClr val="accent1"/>
+          </a:fillRef>
+          <a:effectRef idx="2">
+            <a:schemeClr val="accent1"/>
+          </a:effectRef>
+          <a:fontRef idx="minor">
+            <a:schemeClr val="lt1"/>
+          </a:fontRef>
+        </p:style>
+        <p:txBody>
+          <a:bodyPr rtlCol="0" anchor="ctr"/>
+          <a:lstStyle/>
+          <a:p>
+            <a:pPr algn="ctr"/>
+          </a:p>
+        </p:txBody>
+      </p:sp>
+      <p:sp>
+        <p:nvSpPr>
+          <p:cNvPr id="36" name="Oval 35"/>
+          <p:cNvSpPr/>
+          <p:nvPr/>
+        </p:nvSpPr>
+        <p:spPr>
+          <a:xfrm>
+            <a:off x="0" y="2481942"/>
+            <a:ext cx="3657600" cy="3657600"/>
+          </a:xfrm>
+          <a:prstGeom prst="ellipse">
+            <a:avLst/>
+          </a:prstGeom>
+        </p:spPr>
+        <p:style>
+          <a:lnRef idx="1">
+            <a:schemeClr val="accent1"/>
+          </a:lnRef>
+          <a:fillRef idx="3">
+            <a:schemeClr val="accent1"/>
+          </a:fillRef>
+          <a:effectRef idx="2">
+            <a:schemeClr val="accent1"/>
+          </a:effectRef>
+          <a:fontRef idx="minor">
+            <a:schemeClr val="lt1"/>
+          </a:fontRef>
+        </p:style>
+        <p:txBody>
+          <a:bodyPr rtlCol="0" anchor="ctr"/>
+          <a:lstStyle/>
+          <a:p>
+            <a:pPr algn="ctr"/>
+          </a:p>
+        </p:txBody>
+      </p:sp>
+      <p:sp>
+        <p:nvSpPr>
+          <p:cNvPr id="37" name="Rectangle 36"/>
+          <p:cNvSpPr/>
+          <p:nvPr/>
+        </p:nvSpPr>
+        <p:spPr>
+          <a:xfrm>
+            <a:off x="43760231" y="5165885"/>
+            <a:ext cx="238125" cy="1800224"/>
+          </a:xfrm>
+          <a:prstGeom prst="rect">
+            <a:avLst/>
+          </a:prstGeom>
+        </p:spPr>
+        <p:style>
+          <a:lnRef idx="1">
+            <a:schemeClr val="accent1"/>
+          </a:lnRef>
+          <a:fillRef idx="3">
+            <a:schemeClr val="accent1"/>
+          </a:fillRef>
+          <a:effectRef idx="2">
+            <a:schemeClr val="accent1"/>
+          </a:effectRef>
+          <a:fontRef idx="minor">
+            <a:schemeClr val="lt1"/>
+          </a:fontRef>
+        </p:style>
+        <p:txBody>
+          <a:bodyPr rtlCol="0" anchor="ctr"/>
+          <a:lstStyle/>
+          <a:p>
+            <a:pPr algn="ctr"/>
+          </a:p>
+        </p:txBody>
+      </p:sp>
+      <p:sp>
+        <p:nvSpPr>
+          <p:cNvPr id="38" name="Rectangle 37"/>
           <p:cNvSpPr/>
           <p:nvPr/>
         </p:nvSpPr>
@@ -3616,7 +6872,7 @@
       </p:sp>
       <p:sp>
         <p:nvSpPr>
-          <p:cNvPr id="3" name="Rectangle 2"/>
+          <p:cNvPr id="39" name="Rectangle 38"/>
           <p:cNvSpPr/>
           <p:nvPr/>
         </p:nvSpPr>
@@ -3655,7 +6911,7 @@
       </p:sp>
       <p:sp>
         <p:nvSpPr>
-          <p:cNvPr id="4" name="Rectangle 3"/>
+          <p:cNvPr id="40" name="Rectangle 39"/>
           <p:cNvSpPr/>
           <p:nvPr/>
         </p:nvSpPr>
@@ -3694,7 +6950,7 @@
       </p:sp>
       <p:sp>
         <p:nvSpPr>
-          <p:cNvPr id="5" name="Rectangle 4"/>
+          <p:cNvPr id="41" name="Rectangle 40"/>
           <p:cNvSpPr/>
           <p:nvPr/>
         </p:nvSpPr>
@@ -3733,7 +6989,7 @@
       </p:sp>
       <p:sp>
         <p:nvSpPr>
-          <p:cNvPr id="6" name="Rectangle 5"/>
+          <p:cNvPr id="42" name="Rectangle 41"/>
           <p:cNvSpPr/>
           <p:nvPr/>
         </p:nvSpPr>
@@ -3772,7 +7028,7 @@
       </p:sp>
       <p:sp>
         <p:nvSpPr>
-          <p:cNvPr id="7" name="Rectangle 6"/>
+          <p:cNvPr id="43" name="Rectangle 42"/>
           <p:cNvSpPr/>
           <p:nvPr/>
         </p:nvSpPr>
@@ -3811,7 +7067,7 @@
       </p:sp>
       <p:sp>
         <p:nvSpPr>
-          <p:cNvPr id="8" name="Rectangle 7"/>
+          <p:cNvPr id="44" name="Rectangle 43"/>
           <p:cNvSpPr/>
           <p:nvPr/>
         </p:nvSpPr>
@@ -3850,7 +7106,7 @@
       </p:sp>
       <p:sp>
         <p:nvSpPr>
-          <p:cNvPr id="9" name="Rectangle 8"/>
+          <p:cNvPr id="45" name="Rectangle 44"/>
           <p:cNvSpPr/>
           <p:nvPr/>
         </p:nvSpPr>
@@ -3889,7 +7145,7 @@
       </p:sp>
       <p:sp>
         <p:nvSpPr>
-          <p:cNvPr id="10" name="Rectangle 9"/>
+          <p:cNvPr id="46" name="Rectangle 45"/>
           <p:cNvSpPr/>
           <p:nvPr/>
         </p:nvSpPr>
@@ -3928,7 +7184,266 @@
       </p:sp>
       <p:sp>
         <p:nvSpPr>
-          <p:cNvPr id="11" name="Rectangle 10"/>
+          <p:cNvPr id="47" name="Oval 46"/>
+          <p:cNvSpPr/>
+          <p:nvPr/>
+        </p:nvSpPr>
+        <p:spPr>
+          <a:xfrm>
+            <a:off x="42976800" y="3396342"/>
+            <a:ext cx="1828800" cy="1828800"/>
+          </a:xfrm>
+          <a:prstGeom prst="ellipse">
+            <a:avLst/>
+          </a:prstGeom>
+        </p:spPr>
+        <p:style>
+          <a:lnRef idx="1">
+            <a:schemeClr val="accent1"/>
+          </a:lnRef>
+          <a:fillRef idx="3">
+            <a:schemeClr val="accent1"/>
+          </a:fillRef>
+          <a:effectRef idx="2">
+            <a:schemeClr val="accent1"/>
+          </a:effectRef>
+          <a:fontRef idx="minor">
+            <a:schemeClr val="lt1"/>
+          </a:fontRef>
+        </p:style>
+        <p:txBody>
+          <a:bodyPr rtlCol="0" anchor="ctr"/>
+          <a:lstStyle/>
+          <a:p>
+            <a:pPr algn="ctr"/>
+          </a:p>
+        </p:txBody>
+      </p:sp>
+      <p:sp>
+        <p:nvSpPr>
+          <p:cNvPr id="48" name="Rectangle 47"/>
+          <p:cNvSpPr/>
+          <p:nvPr/>
+        </p:nvSpPr>
+        <p:spPr>
+          <a:xfrm>
+            <a:off x="1828800" y="3396342"/>
+            <a:ext cx="42062400" cy="1828800"/>
+          </a:xfrm>
+          <a:prstGeom prst="rect">
+            <a:avLst/>
+          </a:prstGeom>
+        </p:spPr>
+        <p:style>
+          <a:lnRef idx="1">
+            <a:schemeClr val="accent1"/>
+          </a:lnRef>
+          <a:fillRef idx="3">
+            <a:schemeClr val="accent1"/>
+          </a:fillRef>
+          <a:effectRef idx="2">
+            <a:schemeClr val="accent1"/>
+          </a:effectRef>
+          <a:fontRef idx="minor">
+            <a:schemeClr val="lt1"/>
+          </a:fontRef>
+        </p:style>
+        <p:txBody>
+          <a:bodyPr rtlCol="0" anchor="ctr"/>
+          <a:lstStyle/>
+          <a:p>
+            <a:pPr algn="ctr"/>
+          </a:p>
+        </p:txBody>
+      </p:sp>
+      <p:sp>
+        <p:nvSpPr>
+          <p:cNvPr id="49" name="Oval 48"/>
+          <p:cNvSpPr/>
+          <p:nvPr/>
+        </p:nvSpPr>
+        <p:spPr>
+          <a:xfrm>
+            <a:off x="0" y="2481942"/>
+            <a:ext cx="3657600" cy="3657600"/>
+          </a:xfrm>
+          <a:prstGeom prst="ellipse">
+            <a:avLst/>
+          </a:prstGeom>
+        </p:spPr>
+        <p:style>
+          <a:lnRef idx="1">
+            <a:schemeClr val="accent1"/>
+          </a:lnRef>
+          <a:fillRef idx="3">
+            <a:schemeClr val="accent1"/>
+          </a:fillRef>
+          <a:effectRef idx="2">
+            <a:schemeClr val="accent1"/>
+          </a:effectRef>
+          <a:fontRef idx="minor">
+            <a:schemeClr val="lt1"/>
+          </a:fontRef>
+        </p:style>
+        <p:txBody>
+          <a:bodyPr rtlCol="0" anchor="ctr"/>
+          <a:lstStyle/>
+          <a:p>
+            <a:pPr algn="ctr"/>
+          </a:p>
+        </p:txBody>
+      </p:sp>
+      <p:sp>
+        <p:nvSpPr>
+          <p:cNvPr id="50" name="Rectangle 49"/>
+          <p:cNvSpPr/>
+          <p:nvPr/>
+        </p:nvSpPr>
+        <p:spPr>
+          <a:xfrm>
+            <a:off x="43760231" y="5165885"/>
+            <a:ext cx="238125" cy="1800224"/>
+          </a:xfrm>
+          <a:prstGeom prst="rect">
+            <a:avLst/>
+          </a:prstGeom>
+        </p:spPr>
+        <p:style>
+          <a:lnRef idx="1">
+            <a:schemeClr val="accent1"/>
+          </a:lnRef>
+          <a:fillRef idx="3">
+            <a:schemeClr val="accent1"/>
+          </a:fillRef>
+          <a:effectRef idx="2">
+            <a:schemeClr val="accent1"/>
+          </a:effectRef>
+          <a:fontRef idx="minor">
+            <a:schemeClr val="lt1"/>
+          </a:fontRef>
+        </p:style>
+        <p:txBody>
+          <a:bodyPr rtlCol="0" anchor="ctr"/>
+          <a:lstStyle/>
+          <a:p>
+            <a:pPr algn="ctr"/>
+          </a:p>
+        </p:txBody>
+      </p:sp>
+      <p:sp>
+        <p:nvSpPr>
+          <p:cNvPr id="51" name="Oval 50"/>
+          <p:cNvSpPr/>
+          <p:nvPr/>
+        </p:nvSpPr>
+        <p:spPr>
+          <a:xfrm>
+            <a:off x="42976800" y="3396342"/>
+            <a:ext cx="1828800" cy="1828800"/>
+          </a:xfrm>
+          <a:prstGeom prst="ellipse">
+            <a:avLst/>
+          </a:prstGeom>
+        </p:spPr>
+        <p:style>
+          <a:lnRef idx="1">
+            <a:schemeClr val="accent1"/>
+          </a:lnRef>
+          <a:fillRef idx="3">
+            <a:schemeClr val="accent1"/>
+          </a:fillRef>
+          <a:effectRef idx="2">
+            <a:schemeClr val="accent1"/>
+          </a:effectRef>
+          <a:fontRef idx="minor">
+            <a:schemeClr val="lt1"/>
+          </a:fontRef>
+        </p:style>
+        <p:txBody>
+          <a:bodyPr rtlCol="0" anchor="ctr"/>
+          <a:lstStyle/>
+          <a:p>
+            <a:pPr algn="ctr"/>
+          </a:p>
+        </p:txBody>
+      </p:sp>
+      <p:sp>
+        <p:nvSpPr>
+          <p:cNvPr id="52" name="Rectangle 51"/>
+          <p:cNvSpPr/>
+          <p:nvPr/>
+        </p:nvSpPr>
+        <p:spPr>
+          <a:xfrm>
+            <a:off x="1828800" y="3396342"/>
+            <a:ext cx="42062400" cy="1828800"/>
+          </a:xfrm>
+          <a:prstGeom prst="rect">
+            <a:avLst/>
+          </a:prstGeom>
+        </p:spPr>
+        <p:style>
+          <a:lnRef idx="1">
+            <a:schemeClr val="accent1"/>
+          </a:lnRef>
+          <a:fillRef idx="3">
+            <a:schemeClr val="accent1"/>
+          </a:fillRef>
+          <a:effectRef idx="2">
+            <a:schemeClr val="accent1"/>
+          </a:effectRef>
+          <a:fontRef idx="minor">
+            <a:schemeClr val="lt1"/>
+          </a:fontRef>
+        </p:style>
+        <p:txBody>
+          <a:bodyPr rtlCol="0" anchor="ctr"/>
+          <a:lstStyle/>
+          <a:p>
+            <a:pPr algn="ctr"/>
+          </a:p>
+        </p:txBody>
+      </p:sp>
+      <p:sp>
+        <p:nvSpPr>
+          <p:cNvPr id="53" name="Oval 52"/>
+          <p:cNvSpPr/>
+          <p:nvPr/>
+        </p:nvSpPr>
+        <p:spPr>
+          <a:xfrm>
+            <a:off x="0" y="2481942"/>
+            <a:ext cx="3657600" cy="3657600"/>
+          </a:xfrm>
+          <a:prstGeom prst="ellipse">
+            <a:avLst/>
+          </a:prstGeom>
+        </p:spPr>
+        <p:style>
+          <a:lnRef idx="1">
+            <a:schemeClr val="accent1"/>
+          </a:lnRef>
+          <a:fillRef idx="3">
+            <a:schemeClr val="accent1"/>
+          </a:fillRef>
+          <a:effectRef idx="2">
+            <a:schemeClr val="accent1"/>
+          </a:effectRef>
+          <a:fontRef idx="minor">
+            <a:schemeClr val="lt1"/>
+          </a:fontRef>
+        </p:style>
+        <p:txBody>
+          <a:bodyPr rtlCol="0" anchor="ctr"/>
+          <a:lstStyle/>
+          <a:p>
+            <a:pPr algn="ctr"/>
+          </a:p>
+        </p:txBody>
+      </p:sp>
+      <p:sp>
+        <p:nvSpPr>
+          <p:cNvPr id="54" name="Rectangle 53"/>
           <p:cNvSpPr/>
           <p:nvPr/>
         </p:nvSpPr>
@@ -3967,7 +7482,7 @@
       </p:sp>
       <p:sp>
         <p:nvSpPr>
-          <p:cNvPr id="12" name="Rectangle 11"/>
+          <p:cNvPr id="55" name="Rectangle 54"/>
           <p:cNvSpPr/>
           <p:nvPr/>
         </p:nvSpPr>
@@ -4006,7 +7521,118 @@
       </p:sp>
       <p:sp>
         <p:nvSpPr>
-          <p:cNvPr id="13" name="Rectangle 12"/>
+          <p:cNvPr id="56" name="Oval 55"/>
+          <p:cNvSpPr/>
+          <p:nvPr/>
+        </p:nvSpPr>
+        <p:spPr>
+          <a:xfrm>
+            <a:off x="42976800" y="3396342"/>
+            <a:ext cx="1828800" cy="1828800"/>
+          </a:xfrm>
+          <a:prstGeom prst="ellipse">
+            <a:avLst/>
+          </a:prstGeom>
+        </p:spPr>
+        <p:style>
+          <a:lnRef idx="1">
+            <a:schemeClr val="accent1"/>
+          </a:lnRef>
+          <a:fillRef idx="3">
+            <a:schemeClr val="accent1"/>
+          </a:fillRef>
+          <a:effectRef idx="2">
+            <a:schemeClr val="accent1"/>
+          </a:effectRef>
+          <a:fontRef idx="minor">
+            <a:schemeClr val="lt1"/>
+          </a:fontRef>
+        </p:style>
+        <p:txBody>
+          <a:bodyPr rtlCol="0" anchor="ctr"/>
+          <a:lstStyle/>
+          <a:p>
+            <a:pPr algn="ctr"/>
+          </a:p>
+        </p:txBody>
+      </p:sp>
+      <p:sp>
+        <p:nvSpPr>
+          <p:cNvPr id="57" name="Rectangle 56"/>
+          <p:cNvSpPr/>
+          <p:nvPr/>
+        </p:nvSpPr>
+        <p:spPr>
+          <a:xfrm>
+            <a:off x="1828800" y="3396342"/>
+            <a:ext cx="42062400" cy="1828800"/>
+          </a:xfrm>
+          <a:prstGeom prst="rect">
+            <a:avLst/>
+          </a:prstGeom>
+        </p:spPr>
+        <p:style>
+          <a:lnRef idx="1">
+            <a:schemeClr val="accent1"/>
+          </a:lnRef>
+          <a:fillRef idx="3">
+            <a:schemeClr val="accent1"/>
+          </a:fillRef>
+          <a:effectRef idx="2">
+            <a:schemeClr val="accent1"/>
+          </a:effectRef>
+          <a:fontRef idx="minor">
+            <a:schemeClr val="lt1"/>
+          </a:fontRef>
+        </p:style>
+        <p:txBody>
+          <a:bodyPr rtlCol="0" anchor="ctr"/>
+          <a:lstStyle/>
+          <a:p>
+            <a:pPr algn="ctr"/>
+          </a:p>
+        </p:txBody>
+      </p:sp>
+      <p:sp>
+        <p:nvSpPr>
+          <p:cNvPr id="58" name="Oval 57"/>
+          <p:cNvSpPr/>
+          <p:nvPr/>
+        </p:nvSpPr>
+        <p:spPr>
+          <a:xfrm>
+            <a:off x="0" y="2481942"/>
+            <a:ext cx="3657600" cy="3657600"/>
+          </a:xfrm>
+          <a:prstGeom prst="ellipse">
+            <a:avLst/>
+          </a:prstGeom>
+        </p:spPr>
+        <p:style>
+          <a:lnRef idx="1">
+            <a:schemeClr val="accent1"/>
+          </a:lnRef>
+          <a:fillRef idx="3">
+            <a:schemeClr val="accent1"/>
+          </a:fillRef>
+          <a:effectRef idx="2">
+            <a:schemeClr val="accent1"/>
+          </a:effectRef>
+          <a:fontRef idx="minor">
+            <a:schemeClr val="lt1"/>
+          </a:fontRef>
+        </p:style>
+        <p:txBody>
+          <a:bodyPr rtlCol="0" anchor="ctr"/>
+          <a:lstStyle/>
+          <a:p>
+            <a:pPr algn="ctr"/>
+          </a:p>
+        </p:txBody>
+      </p:sp>
+      <p:sp>
+        <p:nvSpPr>
+          <p:cNvPr id="59" name="Rectangle 58"/>
           <p:cNvSpPr/>
           <p:nvPr/>
         </p:nvSpPr>

--- a/examples/recreations/05_Box_Website__Thermometer_Graphic/out_mat2ppt.pptx
+++ b/examples/recreations/05_Box_Website__Thermometer_Graphic/out_mat2ppt.pptx
@@ -1,15 +1,15 @@
 
 <file path=ppt/presentation.xml><?xml version="1.0" encoding="utf-8"?>
-<p:presentation xmlns:a="http://schemas.openxmlformats.org/drawingml/2006/main" xmlns:r="http://schemas.openxmlformats.org/officeDocument/2006/relationships" xmlns:p="http://schemas.openxmlformats.org/presentationml/2006/main" saveSubsetFonts="1" autoCompressPictures="0">
+<p:presentation xmlns:a="http://schemas.openxmlformats.org/drawingml/2006/main" xmlns:r="http://schemas.openxmlformats.org/officeDocument/2006/relationships" xmlns:p="http://schemas.openxmlformats.org/presentationml/2006/main" saveSubsetFonts="1">
   <p:sldMasterIdLst>
-    <p:sldMasterId id="2147483648" r:id="rId1"/>
+    <p:sldMasterId id="2147483672" r:id="rId1"/>
   </p:sldMasterIdLst>
   <p:sldIdLst>
-    <p:sldId id="256" r:id="rId7"/>
-    <p:sldId id="257" r:id="rId8"/>
+    <p:sldId id="256" r:id="rId8"/>
+    <p:sldId id="257" r:id="rId9"/>
   </p:sldIdLst>
-  <p:sldSz cx="51206400" cy="51206400" type="screen4x3"/>
-  <p:notesSz cx="6858000" cy="9144000"/>
+  <p:sldSz cx="51206400" cy="51206400"/>
+  <p:notesSz cx="9144000" cy="6858000"/>
   <p:defaultTextStyle>
     <a:defPPr>
       <a:defRPr lang="en-US"/>
@@ -105,6 +105,22 @@
       </a:defRPr>
     </a:lvl9pPr>
   </p:defaultTextStyle>
+  <p:extLst>
+    <p:ext uri="{EFAFB233-063F-42B5-8137-9DF3F51BA10A}">
+      <p15:sldGuideLst xmlns:p15="http://schemas.microsoft.com/office/powerpoint/2012/main">
+        <p15:guide id="1" orient="horz" pos="16128" userDrawn="1">
+          <p15:clr>
+            <a:srgbClr val="A4A3A4"/>
+          </p15:clr>
+        </p15:guide>
+        <p15:guide id="2" pos="16128" userDrawn="1">
+          <p15:clr>
+            <a:srgbClr val="A4A3A4"/>
+          </p15:clr>
+        </p15:guide>
+      </p15:sldGuideLst>
+    </p:ext>
+  </p:extLst>
 </p:presentation>
 </file>
 
@@ -137,19 +153,23 @@
         </p:nvSpPr>
         <p:spPr>
           <a:xfrm>
-            <a:off x="685800" y="2130425"/>
-            <a:ext cx="7772400" cy="1470025"/>
-          </a:xfrm>
-        </p:spPr>
-        <p:txBody>
-          <a:bodyPr/>
-          <a:lstStyle/>
+            <a:off x="3840480" y="8380311"/>
+            <a:ext cx="43525440" cy="17827413"/>
+          </a:xfrm>
+        </p:spPr>
+        <p:txBody>
+          <a:bodyPr anchor="b"/>
+          <a:lstStyle>
+            <a:lvl1pPr algn="ctr">
+              <a:defRPr sz="33600"/>
+            </a:lvl1pPr>
+          </a:lstStyle>
           <a:p>
             <a:r>
-              <a:rPr lang="en-US" smtClean="0"/>
+              <a:rPr lang="en-US"/>
               <a:t>Click to edit Master title style</a:t>
             </a:r>
-            <a:endParaRPr lang="en-US"/>
+            <a:endParaRPr lang="en-US" dirty="0"/>
           </a:p>
         </p:txBody>
       </p:sp>
@@ -165,8 +185,8 @@
         </p:nvSpPr>
         <p:spPr>
           <a:xfrm>
-            <a:off x="1371600" y="3886200"/>
-            <a:ext cx="6400800" cy="1752600"/>
+            <a:off x="6400800" y="26895217"/>
+            <a:ext cx="38404800" cy="12363023"/>
           </a:xfrm>
         </p:spPr>
         <p:txBody>
@@ -174,101 +194,47 @@
           <a:lstStyle>
             <a:lvl1pPr marL="0" indent="0" algn="ctr">
               <a:buNone/>
-              <a:defRPr>
-                <a:solidFill>
-                  <a:schemeClr val="tx1">
-                    <a:tint val="75000"/>
-                  </a:schemeClr>
-                </a:solidFill>
-              </a:defRPr>
+              <a:defRPr sz="13440"/>
             </a:lvl1pPr>
-            <a:lvl2pPr marL="457200" indent="0" algn="ctr">
+            <a:lvl2pPr marL="2560320" indent="0" algn="ctr">
               <a:buNone/>
-              <a:defRPr>
-                <a:solidFill>
-                  <a:schemeClr val="tx1">
-                    <a:tint val="75000"/>
-                  </a:schemeClr>
-                </a:solidFill>
-              </a:defRPr>
+              <a:defRPr sz="11200"/>
             </a:lvl2pPr>
-            <a:lvl3pPr marL="914400" indent="0" algn="ctr">
+            <a:lvl3pPr marL="5120640" indent="0" algn="ctr">
               <a:buNone/>
-              <a:defRPr>
-                <a:solidFill>
-                  <a:schemeClr val="tx1">
-                    <a:tint val="75000"/>
-                  </a:schemeClr>
-                </a:solidFill>
-              </a:defRPr>
+              <a:defRPr sz="10080"/>
             </a:lvl3pPr>
-            <a:lvl4pPr marL="1371600" indent="0" algn="ctr">
+            <a:lvl4pPr marL="7680960" indent="0" algn="ctr">
               <a:buNone/>
-              <a:defRPr>
-                <a:solidFill>
-                  <a:schemeClr val="tx1">
-                    <a:tint val="75000"/>
-                  </a:schemeClr>
-                </a:solidFill>
-              </a:defRPr>
+              <a:defRPr sz="8960"/>
             </a:lvl4pPr>
-            <a:lvl5pPr marL="1828800" indent="0" algn="ctr">
+            <a:lvl5pPr marL="10241280" indent="0" algn="ctr">
               <a:buNone/>
-              <a:defRPr>
-                <a:solidFill>
-                  <a:schemeClr val="tx1">
-                    <a:tint val="75000"/>
-                  </a:schemeClr>
-                </a:solidFill>
-              </a:defRPr>
+              <a:defRPr sz="8960"/>
             </a:lvl5pPr>
-            <a:lvl6pPr marL="2286000" indent="0" algn="ctr">
+            <a:lvl6pPr marL="12801600" indent="0" algn="ctr">
               <a:buNone/>
-              <a:defRPr>
-                <a:solidFill>
-                  <a:schemeClr val="tx1">
-                    <a:tint val="75000"/>
-                  </a:schemeClr>
-                </a:solidFill>
-              </a:defRPr>
+              <a:defRPr sz="8960"/>
             </a:lvl6pPr>
-            <a:lvl7pPr marL="2743200" indent="0" algn="ctr">
+            <a:lvl7pPr marL="15361920" indent="0" algn="ctr">
               <a:buNone/>
-              <a:defRPr>
-                <a:solidFill>
-                  <a:schemeClr val="tx1">
-                    <a:tint val="75000"/>
-                  </a:schemeClr>
-                </a:solidFill>
-              </a:defRPr>
+              <a:defRPr sz="8960"/>
             </a:lvl7pPr>
-            <a:lvl8pPr marL="3200400" indent="0" algn="ctr">
+            <a:lvl8pPr marL="17922240" indent="0" algn="ctr">
               <a:buNone/>
-              <a:defRPr>
-                <a:solidFill>
-                  <a:schemeClr val="tx1">
-                    <a:tint val="75000"/>
-                  </a:schemeClr>
-                </a:solidFill>
-              </a:defRPr>
+              <a:defRPr sz="8960"/>
             </a:lvl8pPr>
-            <a:lvl9pPr marL="3657600" indent="0" algn="ctr">
+            <a:lvl9pPr marL="20482560" indent="0" algn="ctr">
               <a:buNone/>
-              <a:defRPr>
-                <a:solidFill>
-                  <a:schemeClr val="tx1">
-                    <a:tint val="75000"/>
-                  </a:schemeClr>
-                </a:solidFill>
-              </a:defRPr>
+              <a:defRPr sz="8960"/>
             </a:lvl9pPr>
           </a:lstStyle>
           <a:p>
             <a:r>
-              <a:rPr lang="en-US" smtClean="0"/>
+              <a:rPr lang="en-US"/>
               <a:t>Click to edit Master subtitle style</a:t>
             </a:r>
-            <a:endParaRPr lang="en-US"/>
+            <a:endParaRPr lang="en-US" dirty="0"/>
           </a:p>
         </p:txBody>
       </p:sp>
@@ -287,9 +253,9 @@
           <a:bodyPr/>
           <a:lstStyle/>
           <a:p>
-            <a:fld id="{5BCAD085-E8A6-8845-BD4E-CB4CCA059FC4}" type="datetimeFigureOut">
+            <a:fld id="{82F6EFAF-E347-4747-A338-7BC457339658}" type="datetimeFigureOut">
               <a:rPr lang="en-US" smtClean="0"/>
-              <a:t>1/27/13</a:t>
+              <a:t>11/27/2022</a:t>
             </a:fld>
             <a:endParaRPr lang="en-US"/>
           </a:p>
@@ -329,7 +295,7 @@
           <a:bodyPr/>
           <a:lstStyle/>
           <a:p>
-            <a:fld id="{C1FF6DA9-008F-8B48-92A6-B652298478BF}" type="slidenum">
+            <a:fld id="{31DE96F5-9D8A-4470-9DC7-E08B9CE4C9B7}" type="slidenum">
               <a:rPr lang="en-US" smtClean="0"/>
               <a:t>‹#›</a:t>
             </a:fld>
@@ -340,7 +306,7 @@
     </p:spTree>
     <p:extLst>
       <p:ext uri="{BB962C8B-B14F-4D97-AF65-F5344CB8AC3E}">
-        <p14:creationId xmlns:p14="http://schemas.microsoft.com/office/powerpoint/2010/main" val="3168075583"/>
+        <p14:creationId xmlns:p14="http://schemas.microsoft.com/office/powerpoint/2010/main" val="1115001512"/>
       </p:ext>
     </p:extLst>
   </p:cSld>
@@ -383,10 +349,10 @@
           <a:lstStyle/>
           <a:p>
             <a:r>
-              <a:rPr lang="en-US" smtClean="0"/>
+              <a:rPr lang="en-US"/>
               <a:t>Click to edit Master title style</a:t>
             </a:r>
-            <a:endParaRPr lang="en-US"/>
+            <a:endParaRPr lang="en-US" dirty="0"/>
           </a:p>
         </p:txBody>
       </p:sp>
@@ -407,38 +373,38 @@
           <a:p>
             <a:pPr lvl="0"/>
             <a:r>
-              <a:rPr lang="en-US" smtClean="0"/>
+              <a:rPr lang="en-US"/>
               <a:t>Click to edit Master text styles</a:t>
             </a:r>
           </a:p>
           <a:p>
             <a:pPr lvl="1"/>
             <a:r>
-              <a:rPr lang="en-US" smtClean="0"/>
+              <a:rPr lang="en-US"/>
               <a:t>Second level</a:t>
             </a:r>
           </a:p>
           <a:p>
             <a:pPr lvl="2"/>
             <a:r>
-              <a:rPr lang="en-US" smtClean="0"/>
+              <a:rPr lang="en-US"/>
               <a:t>Third level</a:t>
             </a:r>
           </a:p>
           <a:p>
             <a:pPr lvl="3"/>
             <a:r>
-              <a:rPr lang="en-US" smtClean="0"/>
+              <a:rPr lang="en-US"/>
               <a:t>Fourth level</a:t>
             </a:r>
           </a:p>
           <a:p>
             <a:pPr lvl="4"/>
             <a:r>
-              <a:rPr lang="en-US" smtClean="0"/>
+              <a:rPr lang="en-US"/>
               <a:t>Fifth level</a:t>
             </a:r>
-            <a:endParaRPr lang="en-US"/>
+            <a:endParaRPr lang="en-US" dirty="0"/>
           </a:p>
         </p:txBody>
       </p:sp>
@@ -457,9 +423,9 @@
           <a:bodyPr/>
           <a:lstStyle/>
           <a:p>
-            <a:fld id="{5BCAD085-E8A6-8845-BD4E-CB4CCA059FC4}" type="datetimeFigureOut">
+            <a:fld id="{82F6EFAF-E347-4747-A338-7BC457339658}" type="datetimeFigureOut">
               <a:rPr lang="en-US" smtClean="0"/>
-              <a:t>1/27/13</a:t>
+              <a:t>11/27/2022</a:t>
             </a:fld>
             <a:endParaRPr lang="en-US"/>
           </a:p>
@@ -499,7 +465,7 @@
           <a:bodyPr/>
           <a:lstStyle/>
           <a:p>
-            <a:fld id="{C1FF6DA9-008F-8B48-92A6-B652298478BF}" type="slidenum">
+            <a:fld id="{31DE96F5-9D8A-4470-9DC7-E08B9CE4C9B7}" type="slidenum">
               <a:rPr lang="en-US" smtClean="0"/>
               <a:t>‹#›</a:t>
             </a:fld>
@@ -510,7 +476,7 @@
     </p:spTree>
     <p:extLst>
       <p:ext uri="{BB962C8B-B14F-4D97-AF65-F5344CB8AC3E}">
-        <p14:creationId xmlns:p14="http://schemas.microsoft.com/office/powerpoint/2010/main" val="2910927964"/>
+        <p14:creationId xmlns:p14="http://schemas.microsoft.com/office/powerpoint/2010/main" val="1639238230"/>
       </p:ext>
     </p:extLst>
   </p:cSld>
@@ -549,8 +515,8 @@
         </p:nvSpPr>
         <p:spPr>
           <a:xfrm>
-            <a:off x="6629400" y="274638"/>
-            <a:ext cx="2057400" cy="5851525"/>
+            <a:off x="36644583" y="2726267"/>
+            <a:ext cx="11041380" cy="43395057"/>
           </a:xfrm>
         </p:spPr>
         <p:txBody>
@@ -558,10 +524,10 @@
           <a:lstStyle/>
           <a:p>
             <a:r>
-              <a:rPr lang="en-US" smtClean="0"/>
+              <a:rPr lang="en-US"/>
               <a:t>Click to edit Master title style</a:t>
             </a:r>
-            <a:endParaRPr lang="en-US"/>
+            <a:endParaRPr lang="en-US" dirty="0"/>
           </a:p>
         </p:txBody>
       </p:sp>
@@ -577,8 +543,8 @@
         </p:nvSpPr>
         <p:spPr>
           <a:xfrm>
-            <a:off x="457200" y="274638"/>
-            <a:ext cx="6019800" cy="5851525"/>
+            <a:off x="3520443" y="2726267"/>
+            <a:ext cx="32484060" cy="43395057"/>
           </a:xfrm>
         </p:spPr>
         <p:txBody>
@@ -587,38 +553,38 @@
           <a:p>
             <a:pPr lvl="0"/>
             <a:r>
-              <a:rPr lang="en-US" smtClean="0"/>
+              <a:rPr lang="en-US"/>
               <a:t>Click to edit Master text styles</a:t>
             </a:r>
           </a:p>
           <a:p>
             <a:pPr lvl="1"/>
             <a:r>
-              <a:rPr lang="en-US" smtClean="0"/>
+              <a:rPr lang="en-US"/>
               <a:t>Second level</a:t>
             </a:r>
           </a:p>
           <a:p>
             <a:pPr lvl="2"/>
             <a:r>
-              <a:rPr lang="en-US" smtClean="0"/>
+              <a:rPr lang="en-US"/>
               <a:t>Third level</a:t>
             </a:r>
           </a:p>
           <a:p>
             <a:pPr lvl="3"/>
             <a:r>
-              <a:rPr lang="en-US" smtClean="0"/>
+              <a:rPr lang="en-US"/>
               <a:t>Fourth level</a:t>
             </a:r>
           </a:p>
           <a:p>
             <a:pPr lvl="4"/>
             <a:r>
-              <a:rPr lang="en-US" smtClean="0"/>
+              <a:rPr lang="en-US"/>
               <a:t>Fifth level</a:t>
             </a:r>
-            <a:endParaRPr lang="en-US"/>
+            <a:endParaRPr lang="en-US" dirty="0"/>
           </a:p>
         </p:txBody>
       </p:sp>
@@ -637,9 +603,9 @@
           <a:bodyPr/>
           <a:lstStyle/>
           <a:p>
-            <a:fld id="{5BCAD085-E8A6-8845-BD4E-CB4CCA059FC4}" type="datetimeFigureOut">
+            <a:fld id="{82F6EFAF-E347-4747-A338-7BC457339658}" type="datetimeFigureOut">
               <a:rPr lang="en-US" smtClean="0"/>
-              <a:t>1/27/13</a:t>
+              <a:t>11/27/2022</a:t>
             </a:fld>
             <a:endParaRPr lang="en-US"/>
           </a:p>
@@ -679,7 +645,7 @@
           <a:bodyPr/>
           <a:lstStyle/>
           <a:p>
-            <a:fld id="{C1FF6DA9-008F-8B48-92A6-B652298478BF}" type="slidenum">
+            <a:fld id="{31DE96F5-9D8A-4470-9DC7-E08B9CE4C9B7}" type="slidenum">
               <a:rPr lang="en-US" smtClean="0"/>
               <a:t>‹#›</a:t>
             </a:fld>
@@ -690,7 +656,7 @@
     </p:spTree>
     <p:extLst>
       <p:ext uri="{BB962C8B-B14F-4D97-AF65-F5344CB8AC3E}">
-        <p14:creationId xmlns:p14="http://schemas.microsoft.com/office/powerpoint/2010/main" val="3612223792"/>
+        <p14:creationId xmlns:p14="http://schemas.microsoft.com/office/powerpoint/2010/main" val="1396385019"/>
       </p:ext>
     </p:extLst>
   </p:cSld>
@@ -733,10 +699,10 @@
           <a:lstStyle/>
           <a:p>
             <a:r>
-              <a:rPr lang="en-US" smtClean="0"/>
+              <a:rPr lang="en-US"/>
               <a:t>Click to edit Master title style</a:t>
             </a:r>
-            <a:endParaRPr lang="en-US"/>
+            <a:endParaRPr lang="en-US" dirty="0"/>
           </a:p>
         </p:txBody>
       </p:sp>
@@ -757,38 +723,38 @@
           <a:p>
             <a:pPr lvl="0"/>
             <a:r>
-              <a:rPr lang="en-US" smtClean="0"/>
+              <a:rPr lang="en-US"/>
               <a:t>Click to edit Master text styles</a:t>
             </a:r>
           </a:p>
           <a:p>
             <a:pPr lvl="1"/>
             <a:r>
-              <a:rPr lang="en-US" smtClean="0"/>
+              <a:rPr lang="en-US"/>
               <a:t>Second level</a:t>
             </a:r>
           </a:p>
           <a:p>
             <a:pPr lvl="2"/>
             <a:r>
-              <a:rPr lang="en-US" smtClean="0"/>
+              <a:rPr lang="en-US"/>
               <a:t>Third level</a:t>
             </a:r>
           </a:p>
           <a:p>
             <a:pPr lvl="3"/>
             <a:r>
-              <a:rPr lang="en-US" smtClean="0"/>
+              <a:rPr lang="en-US"/>
               <a:t>Fourth level</a:t>
             </a:r>
           </a:p>
           <a:p>
             <a:pPr lvl="4"/>
             <a:r>
-              <a:rPr lang="en-US" smtClean="0"/>
+              <a:rPr lang="en-US"/>
               <a:t>Fifth level</a:t>
             </a:r>
-            <a:endParaRPr lang="en-US"/>
+            <a:endParaRPr lang="en-US" dirty="0"/>
           </a:p>
         </p:txBody>
       </p:sp>
@@ -807,9 +773,9 @@
           <a:bodyPr/>
           <a:lstStyle/>
           <a:p>
-            <a:fld id="{5BCAD085-E8A6-8845-BD4E-CB4CCA059FC4}" type="datetimeFigureOut">
+            <a:fld id="{82F6EFAF-E347-4747-A338-7BC457339658}" type="datetimeFigureOut">
               <a:rPr lang="en-US" smtClean="0"/>
-              <a:t>1/27/13</a:t>
+              <a:t>11/27/2022</a:t>
             </a:fld>
             <a:endParaRPr lang="en-US"/>
           </a:p>
@@ -849,7 +815,7 @@
           <a:bodyPr/>
           <a:lstStyle/>
           <a:p>
-            <a:fld id="{C1FF6DA9-008F-8B48-92A6-B652298478BF}" type="slidenum">
+            <a:fld id="{31DE96F5-9D8A-4470-9DC7-E08B9CE4C9B7}" type="slidenum">
               <a:rPr lang="en-US" smtClean="0"/>
               <a:t>‹#›</a:t>
             </a:fld>
@@ -860,7 +826,7 @@
     </p:spTree>
     <p:extLst>
       <p:ext uri="{BB962C8B-B14F-4D97-AF65-F5344CB8AC3E}">
-        <p14:creationId xmlns:p14="http://schemas.microsoft.com/office/powerpoint/2010/main" val="2614314258"/>
+        <p14:creationId xmlns:p14="http://schemas.microsoft.com/office/powerpoint/2010/main" val="3653280910"/>
       </p:ext>
     </p:extLst>
   </p:cSld>
@@ -899,23 +865,23 @@
         </p:nvSpPr>
         <p:spPr>
           <a:xfrm>
-            <a:off x="722313" y="4406900"/>
-            <a:ext cx="7772400" cy="1362075"/>
-          </a:xfrm>
-        </p:spPr>
-        <p:txBody>
-          <a:bodyPr anchor="t"/>
+            <a:off x="3493773" y="12766055"/>
+            <a:ext cx="44165520" cy="21300436"/>
+          </a:xfrm>
+        </p:spPr>
+        <p:txBody>
+          <a:bodyPr anchor="b"/>
           <a:lstStyle>
-            <a:lvl1pPr algn="l">
-              <a:defRPr sz="4000" b="1" cap="all"/>
+            <a:lvl1pPr>
+              <a:defRPr sz="33600"/>
             </a:lvl1pPr>
           </a:lstStyle>
           <a:p>
             <a:r>
-              <a:rPr lang="en-US" smtClean="0"/>
+              <a:rPr lang="en-US"/>
               <a:t>Click to edit Master title style</a:t>
             </a:r>
-            <a:endParaRPr lang="en-US"/>
+            <a:endParaRPr lang="en-US" dirty="0"/>
           </a:p>
         </p:txBody>
       </p:sp>
@@ -931,26 +897,24 @@
         </p:nvSpPr>
         <p:spPr>
           <a:xfrm>
-            <a:off x="722313" y="2906713"/>
-            <a:ext cx="7772400" cy="1500187"/>
-          </a:xfrm>
-        </p:spPr>
-        <p:txBody>
-          <a:bodyPr anchor="b"/>
+            <a:off x="3493773" y="34268002"/>
+            <a:ext cx="44165520" cy="11201396"/>
+          </a:xfrm>
+        </p:spPr>
+        <p:txBody>
+          <a:bodyPr/>
           <a:lstStyle>
             <a:lvl1pPr marL="0" indent="0">
               <a:buNone/>
-              <a:defRPr sz="2000">
+              <a:defRPr sz="13440">
                 <a:solidFill>
-                  <a:schemeClr val="tx1">
-                    <a:tint val="75000"/>
-                  </a:schemeClr>
+                  <a:schemeClr val="tx1"/>
                 </a:solidFill>
               </a:defRPr>
             </a:lvl1pPr>
-            <a:lvl2pPr marL="457200" indent="0">
+            <a:lvl2pPr marL="2560320" indent="0">
               <a:buNone/>
-              <a:defRPr sz="1800">
+              <a:defRPr sz="11200">
                 <a:solidFill>
                   <a:schemeClr val="tx1">
                     <a:tint val="75000"/>
@@ -958,9 +922,9 @@
                 </a:solidFill>
               </a:defRPr>
             </a:lvl2pPr>
-            <a:lvl3pPr marL="914400" indent="0">
+            <a:lvl3pPr marL="5120640" indent="0">
               <a:buNone/>
-              <a:defRPr sz="1600">
+              <a:defRPr sz="10080">
                 <a:solidFill>
                   <a:schemeClr val="tx1">
                     <a:tint val="75000"/>
@@ -968,9 +932,9 @@
                 </a:solidFill>
               </a:defRPr>
             </a:lvl3pPr>
-            <a:lvl4pPr marL="1371600" indent="0">
+            <a:lvl4pPr marL="7680960" indent="0">
               <a:buNone/>
-              <a:defRPr sz="1400">
+              <a:defRPr sz="8960">
                 <a:solidFill>
                   <a:schemeClr val="tx1">
                     <a:tint val="75000"/>
@@ -978,9 +942,9 @@
                 </a:solidFill>
               </a:defRPr>
             </a:lvl4pPr>
-            <a:lvl5pPr marL="1828800" indent="0">
+            <a:lvl5pPr marL="10241280" indent="0">
               <a:buNone/>
-              <a:defRPr sz="1400">
+              <a:defRPr sz="8960">
                 <a:solidFill>
                   <a:schemeClr val="tx1">
                     <a:tint val="75000"/>
@@ -988,9 +952,9 @@
                 </a:solidFill>
               </a:defRPr>
             </a:lvl5pPr>
-            <a:lvl6pPr marL="2286000" indent="0">
+            <a:lvl6pPr marL="12801600" indent="0">
               <a:buNone/>
-              <a:defRPr sz="1400">
+              <a:defRPr sz="8960">
                 <a:solidFill>
                   <a:schemeClr val="tx1">
                     <a:tint val="75000"/>
@@ -998,9 +962,9 @@
                 </a:solidFill>
               </a:defRPr>
             </a:lvl6pPr>
-            <a:lvl7pPr marL="2743200" indent="0">
+            <a:lvl7pPr marL="15361920" indent="0">
               <a:buNone/>
-              <a:defRPr sz="1400">
+              <a:defRPr sz="8960">
                 <a:solidFill>
                   <a:schemeClr val="tx1">
                     <a:tint val="75000"/>
@@ -1008,9 +972,9 @@
                 </a:solidFill>
               </a:defRPr>
             </a:lvl7pPr>
-            <a:lvl8pPr marL="3200400" indent="0">
+            <a:lvl8pPr marL="17922240" indent="0">
               <a:buNone/>
-              <a:defRPr sz="1400">
+              <a:defRPr sz="8960">
                 <a:solidFill>
                   <a:schemeClr val="tx1">
                     <a:tint val="75000"/>
@@ -1018,9 +982,9 @@
                 </a:solidFill>
               </a:defRPr>
             </a:lvl8pPr>
-            <a:lvl9pPr marL="3657600" indent="0">
+            <a:lvl9pPr marL="20482560" indent="0">
               <a:buNone/>
-              <a:defRPr sz="1400">
+              <a:defRPr sz="8960">
                 <a:solidFill>
                   <a:schemeClr val="tx1">
                     <a:tint val="75000"/>
@@ -1032,7 +996,7 @@
           <a:p>
             <a:pPr lvl="0"/>
             <a:r>
-              <a:rPr lang="en-US" smtClean="0"/>
+              <a:rPr lang="en-US"/>
               <a:t>Click to edit Master text styles</a:t>
             </a:r>
           </a:p>
@@ -1053,9 +1017,9 @@
           <a:bodyPr/>
           <a:lstStyle/>
           <a:p>
-            <a:fld id="{5BCAD085-E8A6-8845-BD4E-CB4CCA059FC4}" type="datetimeFigureOut">
+            <a:fld id="{82F6EFAF-E347-4747-A338-7BC457339658}" type="datetimeFigureOut">
               <a:rPr lang="en-US" smtClean="0"/>
-              <a:t>1/27/13</a:t>
+              <a:t>11/27/2022</a:t>
             </a:fld>
             <a:endParaRPr lang="en-US"/>
           </a:p>
@@ -1095,7 +1059,7 @@
           <a:bodyPr/>
           <a:lstStyle/>
           <a:p>
-            <a:fld id="{C1FF6DA9-008F-8B48-92A6-B652298478BF}" type="slidenum">
+            <a:fld id="{31DE96F5-9D8A-4470-9DC7-E08B9CE4C9B7}" type="slidenum">
               <a:rPr lang="en-US" smtClean="0"/>
               <a:t>‹#›</a:t>
             </a:fld>
@@ -1106,7 +1070,7 @@
     </p:spTree>
     <p:extLst>
       <p:ext uri="{BB962C8B-B14F-4D97-AF65-F5344CB8AC3E}">
-        <p14:creationId xmlns:p14="http://schemas.microsoft.com/office/powerpoint/2010/main" val="960648375"/>
+        <p14:creationId xmlns:p14="http://schemas.microsoft.com/office/powerpoint/2010/main" val="219675748"/>
       </p:ext>
     </p:extLst>
   </p:cSld>
@@ -1149,10 +1113,10 @@
           <a:lstStyle/>
           <a:p>
             <a:r>
-              <a:rPr lang="en-US" smtClean="0"/>
+              <a:rPr lang="en-US"/>
               <a:t>Click to edit Master title style</a:t>
             </a:r>
-            <a:endParaRPr lang="en-US"/>
+            <a:endParaRPr lang="en-US" dirty="0"/>
           </a:p>
         </p:txBody>
       </p:sp>
@@ -1168,76 +1132,48 @@
         </p:nvSpPr>
         <p:spPr>
           <a:xfrm>
-            <a:off x="457200" y="1600200"/>
-            <a:ext cx="4038600" cy="4525963"/>
+            <a:off x="3520440" y="13631334"/>
+            <a:ext cx="21762720" cy="32489990"/>
           </a:xfrm>
         </p:spPr>
         <p:txBody>
           <a:bodyPr/>
-          <a:lstStyle>
-            <a:lvl1pPr>
-              <a:defRPr sz="2800"/>
-            </a:lvl1pPr>
-            <a:lvl2pPr>
-              <a:defRPr sz="2400"/>
-            </a:lvl2pPr>
-            <a:lvl3pPr>
-              <a:defRPr sz="2000"/>
-            </a:lvl3pPr>
-            <a:lvl4pPr>
-              <a:defRPr sz="1800"/>
-            </a:lvl4pPr>
-            <a:lvl5pPr>
-              <a:defRPr sz="1800"/>
-            </a:lvl5pPr>
-            <a:lvl6pPr>
-              <a:defRPr sz="1800"/>
-            </a:lvl6pPr>
-            <a:lvl7pPr>
-              <a:defRPr sz="1800"/>
-            </a:lvl7pPr>
-            <a:lvl8pPr>
-              <a:defRPr sz="1800"/>
-            </a:lvl8pPr>
-            <a:lvl9pPr>
-              <a:defRPr sz="1800"/>
-            </a:lvl9pPr>
-          </a:lstStyle>
+          <a:lstStyle/>
           <a:p>
             <a:pPr lvl="0"/>
             <a:r>
-              <a:rPr lang="en-US" smtClean="0"/>
+              <a:rPr lang="en-US"/>
               <a:t>Click to edit Master text styles</a:t>
             </a:r>
           </a:p>
           <a:p>
             <a:pPr lvl="1"/>
             <a:r>
-              <a:rPr lang="en-US" smtClean="0"/>
+              <a:rPr lang="en-US"/>
               <a:t>Second level</a:t>
             </a:r>
           </a:p>
           <a:p>
             <a:pPr lvl="2"/>
             <a:r>
-              <a:rPr lang="en-US" smtClean="0"/>
+              <a:rPr lang="en-US"/>
               <a:t>Third level</a:t>
             </a:r>
           </a:p>
           <a:p>
             <a:pPr lvl="3"/>
             <a:r>
-              <a:rPr lang="en-US" smtClean="0"/>
+              <a:rPr lang="en-US"/>
               <a:t>Fourth level</a:t>
             </a:r>
           </a:p>
           <a:p>
             <a:pPr lvl="4"/>
             <a:r>
-              <a:rPr lang="en-US" smtClean="0"/>
+              <a:rPr lang="en-US"/>
               <a:t>Fifth level</a:t>
             </a:r>
-            <a:endParaRPr lang="en-US"/>
+            <a:endParaRPr lang="en-US" dirty="0"/>
           </a:p>
         </p:txBody>
       </p:sp>
@@ -1253,76 +1189,48 @@
         </p:nvSpPr>
         <p:spPr>
           <a:xfrm>
-            <a:off x="4648200" y="1600200"/>
-            <a:ext cx="4038600" cy="4525963"/>
+            <a:off x="25923240" y="13631334"/>
+            <a:ext cx="21762720" cy="32489990"/>
           </a:xfrm>
         </p:spPr>
         <p:txBody>
           <a:bodyPr/>
-          <a:lstStyle>
-            <a:lvl1pPr>
-              <a:defRPr sz="2800"/>
-            </a:lvl1pPr>
-            <a:lvl2pPr>
-              <a:defRPr sz="2400"/>
-            </a:lvl2pPr>
-            <a:lvl3pPr>
-              <a:defRPr sz="2000"/>
-            </a:lvl3pPr>
-            <a:lvl4pPr>
-              <a:defRPr sz="1800"/>
-            </a:lvl4pPr>
-            <a:lvl5pPr>
-              <a:defRPr sz="1800"/>
-            </a:lvl5pPr>
-            <a:lvl6pPr>
-              <a:defRPr sz="1800"/>
-            </a:lvl6pPr>
-            <a:lvl7pPr>
-              <a:defRPr sz="1800"/>
-            </a:lvl7pPr>
-            <a:lvl8pPr>
-              <a:defRPr sz="1800"/>
-            </a:lvl8pPr>
-            <a:lvl9pPr>
-              <a:defRPr sz="1800"/>
-            </a:lvl9pPr>
-          </a:lstStyle>
+          <a:lstStyle/>
           <a:p>
             <a:pPr lvl="0"/>
             <a:r>
-              <a:rPr lang="en-US" smtClean="0"/>
+              <a:rPr lang="en-US"/>
               <a:t>Click to edit Master text styles</a:t>
             </a:r>
           </a:p>
           <a:p>
             <a:pPr lvl="1"/>
             <a:r>
-              <a:rPr lang="en-US" smtClean="0"/>
+              <a:rPr lang="en-US"/>
               <a:t>Second level</a:t>
             </a:r>
           </a:p>
           <a:p>
             <a:pPr lvl="2"/>
             <a:r>
-              <a:rPr lang="en-US" smtClean="0"/>
+              <a:rPr lang="en-US"/>
               <a:t>Third level</a:t>
             </a:r>
           </a:p>
           <a:p>
             <a:pPr lvl="3"/>
             <a:r>
-              <a:rPr lang="en-US" smtClean="0"/>
+              <a:rPr lang="en-US"/>
               <a:t>Fourth level</a:t>
             </a:r>
           </a:p>
           <a:p>
             <a:pPr lvl="4"/>
             <a:r>
-              <a:rPr lang="en-US" smtClean="0"/>
+              <a:rPr lang="en-US"/>
               <a:t>Fifth level</a:t>
             </a:r>
-            <a:endParaRPr lang="en-US"/>
+            <a:endParaRPr lang="en-US" dirty="0"/>
           </a:p>
         </p:txBody>
       </p:sp>
@@ -1341,9 +1249,9 @@
           <a:bodyPr/>
           <a:lstStyle/>
           <a:p>
-            <a:fld id="{5BCAD085-E8A6-8845-BD4E-CB4CCA059FC4}" type="datetimeFigureOut">
+            <a:fld id="{82F6EFAF-E347-4747-A338-7BC457339658}" type="datetimeFigureOut">
               <a:rPr lang="en-US" smtClean="0"/>
-              <a:t>1/27/13</a:t>
+              <a:t>11/27/2022</a:t>
             </a:fld>
             <a:endParaRPr lang="en-US"/>
           </a:p>
@@ -1383,7 +1291,7 @@
           <a:bodyPr/>
           <a:lstStyle/>
           <a:p>
-            <a:fld id="{C1FF6DA9-008F-8B48-92A6-B652298478BF}" type="slidenum">
+            <a:fld id="{31DE96F5-9D8A-4470-9DC7-E08B9CE4C9B7}" type="slidenum">
               <a:rPr lang="en-US" smtClean="0"/>
               <a:t>‹#›</a:t>
             </a:fld>
@@ -1394,7 +1302,7 @@
     </p:spTree>
     <p:extLst>
       <p:ext uri="{BB962C8B-B14F-4D97-AF65-F5344CB8AC3E}">
-        <p14:creationId xmlns:p14="http://schemas.microsoft.com/office/powerpoint/2010/main" val="2782244947"/>
+        <p14:creationId xmlns:p14="http://schemas.microsoft.com/office/powerpoint/2010/main" val="1737238607"/>
       </p:ext>
     </p:extLst>
   </p:cSld>
@@ -1431,20 +1339,21 @@
             <p:ph type="title"/>
           </p:nvPr>
         </p:nvSpPr>
-        <p:spPr/>
+        <p:spPr>
+          <a:xfrm>
+            <a:off x="3527110" y="2726278"/>
+            <a:ext cx="44165520" cy="9897537"/>
+          </a:xfrm>
+        </p:spPr>
         <p:txBody>
           <a:bodyPr/>
-          <a:lstStyle>
-            <a:lvl1pPr>
-              <a:defRPr/>
-            </a:lvl1pPr>
-          </a:lstStyle>
+          <a:lstStyle/>
           <a:p>
             <a:r>
-              <a:rPr lang="en-US" smtClean="0"/>
+              <a:rPr lang="en-US"/>
               <a:t>Click to edit Master title style</a:t>
             </a:r>
-            <a:endParaRPr lang="en-US"/>
+            <a:endParaRPr lang="en-US" dirty="0"/>
           </a:p>
         </p:txBody>
       </p:sp>
@@ -1460,8 +1369,8 @@
         </p:nvSpPr>
         <p:spPr>
           <a:xfrm>
-            <a:off x="457200" y="1535113"/>
-            <a:ext cx="4040188" cy="639762"/>
+            <a:off x="3527115" y="12552684"/>
+            <a:ext cx="21662704" cy="6151876"/>
           </a:xfrm>
         </p:spPr>
         <p:txBody>
@@ -1469,45 +1378,45 @@
           <a:lstStyle>
             <a:lvl1pPr marL="0" indent="0">
               <a:buNone/>
-              <a:defRPr sz="2400" b="1"/>
+              <a:defRPr sz="13440" b="1"/>
             </a:lvl1pPr>
-            <a:lvl2pPr marL="457200" indent="0">
+            <a:lvl2pPr marL="2560320" indent="0">
               <a:buNone/>
-              <a:defRPr sz="2000" b="1"/>
+              <a:defRPr sz="11200" b="1"/>
             </a:lvl2pPr>
-            <a:lvl3pPr marL="914400" indent="0">
+            <a:lvl3pPr marL="5120640" indent="0">
               <a:buNone/>
-              <a:defRPr sz="1800" b="1"/>
+              <a:defRPr sz="10080" b="1"/>
             </a:lvl3pPr>
-            <a:lvl4pPr marL="1371600" indent="0">
+            <a:lvl4pPr marL="7680960" indent="0">
               <a:buNone/>
-              <a:defRPr sz="1600" b="1"/>
+              <a:defRPr sz="8960" b="1"/>
             </a:lvl4pPr>
-            <a:lvl5pPr marL="1828800" indent="0">
+            <a:lvl5pPr marL="10241280" indent="0">
               <a:buNone/>
-              <a:defRPr sz="1600" b="1"/>
+              <a:defRPr sz="8960" b="1"/>
             </a:lvl5pPr>
-            <a:lvl6pPr marL="2286000" indent="0">
+            <a:lvl6pPr marL="12801600" indent="0">
               <a:buNone/>
-              <a:defRPr sz="1600" b="1"/>
+              <a:defRPr sz="8960" b="1"/>
             </a:lvl6pPr>
-            <a:lvl7pPr marL="2743200" indent="0">
+            <a:lvl7pPr marL="15361920" indent="0">
               <a:buNone/>
-              <a:defRPr sz="1600" b="1"/>
+              <a:defRPr sz="8960" b="1"/>
             </a:lvl7pPr>
-            <a:lvl8pPr marL="3200400" indent="0">
+            <a:lvl8pPr marL="17922240" indent="0">
               <a:buNone/>
-              <a:defRPr sz="1600" b="1"/>
+              <a:defRPr sz="8960" b="1"/>
             </a:lvl8pPr>
-            <a:lvl9pPr marL="3657600" indent="0">
+            <a:lvl9pPr marL="20482560" indent="0">
               <a:buNone/>
-              <a:defRPr sz="1600" b="1"/>
+              <a:defRPr sz="8960" b="1"/>
             </a:lvl9pPr>
           </a:lstStyle>
           <a:p>
             <a:pPr lvl="0"/>
             <a:r>
-              <a:rPr lang="en-US" smtClean="0"/>
+              <a:rPr lang="en-US"/>
               <a:t>Click to edit Master text styles</a:t>
             </a:r>
           </a:p>
@@ -1525,76 +1434,48 @@
         </p:nvSpPr>
         <p:spPr>
           <a:xfrm>
-            <a:off x="457200" y="2174875"/>
-            <a:ext cx="4040188" cy="3951288"/>
+            <a:off x="3527115" y="18704560"/>
+            <a:ext cx="21662704" cy="27511590"/>
           </a:xfrm>
         </p:spPr>
         <p:txBody>
           <a:bodyPr/>
-          <a:lstStyle>
-            <a:lvl1pPr>
-              <a:defRPr sz="2400"/>
-            </a:lvl1pPr>
-            <a:lvl2pPr>
-              <a:defRPr sz="2000"/>
-            </a:lvl2pPr>
-            <a:lvl3pPr>
-              <a:defRPr sz="1800"/>
-            </a:lvl3pPr>
-            <a:lvl4pPr>
-              <a:defRPr sz="1600"/>
-            </a:lvl4pPr>
-            <a:lvl5pPr>
-              <a:defRPr sz="1600"/>
-            </a:lvl5pPr>
-            <a:lvl6pPr>
-              <a:defRPr sz="1600"/>
-            </a:lvl6pPr>
-            <a:lvl7pPr>
-              <a:defRPr sz="1600"/>
-            </a:lvl7pPr>
-            <a:lvl8pPr>
-              <a:defRPr sz="1600"/>
-            </a:lvl8pPr>
-            <a:lvl9pPr>
-              <a:defRPr sz="1600"/>
-            </a:lvl9pPr>
-          </a:lstStyle>
+          <a:lstStyle/>
           <a:p>
             <a:pPr lvl="0"/>
             <a:r>
-              <a:rPr lang="en-US" smtClean="0"/>
+              <a:rPr lang="en-US"/>
               <a:t>Click to edit Master text styles</a:t>
             </a:r>
           </a:p>
           <a:p>
             <a:pPr lvl="1"/>
             <a:r>
-              <a:rPr lang="en-US" smtClean="0"/>
+              <a:rPr lang="en-US"/>
               <a:t>Second level</a:t>
             </a:r>
           </a:p>
           <a:p>
             <a:pPr lvl="2"/>
             <a:r>
-              <a:rPr lang="en-US" smtClean="0"/>
+              <a:rPr lang="en-US"/>
               <a:t>Third level</a:t>
             </a:r>
           </a:p>
           <a:p>
             <a:pPr lvl="3"/>
             <a:r>
-              <a:rPr lang="en-US" smtClean="0"/>
+              <a:rPr lang="en-US"/>
               <a:t>Fourth level</a:t>
             </a:r>
           </a:p>
           <a:p>
             <a:pPr lvl="4"/>
             <a:r>
-              <a:rPr lang="en-US" smtClean="0"/>
+              <a:rPr lang="en-US"/>
               <a:t>Fifth level</a:t>
             </a:r>
-            <a:endParaRPr lang="en-US"/>
+            <a:endParaRPr lang="en-US" dirty="0"/>
           </a:p>
         </p:txBody>
       </p:sp>
@@ -1610,8 +1491,8 @@
         </p:nvSpPr>
         <p:spPr>
           <a:xfrm>
-            <a:off x="4645025" y="1535113"/>
-            <a:ext cx="4041775" cy="639762"/>
+            <a:off x="25923243" y="12552684"/>
+            <a:ext cx="21769390" cy="6151876"/>
           </a:xfrm>
         </p:spPr>
         <p:txBody>
@@ -1619,45 +1500,45 @@
           <a:lstStyle>
             <a:lvl1pPr marL="0" indent="0">
               <a:buNone/>
-              <a:defRPr sz="2400" b="1"/>
+              <a:defRPr sz="13440" b="1"/>
             </a:lvl1pPr>
-            <a:lvl2pPr marL="457200" indent="0">
+            <a:lvl2pPr marL="2560320" indent="0">
               <a:buNone/>
-              <a:defRPr sz="2000" b="1"/>
+              <a:defRPr sz="11200" b="1"/>
             </a:lvl2pPr>
-            <a:lvl3pPr marL="914400" indent="0">
+            <a:lvl3pPr marL="5120640" indent="0">
               <a:buNone/>
-              <a:defRPr sz="1800" b="1"/>
+              <a:defRPr sz="10080" b="1"/>
             </a:lvl3pPr>
-            <a:lvl4pPr marL="1371600" indent="0">
+            <a:lvl4pPr marL="7680960" indent="0">
               <a:buNone/>
-              <a:defRPr sz="1600" b="1"/>
+              <a:defRPr sz="8960" b="1"/>
             </a:lvl4pPr>
-            <a:lvl5pPr marL="1828800" indent="0">
+            <a:lvl5pPr marL="10241280" indent="0">
               <a:buNone/>
-              <a:defRPr sz="1600" b="1"/>
+              <a:defRPr sz="8960" b="1"/>
             </a:lvl5pPr>
-            <a:lvl6pPr marL="2286000" indent="0">
+            <a:lvl6pPr marL="12801600" indent="0">
               <a:buNone/>
-              <a:defRPr sz="1600" b="1"/>
+              <a:defRPr sz="8960" b="1"/>
             </a:lvl6pPr>
-            <a:lvl7pPr marL="2743200" indent="0">
+            <a:lvl7pPr marL="15361920" indent="0">
               <a:buNone/>
-              <a:defRPr sz="1600" b="1"/>
+              <a:defRPr sz="8960" b="1"/>
             </a:lvl7pPr>
-            <a:lvl8pPr marL="3200400" indent="0">
+            <a:lvl8pPr marL="17922240" indent="0">
               <a:buNone/>
-              <a:defRPr sz="1600" b="1"/>
+              <a:defRPr sz="8960" b="1"/>
             </a:lvl8pPr>
-            <a:lvl9pPr marL="3657600" indent="0">
+            <a:lvl9pPr marL="20482560" indent="0">
               <a:buNone/>
-              <a:defRPr sz="1600" b="1"/>
+              <a:defRPr sz="8960" b="1"/>
             </a:lvl9pPr>
           </a:lstStyle>
           <a:p>
             <a:pPr lvl="0"/>
             <a:r>
-              <a:rPr lang="en-US" smtClean="0"/>
+              <a:rPr lang="en-US"/>
               <a:t>Click to edit Master text styles</a:t>
             </a:r>
           </a:p>
@@ -1675,76 +1556,48 @@
         </p:nvSpPr>
         <p:spPr>
           <a:xfrm>
-            <a:off x="4645025" y="2174875"/>
-            <a:ext cx="4041775" cy="3951288"/>
+            <a:off x="25923243" y="18704560"/>
+            <a:ext cx="21769390" cy="27511590"/>
           </a:xfrm>
         </p:spPr>
         <p:txBody>
           <a:bodyPr/>
-          <a:lstStyle>
-            <a:lvl1pPr>
-              <a:defRPr sz="2400"/>
-            </a:lvl1pPr>
-            <a:lvl2pPr>
-              <a:defRPr sz="2000"/>
-            </a:lvl2pPr>
-            <a:lvl3pPr>
-              <a:defRPr sz="1800"/>
-            </a:lvl3pPr>
-            <a:lvl4pPr>
-              <a:defRPr sz="1600"/>
-            </a:lvl4pPr>
-            <a:lvl5pPr>
-              <a:defRPr sz="1600"/>
-            </a:lvl5pPr>
-            <a:lvl6pPr>
-              <a:defRPr sz="1600"/>
-            </a:lvl6pPr>
-            <a:lvl7pPr>
-              <a:defRPr sz="1600"/>
-            </a:lvl7pPr>
-            <a:lvl8pPr>
-              <a:defRPr sz="1600"/>
-            </a:lvl8pPr>
-            <a:lvl9pPr>
-              <a:defRPr sz="1600"/>
-            </a:lvl9pPr>
-          </a:lstStyle>
+          <a:lstStyle/>
           <a:p>
             <a:pPr lvl="0"/>
             <a:r>
-              <a:rPr lang="en-US" smtClean="0"/>
+              <a:rPr lang="en-US"/>
               <a:t>Click to edit Master text styles</a:t>
             </a:r>
           </a:p>
           <a:p>
             <a:pPr lvl="1"/>
             <a:r>
-              <a:rPr lang="en-US" smtClean="0"/>
+              <a:rPr lang="en-US"/>
               <a:t>Second level</a:t>
             </a:r>
           </a:p>
           <a:p>
             <a:pPr lvl="2"/>
             <a:r>
-              <a:rPr lang="en-US" smtClean="0"/>
+              <a:rPr lang="en-US"/>
               <a:t>Third level</a:t>
             </a:r>
           </a:p>
           <a:p>
             <a:pPr lvl="3"/>
             <a:r>
-              <a:rPr lang="en-US" smtClean="0"/>
+              <a:rPr lang="en-US"/>
               <a:t>Fourth level</a:t>
             </a:r>
           </a:p>
           <a:p>
             <a:pPr lvl="4"/>
             <a:r>
-              <a:rPr lang="en-US" smtClean="0"/>
+              <a:rPr lang="en-US"/>
               <a:t>Fifth level</a:t>
             </a:r>
-            <a:endParaRPr lang="en-US"/>
+            <a:endParaRPr lang="en-US" dirty="0"/>
           </a:p>
         </p:txBody>
       </p:sp>
@@ -1763,9 +1616,9 @@
           <a:bodyPr/>
           <a:lstStyle/>
           <a:p>
-            <a:fld id="{5BCAD085-E8A6-8845-BD4E-CB4CCA059FC4}" type="datetimeFigureOut">
+            <a:fld id="{82F6EFAF-E347-4747-A338-7BC457339658}" type="datetimeFigureOut">
               <a:rPr lang="en-US" smtClean="0"/>
-              <a:t>1/27/13</a:t>
+              <a:t>11/27/2022</a:t>
             </a:fld>
             <a:endParaRPr lang="en-US"/>
           </a:p>
@@ -1805,7 +1658,7 @@
           <a:bodyPr/>
           <a:lstStyle/>
           <a:p>
-            <a:fld id="{C1FF6DA9-008F-8B48-92A6-B652298478BF}" type="slidenum">
+            <a:fld id="{31DE96F5-9D8A-4470-9DC7-E08B9CE4C9B7}" type="slidenum">
               <a:rPr lang="en-US" smtClean="0"/>
               <a:t>‹#›</a:t>
             </a:fld>
@@ -1816,7 +1669,7 @@
     </p:spTree>
     <p:extLst>
       <p:ext uri="{BB962C8B-B14F-4D97-AF65-F5344CB8AC3E}">
-        <p14:creationId xmlns:p14="http://schemas.microsoft.com/office/powerpoint/2010/main" val="990158736"/>
+        <p14:creationId xmlns:p14="http://schemas.microsoft.com/office/powerpoint/2010/main" val="1511349564"/>
       </p:ext>
     </p:extLst>
   </p:cSld>
@@ -1859,10 +1712,10 @@
           <a:lstStyle/>
           <a:p>
             <a:r>
-              <a:rPr lang="en-US" smtClean="0"/>
+              <a:rPr lang="en-US"/>
               <a:t>Click to edit Master title style</a:t>
             </a:r>
-            <a:endParaRPr lang="en-US"/>
+            <a:endParaRPr lang="en-US" dirty="0"/>
           </a:p>
         </p:txBody>
       </p:sp>
@@ -1881,9 +1734,9 @@
           <a:bodyPr/>
           <a:lstStyle/>
           <a:p>
-            <a:fld id="{5BCAD085-E8A6-8845-BD4E-CB4CCA059FC4}" type="datetimeFigureOut">
+            <a:fld id="{82F6EFAF-E347-4747-A338-7BC457339658}" type="datetimeFigureOut">
               <a:rPr lang="en-US" smtClean="0"/>
-              <a:t>1/27/13</a:t>
+              <a:t>11/27/2022</a:t>
             </a:fld>
             <a:endParaRPr lang="en-US"/>
           </a:p>
@@ -1923,7 +1776,7 @@
           <a:bodyPr/>
           <a:lstStyle/>
           <a:p>
-            <a:fld id="{C1FF6DA9-008F-8B48-92A6-B652298478BF}" type="slidenum">
+            <a:fld id="{31DE96F5-9D8A-4470-9DC7-E08B9CE4C9B7}" type="slidenum">
               <a:rPr lang="en-US" smtClean="0"/>
               <a:t>‹#›</a:t>
             </a:fld>
@@ -1934,7 +1787,7 @@
     </p:spTree>
     <p:extLst>
       <p:ext uri="{BB962C8B-B14F-4D97-AF65-F5344CB8AC3E}">
-        <p14:creationId xmlns:p14="http://schemas.microsoft.com/office/powerpoint/2010/main" val="727027711"/>
+        <p14:creationId xmlns:p14="http://schemas.microsoft.com/office/powerpoint/2010/main" val="2510758824"/>
       </p:ext>
     </p:extLst>
   </p:cSld>
@@ -1976,9 +1829,9 @@
           <a:bodyPr/>
           <a:lstStyle/>
           <a:p>
-            <a:fld id="{5BCAD085-E8A6-8845-BD4E-CB4CCA059FC4}" type="datetimeFigureOut">
+            <a:fld id="{82F6EFAF-E347-4747-A338-7BC457339658}" type="datetimeFigureOut">
               <a:rPr lang="en-US" smtClean="0"/>
-              <a:t>1/27/13</a:t>
+              <a:t>11/27/2022</a:t>
             </a:fld>
             <a:endParaRPr lang="en-US"/>
           </a:p>
@@ -2018,7 +1871,7 @@
           <a:bodyPr/>
           <a:lstStyle/>
           <a:p>
-            <a:fld id="{C1FF6DA9-008F-8B48-92A6-B652298478BF}" type="slidenum">
+            <a:fld id="{31DE96F5-9D8A-4470-9DC7-E08B9CE4C9B7}" type="slidenum">
               <a:rPr lang="en-US" smtClean="0"/>
               <a:t>‹#›</a:t>
             </a:fld>
@@ -2029,13 +1882,29 @@
     </p:spTree>
     <p:extLst>
       <p:ext uri="{BB962C8B-B14F-4D97-AF65-F5344CB8AC3E}">
-        <p14:creationId xmlns:p14="http://schemas.microsoft.com/office/powerpoint/2010/main" val="1212999818"/>
+        <p14:creationId xmlns:p14="http://schemas.microsoft.com/office/powerpoint/2010/main" val="2716398537"/>
       </p:ext>
     </p:extLst>
   </p:cSld>
   <p:clrMapOvr>
     <a:masterClrMapping/>
   </p:clrMapOvr>
+  <p:extLst>
+    <p:ext uri="{DCECCB84-F9BA-43D5-87BE-67443E8EF086}">
+      <p15:sldGuideLst xmlns:p15="http://schemas.microsoft.com/office/powerpoint/2012/main">
+        <p15:guide id="1" orient="horz" pos="16128" userDrawn="1">
+          <p15:clr>
+            <a:srgbClr val="FBAE40"/>
+          </p15:clr>
+        </p15:guide>
+        <p15:guide id="2" pos="16128" userDrawn="1">
+          <p15:clr>
+            <a:srgbClr val="FBAE40"/>
+          </p15:clr>
+        </p15:guide>
+      </p15:sldGuideLst>
+    </p:ext>
+  </p:extLst>
 </p:sldLayout>
 </file>
 
@@ -2068,23 +1937,23 @@
         </p:nvSpPr>
         <p:spPr>
           <a:xfrm>
-            <a:off x="457200" y="273050"/>
-            <a:ext cx="3008313" cy="1162050"/>
+            <a:off x="3527110" y="3413760"/>
+            <a:ext cx="16515397" cy="11948160"/>
           </a:xfrm>
         </p:spPr>
         <p:txBody>
           <a:bodyPr anchor="b"/>
           <a:lstStyle>
-            <a:lvl1pPr algn="l">
-              <a:defRPr sz="2000" b="1"/>
+            <a:lvl1pPr>
+              <a:defRPr sz="17920"/>
             </a:lvl1pPr>
           </a:lstStyle>
           <a:p>
             <a:r>
-              <a:rPr lang="en-US" smtClean="0"/>
+              <a:rPr lang="en-US"/>
               <a:t>Click to edit Master title style</a:t>
             </a:r>
-            <a:endParaRPr lang="en-US"/>
+            <a:endParaRPr lang="en-US" dirty="0"/>
           </a:p>
         </p:txBody>
       </p:sp>
@@ -2100,76 +1969,76 @@
         </p:nvSpPr>
         <p:spPr>
           <a:xfrm>
-            <a:off x="3575050" y="273050"/>
-            <a:ext cx="5111750" cy="5853113"/>
+            <a:off x="21769390" y="7372785"/>
+            <a:ext cx="25923240" cy="36389733"/>
           </a:xfrm>
         </p:spPr>
         <p:txBody>
           <a:bodyPr/>
           <a:lstStyle>
             <a:lvl1pPr>
-              <a:defRPr sz="3200"/>
+              <a:defRPr sz="17920"/>
             </a:lvl1pPr>
             <a:lvl2pPr>
-              <a:defRPr sz="2800"/>
+              <a:defRPr sz="15680"/>
             </a:lvl2pPr>
             <a:lvl3pPr>
-              <a:defRPr sz="2400"/>
+              <a:defRPr sz="13440"/>
             </a:lvl3pPr>
             <a:lvl4pPr>
-              <a:defRPr sz="2000"/>
+              <a:defRPr sz="11200"/>
             </a:lvl4pPr>
             <a:lvl5pPr>
-              <a:defRPr sz="2000"/>
+              <a:defRPr sz="11200"/>
             </a:lvl5pPr>
             <a:lvl6pPr>
-              <a:defRPr sz="2000"/>
+              <a:defRPr sz="11200"/>
             </a:lvl6pPr>
             <a:lvl7pPr>
-              <a:defRPr sz="2000"/>
+              <a:defRPr sz="11200"/>
             </a:lvl7pPr>
             <a:lvl8pPr>
-              <a:defRPr sz="2000"/>
+              <a:defRPr sz="11200"/>
             </a:lvl8pPr>
             <a:lvl9pPr>
-              <a:defRPr sz="2000"/>
+              <a:defRPr sz="11200"/>
             </a:lvl9pPr>
           </a:lstStyle>
           <a:p>
             <a:pPr lvl="0"/>
             <a:r>
-              <a:rPr lang="en-US" smtClean="0"/>
+              <a:rPr lang="en-US"/>
               <a:t>Click to edit Master text styles</a:t>
             </a:r>
           </a:p>
           <a:p>
             <a:pPr lvl="1"/>
             <a:r>
-              <a:rPr lang="en-US" smtClean="0"/>
+              <a:rPr lang="en-US"/>
               <a:t>Second level</a:t>
             </a:r>
           </a:p>
           <a:p>
             <a:pPr lvl="2"/>
             <a:r>
-              <a:rPr lang="en-US" smtClean="0"/>
+              <a:rPr lang="en-US"/>
               <a:t>Third level</a:t>
             </a:r>
           </a:p>
           <a:p>
             <a:pPr lvl="3"/>
             <a:r>
-              <a:rPr lang="en-US" smtClean="0"/>
+              <a:rPr lang="en-US"/>
               <a:t>Fourth level</a:t>
             </a:r>
           </a:p>
           <a:p>
             <a:pPr lvl="4"/>
             <a:r>
-              <a:rPr lang="en-US" smtClean="0"/>
+              <a:rPr lang="en-US"/>
               <a:t>Fifth level</a:t>
             </a:r>
-            <a:endParaRPr lang="en-US"/>
+            <a:endParaRPr lang="en-US" dirty="0"/>
           </a:p>
         </p:txBody>
       </p:sp>
@@ -2185,8 +2054,8 @@
         </p:nvSpPr>
         <p:spPr>
           <a:xfrm>
-            <a:off x="457200" y="1435100"/>
-            <a:ext cx="3008313" cy="4691063"/>
+            <a:off x="3527110" y="15361920"/>
+            <a:ext cx="16515397" cy="28459857"/>
           </a:xfrm>
         </p:spPr>
         <p:txBody>
@@ -2194,45 +2063,45 @@
           <a:lstStyle>
             <a:lvl1pPr marL="0" indent="0">
               <a:buNone/>
-              <a:defRPr sz="1400"/>
+              <a:defRPr sz="8960"/>
             </a:lvl1pPr>
-            <a:lvl2pPr marL="457200" indent="0">
+            <a:lvl2pPr marL="2560320" indent="0">
               <a:buNone/>
-              <a:defRPr sz="1200"/>
+              <a:defRPr sz="7840"/>
             </a:lvl2pPr>
-            <a:lvl3pPr marL="914400" indent="0">
+            <a:lvl3pPr marL="5120640" indent="0">
               <a:buNone/>
-              <a:defRPr sz="1000"/>
+              <a:defRPr sz="6720"/>
             </a:lvl3pPr>
-            <a:lvl4pPr marL="1371600" indent="0">
+            <a:lvl4pPr marL="7680960" indent="0">
               <a:buNone/>
-              <a:defRPr sz="900"/>
+              <a:defRPr sz="5600"/>
             </a:lvl4pPr>
-            <a:lvl5pPr marL="1828800" indent="0">
+            <a:lvl5pPr marL="10241280" indent="0">
               <a:buNone/>
-              <a:defRPr sz="900"/>
+              <a:defRPr sz="5600"/>
             </a:lvl5pPr>
-            <a:lvl6pPr marL="2286000" indent="0">
+            <a:lvl6pPr marL="12801600" indent="0">
               <a:buNone/>
-              <a:defRPr sz="900"/>
+              <a:defRPr sz="5600"/>
             </a:lvl6pPr>
-            <a:lvl7pPr marL="2743200" indent="0">
+            <a:lvl7pPr marL="15361920" indent="0">
               <a:buNone/>
-              <a:defRPr sz="900"/>
+              <a:defRPr sz="5600"/>
             </a:lvl7pPr>
-            <a:lvl8pPr marL="3200400" indent="0">
+            <a:lvl8pPr marL="17922240" indent="0">
               <a:buNone/>
-              <a:defRPr sz="900"/>
+              <a:defRPr sz="5600"/>
             </a:lvl8pPr>
-            <a:lvl9pPr marL="3657600" indent="0">
+            <a:lvl9pPr marL="20482560" indent="0">
               <a:buNone/>
-              <a:defRPr sz="900"/>
+              <a:defRPr sz="5600"/>
             </a:lvl9pPr>
           </a:lstStyle>
           <a:p>
             <a:pPr lvl="0"/>
             <a:r>
-              <a:rPr lang="en-US" smtClean="0"/>
+              <a:rPr lang="en-US"/>
               <a:t>Click to edit Master text styles</a:t>
             </a:r>
           </a:p>
@@ -2253,9 +2122,9 @@
           <a:bodyPr/>
           <a:lstStyle/>
           <a:p>
-            <a:fld id="{5BCAD085-E8A6-8845-BD4E-CB4CCA059FC4}" type="datetimeFigureOut">
+            <a:fld id="{82F6EFAF-E347-4747-A338-7BC457339658}" type="datetimeFigureOut">
               <a:rPr lang="en-US" smtClean="0"/>
-              <a:t>1/27/13</a:t>
+              <a:t>11/27/2022</a:t>
             </a:fld>
             <a:endParaRPr lang="en-US"/>
           </a:p>
@@ -2295,7 +2164,7 @@
           <a:bodyPr/>
           <a:lstStyle/>
           <a:p>
-            <a:fld id="{C1FF6DA9-008F-8B48-92A6-B652298478BF}" type="slidenum">
+            <a:fld id="{31DE96F5-9D8A-4470-9DC7-E08B9CE4C9B7}" type="slidenum">
               <a:rPr lang="en-US" smtClean="0"/>
               <a:t>‹#›</a:t>
             </a:fld>
@@ -2306,7 +2175,7 @@
     </p:spTree>
     <p:extLst>
       <p:ext uri="{BB962C8B-B14F-4D97-AF65-F5344CB8AC3E}">
-        <p14:creationId xmlns:p14="http://schemas.microsoft.com/office/powerpoint/2010/main" val="1840726560"/>
+        <p14:creationId xmlns:p14="http://schemas.microsoft.com/office/powerpoint/2010/main" val="1569270622"/>
       </p:ext>
     </p:extLst>
   </p:cSld>
@@ -2345,23 +2214,23 @@
         </p:nvSpPr>
         <p:spPr>
           <a:xfrm>
-            <a:off x="1792288" y="4800600"/>
-            <a:ext cx="5486400" cy="566738"/>
+            <a:off x="3527110" y="3413760"/>
+            <a:ext cx="16515397" cy="11948160"/>
           </a:xfrm>
         </p:spPr>
         <p:txBody>
           <a:bodyPr anchor="b"/>
           <a:lstStyle>
-            <a:lvl1pPr algn="l">
-              <a:defRPr sz="2000" b="1"/>
+            <a:lvl1pPr>
+              <a:defRPr sz="17920"/>
             </a:lvl1pPr>
           </a:lstStyle>
           <a:p>
             <a:r>
-              <a:rPr lang="en-US" smtClean="0"/>
+              <a:rPr lang="en-US"/>
               <a:t>Click to edit Master title style</a:t>
             </a:r>
-            <a:endParaRPr lang="en-US"/>
+            <a:endParaRPr lang="en-US" dirty="0"/>
           </a:p>
         </p:txBody>
       </p:sp>
@@ -2369,7 +2238,7 @@
         <p:nvSpPr>
           <p:cNvPr id="3" name="Picture Placeholder 2"/>
           <p:cNvSpPr>
-            <a:spLocks noGrp="1"/>
+            <a:spLocks noGrp="1" noChangeAspect="1"/>
           </p:cNvSpPr>
           <p:nvPr>
             <p:ph type="pic" idx="1"/>
@@ -2377,52 +2246,56 @@
         </p:nvSpPr>
         <p:spPr>
           <a:xfrm>
-            <a:off x="1792288" y="612775"/>
-            <a:ext cx="5486400" cy="4114800"/>
-          </a:xfrm>
-        </p:spPr>
-        <p:txBody>
-          <a:bodyPr/>
+            <a:off x="21769390" y="7372785"/>
+            <a:ext cx="25923240" cy="36389733"/>
+          </a:xfrm>
+        </p:spPr>
+        <p:txBody>
+          <a:bodyPr anchor="t"/>
           <a:lstStyle>
             <a:lvl1pPr marL="0" indent="0">
               <a:buNone/>
-              <a:defRPr sz="3200"/>
+              <a:defRPr sz="17920"/>
             </a:lvl1pPr>
-            <a:lvl2pPr marL="457200" indent="0">
+            <a:lvl2pPr marL="2560320" indent="0">
               <a:buNone/>
-              <a:defRPr sz="2800"/>
+              <a:defRPr sz="15680"/>
             </a:lvl2pPr>
-            <a:lvl3pPr marL="914400" indent="0">
+            <a:lvl3pPr marL="5120640" indent="0">
               <a:buNone/>
-              <a:defRPr sz="2400"/>
+              <a:defRPr sz="13440"/>
             </a:lvl3pPr>
-            <a:lvl4pPr marL="1371600" indent="0">
+            <a:lvl4pPr marL="7680960" indent="0">
               <a:buNone/>
-              <a:defRPr sz="2000"/>
+              <a:defRPr sz="11200"/>
             </a:lvl4pPr>
-            <a:lvl5pPr marL="1828800" indent="0">
+            <a:lvl5pPr marL="10241280" indent="0">
               <a:buNone/>
-              <a:defRPr sz="2000"/>
+              <a:defRPr sz="11200"/>
             </a:lvl5pPr>
-            <a:lvl6pPr marL="2286000" indent="0">
+            <a:lvl6pPr marL="12801600" indent="0">
               <a:buNone/>
-              <a:defRPr sz="2000"/>
+              <a:defRPr sz="11200"/>
             </a:lvl6pPr>
-            <a:lvl7pPr marL="2743200" indent="0">
+            <a:lvl7pPr marL="15361920" indent="0">
               <a:buNone/>
-              <a:defRPr sz="2000"/>
+              <a:defRPr sz="11200"/>
             </a:lvl7pPr>
-            <a:lvl8pPr marL="3200400" indent="0">
+            <a:lvl8pPr marL="17922240" indent="0">
               <a:buNone/>
-              <a:defRPr sz="2000"/>
+              <a:defRPr sz="11200"/>
             </a:lvl8pPr>
-            <a:lvl9pPr marL="3657600" indent="0">
+            <a:lvl9pPr marL="20482560" indent="0">
               <a:buNone/>
-              <a:defRPr sz="2000"/>
+              <a:defRPr sz="11200"/>
             </a:lvl9pPr>
           </a:lstStyle>
           <a:p>
-            <a:endParaRPr lang="en-US"/>
+            <a:r>
+              <a:rPr lang="en-US"/>
+              <a:t>Click icon to add picture</a:t>
+            </a:r>
+            <a:endParaRPr lang="en-US" dirty="0"/>
           </a:p>
         </p:txBody>
       </p:sp>
@@ -2438,8 +2311,8 @@
         </p:nvSpPr>
         <p:spPr>
           <a:xfrm>
-            <a:off x="1792288" y="5367338"/>
-            <a:ext cx="5486400" cy="804862"/>
+            <a:off x="3527110" y="15361920"/>
+            <a:ext cx="16515397" cy="28459857"/>
           </a:xfrm>
         </p:spPr>
         <p:txBody>
@@ -2447,45 +2320,45 @@
           <a:lstStyle>
             <a:lvl1pPr marL="0" indent="0">
               <a:buNone/>
-              <a:defRPr sz="1400"/>
+              <a:defRPr sz="8960"/>
             </a:lvl1pPr>
-            <a:lvl2pPr marL="457200" indent="0">
+            <a:lvl2pPr marL="2560320" indent="0">
               <a:buNone/>
-              <a:defRPr sz="1200"/>
+              <a:defRPr sz="7840"/>
             </a:lvl2pPr>
-            <a:lvl3pPr marL="914400" indent="0">
+            <a:lvl3pPr marL="5120640" indent="0">
               <a:buNone/>
-              <a:defRPr sz="1000"/>
+              <a:defRPr sz="6720"/>
             </a:lvl3pPr>
-            <a:lvl4pPr marL="1371600" indent="0">
+            <a:lvl4pPr marL="7680960" indent="0">
               <a:buNone/>
-              <a:defRPr sz="900"/>
+              <a:defRPr sz="5600"/>
             </a:lvl4pPr>
-            <a:lvl5pPr marL="1828800" indent="0">
+            <a:lvl5pPr marL="10241280" indent="0">
               <a:buNone/>
-              <a:defRPr sz="900"/>
+              <a:defRPr sz="5600"/>
             </a:lvl5pPr>
-            <a:lvl6pPr marL="2286000" indent="0">
+            <a:lvl6pPr marL="12801600" indent="0">
               <a:buNone/>
-              <a:defRPr sz="900"/>
+              <a:defRPr sz="5600"/>
             </a:lvl6pPr>
-            <a:lvl7pPr marL="2743200" indent="0">
+            <a:lvl7pPr marL="15361920" indent="0">
               <a:buNone/>
-              <a:defRPr sz="900"/>
+              <a:defRPr sz="5600"/>
             </a:lvl7pPr>
-            <a:lvl8pPr marL="3200400" indent="0">
+            <a:lvl8pPr marL="17922240" indent="0">
               <a:buNone/>
-              <a:defRPr sz="900"/>
+              <a:defRPr sz="5600"/>
             </a:lvl8pPr>
-            <a:lvl9pPr marL="3657600" indent="0">
+            <a:lvl9pPr marL="20482560" indent="0">
               <a:buNone/>
-              <a:defRPr sz="900"/>
+              <a:defRPr sz="5600"/>
             </a:lvl9pPr>
           </a:lstStyle>
           <a:p>
             <a:pPr lvl="0"/>
             <a:r>
-              <a:rPr lang="en-US" smtClean="0"/>
+              <a:rPr lang="en-US"/>
               <a:t>Click to edit Master text styles</a:t>
             </a:r>
           </a:p>
@@ -2506,9 +2379,9 @@
           <a:bodyPr/>
           <a:lstStyle/>
           <a:p>
-            <a:fld id="{5BCAD085-E8A6-8845-BD4E-CB4CCA059FC4}" type="datetimeFigureOut">
+            <a:fld id="{82F6EFAF-E347-4747-A338-7BC457339658}" type="datetimeFigureOut">
               <a:rPr lang="en-US" smtClean="0"/>
-              <a:t>1/27/13</a:t>
+              <a:t>11/27/2022</a:t>
             </a:fld>
             <a:endParaRPr lang="en-US"/>
           </a:p>
@@ -2548,7 +2421,7 @@
           <a:bodyPr/>
           <a:lstStyle/>
           <a:p>
-            <a:fld id="{C1FF6DA9-008F-8B48-92A6-B652298478BF}" type="slidenum">
+            <a:fld id="{31DE96F5-9D8A-4470-9DC7-E08B9CE4C9B7}" type="slidenum">
               <a:rPr lang="en-US" smtClean="0"/>
               <a:t>‹#›</a:t>
             </a:fld>
@@ -2559,7 +2432,7 @@
     </p:spTree>
     <p:extLst>
       <p:ext uri="{BB962C8B-B14F-4D97-AF65-F5344CB8AC3E}">
-        <p14:creationId xmlns:p14="http://schemas.microsoft.com/office/powerpoint/2010/main" val="3889236939"/>
+        <p14:creationId xmlns:p14="http://schemas.microsoft.com/office/powerpoint/2010/main" val="4229452460"/>
       </p:ext>
     </p:extLst>
   </p:cSld>
@@ -2603,8 +2476,8 @@
         </p:nvSpPr>
         <p:spPr>
           <a:xfrm>
-            <a:off x="457200" y="274638"/>
-            <a:ext cx="8229600" cy="1143000"/>
+            <a:off x="3520440" y="2726278"/>
+            <a:ext cx="44165520" cy="9897537"/>
           </a:xfrm>
           <a:prstGeom prst="rect">
             <a:avLst/>
@@ -2617,10 +2490,10 @@
           <a:lstStyle/>
           <a:p>
             <a:r>
-              <a:rPr lang="en-US" smtClean="0"/>
+              <a:rPr lang="en-US"/>
               <a:t>Click to edit Master title style</a:t>
             </a:r>
-            <a:endParaRPr lang="en-US"/>
+            <a:endParaRPr lang="en-US" dirty="0"/>
           </a:p>
         </p:txBody>
       </p:sp>
@@ -2636,8 +2509,8 @@
         </p:nvSpPr>
         <p:spPr>
           <a:xfrm>
-            <a:off x="457200" y="1600200"/>
-            <a:ext cx="8229600" cy="4525963"/>
+            <a:off x="3520440" y="13631334"/>
+            <a:ext cx="44165520" cy="32489990"/>
           </a:xfrm>
           <a:prstGeom prst="rect">
             <a:avLst/>
@@ -2651,38 +2524,38 @@
           <a:p>
             <a:pPr lvl="0"/>
             <a:r>
-              <a:rPr lang="en-US" smtClean="0"/>
+              <a:rPr lang="en-US"/>
               <a:t>Click to edit Master text styles</a:t>
             </a:r>
           </a:p>
           <a:p>
             <a:pPr lvl="1"/>
             <a:r>
-              <a:rPr lang="en-US" smtClean="0"/>
+              <a:rPr lang="en-US"/>
               <a:t>Second level</a:t>
             </a:r>
           </a:p>
           <a:p>
             <a:pPr lvl="2"/>
             <a:r>
-              <a:rPr lang="en-US" smtClean="0"/>
+              <a:rPr lang="en-US"/>
               <a:t>Third level</a:t>
             </a:r>
           </a:p>
           <a:p>
             <a:pPr lvl="3"/>
             <a:r>
-              <a:rPr lang="en-US" smtClean="0"/>
+              <a:rPr lang="en-US"/>
               <a:t>Fourth level</a:t>
             </a:r>
           </a:p>
           <a:p>
             <a:pPr lvl="4"/>
             <a:r>
-              <a:rPr lang="en-US" smtClean="0"/>
+              <a:rPr lang="en-US"/>
               <a:t>Fifth level</a:t>
             </a:r>
-            <a:endParaRPr lang="en-US"/>
+            <a:endParaRPr lang="en-US" dirty="0"/>
           </a:p>
         </p:txBody>
       </p:sp>
@@ -2698,8 +2571,8 @@
         </p:nvSpPr>
         <p:spPr>
           <a:xfrm>
-            <a:off x="457200" y="6356350"/>
-            <a:ext cx="2133600" cy="365125"/>
+            <a:off x="3520440" y="47460758"/>
+            <a:ext cx="11521440" cy="2726267"/>
           </a:xfrm>
           <a:prstGeom prst="rect">
             <a:avLst/>
@@ -2709,7 +2582,7 @@
           <a:bodyPr vert="horz" lIns="91440" tIns="45720" rIns="91440" bIns="45720" rtlCol="0" anchor="ctr"/>
           <a:lstStyle>
             <a:lvl1pPr algn="l">
-              <a:defRPr sz="1200">
+              <a:defRPr sz="6720">
                 <a:solidFill>
                   <a:schemeClr val="tx1">
                     <a:tint val="75000"/>
@@ -2719,9 +2592,9 @@
             </a:lvl1pPr>
           </a:lstStyle>
           <a:p>
-            <a:fld id="{5BCAD085-E8A6-8845-BD4E-CB4CCA059FC4}" type="datetimeFigureOut">
+            <a:fld id="{82F6EFAF-E347-4747-A338-7BC457339658}" type="datetimeFigureOut">
               <a:rPr lang="en-US" smtClean="0"/>
-              <a:t>1/27/13</a:t>
+              <a:t>11/27/2022</a:t>
             </a:fld>
             <a:endParaRPr lang="en-US"/>
           </a:p>
@@ -2739,8 +2612,8 @@
         </p:nvSpPr>
         <p:spPr>
           <a:xfrm>
-            <a:off x="3124200" y="6356350"/>
-            <a:ext cx="2895600" cy="365125"/>
+            <a:off x="16962120" y="47460758"/>
+            <a:ext cx="17282160" cy="2726267"/>
           </a:xfrm>
           <a:prstGeom prst="rect">
             <a:avLst/>
@@ -2750,7 +2623,7 @@
           <a:bodyPr vert="horz" lIns="91440" tIns="45720" rIns="91440" bIns="45720" rtlCol="0" anchor="ctr"/>
           <a:lstStyle>
             <a:lvl1pPr algn="ctr">
-              <a:defRPr sz="1200">
+              <a:defRPr sz="6720">
                 <a:solidFill>
                   <a:schemeClr val="tx1">
                     <a:tint val="75000"/>
@@ -2776,8 +2649,8 @@
         </p:nvSpPr>
         <p:spPr>
           <a:xfrm>
-            <a:off x="6553200" y="6356350"/>
-            <a:ext cx="2133600" cy="365125"/>
+            <a:off x="36164520" y="47460758"/>
+            <a:ext cx="11521440" cy="2726267"/>
           </a:xfrm>
           <a:prstGeom prst="rect">
             <a:avLst/>
@@ -2787,7 +2660,7 @@
           <a:bodyPr vert="horz" lIns="91440" tIns="45720" rIns="91440" bIns="45720" rtlCol="0" anchor="ctr"/>
           <a:lstStyle>
             <a:lvl1pPr algn="r">
-              <a:defRPr sz="1200">
+              <a:defRPr sz="6720">
                 <a:solidFill>
                   <a:schemeClr val="tx1">
                     <a:tint val="75000"/>
@@ -2797,7 +2670,7 @@
             </a:lvl1pPr>
           </a:lstStyle>
           <a:p>
-            <a:fld id="{C1FF6DA9-008F-8B48-92A6-B652298478BF}" type="slidenum">
+            <a:fld id="{31DE96F5-9D8A-4470-9DC7-E08B9CE4C9B7}" type="slidenum">
               <a:rPr lang="en-US" smtClean="0"/>
               <a:t>‹#›</a:t>
             </a:fld>
@@ -2808,32 +2681,35 @@
     </p:spTree>
     <p:extLst>
       <p:ext uri="{BB962C8B-B14F-4D97-AF65-F5344CB8AC3E}">
-        <p14:creationId xmlns:p14="http://schemas.microsoft.com/office/powerpoint/2010/main" val="2209977519"/>
+        <p14:creationId xmlns:p14="http://schemas.microsoft.com/office/powerpoint/2010/main" val="1199523703"/>
       </p:ext>
     </p:extLst>
   </p:cSld>
   <p:clrMap bg1="lt1" tx1="dk1" bg2="lt2" tx2="dk2" accent1="accent1" accent2="accent2" accent3="accent3" accent4="accent4" accent5="accent5" accent6="accent6" hlink="hlink" folHlink="folHlink"/>
   <p:sldLayoutIdLst>
-    <p:sldLayoutId id="2147483649" r:id="rId1"/>
-    <p:sldLayoutId id="2147483650" r:id="rId2"/>
-    <p:sldLayoutId id="2147483651" r:id="rId3"/>
-    <p:sldLayoutId id="2147483652" r:id="rId4"/>
-    <p:sldLayoutId id="2147483653" r:id="rId5"/>
-    <p:sldLayoutId id="2147483654" r:id="rId6"/>
-    <p:sldLayoutId id="2147483655" r:id="rId7"/>
-    <p:sldLayoutId id="2147483656" r:id="rId8"/>
-    <p:sldLayoutId id="2147483657" r:id="rId9"/>
-    <p:sldLayoutId id="2147483658" r:id="rId10"/>
-    <p:sldLayoutId id="2147483659" r:id="rId11"/>
+    <p:sldLayoutId id="2147483673" r:id="rId1"/>
+    <p:sldLayoutId id="2147483674" r:id="rId2"/>
+    <p:sldLayoutId id="2147483675" r:id="rId3"/>
+    <p:sldLayoutId id="2147483676" r:id="rId4"/>
+    <p:sldLayoutId id="2147483677" r:id="rId5"/>
+    <p:sldLayoutId id="2147483678" r:id="rId6"/>
+    <p:sldLayoutId id="2147483679" r:id="rId7"/>
+    <p:sldLayoutId id="2147483680" r:id="rId8"/>
+    <p:sldLayoutId id="2147483681" r:id="rId9"/>
+    <p:sldLayoutId id="2147483682" r:id="rId10"/>
+    <p:sldLayoutId id="2147483683" r:id="rId11"/>
   </p:sldLayoutIdLst>
   <p:txStyles>
     <p:titleStyle>
-      <a:lvl1pPr algn="ctr" defTabSz="457200" rtl="0" eaLnBrk="1" latinLnBrk="0" hangingPunct="1">
+      <a:lvl1pPr algn="l" defTabSz="5120640" rtl="0" eaLnBrk="1" latinLnBrk="0" hangingPunct="1">
+        <a:lnSpc>
+          <a:spcPct val="90000"/>
+        </a:lnSpc>
         <a:spcBef>
           <a:spcPct val="0"/>
         </a:spcBef>
         <a:buNone/>
-        <a:defRPr sz="4400" kern="1200">
+        <a:defRPr sz="24640" kern="1200">
           <a:solidFill>
             <a:schemeClr val="tx1"/>
           </a:solidFill>
@@ -2844,13 +2720,16 @@
       </a:lvl1pPr>
     </p:titleStyle>
     <p:bodyStyle>
-      <a:lvl1pPr marL="342900" indent="-342900" algn="l" defTabSz="457200" rtl="0" eaLnBrk="1" latinLnBrk="0" hangingPunct="1">
+      <a:lvl1pPr marL="1280160" indent="-1280160" algn="l" defTabSz="5120640" rtl="0" eaLnBrk="1" latinLnBrk="0" hangingPunct="1">
+        <a:lnSpc>
+          <a:spcPct val="90000"/>
+        </a:lnSpc>
         <a:spcBef>
-          <a:spcPct val="20000"/>
+          <a:spcPts val="5600"/>
         </a:spcBef>
-        <a:buFont typeface="Arial"/>
+        <a:buFont typeface="Arial" panose="020B0604020202020204" pitchFamily="34" charset="0"/>
         <a:buChar char="•"/>
-        <a:defRPr sz="3200" kern="1200">
+        <a:defRPr sz="15680" kern="1200">
           <a:solidFill>
             <a:schemeClr val="tx1"/>
           </a:solidFill>
@@ -2859,13 +2738,16 @@
           <a:cs typeface="+mn-cs"/>
         </a:defRPr>
       </a:lvl1pPr>
-      <a:lvl2pPr marL="742950" indent="-285750" algn="l" defTabSz="457200" rtl="0" eaLnBrk="1" latinLnBrk="0" hangingPunct="1">
+      <a:lvl2pPr marL="3840480" indent="-1280160" algn="l" defTabSz="5120640" rtl="0" eaLnBrk="1" latinLnBrk="0" hangingPunct="1">
+        <a:lnSpc>
+          <a:spcPct val="90000"/>
+        </a:lnSpc>
         <a:spcBef>
-          <a:spcPct val="20000"/>
+          <a:spcPts val="2800"/>
         </a:spcBef>
-        <a:buFont typeface="Arial"/>
-        <a:buChar char="–"/>
-        <a:defRPr sz="2800" kern="1200">
+        <a:buFont typeface="Arial" panose="020B0604020202020204" pitchFamily="34" charset="0"/>
+        <a:buChar char="•"/>
+        <a:defRPr sz="13440" kern="1200">
           <a:solidFill>
             <a:schemeClr val="tx1"/>
           </a:solidFill>
@@ -2874,13 +2756,16 @@
           <a:cs typeface="+mn-cs"/>
         </a:defRPr>
       </a:lvl2pPr>
-      <a:lvl3pPr marL="1143000" indent="-228600" algn="l" defTabSz="457200" rtl="0" eaLnBrk="1" latinLnBrk="0" hangingPunct="1">
+      <a:lvl3pPr marL="6400800" indent="-1280160" algn="l" defTabSz="5120640" rtl="0" eaLnBrk="1" latinLnBrk="0" hangingPunct="1">
+        <a:lnSpc>
+          <a:spcPct val="90000"/>
+        </a:lnSpc>
         <a:spcBef>
-          <a:spcPct val="20000"/>
+          <a:spcPts val="2800"/>
         </a:spcBef>
-        <a:buFont typeface="Arial"/>
+        <a:buFont typeface="Arial" panose="020B0604020202020204" pitchFamily="34" charset="0"/>
         <a:buChar char="•"/>
-        <a:defRPr sz="2400" kern="1200">
+        <a:defRPr sz="11200" kern="1200">
           <a:solidFill>
             <a:schemeClr val="tx1"/>
           </a:solidFill>
@@ -2889,13 +2774,16 @@
           <a:cs typeface="+mn-cs"/>
         </a:defRPr>
       </a:lvl3pPr>
-      <a:lvl4pPr marL="1600200" indent="-228600" algn="l" defTabSz="457200" rtl="0" eaLnBrk="1" latinLnBrk="0" hangingPunct="1">
+      <a:lvl4pPr marL="8961120" indent="-1280160" algn="l" defTabSz="5120640" rtl="0" eaLnBrk="1" latinLnBrk="0" hangingPunct="1">
+        <a:lnSpc>
+          <a:spcPct val="90000"/>
+        </a:lnSpc>
         <a:spcBef>
-          <a:spcPct val="20000"/>
+          <a:spcPts val="2800"/>
         </a:spcBef>
-        <a:buFont typeface="Arial"/>
-        <a:buChar char="–"/>
-        <a:defRPr sz="2000" kern="1200">
+        <a:buFont typeface="Arial" panose="020B0604020202020204" pitchFamily="34" charset="0"/>
+        <a:buChar char="•"/>
+        <a:defRPr sz="10080" kern="1200">
           <a:solidFill>
             <a:schemeClr val="tx1"/>
           </a:solidFill>
@@ -2904,13 +2792,16 @@
           <a:cs typeface="+mn-cs"/>
         </a:defRPr>
       </a:lvl4pPr>
-      <a:lvl5pPr marL="2057400" indent="-228600" algn="l" defTabSz="457200" rtl="0" eaLnBrk="1" latinLnBrk="0" hangingPunct="1">
+      <a:lvl5pPr marL="11521440" indent="-1280160" algn="l" defTabSz="5120640" rtl="0" eaLnBrk="1" latinLnBrk="0" hangingPunct="1">
+        <a:lnSpc>
+          <a:spcPct val="90000"/>
+        </a:lnSpc>
         <a:spcBef>
-          <a:spcPct val="20000"/>
+          <a:spcPts val="2800"/>
         </a:spcBef>
-        <a:buFont typeface="Arial"/>
-        <a:buChar char="»"/>
-        <a:defRPr sz="2000" kern="1200">
+        <a:buFont typeface="Arial" panose="020B0604020202020204" pitchFamily="34" charset="0"/>
+        <a:buChar char="•"/>
+        <a:defRPr sz="10080" kern="1200">
           <a:solidFill>
             <a:schemeClr val="tx1"/>
           </a:solidFill>
@@ -2919,13 +2810,16 @@
           <a:cs typeface="+mn-cs"/>
         </a:defRPr>
       </a:lvl5pPr>
-      <a:lvl6pPr marL="2514600" indent="-228600" algn="l" defTabSz="457200" rtl="0" eaLnBrk="1" latinLnBrk="0" hangingPunct="1">
+      <a:lvl6pPr marL="14081760" indent="-1280160" algn="l" defTabSz="5120640" rtl="0" eaLnBrk="1" latinLnBrk="0" hangingPunct="1">
+        <a:lnSpc>
+          <a:spcPct val="90000"/>
+        </a:lnSpc>
         <a:spcBef>
-          <a:spcPct val="20000"/>
+          <a:spcPts val="2800"/>
         </a:spcBef>
-        <a:buFont typeface="Arial"/>
+        <a:buFont typeface="Arial" panose="020B0604020202020204" pitchFamily="34" charset="0"/>
         <a:buChar char="•"/>
-        <a:defRPr sz="2000" kern="1200">
+        <a:defRPr sz="10080" kern="1200">
           <a:solidFill>
             <a:schemeClr val="tx1"/>
           </a:solidFill>
@@ -2934,13 +2828,16 @@
           <a:cs typeface="+mn-cs"/>
         </a:defRPr>
       </a:lvl6pPr>
-      <a:lvl7pPr marL="2971800" indent="-228600" algn="l" defTabSz="457200" rtl="0" eaLnBrk="1" latinLnBrk="0" hangingPunct="1">
+      <a:lvl7pPr marL="16642080" indent="-1280160" algn="l" defTabSz="5120640" rtl="0" eaLnBrk="1" latinLnBrk="0" hangingPunct="1">
+        <a:lnSpc>
+          <a:spcPct val="90000"/>
+        </a:lnSpc>
         <a:spcBef>
-          <a:spcPct val="20000"/>
+          <a:spcPts val="2800"/>
         </a:spcBef>
-        <a:buFont typeface="Arial"/>
+        <a:buFont typeface="Arial" panose="020B0604020202020204" pitchFamily="34" charset="0"/>
         <a:buChar char="•"/>
-        <a:defRPr sz="2000" kern="1200">
+        <a:defRPr sz="10080" kern="1200">
           <a:solidFill>
             <a:schemeClr val="tx1"/>
           </a:solidFill>
@@ -2949,13 +2846,16 @@
           <a:cs typeface="+mn-cs"/>
         </a:defRPr>
       </a:lvl7pPr>
-      <a:lvl8pPr marL="3429000" indent="-228600" algn="l" defTabSz="457200" rtl="0" eaLnBrk="1" latinLnBrk="0" hangingPunct="1">
+      <a:lvl8pPr marL="19202400" indent="-1280160" algn="l" defTabSz="5120640" rtl="0" eaLnBrk="1" latinLnBrk="0" hangingPunct="1">
+        <a:lnSpc>
+          <a:spcPct val="90000"/>
+        </a:lnSpc>
         <a:spcBef>
-          <a:spcPct val="20000"/>
+          <a:spcPts val="2800"/>
         </a:spcBef>
-        <a:buFont typeface="Arial"/>
+        <a:buFont typeface="Arial" panose="020B0604020202020204" pitchFamily="34" charset="0"/>
         <a:buChar char="•"/>
-        <a:defRPr sz="2000" kern="1200">
+        <a:defRPr sz="10080" kern="1200">
           <a:solidFill>
             <a:schemeClr val="tx1"/>
           </a:solidFill>
@@ -2964,13 +2864,16 @@
           <a:cs typeface="+mn-cs"/>
         </a:defRPr>
       </a:lvl8pPr>
-      <a:lvl9pPr marL="3886200" indent="-228600" algn="l" defTabSz="457200" rtl="0" eaLnBrk="1" latinLnBrk="0" hangingPunct="1">
+      <a:lvl9pPr marL="21762720" indent="-1280160" algn="l" defTabSz="5120640" rtl="0" eaLnBrk="1" latinLnBrk="0" hangingPunct="1">
+        <a:lnSpc>
+          <a:spcPct val="90000"/>
+        </a:lnSpc>
         <a:spcBef>
-          <a:spcPct val="20000"/>
+          <a:spcPts val="2800"/>
         </a:spcBef>
-        <a:buFont typeface="Arial"/>
+        <a:buFont typeface="Arial" panose="020B0604020202020204" pitchFamily="34" charset="0"/>
         <a:buChar char="•"/>
-        <a:defRPr sz="2000" kern="1200">
+        <a:defRPr sz="10080" kern="1200">
           <a:solidFill>
             <a:schemeClr val="tx1"/>
           </a:solidFill>
@@ -2984,8 +2887,8 @@
       <a:defPPr>
         <a:defRPr lang="en-US"/>
       </a:defPPr>
-      <a:lvl1pPr marL="0" algn="l" defTabSz="457200" rtl="0" eaLnBrk="1" latinLnBrk="0" hangingPunct="1">
-        <a:defRPr sz="1800" kern="1200">
+      <a:lvl1pPr marL="0" algn="l" defTabSz="5120640" rtl="0" eaLnBrk="1" latinLnBrk="0" hangingPunct="1">
+        <a:defRPr sz="10080" kern="1200">
           <a:solidFill>
             <a:schemeClr val="tx1"/>
           </a:solidFill>
@@ -2994,8 +2897,8 @@
           <a:cs typeface="+mn-cs"/>
         </a:defRPr>
       </a:lvl1pPr>
-      <a:lvl2pPr marL="457200" algn="l" defTabSz="457200" rtl="0" eaLnBrk="1" latinLnBrk="0" hangingPunct="1">
-        <a:defRPr sz="1800" kern="1200">
+      <a:lvl2pPr marL="2560320" algn="l" defTabSz="5120640" rtl="0" eaLnBrk="1" latinLnBrk="0" hangingPunct="1">
+        <a:defRPr sz="10080" kern="1200">
           <a:solidFill>
             <a:schemeClr val="tx1"/>
           </a:solidFill>
@@ -3004,8 +2907,8 @@
           <a:cs typeface="+mn-cs"/>
         </a:defRPr>
       </a:lvl2pPr>
-      <a:lvl3pPr marL="914400" algn="l" defTabSz="457200" rtl="0" eaLnBrk="1" latinLnBrk="0" hangingPunct="1">
-        <a:defRPr sz="1800" kern="1200">
+      <a:lvl3pPr marL="5120640" algn="l" defTabSz="5120640" rtl="0" eaLnBrk="1" latinLnBrk="0" hangingPunct="1">
+        <a:defRPr sz="10080" kern="1200">
           <a:solidFill>
             <a:schemeClr val="tx1"/>
           </a:solidFill>
@@ -3014,8 +2917,8 @@
           <a:cs typeface="+mn-cs"/>
         </a:defRPr>
       </a:lvl3pPr>
-      <a:lvl4pPr marL="1371600" algn="l" defTabSz="457200" rtl="0" eaLnBrk="1" latinLnBrk="0" hangingPunct="1">
-        <a:defRPr sz="1800" kern="1200">
+      <a:lvl4pPr marL="7680960" algn="l" defTabSz="5120640" rtl="0" eaLnBrk="1" latinLnBrk="0" hangingPunct="1">
+        <a:defRPr sz="10080" kern="1200">
           <a:solidFill>
             <a:schemeClr val="tx1"/>
           </a:solidFill>
@@ -3024,8 +2927,8 @@
           <a:cs typeface="+mn-cs"/>
         </a:defRPr>
       </a:lvl4pPr>
-      <a:lvl5pPr marL="1828800" algn="l" defTabSz="457200" rtl="0" eaLnBrk="1" latinLnBrk="0" hangingPunct="1">
-        <a:defRPr sz="1800" kern="1200">
+      <a:lvl5pPr marL="10241280" algn="l" defTabSz="5120640" rtl="0" eaLnBrk="1" latinLnBrk="0" hangingPunct="1">
+        <a:defRPr sz="10080" kern="1200">
           <a:solidFill>
             <a:schemeClr val="tx1"/>
           </a:solidFill>
@@ -3034,8 +2937,8 @@
           <a:cs typeface="+mn-cs"/>
         </a:defRPr>
       </a:lvl5pPr>
-      <a:lvl6pPr marL="2286000" algn="l" defTabSz="457200" rtl="0" eaLnBrk="1" latinLnBrk="0" hangingPunct="1">
-        <a:defRPr sz="1800" kern="1200">
+      <a:lvl6pPr marL="12801600" algn="l" defTabSz="5120640" rtl="0" eaLnBrk="1" latinLnBrk="0" hangingPunct="1">
+        <a:defRPr sz="10080" kern="1200">
           <a:solidFill>
             <a:schemeClr val="tx1"/>
           </a:solidFill>
@@ -3044,8 +2947,8 @@
           <a:cs typeface="+mn-cs"/>
         </a:defRPr>
       </a:lvl6pPr>
-      <a:lvl7pPr marL="2743200" algn="l" defTabSz="457200" rtl="0" eaLnBrk="1" latinLnBrk="0" hangingPunct="1">
-        <a:defRPr sz="1800" kern="1200">
+      <a:lvl7pPr marL="15361920" algn="l" defTabSz="5120640" rtl="0" eaLnBrk="1" latinLnBrk="0" hangingPunct="1">
+        <a:defRPr sz="10080" kern="1200">
           <a:solidFill>
             <a:schemeClr val="tx1"/>
           </a:solidFill>
@@ -3054,8 +2957,8 @@
           <a:cs typeface="+mn-cs"/>
         </a:defRPr>
       </a:lvl7pPr>
-      <a:lvl8pPr marL="3200400" algn="l" defTabSz="457200" rtl="0" eaLnBrk="1" latinLnBrk="0" hangingPunct="1">
-        <a:defRPr sz="1800" kern="1200">
+      <a:lvl8pPr marL="17922240" algn="l" defTabSz="5120640" rtl="0" eaLnBrk="1" latinLnBrk="0" hangingPunct="1">
+        <a:defRPr sz="10080" kern="1200">
           <a:solidFill>
             <a:schemeClr val="tx1"/>
           </a:solidFill>
@@ -3064,8 +2967,8 @@
           <a:cs typeface="+mn-cs"/>
         </a:defRPr>
       </a:lvl8pPr>
-      <a:lvl9pPr marL="3657600" algn="l" defTabSz="457200" rtl="0" eaLnBrk="1" latinLnBrk="0" hangingPunct="1">
-        <a:defRPr sz="1800" kern="1200">
+      <a:lvl9pPr marL="20482560" algn="l" defTabSz="5120640" rtl="0" eaLnBrk="1" latinLnBrk="0" hangingPunct="1">
+        <a:defRPr sz="10080" kern="1200">
           <a:solidFill>
             <a:schemeClr val="tx1"/>
           </a:solidFill>
@@ -3076,6 +2979,22 @@
       </a:lvl9pPr>
     </p:otherStyle>
   </p:txStyles>
+  <p:extLst>
+    <p:ext uri="{27BBF7A9-308A-43DC-89C8-2F10F3537804}">
+      <p15:sldGuideLst xmlns:p15="http://schemas.microsoft.com/office/powerpoint/2012/main">
+        <p15:guide id="1" orient="horz" pos="16128" userDrawn="1">
+          <p15:clr>
+            <a:srgbClr val="F26B43"/>
+          </p15:clr>
+        </p15:guide>
+        <p15:guide id="2" pos="16128" userDrawn="1">
+          <p15:clr>
+            <a:srgbClr val="F26B43"/>
+          </p15:clr>
+        </p15:guide>
+      </p15:sldGuideLst>
+    </p:ext>
+  </p:extLst>
 </p:sldMaster>
 </file>
 
@@ -3097,21 +3016,26 @@
         </p:nvSpPr>
         <p:spPr>
           <a:xfrm>
-            <a:off x="42976800" y="3396342"/>
+            <a:off x="42976800" y="18212653"/>
             <a:ext cx="1828800" cy="1828800"/>
           </a:xfrm>
           <a:prstGeom prst="ellipse">
             <a:avLst/>
           </a:prstGeom>
-        </p:spPr>
-        <p:style>
-          <a:lnRef idx="1">
-            <a:schemeClr val="accent1"/>
-          </a:lnRef>
-          <a:fillRef idx="3">
-            <a:schemeClr val="accent1"/>
-          </a:fillRef>
-          <a:effectRef idx="2">
+          <a:solidFill>
+            <a:schemeClr val="bg1"/>
+          </a:solidFill>
+        </p:spPr>
+        <p:style>
+          <a:lnRef idx="2">
+            <a:schemeClr val="accent1">
+              <a:shade val="50000"/>
+            </a:schemeClr>
+          </a:lnRef>
+          <a:fillRef idx="1">
+            <a:schemeClr val="accent1"/>
+          </a:fillRef>
+          <a:effectRef idx="0">
             <a:schemeClr val="accent1"/>
           </a:effectRef>
           <a:fontRef idx="minor">
@@ -3134,21 +3058,40 @@
         </p:nvSpPr>
         <p:spPr>
           <a:xfrm>
-            <a:off x="1828800" y="3396342"/>
+            <a:off x="1828800" y="18212653"/>
             <a:ext cx="42062400" cy="1828800"/>
           </a:xfrm>
           <a:prstGeom prst="rect">
             <a:avLst/>
           </a:prstGeom>
-        </p:spPr>
-        <p:style>
-          <a:lnRef idx="1">
-            <a:schemeClr val="accent1"/>
-          </a:lnRef>
-          <a:fillRef idx="3">
-            <a:schemeClr val="accent1"/>
-          </a:fillRef>
-          <a:effectRef idx="2">
+          <a:gradFill flip="none" rotWithShape="1">
+            <a:gsLst>
+              <a:gs pos="4000">
+                <a:schemeClr val="accent1"/>
+              </a:gs>
+              <a:gs pos="0">
+                <a:schemeClr val="accent1"/>
+              </a:gs>
+              <a:gs pos="7000">
+                <a:schemeClr val="bg1"/>
+              </a:gs>
+              <a:gs pos="100000">
+                <a:schemeClr val="bg1"/>
+              </a:gs>
+            </a:gsLst>
+            <a:lin ang="0" scaled="0"/>
+          </a:gradFill>
+        </p:spPr>
+        <p:style>
+          <a:lnRef idx="2">
+            <a:schemeClr val="accent1">
+              <a:shade val="50000"/>
+            </a:schemeClr>
+          </a:lnRef>
+          <a:fillRef idx="1">
+            <a:schemeClr val="accent1"/>
+          </a:fillRef>
+          <a:effectRef idx="0">
             <a:schemeClr val="accent1"/>
           </a:effectRef>
           <a:fontRef idx="minor">
@@ -3171,21 +3114,29 @@
         </p:nvSpPr>
         <p:spPr>
           <a:xfrm>
-            <a:off x="0" y="2481942"/>
+            <a:off x="0" y="17298253"/>
             <a:ext cx="3657600" cy="3657600"/>
           </a:xfrm>
           <a:prstGeom prst="ellipse">
             <a:avLst/>
           </a:prstGeom>
-        </p:spPr>
-        <p:style>
-          <a:lnRef idx="1">
-            <a:schemeClr val="accent1"/>
-          </a:lnRef>
-          <a:fillRef idx="3">
-            <a:schemeClr val="accent1"/>
-          </a:fillRef>
-          <a:effectRef idx="2">
+          <a:solidFill>
+            <a:schemeClr val="accent1"/>
+          </a:solidFill>
+          <a:ln>
+            <a:noFill/>
+          </a:ln>
+        </p:spPr>
+        <p:style>
+          <a:lnRef idx="2">
+            <a:schemeClr val="accent1">
+              <a:shade val="50000"/>
+            </a:schemeClr>
+          </a:lnRef>
+          <a:fillRef idx="1">
+            <a:schemeClr val="accent1"/>
+          </a:fillRef>
+          <a:effectRef idx="0">
             <a:schemeClr val="accent1"/>
           </a:effectRef>
           <a:fontRef idx="minor">
@@ -3208,21 +3159,29 @@
         </p:nvSpPr>
         <p:spPr>
           <a:xfrm>
-            <a:off x="43760231" y="5165885"/>
-            <a:ext cx="238125" cy="1800224"/>
+            <a:off x="43760257" y="18229935"/>
+            <a:ext cx="238109" cy="1800179"/>
           </a:xfrm>
           <a:prstGeom prst="rect">
             <a:avLst/>
           </a:prstGeom>
-        </p:spPr>
-        <p:style>
-          <a:lnRef idx="1">
-            <a:schemeClr val="accent1"/>
-          </a:lnRef>
-          <a:fillRef idx="3">
-            <a:schemeClr val="accent1"/>
-          </a:fillRef>
-          <a:effectRef idx="2">
+          <a:solidFill>
+            <a:schemeClr val="bg1"/>
+          </a:solidFill>
+          <a:ln>
+            <a:noFill/>
+          </a:ln>
+        </p:spPr>
+        <p:style>
+          <a:lnRef idx="2">
+            <a:schemeClr val="accent1">
+              <a:shade val="50000"/>
+            </a:schemeClr>
+          </a:lnRef>
+          <a:fillRef idx="1">
+            <a:schemeClr val="accent1"/>
+          </a:fillRef>
+          <a:effectRef idx="0">
             <a:schemeClr val="accent1"/>
           </a:effectRef>
           <a:fontRef idx="minor">
@@ -3245,21 +3204,26 @@
         </p:nvSpPr>
         <p:spPr>
           <a:xfrm>
-            <a:off x="42976800" y="3396342"/>
+            <a:off x="42976800" y="22468819"/>
             <a:ext cx="1828800" cy="1828800"/>
           </a:xfrm>
           <a:prstGeom prst="ellipse">
             <a:avLst/>
           </a:prstGeom>
-        </p:spPr>
-        <p:style>
-          <a:lnRef idx="1">
-            <a:schemeClr val="accent1"/>
-          </a:lnRef>
-          <a:fillRef idx="3">
-            <a:schemeClr val="accent1"/>
-          </a:fillRef>
-          <a:effectRef idx="2">
+          <a:solidFill>
+            <a:schemeClr val="bg1"/>
+          </a:solidFill>
+        </p:spPr>
+        <p:style>
+          <a:lnRef idx="2">
+            <a:schemeClr val="accent1">
+              <a:shade val="50000"/>
+            </a:schemeClr>
+          </a:lnRef>
+          <a:fillRef idx="1">
+            <a:schemeClr val="accent1"/>
+          </a:fillRef>
+          <a:effectRef idx="0">
             <a:schemeClr val="accent1"/>
           </a:effectRef>
           <a:fontRef idx="minor">
@@ -3282,21 +3246,40 @@
         </p:nvSpPr>
         <p:spPr>
           <a:xfrm>
-            <a:off x="1828800" y="3396342"/>
+            <a:off x="1828800" y="22468819"/>
             <a:ext cx="42062400" cy="1828800"/>
           </a:xfrm>
           <a:prstGeom prst="rect">
             <a:avLst/>
           </a:prstGeom>
-        </p:spPr>
-        <p:style>
-          <a:lnRef idx="1">
-            <a:schemeClr val="accent1"/>
-          </a:lnRef>
-          <a:fillRef idx="3">
-            <a:schemeClr val="accent1"/>
-          </a:fillRef>
-          <a:effectRef idx="2">
+          <a:gradFill flip="none" rotWithShape="1">
+            <a:gsLst>
+              <a:gs pos="0">
+                <a:schemeClr val="accent1"/>
+              </a:gs>
+              <a:gs pos="11000">
+                <a:schemeClr val="bg1"/>
+              </a:gs>
+              <a:gs pos="9000">
+                <a:schemeClr val="accent1"/>
+              </a:gs>
+              <a:gs pos="100000">
+                <a:schemeClr val="bg1"/>
+              </a:gs>
+            </a:gsLst>
+            <a:lin ang="0" scaled="0"/>
+          </a:gradFill>
+        </p:spPr>
+        <p:style>
+          <a:lnRef idx="2">
+            <a:schemeClr val="accent1">
+              <a:shade val="50000"/>
+            </a:schemeClr>
+          </a:lnRef>
+          <a:fillRef idx="1">
+            <a:schemeClr val="accent1"/>
+          </a:fillRef>
+          <a:effectRef idx="0">
             <a:schemeClr val="accent1"/>
           </a:effectRef>
           <a:fontRef idx="minor">
@@ -3319,21 +3302,29 @@
         </p:nvSpPr>
         <p:spPr>
           <a:xfrm>
-            <a:off x="0" y="2481942"/>
+            <a:off x="0" y="21554419"/>
             <a:ext cx="3657600" cy="3657600"/>
           </a:xfrm>
           <a:prstGeom prst="ellipse">
             <a:avLst/>
           </a:prstGeom>
-        </p:spPr>
-        <p:style>
-          <a:lnRef idx="1">
-            <a:schemeClr val="accent1"/>
-          </a:lnRef>
-          <a:fillRef idx="3">
-            <a:schemeClr val="accent1"/>
-          </a:fillRef>
-          <a:effectRef idx="2">
+          <a:solidFill>
+            <a:schemeClr val="accent1"/>
+          </a:solidFill>
+          <a:ln>
+            <a:noFill/>
+          </a:ln>
+        </p:spPr>
+        <p:style>
+          <a:lnRef idx="2">
+            <a:schemeClr val="accent1">
+              <a:shade val="50000"/>
+            </a:schemeClr>
+          </a:lnRef>
+          <a:fillRef idx="1">
+            <a:schemeClr val="accent1"/>
+          </a:fillRef>
+          <a:effectRef idx="0">
             <a:schemeClr val="accent1"/>
           </a:effectRef>
           <a:fontRef idx="minor">
@@ -3356,21 +3347,29 @@
         </p:nvSpPr>
         <p:spPr>
           <a:xfrm>
-            <a:off x="43760231" y="5165885"/>
-            <a:ext cx="238125" cy="1800224"/>
+            <a:off x="43760257" y="22486101"/>
+            <a:ext cx="238109" cy="1800179"/>
           </a:xfrm>
           <a:prstGeom prst="rect">
             <a:avLst/>
           </a:prstGeom>
-        </p:spPr>
-        <p:style>
-          <a:lnRef idx="1">
-            <a:schemeClr val="accent1"/>
-          </a:lnRef>
-          <a:fillRef idx="3">
-            <a:schemeClr val="accent1"/>
-          </a:fillRef>
-          <a:effectRef idx="2">
+          <a:solidFill>
+            <a:schemeClr val="bg1"/>
+          </a:solidFill>
+          <a:ln>
+            <a:noFill/>
+          </a:ln>
+        </p:spPr>
+        <p:style>
+          <a:lnRef idx="2">
+            <a:schemeClr val="accent1">
+              <a:shade val="50000"/>
+            </a:schemeClr>
+          </a:lnRef>
+          <a:fillRef idx="1">
+            <a:schemeClr val="accent1"/>
+          </a:fillRef>
+          <a:effectRef idx="0">
             <a:schemeClr val="accent1"/>
           </a:effectRef>
           <a:fontRef idx="minor">
@@ -3393,21 +3392,26 @@
         </p:nvSpPr>
         <p:spPr>
           <a:xfrm>
-            <a:off x="42976800" y="3396342"/>
+            <a:off x="42976800" y="26724985"/>
             <a:ext cx="1828800" cy="1828800"/>
           </a:xfrm>
           <a:prstGeom prst="ellipse">
             <a:avLst/>
           </a:prstGeom>
-        </p:spPr>
-        <p:style>
-          <a:lnRef idx="1">
-            <a:schemeClr val="accent1"/>
-          </a:lnRef>
-          <a:fillRef idx="3">
-            <a:schemeClr val="accent1"/>
-          </a:fillRef>
-          <a:effectRef idx="2">
+          <a:solidFill>
+            <a:schemeClr val="bg1"/>
+          </a:solidFill>
+        </p:spPr>
+        <p:style>
+          <a:lnRef idx="2">
+            <a:schemeClr val="accent1">
+              <a:shade val="50000"/>
+            </a:schemeClr>
+          </a:lnRef>
+          <a:fillRef idx="1">
+            <a:schemeClr val="accent1"/>
+          </a:fillRef>
+          <a:effectRef idx="0">
             <a:schemeClr val="accent1"/>
           </a:effectRef>
           <a:fontRef idx="minor">
@@ -3430,21 +3434,40 @@
         </p:nvSpPr>
         <p:spPr>
           <a:xfrm>
-            <a:off x="1828800" y="3396342"/>
+            <a:off x="1828800" y="26724985"/>
             <a:ext cx="42062400" cy="1828800"/>
           </a:xfrm>
           <a:prstGeom prst="rect">
             <a:avLst/>
           </a:prstGeom>
-        </p:spPr>
-        <p:style>
-          <a:lnRef idx="1">
-            <a:schemeClr val="accent1"/>
-          </a:lnRef>
-          <a:fillRef idx="3">
-            <a:schemeClr val="accent1"/>
-          </a:fillRef>
-          <a:effectRef idx="2">
+          <a:gradFill flip="none" rotWithShape="1">
+            <a:gsLst>
+              <a:gs pos="0">
+                <a:schemeClr val="accent1"/>
+              </a:gs>
+              <a:gs pos="16000">
+                <a:schemeClr val="bg1"/>
+              </a:gs>
+              <a:gs pos="14000">
+                <a:schemeClr val="accent1"/>
+              </a:gs>
+              <a:gs pos="100000">
+                <a:schemeClr val="bg1"/>
+              </a:gs>
+            </a:gsLst>
+            <a:lin ang="0" scaled="0"/>
+          </a:gradFill>
+        </p:spPr>
+        <p:style>
+          <a:lnRef idx="2">
+            <a:schemeClr val="accent1">
+              <a:shade val="50000"/>
+            </a:schemeClr>
+          </a:lnRef>
+          <a:fillRef idx="1">
+            <a:schemeClr val="accent1"/>
+          </a:fillRef>
+          <a:effectRef idx="0">
             <a:schemeClr val="accent1"/>
           </a:effectRef>
           <a:fontRef idx="minor">
@@ -3467,21 +3490,29 @@
         </p:nvSpPr>
         <p:spPr>
           <a:xfrm>
-            <a:off x="0" y="2481942"/>
+            <a:off x="0" y="25810585"/>
             <a:ext cx="3657600" cy="3657600"/>
           </a:xfrm>
           <a:prstGeom prst="ellipse">
             <a:avLst/>
           </a:prstGeom>
-        </p:spPr>
-        <p:style>
-          <a:lnRef idx="1">
-            <a:schemeClr val="accent1"/>
-          </a:lnRef>
-          <a:fillRef idx="3">
-            <a:schemeClr val="accent1"/>
-          </a:fillRef>
-          <a:effectRef idx="2">
+          <a:solidFill>
+            <a:schemeClr val="accent1"/>
+          </a:solidFill>
+          <a:ln>
+            <a:noFill/>
+          </a:ln>
+        </p:spPr>
+        <p:style>
+          <a:lnRef idx="2">
+            <a:schemeClr val="accent1">
+              <a:shade val="50000"/>
+            </a:schemeClr>
+          </a:lnRef>
+          <a:fillRef idx="1">
+            <a:schemeClr val="accent1"/>
+          </a:fillRef>
+          <a:effectRef idx="0">
             <a:schemeClr val="accent1"/>
           </a:effectRef>
           <a:fontRef idx="minor">
@@ -3504,21 +3535,29 @@
         </p:nvSpPr>
         <p:spPr>
           <a:xfrm>
-            <a:off x="43760231" y="5165885"/>
-            <a:ext cx="238125" cy="1800224"/>
+            <a:off x="43760257" y="26742268"/>
+            <a:ext cx="238109" cy="1800179"/>
           </a:xfrm>
           <a:prstGeom prst="rect">
             <a:avLst/>
           </a:prstGeom>
-        </p:spPr>
-        <p:style>
-          <a:lnRef idx="1">
-            <a:schemeClr val="accent1"/>
-          </a:lnRef>
-          <a:fillRef idx="3">
-            <a:schemeClr val="accent1"/>
-          </a:fillRef>
-          <a:effectRef idx="2">
+          <a:solidFill>
+            <a:schemeClr val="bg1"/>
+          </a:solidFill>
+          <a:ln>
+            <a:noFill/>
+          </a:ln>
+        </p:spPr>
+        <p:style>
+          <a:lnRef idx="2">
+            <a:schemeClr val="accent1">
+              <a:shade val="50000"/>
+            </a:schemeClr>
+          </a:lnRef>
+          <a:fillRef idx="1">
+            <a:schemeClr val="accent1"/>
+          </a:fillRef>
+          <a:effectRef idx="0">
             <a:schemeClr val="accent1"/>
           </a:effectRef>
           <a:fontRef idx="minor">
@@ -3541,21 +3580,26 @@
         </p:nvSpPr>
         <p:spPr>
           <a:xfrm>
-            <a:off x="42976800" y="3396342"/>
+            <a:off x="42976800" y="30981243"/>
             <a:ext cx="1828800" cy="1828800"/>
           </a:xfrm>
           <a:prstGeom prst="ellipse">
             <a:avLst/>
           </a:prstGeom>
-        </p:spPr>
-        <p:style>
-          <a:lnRef idx="1">
-            <a:schemeClr val="accent1"/>
-          </a:lnRef>
-          <a:fillRef idx="3">
-            <a:schemeClr val="accent1"/>
-          </a:fillRef>
-          <a:effectRef idx="2">
+          <a:solidFill>
+            <a:schemeClr val="bg1"/>
+          </a:solidFill>
+        </p:spPr>
+        <p:style>
+          <a:lnRef idx="2">
+            <a:schemeClr val="accent1">
+              <a:shade val="50000"/>
+            </a:schemeClr>
+          </a:lnRef>
+          <a:fillRef idx="1">
+            <a:schemeClr val="accent1"/>
+          </a:fillRef>
+          <a:effectRef idx="0">
             <a:schemeClr val="accent1"/>
           </a:effectRef>
           <a:fontRef idx="minor">
@@ -3578,21 +3622,40 @@
         </p:nvSpPr>
         <p:spPr>
           <a:xfrm>
-            <a:off x="1828800" y="3396342"/>
+            <a:off x="1828800" y="30981243"/>
             <a:ext cx="42062400" cy="1828800"/>
           </a:xfrm>
           <a:prstGeom prst="rect">
             <a:avLst/>
           </a:prstGeom>
-        </p:spPr>
-        <p:style>
-          <a:lnRef idx="1">
-            <a:schemeClr val="accent1"/>
-          </a:lnRef>
-          <a:fillRef idx="3">
-            <a:schemeClr val="accent1"/>
-          </a:fillRef>
-          <a:effectRef idx="2">
+          <a:gradFill flip="none" rotWithShape="1">
+            <a:gsLst>
+              <a:gs pos="0">
+                <a:schemeClr val="accent1"/>
+              </a:gs>
+              <a:gs pos="22000">
+                <a:schemeClr val="bg1"/>
+              </a:gs>
+              <a:gs pos="20000">
+                <a:schemeClr val="accent1"/>
+              </a:gs>
+              <a:gs pos="100000">
+                <a:schemeClr val="bg1"/>
+              </a:gs>
+            </a:gsLst>
+            <a:lin ang="0" scaled="0"/>
+          </a:gradFill>
+        </p:spPr>
+        <p:style>
+          <a:lnRef idx="2">
+            <a:schemeClr val="accent1">
+              <a:shade val="50000"/>
+            </a:schemeClr>
+          </a:lnRef>
+          <a:fillRef idx="1">
+            <a:schemeClr val="accent1"/>
+          </a:fillRef>
+          <a:effectRef idx="0">
             <a:schemeClr val="accent1"/>
           </a:effectRef>
           <a:fontRef idx="minor">
@@ -3615,21 +3678,29 @@
         </p:nvSpPr>
         <p:spPr>
           <a:xfrm>
-            <a:off x="0" y="2481942"/>
+            <a:off x="0" y="30066843"/>
             <a:ext cx="3657600" cy="3657600"/>
           </a:xfrm>
           <a:prstGeom prst="ellipse">
             <a:avLst/>
           </a:prstGeom>
-        </p:spPr>
-        <p:style>
-          <a:lnRef idx="1">
-            <a:schemeClr val="accent1"/>
-          </a:lnRef>
-          <a:fillRef idx="3">
-            <a:schemeClr val="accent1"/>
-          </a:fillRef>
-          <a:effectRef idx="2">
+          <a:solidFill>
+            <a:schemeClr val="accent1"/>
+          </a:solidFill>
+          <a:ln>
+            <a:noFill/>
+          </a:ln>
+        </p:spPr>
+        <p:style>
+          <a:lnRef idx="2">
+            <a:schemeClr val="accent1">
+              <a:shade val="50000"/>
+            </a:schemeClr>
+          </a:lnRef>
+          <a:fillRef idx="1">
+            <a:schemeClr val="accent1"/>
+          </a:fillRef>
+          <a:effectRef idx="0">
             <a:schemeClr val="accent1"/>
           </a:effectRef>
           <a:fontRef idx="minor">
@@ -3652,21 +3723,29 @@
         </p:nvSpPr>
         <p:spPr>
           <a:xfrm>
-            <a:off x="43760231" y="5165885"/>
-            <a:ext cx="238125" cy="1800224"/>
+            <a:off x="43760257" y="30998525"/>
+            <a:ext cx="238109" cy="1800179"/>
           </a:xfrm>
           <a:prstGeom prst="rect">
             <a:avLst/>
           </a:prstGeom>
-        </p:spPr>
-        <p:style>
-          <a:lnRef idx="1">
-            <a:schemeClr val="accent1"/>
-          </a:lnRef>
-          <a:fillRef idx="3">
-            <a:schemeClr val="accent1"/>
-          </a:fillRef>
-          <a:effectRef idx="2">
+          <a:solidFill>
+            <a:schemeClr val="bg1"/>
+          </a:solidFill>
+          <a:ln>
+            <a:noFill/>
+          </a:ln>
+        </p:spPr>
+        <p:style>
+          <a:lnRef idx="2">
+            <a:schemeClr val="accent1">
+              <a:shade val="50000"/>
+            </a:schemeClr>
+          </a:lnRef>
+          <a:fillRef idx="1">
+            <a:schemeClr val="accent1"/>
+          </a:fillRef>
+          <a:effectRef idx="0">
             <a:schemeClr val="accent1"/>
           </a:effectRef>
           <a:fontRef idx="minor">
@@ -3689,21 +3768,26 @@
         </p:nvSpPr>
         <p:spPr>
           <a:xfrm>
-            <a:off x="42976800" y="3396342"/>
+            <a:off x="42976800" y="35237409"/>
             <a:ext cx="1828800" cy="1828800"/>
           </a:xfrm>
           <a:prstGeom prst="ellipse">
             <a:avLst/>
           </a:prstGeom>
-        </p:spPr>
-        <p:style>
-          <a:lnRef idx="1">
-            <a:schemeClr val="accent1"/>
-          </a:lnRef>
-          <a:fillRef idx="3">
-            <a:schemeClr val="accent1"/>
-          </a:fillRef>
-          <a:effectRef idx="2">
+          <a:solidFill>
+            <a:schemeClr val="bg1"/>
+          </a:solidFill>
+        </p:spPr>
+        <p:style>
+          <a:lnRef idx="2">
+            <a:schemeClr val="accent1">
+              <a:shade val="50000"/>
+            </a:schemeClr>
+          </a:lnRef>
+          <a:fillRef idx="1">
+            <a:schemeClr val="accent1"/>
+          </a:fillRef>
+          <a:effectRef idx="0">
             <a:schemeClr val="accent1"/>
           </a:effectRef>
           <a:fontRef idx="minor">
@@ -3726,21 +3810,40 @@
         </p:nvSpPr>
         <p:spPr>
           <a:xfrm>
-            <a:off x="1828800" y="3396342"/>
+            <a:off x="1828800" y="35237409"/>
             <a:ext cx="42062400" cy="1828800"/>
           </a:xfrm>
           <a:prstGeom prst="rect">
             <a:avLst/>
           </a:prstGeom>
-        </p:spPr>
-        <p:style>
-          <a:lnRef idx="1">
-            <a:schemeClr val="accent1"/>
-          </a:lnRef>
-          <a:fillRef idx="3">
-            <a:schemeClr val="accent1"/>
-          </a:fillRef>
-          <a:effectRef idx="2">
+          <a:gradFill flip="none" rotWithShape="1">
+            <a:gsLst>
+              <a:gs pos="0">
+                <a:schemeClr val="accent1"/>
+              </a:gs>
+              <a:gs pos="27000">
+                <a:schemeClr val="bg1"/>
+              </a:gs>
+              <a:gs pos="25000">
+                <a:schemeClr val="accent1"/>
+              </a:gs>
+              <a:gs pos="100000">
+                <a:schemeClr val="bg1"/>
+              </a:gs>
+            </a:gsLst>
+            <a:lin ang="0" scaled="0"/>
+          </a:gradFill>
+        </p:spPr>
+        <p:style>
+          <a:lnRef idx="2">
+            <a:schemeClr val="accent1">
+              <a:shade val="50000"/>
+            </a:schemeClr>
+          </a:lnRef>
+          <a:fillRef idx="1">
+            <a:schemeClr val="accent1"/>
+          </a:fillRef>
+          <a:effectRef idx="0">
             <a:schemeClr val="accent1"/>
           </a:effectRef>
           <a:fontRef idx="minor">
@@ -3763,21 +3866,29 @@
         </p:nvSpPr>
         <p:spPr>
           <a:xfrm>
-            <a:off x="0" y="2481942"/>
+            <a:off x="0" y="34323009"/>
             <a:ext cx="3657600" cy="3657600"/>
           </a:xfrm>
           <a:prstGeom prst="ellipse">
             <a:avLst/>
           </a:prstGeom>
-        </p:spPr>
-        <p:style>
-          <a:lnRef idx="1">
-            <a:schemeClr val="accent1"/>
-          </a:lnRef>
-          <a:fillRef idx="3">
-            <a:schemeClr val="accent1"/>
-          </a:fillRef>
-          <a:effectRef idx="2">
+          <a:solidFill>
+            <a:schemeClr val="accent1"/>
+          </a:solidFill>
+          <a:ln>
+            <a:noFill/>
+          </a:ln>
+        </p:spPr>
+        <p:style>
+          <a:lnRef idx="2">
+            <a:schemeClr val="accent1">
+              <a:shade val="50000"/>
+            </a:schemeClr>
+          </a:lnRef>
+          <a:fillRef idx="1">
+            <a:schemeClr val="accent1"/>
+          </a:fillRef>
+          <a:effectRef idx="0">
             <a:schemeClr val="accent1"/>
           </a:effectRef>
           <a:fontRef idx="minor">
@@ -3800,21 +3911,29 @@
         </p:nvSpPr>
         <p:spPr>
           <a:xfrm>
-            <a:off x="43760231" y="5165885"/>
-            <a:ext cx="238125" cy="1800224"/>
+            <a:off x="43760257" y="35254692"/>
+            <a:ext cx="238109" cy="1800179"/>
           </a:xfrm>
           <a:prstGeom prst="rect">
             <a:avLst/>
           </a:prstGeom>
-        </p:spPr>
-        <p:style>
-          <a:lnRef idx="1">
-            <a:schemeClr val="accent1"/>
-          </a:lnRef>
-          <a:fillRef idx="3">
-            <a:schemeClr val="accent1"/>
-          </a:fillRef>
-          <a:effectRef idx="2">
+          <a:solidFill>
+            <a:schemeClr val="bg1"/>
+          </a:solidFill>
+          <a:ln>
+            <a:noFill/>
+          </a:ln>
+        </p:spPr>
+        <p:style>
+          <a:lnRef idx="2">
+            <a:schemeClr val="accent1">
+              <a:shade val="50000"/>
+            </a:schemeClr>
+          </a:lnRef>
+          <a:fillRef idx="1">
+            <a:schemeClr val="accent1"/>
+          </a:fillRef>
+          <a:effectRef idx="0">
             <a:schemeClr val="accent1"/>
           </a:effectRef>
           <a:fontRef idx="minor">
@@ -3837,21 +3956,26 @@
         </p:nvSpPr>
         <p:spPr>
           <a:xfrm>
-            <a:off x="42976800" y="3396342"/>
+            <a:off x="42976800" y="39493576"/>
             <a:ext cx="1828800" cy="1828800"/>
           </a:xfrm>
           <a:prstGeom prst="ellipse">
             <a:avLst/>
           </a:prstGeom>
-        </p:spPr>
-        <p:style>
-          <a:lnRef idx="1">
-            <a:schemeClr val="accent1"/>
-          </a:lnRef>
-          <a:fillRef idx="3">
-            <a:schemeClr val="accent1"/>
-          </a:fillRef>
-          <a:effectRef idx="2">
+          <a:solidFill>
+            <a:schemeClr val="bg1"/>
+          </a:solidFill>
+        </p:spPr>
+        <p:style>
+          <a:lnRef idx="2">
+            <a:schemeClr val="accent1">
+              <a:shade val="50000"/>
+            </a:schemeClr>
+          </a:lnRef>
+          <a:fillRef idx="1">
+            <a:schemeClr val="accent1"/>
+          </a:fillRef>
+          <a:effectRef idx="0">
             <a:schemeClr val="accent1"/>
           </a:effectRef>
           <a:fontRef idx="minor">
@@ -3874,21 +3998,40 @@
         </p:nvSpPr>
         <p:spPr>
           <a:xfrm>
-            <a:off x="1828800" y="3396342"/>
+            <a:off x="1828800" y="39493576"/>
             <a:ext cx="42062400" cy="1828800"/>
           </a:xfrm>
           <a:prstGeom prst="rect">
             <a:avLst/>
           </a:prstGeom>
-        </p:spPr>
-        <p:style>
-          <a:lnRef idx="1">
-            <a:schemeClr val="accent1"/>
-          </a:lnRef>
-          <a:fillRef idx="3">
-            <a:schemeClr val="accent1"/>
-          </a:fillRef>
-          <a:effectRef idx="2">
+          <a:gradFill flip="none" rotWithShape="1">
+            <a:gsLst>
+              <a:gs pos="0">
+                <a:schemeClr val="accent1"/>
+              </a:gs>
+              <a:gs pos="33000">
+                <a:schemeClr val="bg1"/>
+              </a:gs>
+              <a:gs pos="31000">
+                <a:schemeClr val="accent1"/>
+              </a:gs>
+              <a:gs pos="100000">
+                <a:schemeClr val="bg1"/>
+              </a:gs>
+            </a:gsLst>
+            <a:lin ang="0" scaled="0"/>
+          </a:gradFill>
+        </p:spPr>
+        <p:style>
+          <a:lnRef idx="2">
+            <a:schemeClr val="accent1">
+              <a:shade val="50000"/>
+            </a:schemeClr>
+          </a:lnRef>
+          <a:fillRef idx="1">
+            <a:schemeClr val="accent1"/>
+          </a:fillRef>
+          <a:effectRef idx="0">
             <a:schemeClr val="accent1"/>
           </a:effectRef>
           <a:fontRef idx="minor">
@@ -3911,21 +4054,29 @@
         </p:nvSpPr>
         <p:spPr>
           <a:xfrm>
-            <a:off x="0" y="2481942"/>
+            <a:off x="0" y="38579176"/>
             <a:ext cx="3657600" cy="3657600"/>
           </a:xfrm>
           <a:prstGeom prst="ellipse">
             <a:avLst/>
           </a:prstGeom>
-        </p:spPr>
-        <p:style>
-          <a:lnRef idx="1">
-            <a:schemeClr val="accent1"/>
-          </a:lnRef>
-          <a:fillRef idx="3">
-            <a:schemeClr val="accent1"/>
-          </a:fillRef>
-          <a:effectRef idx="2">
+          <a:solidFill>
+            <a:schemeClr val="accent1"/>
+          </a:solidFill>
+          <a:ln>
+            <a:noFill/>
+          </a:ln>
+        </p:spPr>
+        <p:style>
+          <a:lnRef idx="2">
+            <a:schemeClr val="accent1">
+              <a:shade val="50000"/>
+            </a:schemeClr>
+          </a:lnRef>
+          <a:fillRef idx="1">
+            <a:schemeClr val="accent1"/>
+          </a:fillRef>
+          <a:effectRef idx="0">
             <a:schemeClr val="accent1"/>
           </a:effectRef>
           <a:fontRef idx="minor">
@@ -3948,21 +4099,29 @@
         </p:nvSpPr>
         <p:spPr>
           <a:xfrm>
-            <a:off x="43760231" y="5165885"/>
-            <a:ext cx="238125" cy="1800224"/>
+            <a:off x="43760257" y="39510858"/>
+            <a:ext cx="238109" cy="1800179"/>
           </a:xfrm>
           <a:prstGeom prst="rect">
             <a:avLst/>
           </a:prstGeom>
-        </p:spPr>
-        <p:style>
-          <a:lnRef idx="1">
-            <a:schemeClr val="accent1"/>
-          </a:lnRef>
-          <a:fillRef idx="3">
-            <a:schemeClr val="accent1"/>
-          </a:fillRef>
-          <a:effectRef idx="2">
+          <a:solidFill>
+            <a:schemeClr val="bg1"/>
+          </a:solidFill>
+          <a:ln>
+            <a:noFill/>
+          </a:ln>
+        </p:spPr>
+        <p:style>
+          <a:lnRef idx="2">
+            <a:schemeClr val="accent1">
+              <a:shade val="50000"/>
+            </a:schemeClr>
+          </a:lnRef>
+          <a:fillRef idx="1">
+            <a:schemeClr val="accent1"/>
+          </a:fillRef>
+          <a:effectRef idx="0">
             <a:schemeClr val="accent1"/>
           </a:effectRef>
           <a:fontRef idx="minor">
@@ -3985,21 +4144,26 @@
         </p:nvSpPr>
         <p:spPr>
           <a:xfrm>
-            <a:off x="42976800" y="3396342"/>
+            <a:off x="42976800" y="43749833"/>
             <a:ext cx="1828800" cy="1828800"/>
           </a:xfrm>
           <a:prstGeom prst="ellipse">
             <a:avLst/>
           </a:prstGeom>
-        </p:spPr>
-        <p:style>
-          <a:lnRef idx="1">
-            <a:schemeClr val="accent1"/>
-          </a:lnRef>
-          <a:fillRef idx="3">
-            <a:schemeClr val="accent1"/>
-          </a:fillRef>
-          <a:effectRef idx="2">
+          <a:solidFill>
+            <a:schemeClr val="bg1"/>
+          </a:solidFill>
+        </p:spPr>
+        <p:style>
+          <a:lnRef idx="2">
+            <a:schemeClr val="accent1">
+              <a:shade val="50000"/>
+            </a:schemeClr>
+          </a:lnRef>
+          <a:fillRef idx="1">
+            <a:schemeClr val="accent1"/>
+          </a:fillRef>
+          <a:effectRef idx="0">
             <a:schemeClr val="accent1"/>
           </a:effectRef>
           <a:fontRef idx="minor">
@@ -4022,21 +4186,40 @@
         </p:nvSpPr>
         <p:spPr>
           <a:xfrm>
-            <a:off x="1828800" y="3396342"/>
+            <a:off x="1828800" y="43749833"/>
             <a:ext cx="42062400" cy="1828800"/>
           </a:xfrm>
           <a:prstGeom prst="rect">
             <a:avLst/>
           </a:prstGeom>
-        </p:spPr>
-        <p:style>
-          <a:lnRef idx="1">
-            <a:schemeClr val="accent1"/>
-          </a:lnRef>
-          <a:fillRef idx="3">
-            <a:schemeClr val="accent1"/>
-          </a:fillRef>
-          <a:effectRef idx="2">
+          <a:gradFill flip="none" rotWithShape="1">
+            <a:gsLst>
+              <a:gs pos="0">
+                <a:schemeClr val="accent1"/>
+              </a:gs>
+              <a:gs pos="38000">
+                <a:schemeClr val="bg1"/>
+              </a:gs>
+              <a:gs pos="36000">
+                <a:schemeClr val="accent1"/>
+              </a:gs>
+              <a:gs pos="100000">
+                <a:schemeClr val="bg1"/>
+              </a:gs>
+            </a:gsLst>
+            <a:lin ang="0" scaled="0"/>
+          </a:gradFill>
+        </p:spPr>
+        <p:style>
+          <a:lnRef idx="2">
+            <a:schemeClr val="accent1">
+              <a:shade val="50000"/>
+            </a:schemeClr>
+          </a:lnRef>
+          <a:fillRef idx="1">
+            <a:schemeClr val="accent1"/>
+          </a:fillRef>
+          <a:effectRef idx="0">
             <a:schemeClr val="accent1"/>
           </a:effectRef>
           <a:fontRef idx="minor">
@@ -4059,21 +4242,29 @@
         </p:nvSpPr>
         <p:spPr>
           <a:xfrm>
-            <a:off x="0" y="2481942"/>
+            <a:off x="0" y="42835433"/>
             <a:ext cx="3657600" cy="3657600"/>
           </a:xfrm>
           <a:prstGeom prst="ellipse">
             <a:avLst/>
           </a:prstGeom>
-        </p:spPr>
-        <p:style>
-          <a:lnRef idx="1">
-            <a:schemeClr val="accent1"/>
-          </a:lnRef>
-          <a:fillRef idx="3">
-            <a:schemeClr val="accent1"/>
-          </a:fillRef>
-          <a:effectRef idx="2">
+          <a:solidFill>
+            <a:schemeClr val="accent1"/>
+          </a:solidFill>
+          <a:ln>
+            <a:noFill/>
+          </a:ln>
+        </p:spPr>
+        <p:style>
+          <a:lnRef idx="2">
+            <a:schemeClr val="accent1">
+              <a:shade val="50000"/>
+            </a:schemeClr>
+          </a:lnRef>
+          <a:fillRef idx="1">
+            <a:schemeClr val="accent1"/>
+          </a:fillRef>
+          <a:effectRef idx="0">
             <a:schemeClr val="accent1"/>
           </a:effectRef>
           <a:fontRef idx="minor">
@@ -4096,21 +4287,29 @@
         </p:nvSpPr>
         <p:spPr>
           <a:xfrm>
-            <a:off x="43760231" y="5165885"/>
-            <a:ext cx="238125" cy="1800224"/>
+            <a:off x="43760257" y="43767115"/>
+            <a:ext cx="238109" cy="1800179"/>
           </a:xfrm>
           <a:prstGeom prst="rect">
             <a:avLst/>
           </a:prstGeom>
-        </p:spPr>
-        <p:style>
-          <a:lnRef idx="1">
-            <a:schemeClr val="accent1"/>
-          </a:lnRef>
-          <a:fillRef idx="3">
-            <a:schemeClr val="accent1"/>
-          </a:fillRef>
-          <a:effectRef idx="2">
+          <a:solidFill>
+            <a:schemeClr val="bg1"/>
+          </a:solidFill>
+          <a:ln>
+            <a:noFill/>
+          </a:ln>
+        </p:spPr>
+        <p:style>
+          <a:lnRef idx="2">
+            <a:schemeClr val="accent1">
+              <a:shade val="50000"/>
+            </a:schemeClr>
+          </a:lnRef>
+          <a:fillRef idx="1">
+            <a:schemeClr val="accent1"/>
+          </a:fillRef>
+          <a:effectRef idx="0">
             <a:schemeClr val="accent1"/>
           </a:effectRef>
           <a:fontRef idx="minor">
@@ -4133,21 +4332,26 @@
         </p:nvSpPr>
         <p:spPr>
           <a:xfrm>
-            <a:off x="42976800" y="3396342"/>
+            <a:off x="42976800" y="48006000"/>
             <a:ext cx="1828800" cy="1828800"/>
           </a:xfrm>
           <a:prstGeom prst="ellipse">
             <a:avLst/>
           </a:prstGeom>
-        </p:spPr>
-        <p:style>
-          <a:lnRef idx="1">
-            <a:schemeClr val="accent1"/>
-          </a:lnRef>
-          <a:fillRef idx="3">
-            <a:schemeClr val="accent1"/>
-          </a:fillRef>
-          <a:effectRef idx="2">
+          <a:solidFill>
+            <a:schemeClr val="bg1"/>
+          </a:solidFill>
+        </p:spPr>
+        <p:style>
+          <a:lnRef idx="2">
+            <a:schemeClr val="accent1">
+              <a:shade val="50000"/>
+            </a:schemeClr>
+          </a:lnRef>
+          <a:fillRef idx="1">
+            <a:schemeClr val="accent1"/>
+          </a:fillRef>
+          <a:effectRef idx="0">
             <a:schemeClr val="accent1"/>
           </a:effectRef>
           <a:fontRef idx="minor">
@@ -4170,21 +4374,40 @@
         </p:nvSpPr>
         <p:spPr>
           <a:xfrm>
-            <a:off x="1828800" y="3396342"/>
+            <a:off x="1828800" y="48006000"/>
             <a:ext cx="42062400" cy="1828800"/>
           </a:xfrm>
           <a:prstGeom prst="rect">
             <a:avLst/>
           </a:prstGeom>
-        </p:spPr>
-        <p:style>
-          <a:lnRef idx="1">
-            <a:schemeClr val="accent1"/>
-          </a:lnRef>
-          <a:fillRef idx="3">
-            <a:schemeClr val="accent1"/>
-          </a:fillRef>
-          <a:effectRef idx="2">
+          <a:gradFill flip="none" rotWithShape="1">
+            <a:gsLst>
+              <a:gs pos="0">
+                <a:schemeClr val="accent1"/>
+              </a:gs>
+              <a:gs pos="43000">
+                <a:schemeClr val="bg1"/>
+              </a:gs>
+              <a:gs pos="41000">
+                <a:schemeClr val="accent1"/>
+              </a:gs>
+              <a:gs pos="100000">
+                <a:schemeClr val="bg1"/>
+              </a:gs>
+            </a:gsLst>
+            <a:lin ang="0" scaled="0"/>
+          </a:gradFill>
+        </p:spPr>
+        <p:style>
+          <a:lnRef idx="2">
+            <a:schemeClr val="accent1">
+              <a:shade val="50000"/>
+            </a:schemeClr>
+          </a:lnRef>
+          <a:fillRef idx="1">
+            <a:schemeClr val="accent1"/>
+          </a:fillRef>
+          <a:effectRef idx="0">
             <a:schemeClr val="accent1"/>
           </a:effectRef>
           <a:fontRef idx="minor">
@@ -4207,21 +4430,29 @@
         </p:nvSpPr>
         <p:spPr>
           <a:xfrm>
-            <a:off x="0" y="2481942"/>
+            <a:off x="0" y="47091600"/>
             <a:ext cx="3657600" cy="3657600"/>
           </a:xfrm>
           <a:prstGeom prst="ellipse">
             <a:avLst/>
           </a:prstGeom>
-        </p:spPr>
-        <p:style>
-          <a:lnRef idx="1">
-            <a:schemeClr val="accent1"/>
-          </a:lnRef>
-          <a:fillRef idx="3">
-            <a:schemeClr val="accent1"/>
-          </a:fillRef>
-          <a:effectRef idx="2">
+          <a:solidFill>
+            <a:schemeClr val="accent1"/>
+          </a:solidFill>
+          <a:ln>
+            <a:noFill/>
+          </a:ln>
+        </p:spPr>
+        <p:style>
+          <a:lnRef idx="2">
+            <a:schemeClr val="accent1">
+              <a:shade val="50000"/>
+            </a:schemeClr>
+          </a:lnRef>
+          <a:fillRef idx="1">
+            <a:schemeClr val="accent1"/>
+          </a:fillRef>
+          <a:effectRef idx="0">
             <a:schemeClr val="accent1"/>
           </a:effectRef>
           <a:fontRef idx="minor">
@@ -4244,69 +4475,70 @@
         </p:nvSpPr>
         <p:spPr>
           <a:xfrm>
-            <a:off x="43760231" y="5165885"/>
-            <a:ext cx="238125" cy="1800224"/>
+            <a:off x="43760257" y="48023282"/>
+            <a:ext cx="238109" cy="1800179"/>
           </a:xfrm>
           <a:prstGeom prst="rect">
             <a:avLst/>
           </a:prstGeom>
-        </p:spPr>
-        <p:style>
-          <a:lnRef idx="1">
-            <a:schemeClr val="accent1"/>
-          </a:lnRef>
-          <a:fillRef idx="3">
-            <a:schemeClr val="accent1"/>
-          </a:fillRef>
-          <a:effectRef idx="2">
-            <a:schemeClr val="accent1"/>
-          </a:effectRef>
-          <a:fontRef idx="minor">
-            <a:schemeClr val="lt1"/>
-          </a:fontRef>
-        </p:style>
-        <p:txBody>
-          <a:bodyPr rtlCol="0" anchor="ctr"/>
-          <a:lstStyle/>
-          <a:p>
-            <a:pPr algn="ctr"/>
-          </a:p>
-        </p:txBody>
-      </p:sp>
-      <p:sp>
-        <p:nvSpPr>
-          <p:cNvPr id="34" name="Rectangle 33"/>
-          <p:cNvSpPr/>
-          <p:nvPr/>
-        </p:nvSpPr>
-        <p:spPr>
-          <a:xfrm>
-            <a:off x="45589031" y="13762844"/>
-            <a:ext cx="4236244" cy="2215991"/>
+          <a:solidFill>
+            <a:schemeClr val="bg1"/>
+          </a:solidFill>
+          <a:ln>
+            <a:noFill/>
+          </a:ln>
+        </p:spPr>
+        <p:style>
+          <a:lnRef idx="2">
+            <a:schemeClr val="accent1">
+              <a:shade val="50000"/>
+            </a:schemeClr>
+          </a:lnRef>
+          <a:fillRef idx="1">
+            <a:schemeClr val="accent1"/>
+          </a:fillRef>
+          <a:effectRef idx="0">
+            <a:schemeClr val="accent1"/>
+          </a:effectRef>
+          <a:fontRef idx="minor">
+            <a:schemeClr val="lt1"/>
+          </a:fontRef>
+        </p:style>
+        <p:txBody>
+          <a:bodyPr rtlCol="0" anchor="ctr"/>
+          <a:lstStyle/>
+          <a:p>
+            <a:pPr algn="ctr"/>
+          </a:p>
+        </p:txBody>
+      </p:sp>
+      <p:sp>
+        <p:nvSpPr>
+          <p:cNvPr id="34" name="TextBox 33"/>
+          <p:cNvSpPr txBox="1"/>
+          <p:nvPr/>
+        </p:nvSpPr>
+        <p:spPr>
+          <a:xfrm>
+            <a:off x="45589057" y="13762817"/>
+            <a:ext cx="4236232" cy="2215956"/>
           </a:xfrm>
           <a:prstGeom prst="rect">
             <a:avLst/>
           </a:prstGeom>
-        </p:spPr>
-        <p:style>
-          <a:lnRef idx="1">
-            <a:schemeClr val="accent1"/>
-          </a:lnRef>
-          <a:fillRef idx="3">
-            <a:schemeClr val="accent1"/>
-          </a:fillRef>
-          <a:effectRef idx="2">
-            <a:schemeClr val="accent1"/>
-          </a:effectRef>
-          <a:fontRef idx="minor">
-            <a:schemeClr val="lt1"/>
-          </a:fontRef>
-        </p:style>
-        <p:txBody>
-          <a:bodyPr rtlCol="0" anchor="ctr"/>
-          <a:lstStyle/>
-          <a:p>
+          <a:noFill/>
+        </p:spPr>
+        <p:txBody>
+          <a:bodyPr wrap="square">
+            <a:spAutoFit/>
+          </a:bodyPr>
+          <a:lstStyle/>
+          <a:p>
+            <a:pPr>
+              <a:buNone/>
+            </a:pPr>
             <a:r>
+              <a:rPr sz="13800"/>
               <a:t>5%</a:t>
             </a:r>
           </a:p>
@@ -4314,38 +4546,31 @@
       </p:sp>
       <p:sp>
         <p:nvSpPr>
-          <p:cNvPr id="35" name="Rectangle 34"/>
-          <p:cNvSpPr/>
-          <p:nvPr/>
-        </p:nvSpPr>
-        <p:spPr>
-          <a:xfrm>
-            <a:off x="45720000" y="18019039"/>
-            <a:ext cx="4236244" cy="2215991"/>
+          <p:cNvPr id="35" name="TextBox 34"/>
+          <p:cNvSpPr txBox="1"/>
+          <p:nvPr/>
+        </p:nvSpPr>
+        <p:spPr>
+          <a:xfrm>
+            <a:off x="45720000" y="18019074"/>
+            <a:ext cx="4236232" cy="2215956"/>
           </a:xfrm>
           <a:prstGeom prst="rect">
             <a:avLst/>
           </a:prstGeom>
-        </p:spPr>
-        <p:style>
-          <a:lnRef idx="1">
-            <a:schemeClr val="accent1"/>
-          </a:lnRef>
-          <a:fillRef idx="3">
-            <a:schemeClr val="accent1"/>
-          </a:fillRef>
-          <a:effectRef idx="2">
-            <a:schemeClr val="accent1"/>
-          </a:effectRef>
-          <a:fontRef idx="minor">
-            <a:schemeClr val="lt1"/>
-          </a:fontRef>
-        </p:style>
-        <p:txBody>
-          <a:bodyPr rtlCol="0" anchor="ctr"/>
-          <a:lstStyle/>
-          <a:p>
+          <a:noFill/>
+        </p:spPr>
+        <p:txBody>
+          <a:bodyPr wrap="square">
+            <a:spAutoFit/>
+          </a:bodyPr>
+          <a:lstStyle/>
+          <a:p>
+            <a:pPr>
+              <a:buNone/>
+            </a:pPr>
             <a:r>
+              <a:rPr sz="13800"/>
               <a:t>10%</a:t>
             </a:r>
           </a:p>
@@ -4353,38 +4578,31 @@
       </p:sp>
       <p:sp>
         <p:nvSpPr>
-          <p:cNvPr id="36" name="Rectangle 35"/>
-          <p:cNvSpPr/>
-          <p:nvPr/>
-        </p:nvSpPr>
-        <p:spPr>
-          <a:xfrm>
-            <a:off x="45720000" y="22275234"/>
-            <a:ext cx="4236244" cy="2215991"/>
+          <p:cNvPr id="36" name="TextBox 35"/>
+          <p:cNvSpPr txBox="1"/>
+          <p:nvPr/>
+        </p:nvSpPr>
+        <p:spPr>
+          <a:xfrm>
+            <a:off x="45720000" y="22275241"/>
+            <a:ext cx="4236232" cy="2215956"/>
           </a:xfrm>
           <a:prstGeom prst="rect">
             <a:avLst/>
           </a:prstGeom>
-        </p:spPr>
-        <p:style>
-          <a:lnRef idx="1">
-            <a:schemeClr val="accent1"/>
-          </a:lnRef>
-          <a:fillRef idx="3">
-            <a:schemeClr val="accent1"/>
-          </a:fillRef>
-          <a:effectRef idx="2">
-            <a:schemeClr val="accent1"/>
-          </a:effectRef>
-          <a:fontRef idx="minor">
-            <a:schemeClr val="lt1"/>
-          </a:fontRef>
-        </p:style>
-        <p:txBody>
-          <a:bodyPr rtlCol="0" anchor="ctr"/>
-          <a:lstStyle/>
-          <a:p>
+          <a:noFill/>
+        </p:spPr>
+        <p:txBody>
+          <a:bodyPr wrap="square">
+            <a:spAutoFit/>
+          </a:bodyPr>
+          <a:lstStyle/>
+          <a:p>
+            <a:pPr>
+              <a:buNone/>
+            </a:pPr>
             <a:r>
+              <a:rPr sz="13800"/>
               <a:t>15%</a:t>
             </a:r>
           </a:p>
@@ -4392,38 +4610,31 @@
       </p:sp>
       <p:sp>
         <p:nvSpPr>
-          <p:cNvPr id="37" name="Rectangle 36"/>
-          <p:cNvSpPr/>
-          <p:nvPr/>
-        </p:nvSpPr>
-        <p:spPr>
-          <a:xfrm>
-            <a:off x="45458062" y="26531795"/>
-            <a:ext cx="4236244" cy="2215991"/>
+          <p:cNvPr id="37" name="TextBox 36"/>
+          <p:cNvSpPr txBox="1"/>
+          <p:nvPr/>
+        </p:nvSpPr>
+        <p:spPr>
+          <a:xfrm>
+            <a:off x="45458024" y="26531773"/>
+            <a:ext cx="4236232" cy="2215956"/>
           </a:xfrm>
           <a:prstGeom prst="rect">
             <a:avLst/>
           </a:prstGeom>
-        </p:spPr>
-        <p:style>
-          <a:lnRef idx="1">
-            <a:schemeClr val="accent1"/>
-          </a:lnRef>
-          <a:fillRef idx="3">
-            <a:schemeClr val="accent1"/>
-          </a:fillRef>
-          <a:effectRef idx="2">
-            <a:schemeClr val="accent1"/>
-          </a:effectRef>
-          <a:fontRef idx="minor">
-            <a:schemeClr val="lt1"/>
-          </a:fontRef>
-        </p:style>
-        <p:txBody>
-          <a:bodyPr rtlCol="0" anchor="ctr"/>
-          <a:lstStyle/>
-          <a:p>
+          <a:noFill/>
+        </p:spPr>
+        <p:txBody>
+          <a:bodyPr wrap="square">
+            <a:spAutoFit/>
+          </a:bodyPr>
+          <a:lstStyle/>
+          <a:p>
+            <a:pPr>
+              <a:buNone/>
+            </a:pPr>
             <a:r>
+              <a:rPr sz="13800"/>
               <a:t>20%</a:t>
             </a:r>
           </a:p>
@@ -4431,38 +4642,31 @@
       </p:sp>
       <p:sp>
         <p:nvSpPr>
-          <p:cNvPr id="38" name="Rectangle 37"/>
-          <p:cNvSpPr/>
-          <p:nvPr/>
-        </p:nvSpPr>
-        <p:spPr>
-          <a:xfrm>
-            <a:off x="45589031" y="30787990"/>
-            <a:ext cx="4236244" cy="2215991"/>
+          <p:cNvPr id="38" name="TextBox 37"/>
+          <p:cNvSpPr txBox="1"/>
+          <p:nvPr/>
+        </p:nvSpPr>
+        <p:spPr>
+          <a:xfrm>
+            <a:off x="45589057" y="30788030"/>
+            <a:ext cx="4236232" cy="2215956"/>
           </a:xfrm>
           <a:prstGeom prst="rect">
             <a:avLst/>
           </a:prstGeom>
-        </p:spPr>
-        <p:style>
-          <a:lnRef idx="1">
-            <a:schemeClr val="accent1"/>
-          </a:lnRef>
-          <a:fillRef idx="3">
-            <a:schemeClr val="accent1"/>
-          </a:fillRef>
-          <a:effectRef idx="2">
-            <a:schemeClr val="accent1"/>
-          </a:effectRef>
-          <a:fontRef idx="minor">
-            <a:schemeClr val="lt1"/>
-          </a:fontRef>
-        </p:style>
-        <p:txBody>
-          <a:bodyPr rtlCol="0" anchor="ctr"/>
-          <a:lstStyle/>
-          <a:p>
+          <a:noFill/>
+        </p:spPr>
+        <p:txBody>
+          <a:bodyPr wrap="square">
+            <a:spAutoFit/>
+          </a:bodyPr>
+          <a:lstStyle/>
+          <a:p>
+            <a:pPr>
+              <a:buNone/>
+            </a:pPr>
             <a:r>
+              <a:rPr sz="13800"/>
               <a:t>25%</a:t>
             </a:r>
           </a:p>
@@ -4470,38 +4674,31 @@
       </p:sp>
       <p:sp>
         <p:nvSpPr>
-          <p:cNvPr id="39" name="Rectangle 38"/>
-          <p:cNvSpPr/>
-          <p:nvPr/>
-        </p:nvSpPr>
-        <p:spPr>
-          <a:xfrm>
-            <a:off x="45667613" y="35044185"/>
-            <a:ext cx="4236244" cy="2215991"/>
+          <p:cNvPr id="39" name="TextBox 38"/>
+          <p:cNvSpPr txBox="1"/>
+          <p:nvPr/>
+        </p:nvSpPr>
+        <p:spPr>
+          <a:xfrm>
+            <a:off x="45667604" y="35044197"/>
+            <a:ext cx="4236232" cy="2215956"/>
           </a:xfrm>
           <a:prstGeom prst="rect">
             <a:avLst/>
           </a:prstGeom>
-        </p:spPr>
-        <p:style>
-          <a:lnRef idx="1">
-            <a:schemeClr val="accent1"/>
-          </a:lnRef>
-          <a:fillRef idx="3">
-            <a:schemeClr val="accent1"/>
-          </a:fillRef>
-          <a:effectRef idx="2">
-            <a:schemeClr val="accent1"/>
-          </a:effectRef>
-          <a:fontRef idx="minor">
-            <a:schemeClr val="lt1"/>
-          </a:fontRef>
-        </p:style>
-        <p:txBody>
-          <a:bodyPr rtlCol="0" anchor="ctr"/>
-          <a:lstStyle/>
-          <a:p>
+          <a:noFill/>
+        </p:spPr>
+        <p:txBody>
+          <a:bodyPr wrap="square">
+            <a:spAutoFit/>
+          </a:bodyPr>
+          <a:lstStyle/>
+          <a:p>
+            <a:pPr>
+              <a:buNone/>
+            </a:pPr>
             <a:r>
+              <a:rPr sz="13800"/>
               <a:t>30%</a:t>
             </a:r>
           </a:p>
@@ -4509,38 +4706,31 @@
       </p:sp>
       <p:sp>
         <p:nvSpPr>
-          <p:cNvPr id="40" name="Rectangle 39"/>
-          <p:cNvSpPr/>
-          <p:nvPr/>
-        </p:nvSpPr>
-        <p:spPr>
-          <a:xfrm>
-            <a:off x="45667613" y="39300380"/>
-            <a:ext cx="4236244" cy="2215991"/>
+          <p:cNvPr id="40" name="TextBox 39"/>
+          <p:cNvSpPr txBox="1"/>
+          <p:nvPr/>
+        </p:nvSpPr>
+        <p:spPr>
+          <a:xfrm>
+            <a:off x="45667604" y="39300363"/>
+            <a:ext cx="4236232" cy="2215956"/>
           </a:xfrm>
           <a:prstGeom prst="rect">
             <a:avLst/>
           </a:prstGeom>
-        </p:spPr>
-        <p:style>
-          <a:lnRef idx="1">
-            <a:schemeClr val="accent1"/>
-          </a:lnRef>
-          <a:fillRef idx="3">
-            <a:schemeClr val="accent1"/>
-          </a:fillRef>
-          <a:effectRef idx="2">
-            <a:schemeClr val="accent1"/>
-          </a:effectRef>
-          <a:fontRef idx="minor">
-            <a:schemeClr val="lt1"/>
-          </a:fontRef>
-        </p:style>
-        <p:txBody>
-          <a:bodyPr rtlCol="0" anchor="ctr"/>
-          <a:lstStyle/>
-          <a:p>
+          <a:noFill/>
+        </p:spPr>
+        <p:txBody>
+          <a:bodyPr wrap="square">
+            <a:spAutoFit/>
+          </a:bodyPr>
+          <a:lstStyle/>
+          <a:p>
+            <a:pPr>
+              <a:buNone/>
+            </a:pPr>
             <a:r>
+              <a:rPr sz="13800"/>
               <a:t>35%</a:t>
             </a:r>
           </a:p>
@@ -4548,38 +4738,31 @@
       </p:sp>
       <p:sp>
         <p:nvSpPr>
-          <p:cNvPr id="41" name="Rectangle 40"/>
-          <p:cNvSpPr/>
-          <p:nvPr/>
-        </p:nvSpPr>
-        <p:spPr>
-          <a:xfrm>
-            <a:off x="45405675" y="43556941"/>
-            <a:ext cx="4236244" cy="2215991"/>
+          <p:cNvPr id="41" name="TextBox 40"/>
+          <p:cNvSpPr txBox="1"/>
+          <p:nvPr/>
+        </p:nvSpPr>
+        <p:spPr>
+          <a:xfrm>
+            <a:off x="45405629" y="43556895"/>
+            <a:ext cx="4236232" cy="2215956"/>
           </a:xfrm>
           <a:prstGeom prst="rect">
             <a:avLst/>
           </a:prstGeom>
-        </p:spPr>
-        <p:style>
-          <a:lnRef idx="1">
-            <a:schemeClr val="accent1"/>
-          </a:lnRef>
-          <a:fillRef idx="3">
-            <a:schemeClr val="accent1"/>
-          </a:fillRef>
-          <a:effectRef idx="2">
-            <a:schemeClr val="accent1"/>
-          </a:effectRef>
-          <a:fontRef idx="minor">
-            <a:schemeClr val="lt1"/>
-          </a:fontRef>
-        </p:style>
-        <p:txBody>
-          <a:bodyPr rtlCol="0" anchor="ctr"/>
-          <a:lstStyle/>
-          <a:p>
+          <a:noFill/>
+        </p:spPr>
+        <p:txBody>
+          <a:bodyPr wrap="square">
+            <a:spAutoFit/>
+          </a:bodyPr>
+          <a:lstStyle/>
+          <a:p>
+            <a:pPr>
+              <a:buNone/>
+            </a:pPr>
             <a:r>
+              <a:rPr sz="13800"/>
               <a:t>40%</a:t>
             </a:r>
           </a:p>
@@ -4587,38 +4770,31 @@
       </p:sp>
       <p:sp>
         <p:nvSpPr>
-          <p:cNvPr id="42" name="Rectangle 41"/>
-          <p:cNvSpPr/>
-          <p:nvPr/>
-        </p:nvSpPr>
-        <p:spPr>
-          <a:xfrm>
-            <a:off x="45536644" y="47813136"/>
-            <a:ext cx="4236244" cy="2215991"/>
+          <p:cNvPr id="42" name="TextBox 41"/>
+          <p:cNvSpPr txBox="1"/>
+          <p:nvPr/>
+        </p:nvSpPr>
+        <p:spPr>
+          <a:xfrm>
+            <a:off x="45536662" y="47813153"/>
+            <a:ext cx="4236232" cy="2215956"/>
           </a:xfrm>
           <a:prstGeom prst="rect">
             <a:avLst/>
           </a:prstGeom>
-        </p:spPr>
-        <p:style>
-          <a:lnRef idx="1">
-            <a:schemeClr val="accent1"/>
-          </a:lnRef>
-          <a:fillRef idx="3">
-            <a:schemeClr val="accent1"/>
-          </a:fillRef>
-          <a:effectRef idx="2">
-            <a:schemeClr val="accent1"/>
-          </a:effectRef>
-          <a:fontRef idx="minor">
-            <a:schemeClr val="lt1"/>
-          </a:fontRef>
-        </p:style>
-        <p:txBody>
-          <a:bodyPr rtlCol="0" anchor="ctr"/>
-          <a:lstStyle/>
-          <a:p>
+          <a:noFill/>
+        </p:spPr>
+        <p:txBody>
+          <a:bodyPr wrap="square">
+            <a:spAutoFit/>
+          </a:bodyPr>
+          <a:lstStyle/>
+          <a:p>
+            <a:pPr>
+              <a:buNone/>
+            </a:pPr>
             <a:r>
+              <a:rPr sz="13800"/>
               <a:t>45%</a:t>
             </a:r>
           </a:p>
@@ -4626,38 +4802,31 @@
       </p:sp>
       <p:sp>
         <p:nvSpPr>
-          <p:cNvPr id="43" name="Rectangle 42"/>
-          <p:cNvSpPr/>
-          <p:nvPr/>
-        </p:nvSpPr>
-        <p:spPr>
-          <a:xfrm>
-            <a:off x="45720000" y="9506649"/>
-            <a:ext cx="4236244" cy="2215991"/>
+          <p:cNvPr id="43" name="TextBox 42"/>
+          <p:cNvSpPr txBox="1"/>
+          <p:nvPr/>
+        </p:nvSpPr>
+        <p:spPr>
+          <a:xfrm>
+            <a:off x="45720000" y="9506651"/>
+            <a:ext cx="4236232" cy="2215956"/>
           </a:xfrm>
           <a:prstGeom prst="rect">
             <a:avLst/>
           </a:prstGeom>
-        </p:spPr>
-        <p:style>
-          <a:lnRef idx="1">
-            <a:schemeClr val="accent1"/>
-          </a:lnRef>
-          <a:fillRef idx="3">
-            <a:schemeClr val="accent1"/>
-          </a:fillRef>
-          <a:effectRef idx="2">
-            <a:schemeClr val="accent1"/>
-          </a:effectRef>
-          <a:fontRef idx="minor">
-            <a:schemeClr val="lt1"/>
-          </a:fontRef>
-        </p:style>
-        <p:txBody>
-          <a:bodyPr rtlCol="0" anchor="ctr"/>
-          <a:lstStyle/>
-          <a:p>
+          <a:noFill/>
+        </p:spPr>
+        <p:txBody>
+          <a:bodyPr wrap="square">
+            <a:spAutoFit/>
+          </a:bodyPr>
+          <a:lstStyle/>
+          <a:p>
+            <a:pPr>
+              <a:buNone/>
+            </a:pPr>
             <a:r>
+              <a:rPr sz="13800"/>
               <a:t>2%</a:t>
             </a:r>
           </a:p>
@@ -4671,21 +4840,26 @@
         </p:nvSpPr>
         <p:spPr>
           <a:xfrm>
-            <a:off x="42976800" y="3396342"/>
+            <a:off x="42976800" y="13956395"/>
             <a:ext cx="1828800" cy="1828800"/>
           </a:xfrm>
           <a:prstGeom prst="ellipse">
             <a:avLst/>
           </a:prstGeom>
-        </p:spPr>
-        <p:style>
-          <a:lnRef idx="1">
-            <a:schemeClr val="accent1"/>
-          </a:lnRef>
-          <a:fillRef idx="3">
-            <a:schemeClr val="accent1"/>
-          </a:fillRef>
-          <a:effectRef idx="2">
+          <a:solidFill>
+            <a:schemeClr val="bg1"/>
+          </a:solidFill>
+        </p:spPr>
+        <p:style>
+          <a:lnRef idx="2">
+            <a:schemeClr val="accent1">
+              <a:shade val="50000"/>
+            </a:schemeClr>
+          </a:lnRef>
+          <a:fillRef idx="1">
+            <a:schemeClr val="accent1"/>
+          </a:fillRef>
+          <a:effectRef idx="0">
             <a:schemeClr val="accent1"/>
           </a:effectRef>
           <a:fontRef idx="minor">
@@ -4708,21 +4882,26 @@
         </p:nvSpPr>
         <p:spPr>
           <a:xfrm>
-            <a:off x="1828800" y="3396342"/>
+            <a:off x="1828800" y="13956395"/>
             <a:ext cx="42062400" cy="1828800"/>
           </a:xfrm>
           <a:prstGeom prst="rect">
             <a:avLst/>
           </a:prstGeom>
-        </p:spPr>
-        <p:style>
-          <a:lnRef idx="1">
-            <a:schemeClr val="accent1"/>
-          </a:lnRef>
-          <a:fillRef idx="3">
-            <a:schemeClr val="accent1"/>
-          </a:fillRef>
-          <a:effectRef idx="2">
+          <a:solidFill>
+            <a:schemeClr val="bg1"/>
+          </a:solidFill>
+        </p:spPr>
+        <p:style>
+          <a:lnRef idx="2">
+            <a:schemeClr val="accent1">
+              <a:shade val="50000"/>
+            </a:schemeClr>
+          </a:lnRef>
+          <a:fillRef idx="1">
+            <a:schemeClr val="accent1"/>
+          </a:fillRef>
+          <a:effectRef idx="0">
             <a:schemeClr val="accent1"/>
           </a:effectRef>
           <a:fontRef idx="minor">
@@ -4745,21 +4924,40 @@
         </p:nvSpPr>
         <p:spPr>
           <a:xfrm>
-            <a:off x="0" y="2481942"/>
+            <a:off x="0" y="13041995"/>
             <a:ext cx="3657600" cy="3657600"/>
           </a:xfrm>
           <a:prstGeom prst="ellipse">
             <a:avLst/>
           </a:prstGeom>
-        </p:spPr>
-        <p:style>
-          <a:lnRef idx="1">
-            <a:schemeClr val="accent1"/>
-          </a:lnRef>
-          <a:fillRef idx="3">
-            <a:schemeClr val="accent1"/>
-          </a:fillRef>
-          <a:effectRef idx="2">
+          <a:gradFill flip="none" rotWithShape="1">
+            <a:gsLst>
+              <a:gs pos="0">
+                <a:schemeClr val="accent1"/>
+              </a:gs>
+              <a:gs pos="65000">
+                <a:schemeClr val="bg1"/>
+              </a:gs>
+              <a:gs pos="45000">
+                <a:schemeClr val="accent1"/>
+              </a:gs>
+              <a:gs pos="100000">
+                <a:schemeClr val="bg1"/>
+              </a:gs>
+            </a:gsLst>
+            <a:lin ang="0" scaled="0"/>
+          </a:gradFill>
+        </p:spPr>
+        <p:style>
+          <a:lnRef idx="2">
+            <a:schemeClr val="accent1">
+              <a:shade val="50000"/>
+            </a:schemeClr>
+          </a:lnRef>
+          <a:fillRef idx="1">
+            <a:schemeClr val="accent1"/>
+          </a:fillRef>
+          <a:effectRef idx="0">
             <a:schemeClr val="accent1"/>
           </a:effectRef>
           <a:fontRef idx="minor">
@@ -4782,21 +4980,29 @@
         </p:nvSpPr>
         <p:spPr>
           <a:xfrm>
-            <a:off x="43760231" y="5165885"/>
-            <a:ext cx="238125" cy="1800224"/>
+            <a:off x="43760257" y="13973677"/>
+            <a:ext cx="238109" cy="1800179"/>
           </a:xfrm>
           <a:prstGeom prst="rect">
             <a:avLst/>
           </a:prstGeom>
-        </p:spPr>
-        <p:style>
-          <a:lnRef idx="1">
-            <a:schemeClr val="accent1"/>
-          </a:lnRef>
-          <a:fillRef idx="3">
-            <a:schemeClr val="accent1"/>
-          </a:fillRef>
-          <a:effectRef idx="2">
+          <a:solidFill>
+            <a:schemeClr val="bg1"/>
+          </a:solidFill>
+          <a:ln>
+            <a:noFill/>
+          </a:ln>
+        </p:spPr>
+        <p:style>
+          <a:lnRef idx="2">
+            <a:schemeClr val="accent1">
+              <a:shade val="50000"/>
+            </a:schemeClr>
+          </a:lnRef>
+          <a:fillRef idx="1">
+            <a:schemeClr val="accent1"/>
+          </a:fillRef>
+          <a:effectRef idx="0">
             <a:schemeClr val="accent1"/>
           </a:effectRef>
           <a:fontRef idx="minor">
@@ -4819,21 +5025,29 @@
         </p:nvSpPr>
         <p:spPr>
           <a:xfrm>
-            <a:off x="3398042" y="5574350"/>
-            <a:ext cx="404814" cy="1800224"/>
+            <a:off x="3398001" y="13970660"/>
+            <a:ext cx="404804" cy="1800179"/>
           </a:xfrm>
           <a:prstGeom prst="rect">
             <a:avLst/>
           </a:prstGeom>
-        </p:spPr>
-        <p:style>
-          <a:lnRef idx="1">
-            <a:schemeClr val="accent1"/>
-          </a:lnRef>
-          <a:fillRef idx="3">
-            <a:schemeClr val="accent1"/>
-          </a:fillRef>
-          <a:effectRef idx="2">
+          <a:solidFill>
+            <a:schemeClr val="bg1"/>
+          </a:solidFill>
+          <a:ln>
+            <a:noFill/>
+          </a:ln>
+        </p:spPr>
+        <p:style>
+          <a:lnRef idx="2">
+            <a:schemeClr val="accent1">
+              <a:shade val="50000"/>
+            </a:schemeClr>
+          </a:lnRef>
+          <a:fillRef idx="1">
+            <a:schemeClr val="accent1"/>
+          </a:fillRef>
+          <a:effectRef idx="0">
             <a:schemeClr val="accent1"/>
           </a:effectRef>
           <a:fontRef idx="minor">
@@ -4856,21 +5070,26 @@
         </p:nvSpPr>
         <p:spPr>
           <a:xfrm>
-            <a:off x="42976800" y="3396342"/>
+            <a:off x="42976800" y="9700229"/>
             <a:ext cx="1828800" cy="1828800"/>
           </a:xfrm>
           <a:prstGeom prst="ellipse">
             <a:avLst/>
           </a:prstGeom>
-        </p:spPr>
-        <p:style>
-          <a:lnRef idx="1">
-            <a:schemeClr val="accent1"/>
-          </a:lnRef>
-          <a:fillRef idx="3">
-            <a:schemeClr val="accent1"/>
-          </a:fillRef>
-          <a:effectRef idx="2">
+          <a:solidFill>
+            <a:schemeClr val="bg1"/>
+          </a:solidFill>
+        </p:spPr>
+        <p:style>
+          <a:lnRef idx="2">
+            <a:schemeClr val="accent1">
+              <a:shade val="50000"/>
+            </a:schemeClr>
+          </a:lnRef>
+          <a:fillRef idx="1">
+            <a:schemeClr val="accent1"/>
+          </a:fillRef>
+          <a:effectRef idx="0">
             <a:schemeClr val="accent1"/>
           </a:effectRef>
           <a:fontRef idx="minor">
@@ -4893,21 +5112,26 @@
         </p:nvSpPr>
         <p:spPr>
           <a:xfrm>
-            <a:off x="1828800" y="3396342"/>
+            <a:off x="1828800" y="9700229"/>
             <a:ext cx="42062400" cy="1828800"/>
           </a:xfrm>
           <a:prstGeom prst="rect">
             <a:avLst/>
           </a:prstGeom>
-        </p:spPr>
-        <p:style>
-          <a:lnRef idx="1">
-            <a:schemeClr val="accent1"/>
-          </a:lnRef>
-          <a:fillRef idx="3">
-            <a:schemeClr val="accent1"/>
-          </a:fillRef>
-          <a:effectRef idx="2">
+          <a:solidFill>
+            <a:schemeClr val="bg1"/>
+          </a:solidFill>
+        </p:spPr>
+        <p:style>
+          <a:lnRef idx="2">
+            <a:schemeClr val="accent1">
+              <a:shade val="50000"/>
+            </a:schemeClr>
+          </a:lnRef>
+          <a:fillRef idx="1">
+            <a:schemeClr val="accent1"/>
+          </a:fillRef>
+          <a:effectRef idx="0">
             <a:schemeClr val="accent1"/>
           </a:effectRef>
           <a:fontRef idx="minor">
@@ -4930,21 +5154,40 @@
         </p:nvSpPr>
         <p:spPr>
           <a:xfrm>
-            <a:off x="0" y="2481942"/>
+            <a:off x="0" y="8785829"/>
             <a:ext cx="3657600" cy="3657600"/>
           </a:xfrm>
           <a:prstGeom prst="ellipse">
             <a:avLst/>
           </a:prstGeom>
-        </p:spPr>
-        <p:style>
-          <a:lnRef idx="1">
-            <a:schemeClr val="accent1"/>
-          </a:lnRef>
-          <a:fillRef idx="3">
-            <a:schemeClr val="accent1"/>
-          </a:fillRef>
-          <a:effectRef idx="2">
+          <a:gradFill flip="none" rotWithShape="1">
+            <a:gsLst>
+              <a:gs pos="0">
+                <a:schemeClr val="accent1"/>
+              </a:gs>
+              <a:gs pos="25000">
+                <a:schemeClr val="bg1"/>
+              </a:gs>
+              <a:gs pos="16000">
+                <a:schemeClr val="accent1"/>
+              </a:gs>
+              <a:gs pos="100000">
+                <a:schemeClr val="bg1"/>
+              </a:gs>
+            </a:gsLst>
+            <a:lin ang="0" scaled="0"/>
+          </a:gradFill>
+        </p:spPr>
+        <p:style>
+          <a:lnRef idx="2">
+            <a:schemeClr val="accent1">
+              <a:shade val="50000"/>
+            </a:schemeClr>
+          </a:lnRef>
+          <a:fillRef idx="1">
+            <a:schemeClr val="accent1"/>
+          </a:fillRef>
+          <a:effectRef idx="0">
             <a:schemeClr val="accent1"/>
           </a:effectRef>
           <a:fontRef idx="minor">
@@ -4967,21 +5210,29 @@
         </p:nvSpPr>
         <p:spPr>
           <a:xfrm>
-            <a:off x="43760231" y="5165885"/>
-            <a:ext cx="238125" cy="1800224"/>
+            <a:off x="43760257" y="9717511"/>
+            <a:ext cx="238109" cy="1800179"/>
           </a:xfrm>
           <a:prstGeom prst="rect">
             <a:avLst/>
           </a:prstGeom>
-        </p:spPr>
-        <p:style>
-          <a:lnRef idx="1">
-            <a:schemeClr val="accent1"/>
-          </a:lnRef>
-          <a:fillRef idx="3">
-            <a:schemeClr val="accent1"/>
-          </a:fillRef>
-          <a:effectRef idx="2">
+          <a:solidFill>
+            <a:schemeClr val="bg1"/>
+          </a:solidFill>
+          <a:ln>
+            <a:noFill/>
+          </a:ln>
+        </p:spPr>
+        <p:style>
+          <a:lnRef idx="2">
+            <a:schemeClr val="accent1">
+              <a:shade val="50000"/>
+            </a:schemeClr>
+          </a:lnRef>
+          <a:fillRef idx="1">
+            <a:schemeClr val="accent1"/>
+          </a:fillRef>
+          <a:effectRef idx="0">
             <a:schemeClr val="accent1"/>
           </a:effectRef>
           <a:fontRef idx="minor">
@@ -5004,69 +5255,70 @@
         </p:nvSpPr>
         <p:spPr>
           <a:xfrm>
-            <a:off x="3398042" y="5574350"/>
-            <a:ext cx="404814" cy="1800224"/>
+            <a:off x="3398001" y="9714494"/>
+            <a:ext cx="404804" cy="1800179"/>
           </a:xfrm>
           <a:prstGeom prst="rect">
             <a:avLst/>
           </a:prstGeom>
-        </p:spPr>
-        <p:style>
-          <a:lnRef idx="1">
-            <a:schemeClr val="accent1"/>
-          </a:lnRef>
-          <a:fillRef idx="3">
-            <a:schemeClr val="accent1"/>
-          </a:fillRef>
-          <a:effectRef idx="2">
-            <a:schemeClr val="accent1"/>
-          </a:effectRef>
-          <a:fontRef idx="minor">
-            <a:schemeClr val="lt1"/>
-          </a:fontRef>
-        </p:style>
-        <p:txBody>
-          <a:bodyPr rtlCol="0" anchor="ctr"/>
-          <a:lstStyle/>
-          <a:p>
-            <a:pPr algn="ctr"/>
-          </a:p>
-        </p:txBody>
-      </p:sp>
-      <p:sp>
-        <p:nvSpPr>
-          <p:cNvPr id="54" name="Rectangle 53"/>
-          <p:cNvSpPr/>
-          <p:nvPr/>
-        </p:nvSpPr>
-        <p:spPr>
-          <a:xfrm>
-            <a:off x="45798582" y="1010925"/>
-            <a:ext cx="4236244" cy="2215991"/>
+          <a:solidFill>
+            <a:schemeClr val="bg1"/>
+          </a:solidFill>
+          <a:ln>
+            <a:noFill/>
+          </a:ln>
+        </p:spPr>
+        <p:style>
+          <a:lnRef idx="2">
+            <a:schemeClr val="accent1">
+              <a:shade val="50000"/>
+            </a:schemeClr>
+          </a:lnRef>
+          <a:fillRef idx="1">
+            <a:schemeClr val="accent1"/>
+          </a:fillRef>
+          <a:effectRef idx="0">
+            <a:schemeClr val="accent1"/>
+          </a:effectRef>
+          <a:fontRef idx="minor">
+            <a:schemeClr val="lt1"/>
+          </a:fontRef>
+        </p:style>
+        <p:txBody>
+          <a:bodyPr rtlCol="0" anchor="ctr"/>
+          <a:lstStyle/>
+          <a:p>
+            <a:pPr algn="ctr"/>
+          </a:p>
+        </p:txBody>
+      </p:sp>
+      <p:sp>
+        <p:nvSpPr>
+          <p:cNvPr id="54" name="TextBox 53"/>
+          <p:cNvSpPr txBox="1"/>
+          <p:nvPr/>
+        </p:nvSpPr>
+        <p:spPr>
+          <a:xfrm>
+            <a:off x="45798546" y="1010960"/>
+            <a:ext cx="4236232" cy="2215956"/>
           </a:xfrm>
           <a:prstGeom prst="rect">
             <a:avLst/>
           </a:prstGeom>
-        </p:spPr>
-        <p:style>
-          <a:lnRef idx="1">
-            <a:schemeClr val="accent1"/>
-          </a:lnRef>
-          <a:fillRef idx="3">
-            <a:schemeClr val="accent1"/>
-          </a:fillRef>
-          <a:effectRef idx="2">
-            <a:schemeClr val="accent1"/>
-          </a:effectRef>
-          <a:fontRef idx="minor">
-            <a:schemeClr val="lt1"/>
-          </a:fontRef>
-        </p:style>
-        <p:txBody>
-          <a:bodyPr rtlCol="0" anchor="ctr"/>
-          <a:lstStyle/>
-          <a:p>
+          <a:noFill/>
+        </p:spPr>
+        <p:txBody>
+          <a:bodyPr wrap="square">
+            <a:spAutoFit/>
+          </a:bodyPr>
+          <a:lstStyle/>
+          <a:p>
+            <a:pPr>
+              <a:buNone/>
+            </a:pPr>
             <a:r>
+              <a:rPr sz="13800"/>
               <a:t>0%</a:t>
             </a:r>
           </a:p>
@@ -5080,21 +5332,26 @@
         </p:nvSpPr>
         <p:spPr>
           <a:xfrm>
-            <a:off x="42976800" y="3396342"/>
+            <a:off x="43055346" y="1204539"/>
             <a:ext cx="1828800" cy="1828800"/>
           </a:xfrm>
           <a:prstGeom prst="ellipse">
             <a:avLst/>
           </a:prstGeom>
-        </p:spPr>
-        <p:style>
-          <a:lnRef idx="1">
-            <a:schemeClr val="accent1"/>
-          </a:lnRef>
-          <a:fillRef idx="3">
-            <a:schemeClr val="accent1"/>
-          </a:fillRef>
-          <a:effectRef idx="2">
+          <a:solidFill>
+            <a:schemeClr val="bg1"/>
+          </a:solidFill>
+        </p:spPr>
+        <p:style>
+          <a:lnRef idx="2">
+            <a:schemeClr val="accent1">
+              <a:shade val="50000"/>
+            </a:schemeClr>
+          </a:lnRef>
+          <a:fillRef idx="1">
+            <a:schemeClr val="accent1"/>
+          </a:fillRef>
+          <a:effectRef idx="0">
             <a:schemeClr val="accent1"/>
           </a:effectRef>
           <a:fontRef idx="minor">
@@ -5117,21 +5374,26 @@
         </p:nvSpPr>
         <p:spPr>
           <a:xfrm>
-            <a:off x="1828800" y="3396342"/>
+            <a:off x="1907346" y="1204539"/>
             <a:ext cx="42062400" cy="1828800"/>
           </a:xfrm>
           <a:prstGeom prst="rect">
             <a:avLst/>
           </a:prstGeom>
-        </p:spPr>
-        <p:style>
-          <a:lnRef idx="1">
-            <a:schemeClr val="accent1"/>
-          </a:lnRef>
-          <a:fillRef idx="3">
-            <a:schemeClr val="accent1"/>
-          </a:fillRef>
-          <a:effectRef idx="2">
+          <a:solidFill>
+            <a:schemeClr val="bg1"/>
+          </a:solidFill>
+        </p:spPr>
+        <p:style>
+          <a:lnRef idx="2">
+            <a:schemeClr val="accent1">
+              <a:shade val="50000"/>
+            </a:schemeClr>
+          </a:lnRef>
+          <a:fillRef idx="1">
+            <a:schemeClr val="accent1"/>
+          </a:fillRef>
+          <a:effectRef idx="0">
             <a:schemeClr val="accent1"/>
           </a:effectRef>
           <a:fontRef idx="minor">
@@ -5154,21 +5416,26 @@
         </p:nvSpPr>
         <p:spPr>
           <a:xfrm>
-            <a:off x="0" y="2481942"/>
+            <a:off x="78546" y="290139"/>
             <a:ext cx="3657600" cy="3657600"/>
           </a:xfrm>
           <a:prstGeom prst="ellipse">
             <a:avLst/>
           </a:prstGeom>
-        </p:spPr>
-        <p:style>
-          <a:lnRef idx="1">
-            <a:schemeClr val="accent1"/>
-          </a:lnRef>
-          <a:fillRef idx="3">
-            <a:schemeClr val="accent1"/>
-          </a:fillRef>
-          <a:effectRef idx="2">
+          <a:solidFill>
+            <a:schemeClr val="bg1"/>
+          </a:solidFill>
+        </p:spPr>
+        <p:style>
+          <a:lnRef idx="2">
+            <a:schemeClr val="accent1">
+              <a:shade val="50000"/>
+            </a:schemeClr>
+          </a:lnRef>
+          <a:fillRef idx="1">
+            <a:schemeClr val="accent1"/>
+          </a:fillRef>
+          <a:effectRef idx="0">
             <a:schemeClr val="accent1"/>
           </a:effectRef>
           <a:fontRef idx="minor">
@@ -5191,21 +5458,29 @@
         </p:nvSpPr>
         <p:spPr>
           <a:xfrm>
-            <a:off x="43760231" y="5165885"/>
-            <a:ext cx="238125" cy="1800224"/>
+            <a:off x="43838804" y="1221821"/>
+            <a:ext cx="238109" cy="1800179"/>
           </a:xfrm>
           <a:prstGeom prst="rect">
             <a:avLst/>
           </a:prstGeom>
-        </p:spPr>
-        <p:style>
-          <a:lnRef idx="1">
-            <a:schemeClr val="accent1"/>
-          </a:lnRef>
-          <a:fillRef idx="3">
-            <a:schemeClr val="accent1"/>
-          </a:fillRef>
-          <a:effectRef idx="2">
+          <a:solidFill>
+            <a:schemeClr val="bg1"/>
+          </a:solidFill>
+          <a:ln>
+            <a:noFill/>
+          </a:ln>
+        </p:spPr>
+        <p:style>
+          <a:lnRef idx="2">
+            <a:schemeClr val="accent1">
+              <a:shade val="50000"/>
+            </a:schemeClr>
+          </a:lnRef>
+          <a:fillRef idx="1">
+            <a:schemeClr val="accent1"/>
+          </a:fillRef>
+          <a:effectRef idx="0">
             <a:schemeClr val="accent1"/>
           </a:effectRef>
           <a:fontRef idx="minor">
@@ -5228,69 +5503,70 @@
         </p:nvSpPr>
         <p:spPr>
           <a:xfrm>
-            <a:off x="3398042" y="5574350"/>
-            <a:ext cx="404814" cy="1800224"/>
+            <a:off x="3476548" y="1218803"/>
+            <a:ext cx="404804" cy="1800179"/>
           </a:xfrm>
           <a:prstGeom prst="rect">
             <a:avLst/>
           </a:prstGeom>
-        </p:spPr>
-        <p:style>
-          <a:lnRef idx="1">
-            <a:schemeClr val="accent1"/>
-          </a:lnRef>
-          <a:fillRef idx="3">
-            <a:schemeClr val="accent1"/>
-          </a:fillRef>
-          <a:effectRef idx="2">
-            <a:schemeClr val="accent1"/>
-          </a:effectRef>
-          <a:fontRef idx="minor">
-            <a:schemeClr val="lt1"/>
-          </a:fontRef>
-        </p:style>
-        <p:txBody>
-          <a:bodyPr rtlCol="0" anchor="ctr"/>
-          <a:lstStyle/>
-          <a:p>
-            <a:pPr algn="ctr"/>
-          </a:p>
-        </p:txBody>
-      </p:sp>
-      <p:sp>
-        <p:nvSpPr>
-          <p:cNvPr id="60" name="Rectangle 59"/>
-          <p:cNvSpPr/>
-          <p:nvPr/>
-        </p:nvSpPr>
-        <p:spPr>
-          <a:xfrm>
-            <a:off x="45720000" y="5267120"/>
-            <a:ext cx="4236244" cy="2215991"/>
+          <a:solidFill>
+            <a:schemeClr val="bg1"/>
+          </a:solidFill>
+          <a:ln>
+            <a:noFill/>
+          </a:ln>
+        </p:spPr>
+        <p:style>
+          <a:lnRef idx="2">
+            <a:schemeClr val="accent1">
+              <a:shade val="50000"/>
+            </a:schemeClr>
+          </a:lnRef>
+          <a:fillRef idx="1">
+            <a:schemeClr val="accent1"/>
+          </a:fillRef>
+          <a:effectRef idx="0">
+            <a:schemeClr val="accent1"/>
+          </a:effectRef>
+          <a:fontRef idx="minor">
+            <a:schemeClr val="lt1"/>
+          </a:fontRef>
+        </p:style>
+        <p:txBody>
+          <a:bodyPr rtlCol="0" anchor="ctr"/>
+          <a:lstStyle/>
+          <a:p>
+            <a:pPr algn="ctr"/>
+          </a:p>
+        </p:txBody>
+      </p:sp>
+      <p:sp>
+        <p:nvSpPr>
+          <p:cNvPr id="60" name="TextBox 59"/>
+          <p:cNvSpPr txBox="1"/>
+          <p:nvPr/>
+        </p:nvSpPr>
+        <p:spPr>
+          <a:xfrm>
+            <a:off x="45720000" y="5267126"/>
+            <a:ext cx="4236232" cy="2215956"/>
           </a:xfrm>
           <a:prstGeom prst="rect">
             <a:avLst/>
           </a:prstGeom>
-        </p:spPr>
-        <p:style>
-          <a:lnRef idx="1">
-            <a:schemeClr val="accent1"/>
-          </a:lnRef>
-          <a:fillRef idx="3">
-            <a:schemeClr val="accent1"/>
-          </a:fillRef>
-          <a:effectRef idx="2">
-            <a:schemeClr val="accent1"/>
-          </a:effectRef>
-          <a:fontRef idx="minor">
-            <a:schemeClr val="lt1"/>
-          </a:fontRef>
-        </p:style>
-        <p:txBody>
-          <a:bodyPr rtlCol="0" anchor="ctr"/>
-          <a:lstStyle/>
-          <a:p>
+          <a:noFill/>
+        </p:spPr>
+        <p:txBody>
+          <a:bodyPr wrap="square">
+            <a:spAutoFit/>
+          </a:bodyPr>
+          <a:lstStyle/>
+          <a:p>
+            <a:pPr>
+              <a:buNone/>
+            </a:pPr>
             <a:r>
+              <a:rPr sz="13800"/>
               <a:t>1%</a:t>
             </a:r>
           </a:p>
@@ -5304,21 +5580,26 @@
         </p:nvSpPr>
         <p:spPr>
           <a:xfrm>
-            <a:off x="42976800" y="3396342"/>
+            <a:off x="42976800" y="5460705"/>
             <a:ext cx="1828800" cy="1828800"/>
           </a:xfrm>
           <a:prstGeom prst="ellipse">
             <a:avLst/>
           </a:prstGeom>
-        </p:spPr>
-        <p:style>
-          <a:lnRef idx="1">
-            <a:schemeClr val="accent1"/>
-          </a:lnRef>
-          <a:fillRef idx="3">
-            <a:schemeClr val="accent1"/>
-          </a:fillRef>
-          <a:effectRef idx="2">
+          <a:solidFill>
+            <a:schemeClr val="bg1"/>
+          </a:solidFill>
+        </p:spPr>
+        <p:style>
+          <a:lnRef idx="2">
+            <a:schemeClr val="accent1">
+              <a:shade val="50000"/>
+            </a:schemeClr>
+          </a:lnRef>
+          <a:fillRef idx="1">
+            <a:schemeClr val="accent1"/>
+          </a:fillRef>
+          <a:effectRef idx="0">
             <a:schemeClr val="accent1"/>
           </a:effectRef>
           <a:fontRef idx="minor">
@@ -5341,21 +5622,26 @@
         </p:nvSpPr>
         <p:spPr>
           <a:xfrm>
-            <a:off x="1828800" y="3396342"/>
+            <a:off x="1828800" y="5460705"/>
             <a:ext cx="42062400" cy="1828800"/>
           </a:xfrm>
           <a:prstGeom prst="rect">
             <a:avLst/>
           </a:prstGeom>
-        </p:spPr>
-        <p:style>
-          <a:lnRef idx="1">
-            <a:schemeClr val="accent1"/>
-          </a:lnRef>
-          <a:fillRef idx="3">
-            <a:schemeClr val="accent1"/>
-          </a:fillRef>
-          <a:effectRef idx="2">
+          <a:solidFill>
+            <a:schemeClr val="bg1"/>
+          </a:solidFill>
+        </p:spPr>
+        <p:style>
+          <a:lnRef idx="2">
+            <a:schemeClr val="accent1">
+              <a:shade val="50000"/>
+            </a:schemeClr>
+          </a:lnRef>
+          <a:fillRef idx="1">
+            <a:schemeClr val="accent1"/>
+          </a:fillRef>
+          <a:effectRef idx="0">
             <a:schemeClr val="accent1"/>
           </a:effectRef>
           <a:fontRef idx="minor">
@@ -5378,21 +5664,40 @@
         </p:nvSpPr>
         <p:spPr>
           <a:xfrm>
-            <a:off x="0" y="2481942"/>
+            <a:off x="0" y="4546305"/>
             <a:ext cx="3657600" cy="3657600"/>
           </a:xfrm>
           <a:prstGeom prst="ellipse">
             <a:avLst/>
           </a:prstGeom>
-        </p:spPr>
-        <p:style>
-          <a:lnRef idx="1">
-            <a:schemeClr val="accent1"/>
-          </a:lnRef>
-          <a:fillRef idx="3">
-            <a:schemeClr val="accent1"/>
-          </a:fillRef>
-          <a:effectRef idx="2">
+          <a:gradFill flip="none" rotWithShape="1">
+            <a:gsLst>
+              <a:gs pos="0">
+                <a:schemeClr val="accent1"/>
+              </a:gs>
+              <a:gs pos="17000">
+                <a:schemeClr val="bg1"/>
+              </a:gs>
+              <a:gs pos="6000">
+                <a:schemeClr val="accent1"/>
+              </a:gs>
+              <a:gs pos="100000">
+                <a:schemeClr val="bg1"/>
+              </a:gs>
+            </a:gsLst>
+            <a:lin ang="0" scaled="0"/>
+          </a:gradFill>
+        </p:spPr>
+        <p:style>
+          <a:lnRef idx="2">
+            <a:schemeClr val="accent1">
+              <a:shade val="50000"/>
+            </a:schemeClr>
+          </a:lnRef>
+          <a:fillRef idx="1">
+            <a:schemeClr val="accent1"/>
+          </a:fillRef>
+          <a:effectRef idx="0">
             <a:schemeClr val="accent1"/>
           </a:effectRef>
           <a:fontRef idx="minor">
@@ -5415,21 +5720,29 @@
         </p:nvSpPr>
         <p:spPr>
           <a:xfrm>
-            <a:off x="43760231" y="5165885"/>
-            <a:ext cx="238125" cy="1800224"/>
+            <a:off x="43760257" y="5477987"/>
+            <a:ext cx="238109" cy="1800179"/>
           </a:xfrm>
           <a:prstGeom prst="rect">
             <a:avLst/>
           </a:prstGeom>
-        </p:spPr>
-        <p:style>
-          <a:lnRef idx="1">
-            <a:schemeClr val="accent1"/>
-          </a:lnRef>
-          <a:fillRef idx="3">
-            <a:schemeClr val="accent1"/>
-          </a:fillRef>
-          <a:effectRef idx="2">
+          <a:solidFill>
+            <a:schemeClr val="bg1"/>
+          </a:solidFill>
+          <a:ln>
+            <a:noFill/>
+          </a:ln>
+        </p:spPr>
+        <p:style>
+          <a:lnRef idx="2">
+            <a:schemeClr val="accent1">
+              <a:shade val="50000"/>
+            </a:schemeClr>
+          </a:lnRef>
+          <a:fillRef idx="1">
+            <a:schemeClr val="accent1"/>
+          </a:fillRef>
+          <a:effectRef idx="0">
             <a:schemeClr val="accent1"/>
           </a:effectRef>
           <a:fontRef idx="minor">
@@ -5452,21 +5765,29 @@
         </p:nvSpPr>
         <p:spPr>
           <a:xfrm>
-            <a:off x="3398042" y="5574350"/>
-            <a:ext cx="404814" cy="1800224"/>
+            <a:off x="3398001" y="5474970"/>
+            <a:ext cx="404804" cy="1800179"/>
           </a:xfrm>
           <a:prstGeom prst="rect">
             <a:avLst/>
           </a:prstGeom>
-        </p:spPr>
-        <p:style>
-          <a:lnRef idx="1">
-            <a:schemeClr val="accent1"/>
-          </a:lnRef>
-          <a:fillRef idx="3">
-            <a:schemeClr val="accent1"/>
-          </a:fillRef>
-          <a:effectRef idx="2">
+          <a:solidFill>
+            <a:schemeClr val="bg1"/>
+          </a:solidFill>
+          <a:ln>
+            <a:noFill/>
+          </a:ln>
+        </p:spPr>
+        <p:style>
+          <a:lnRef idx="2">
+            <a:schemeClr val="accent1">
+              <a:shade val="50000"/>
+            </a:schemeClr>
+          </a:lnRef>
+          <a:fillRef idx="1">
+            <a:schemeClr val="accent1"/>
+          </a:fillRef>
+          <a:effectRef idx="0">
             <a:schemeClr val="accent1"/>
           </a:effectRef>
           <a:fontRef idx="minor">
@@ -5507,21 +5828,26 @@
         </p:nvSpPr>
         <p:spPr>
           <a:xfrm>
-            <a:off x="42976800" y="3396342"/>
+            <a:off x="42976800" y="1399580"/>
             <a:ext cx="1828800" cy="1828800"/>
           </a:xfrm>
           <a:prstGeom prst="ellipse">
             <a:avLst/>
           </a:prstGeom>
-        </p:spPr>
-        <p:style>
-          <a:lnRef idx="1">
-            <a:schemeClr val="accent1"/>
-          </a:lnRef>
-          <a:fillRef idx="3">
-            <a:schemeClr val="accent1"/>
-          </a:fillRef>
-          <a:effectRef idx="2">
+          <a:solidFill>
+            <a:schemeClr val="bg1"/>
+          </a:solidFill>
+        </p:spPr>
+        <p:style>
+          <a:lnRef idx="2">
+            <a:schemeClr val="accent1">
+              <a:shade val="50000"/>
+            </a:schemeClr>
+          </a:lnRef>
+          <a:fillRef idx="1">
+            <a:schemeClr val="accent1"/>
+          </a:fillRef>
+          <a:effectRef idx="0">
             <a:schemeClr val="accent1"/>
           </a:effectRef>
           <a:fontRef idx="minor">
@@ -5544,21 +5870,40 @@
         </p:nvSpPr>
         <p:spPr>
           <a:xfrm>
-            <a:off x="1828800" y="3396342"/>
+            <a:off x="1828800" y="1399580"/>
             <a:ext cx="42062400" cy="1828800"/>
           </a:xfrm>
           <a:prstGeom prst="rect">
             <a:avLst/>
           </a:prstGeom>
-        </p:spPr>
-        <p:style>
-          <a:lnRef idx="1">
-            <a:schemeClr val="accent1"/>
-          </a:lnRef>
-          <a:fillRef idx="3">
-            <a:schemeClr val="accent1"/>
-          </a:fillRef>
-          <a:effectRef idx="2">
+          <a:gradFill flip="none" rotWithShape="1">
+            <a:gsLst>
+              <a:gs pos="0">
+                <a:schemeClr val="accent1"/>
+              </a:gs>
+              <a:gs pos="49000">
+                <a:schemeClr val="bg1"/>
+              </a:gs>
+              <a:gs pos="47000">
+                <a:schemeClr val="accent1"/>
+              </a:gs>
+              <a:gs pos="100000">
+                <a:schemeClr val="bg1"/>
+              </a:gs>
+            </a:gsLst>
+            <a:lin ang="0" scaled="0"/>
+          </a:gradFill>
+        </p:spPr>
+        <p:style>
+          <a:lnRef idx="2">
+            <a:schemeClr val="accent1">
+              <a:shade val="50000"/>
+            </a:schemeClr>
+          </a:lnRef>
+          <a:fillRef idx="1">
+            <a:schemeClr val="accent1"/>
+          </a:fillRef>
+          <a:effectRef idx="0">
             <a:schemeClr val="accent1"/>
           </a:effectRef>
           <a:fontRef idx="minor">
@@ -5581,21 +5926,29 @@
         </p:nvSpPr>
         <p:spPr>
           <a:xfrm>
-            <a:off x="0" y="2481942"/>
+            <a:off x="0" y="485180"/>
             <a:ext cx="3657600" cy="3657600"/>
           </a:xfrm>
           <a:prstGeom prst="ellipse">
             <a:avLst/>
           </a:prstGeom>
-        </p:spPr>
-        <p:style>
-          <a:lnRef idx="1">
-            <a:schemeClr val="accent1"/>
-          </a:lnRef>
-          <a:fillRef idx="3">
-            <a:schemeClr val="accent1"/>
-          </a:fillRef>
-          <a:effectRef idx="2">
+          <a:solidFill>
+            <a:schemeClr val="accent1"/>
+          </a:solidFill>
+          <a:ln>
+            <a:noFill/>
+          </a:ln>
+        </p:spPr>
+        <p:style>
+          <a:lnRef idx="2">
+            <a:schemeClr val="accent1">
+              <a:shade val="50000"/>
+            </a:schemeClr>
+          </a:lnRef>
+          <a:fillRef idx="1">
+            <a:schemeClr val="accent1"/>
+          </a:fillRef>
+          <a:effectRef idx="0">
             <a:schemeClr val="accent1"/>
           </a:effectRef>
           <a:fontRef idx="minor">
@@ -5618,21 +5971,29 @@
         </p:nvSpPr>
         <p:spPr>
           <a:xfrm>
-            <a:off x="43760231" y="5165885"/>
-            <a:ext cx="238125" cy="1800224"/>
+            <a:off x="43760257" y="1416862"/>
+            <a:ext cx="238109" cy="1800179"/>
           </a:xfrm>
           <a:prstGeom prst="rect">
             <a:avLst/>
           </a:prstGeom>
-        </p:spPr>
-        <p:style>
-          <a:lnRef idx="1">
-            <a:schemeClr val="accent1"/>
-          </a:lnRef>
-          <a:fillRef idx="3">
-            <a:schemeClr val="accent1"/>
-          </a:fillRef>
-          <a:effectRef idx="2">
+          <a:solidFill>
+            <a:schemeClr val="bg1"/>
+          </a:solidFill>
+          <a:ln>
+            <a:noFill/>
+          </a:ln>
+        </p:spPr>
+        <p:style>
+          <a:lnRef idx="2">
+            <a:schemeClr val="accent1">
+              <a:shade val="50000"/>
+            </a:schemeClr>
+          </a:lnRef>
+          <a:fillRef idx="1">
+            <a:schemeClr val="accent1"/>
+          </a:fillRef>
+          <a:effectRef idx="0">
             <a:schemeClr val="accent1"/>
           </a:effectRef>
           <a:fontRef idx="minor">
@@ -5655,21 +6016,26 @@
         </p:nvSpPr>
         <p:spPr>
           <a:xfrm>
-            <a:off x="42976800" y="3396342"/>
+            <a:off x="42976800" y="5655746"/>
             <a:ext cx="1828800" cy="1828800"/>
           </a:xfrm>
           <a:prstGeom prst="ellipse">
             <a:avLst/>
           </a:prstGeom>
-        </p:spPr>
-        <p:style>
-          <a:lnRef idx="1">
-            <a:schemeClr val="accent1"/>
-          </a:lnRef>
-          <a:fillRef idx="3">
-            <a:schemeClr val="accent1"/>
-          </a:fillRef>
-          <a:effectRef idx="2">
+          <a:solidFill>
+            <a:schemeClr val="bg1"/>
+          </a:solidFill>
+        </p:spPr>
+        <p:style>
+          <a:lnRef idx="2">
+            <a:schemeClr val="accent1">
+              <a:shade val="50000"/>
+            </a:schemeClr>
+          </a:lnRef>
+          <a:fillRef idx="1">
+            <a:schemeClr val="accent1"/>
+          </a:fillRef>
+          <a:effectRef idx="0">
             <a:schemeClr val="accent1"/>
           </a:effectRef>
           <a:fontRef idx="minor">
@@ -5692,21 +6058,40 @@
         </p:nvSpPr>
         <p:spPr>
           <a:xfrm>
-            <a:off x="1828800" y="3396342"/>
+            <a:off x="1828800" y="5655746"/>
             <a:ext cx="42062400" cy="1828800"/>
           </a:xfrm>
           <a:prstGeom prst="rect">
             <a:avLst/>
           </a:prstGeom>
-        </p:spPr>
-        <p:style>
-          <a:lnRef idx="1">
-            <a:schemeClr val="accent1"/>
-          </a:lnRef>
-          <a:fillRef idx="3">
-            <a:schemeClr val="accent1"/>
-          </a:fillRef>
-          <a:effectRef idx="2">
+          <a:gradFill flip="none" rotWithShape="1">
+            <a:gsLst>
+              <a:gs pos="0">
+                <a:schemeClr val="accent1"/>
+              </a:gs>
+              <a:gs pos="54000">
+                <a:schemeClr val="bg1"/>
+              </a:gs>
+              <a:gs pos="52000">
+                <a:schemeClr val="accent1"/>
+              </a:gs>
+              <a:gs pos="100000">
+                <a:schemeClr val="bg1"/>
+              </a:gs>
+            </a:gsLst>
+            <a:lin ang="0" scaled="0"/>
+          </a:gradFill>
+        </p:spPr>
+        <p:style>
+          <a:lnRef idx="2">
+            <a:schemeClr val="accent1">
+              <a:shade val="50000"/>
+            </a:schemeClr>
+          </a:lnRef>
+          <a:fillRef idx="1">
+            <a:schemeClr val="accent1"/>
+          </a:fillRef>
+          <a:effectRef idx="0">
             <a:schemeClr val="accent1"/>
           </a:effectRef>
           <a:fontRef idx="minor">
@@ -5729,21 +6114,29 @@
         </p:nvSpPr>
         <p:spPr>
           <a:xfrm>
-            <a:off x="0" y="2481942"/>
+            <a:off x="0" y="4741346"/>
             <a:ext cx="3657600" cy="3657600"/>
           </a:xfrm>
           <a:prstGeom prst="ellipse">
             <a:avLst/>
           </a:prstGeom>
-        </p:spPr>
-        <p:style>
-          <a:lnRef idx="1">
-            <a:schemeClr val="accent1"/>
-          </a:lnRef>
-          <a:fillRef idx="3">
-            <a:schemeClr val="accent1"/>
-          </a:fillRef>
-          <a:effectRef idx="2">
+          <a:solidFill>
+            <a:schemeClr val="accent1"/>
+          </a:solidFill>
+          <a:ln>
+            <a:noFill/>
+          </a:ln>
+        </p:spPr>
+        <p:style>
+          <a:lnRef idx="2">
+            <a:schemeClr val="accent1">
+              <a:shade val="50000"/>
+            </a:schemeClr>
+          </a:lnRef>
+          <a:fillRef idx="1">
+            <a:schemeClr val="accent1"/>
+          </a:fillRef>
+          <a:effectRef idx="0">
             <a:schemeClr val="accent1"/>
           </a:effectRef>
           <a:fontRef idx="minor">
@@ -5766,21 +6159,29 @@
         </p:nvSpPr>
         <p:spPr>
           <a:xfrm>
-            <a:off x="43760231" y="5165885"/>
-            <a:ext cx="238125" cy="1800224"/>
+            <a:off x="43760257" y="5673029"/>
+            <a:ext cx="238109" cy="1800179"/>
           </a:xfrm>
           <a:prstGeom prst="rect">
             <a:avLst/>
           </a:prstGeom>
-        </p:spPr>
-        <p:style>
-          <a:lnRef idx="1">
-            <a:schemeClr val="accent1"/>
-          </a:lnRef>
-          <a:fillRef idx="3">
-            <a:schemeClr val="accent1"/>
-          </a:fillRef>
-          <a:effectRef idx="2">
+          <a:solidFill>
+            <a:schemeClr val="bg1"/>
+          </a:solidFill>
+          <a:ln>
+            <a:noFill/>
+          </a:ln>
+        </p:spPr>
+        <p:style>
+          <a:lnRef idx="2">
+            <a:schemeClr val="accent1">
+              <a:shade val="50000"/>
+            </a:schemeClr>
+          </a:lnRef>
+          <a:fillRef idx="1">
+            <a:schemeClr val="accent1"/>
+          </a:fillRef>
+          <a:effectRef idx="0">
             <a:schemeClr val="accent1"/>
           </a:effectRef>
           <a:fontRef idx="minor">
@@ -5803,21 +6204,26 @@
         </p:nvSpPr>
         <p:spPr>
           <a:xfrm>
-            <a:off x="42976800" y="3396342"/>
+            <a:off x="42976800" y="9911913"/>
             <a:ext cx="1828800" cy="1828800"/>
           </a:xfrm>
           <a:prstGeom prst="ellipse">
             <a:avLst/>
           </a:prstGeom>
-        </p:spPr>
-        <p:style>
-          <a:lnRef idx="1">
-            <a:schemeClr val="accent1"/>
-          </a:lnRef>
-          <a:fillRef idx="3">
-            <a:schemeClr val="accent1"/>
-          </a:fillRef>
-          <a:effectRef idx="2">
+          <a:solidFill>
+            <a:schemeClr val="bg1"/>
+          </a:solidFill>
+        </p:spPr>
+        <p:style>
+          <a:lnRef idx="2">
+            <a:schemeClr val="accent1">
+              <a:shade val="50000"/>
+            </a:schemeClr>
+          </a:lnRef>
+          <a:fillRef idx="1">
+            <a:schemeClr val="accent1"/>
+          </a:fillRef>
+          <a:effectRef idx="0">
             <a:schemeClr val="accent1"/>
           </a:effectRef>
           <a:fontRef idx="minor">
@@ -5840,21 +6246,40 @@
         </p:nvSpPr>
         <p:spPr>
           <a:xfrm>
-            <a:off x="1828800" y="3396342"/>
+            <a:off x="1828800" y="9911913"/>
             <a:ext cx="42062400" cy="1828800"/>
           </a:xfrm>
           <a:prstGeom prst="rect">
             <a:avLst/>
           </a:prstGeom>
-        </p:spPr>
-        <p:style>
-          <a:lnRef idx="1">
-            <a:schemeClr val="accent1"/>
-          </a:lnRef>
-          <a:fillRef idx="3">
-            <a:schemeClr val="accent1"/>
-          </a:fillRef>
-          <a:effectRef idx="2">
+          <a:gradFill flip="none" rotWithShape="1">
+            <a:gsLst>
+              <a:gs pos="0">
+                <a:schemeClr val="accent1"/>
+              </a:gs>
+              <a:gs pos="60000">
+                <a:schemeClr val="bg1"/>
+              </a:gs>
+              <a:gs pos="58000">
+                <a:schemeClr val="accent1"/>
+              </a:gs>
+              <a:gs pos="100000">
+                <a:schemeClr val="bg1"/>
+              </a:gs>
+            </a:gsLst>
+            <a:lin ang="0" scaled="0"/>
+          </a:gradFill>
+        </p:spPr>
+        <p:style>
+          <a:lnRef idx="2">
+            <a:schemeClr val="accent1">
+              <a:shade val="50000"/>
+            </a:schemeClr>
+          </a:lnRef>
+          <a:fillRef idx="1">
+            <a:schemeClr val="accent1"/>
+          </a:fillRef>
+          <a:effectRef idx="0">
             <a:schemeClr val="accent1"/>
           </a:effectRef>
           <a:fontRef idx="minor">
@@ -5877,21 +6302,29 @@
         </p:nvSpPr>
         <p:spPr>
           <a:xfrm>
-            <a:off x="0" y="2481942"/>
+            <a:off x="0" y="8997513"/>
             <a:ext cx="3657600" cy="3657600"/>
           </a:xfrm>
           <a:prstGeom prst="ellipse">
             <a:avLst/>
           </a:prstGeom>
-        </p:spPr>
-        <p:style>
-          <a:lnRef idx="1">
-            <a:schemeClr val="accent1"/>
-          </a:lnRef>
-          <a:fillRef idx="3">
-            <a:schemeClr val="accent1"/>
-          </a:fillRef>
-          <a:effectRef idx="2">
+          <a:solidFill>
+            <a:schemeClr val="accent1"/>
+          </a:solidFill>
+          <a:ln>
+            <a:noFill/>
+          </a:ln>
+        </p:spPr>
+        <p:style>
+          <a:lnRef idx="2">
+            <a:schemeClr val="accent1">
+              <a:shade val="50000"/>
+            </a:schemeClr>
+          </a:lnRef>
+          <a:fillRef idx="1">
+            <a:schemeClr val="accent1"/>
+          </a:fillRef>
+          <a:effectRef idx="0">
             <a:schemeClr val="accent1"/>
           </a:effectRef>
           <a:fontRef idx="minor">
@@ -5914,21 +6347,29 @@
         </p:nvSpPr>
         <p:spPr>
           <a:xfrm>
-            <a:off x="43760231" y="5165885"/>
-            <a:ext cx="238125" cy="1800224"/>
+            <a:off x="43760257" y="9929195"/>
+            <a:ext cx="238109" cy="1800179"/>
           </a:xfrm>
           <a:prstGeom prst="rect">
             <a:avLst/>
           </a:prstGeom>
-        </p:spPr>
-        <p:style>
-          <a:lnRef idx="1">
-            <a:schemeClr val="accent1"/>
-          </a:lnRef>
-          <a:fillRef idx="3">
-            <a:schemeClr val="accent1"/>
-          </a:fillRef>
-          <a:effectRef idx="2">
+          <a:solidFill>
+            <a:schemeClr val="bg1"/>
+          </a:solidFill>
+          <a:ln>
+            <a:noFill/>
+          </a:ln>
+        </p:spPr>
+        <p:style>
+          <a:lnRef idx="2">
+            <a:schemeClr val="accent1">
+              <a:shade val="50000"/>
+            </a:schemeClr>
+          </a:lnRef>
+          <a:fillRef idx="1">
+            <a:schemeClr val="accent1"/>
+          </a:fillRef>
+          <a:effectRef idx="0">
             <a:schemeClr val="accent1"/>
           </a:effectRef>
           <a:fontRef idx="minor">
@@ -5951,21 +6392,26 @@
         </p:nvSpPr>
         <p:spPr>
           <a:xfrm>
-            <a:off x="42976800" y="3396342"/>
+            <a:off x="42976800" y="14168170"/>
             <a:ext cx="1828800" cy="1828800"/>
           </a:xfrm>
           <a:prstGeom prst="ellipse">
             <a:avLst/>
           </a:prstGeom>
-        </p:spPr>
-        <p:style>
-          <a:lnRef idx="1">
-            <a:schemeClr val="accent1"/>
-          </a:lnRef>
-          <a:fillRef idx="3">
-            <a:schemeClr val="accent1"/>
-          </a:fillRef>
-          <a:effectRef idx="2">
+          <a:solidFill>
+            <a:schemeClr val="bg1"/>
+          </a:solidFill>
+        </p:spPr>
+        <p:style>
+          <a:lnRef idx="2">
+            <a:schemeClr val="accent1">
+              <a:shade val="50000"/>
+            </a:schemeClr>
+          </a:lnRef>
+          <a:fillRef idx="1">
+            <a:schemeClr val="accent1"/>
+          </a:fillRef>
+          <a:effectRef idx="0">
             <a:schemeClr val="accent1"/>
           </a:effectRef>
           <a:fontRef idx="minor">
@@ -5988,21 +6434,40 @@
         </p:nvSpPr>
         <p:spPr>
           <a:xfrm>
-            <a:off x="1828800" y="3396342"/>
+            <a:off x="1828800" y="14168170"/>
             <a:ext cx="42062400" cy="1828800"/>
           </a:xfrm>
           <a:prstGeom prst="rect">
             <a:avLst/>
           </a:prstGeom>
-        </p:spPr>
-        <p:style>
-          <a:lnRef idx="1">
-            <a:schemeClr val="accent1"/>
-          </a:lnRef>
-          <a:fillRef idx="3">
-            <a:schemeClr val="accent1"/>
-          </a:fillRef>
-          <a:effectRef idx="2">
+          <a:gradFill flip="none" rotWithShape="1">
+            <a:gsLst>
+              <a:gs pos="0">
+                <a:schemeClr val="accent1"/>
+              </a:gs>
+              <a:gs pos="65000">
+                <a:schemeClr val="bg1"/>
+              </a:gs>
+              <a:gs pos="63000">
+                <a:schemeClr val="accent1"/>
+              </a:gs>
+              <a:gs pos="100000">
+                <a:schemeClr val="bg1"/>
+              </a:gs>
+            </a:gsLst>
+            <a:lin ang="0" scaled="0"/>
+          </a:gradFill>
+        </p:spPr>
+        <p:style>
+          <a:lnRef idx="2">
+            <a:schemeClr val="accent1">
+              <a:shade val="50000"/>
+            </a:schemeClr>
+          </a:lnRef>
+          <a:fillRef idx="1">
+            <a:schemeClr val="accent1"/>
+          </a:fillRef>
+          <a:effectRef idx="0">
             <a:schemeClr val="accent1"/>
           </a:effectRef>
           <a:fontRef idx="minor">
@@ -6025,21 +6490,29 @@
         </p:nvSpPr>
         <p:spPr>
           <a:xfrm>
-            <a:off x="0" y="2481942"/>
+            <a:off x="0" y="13253770"/>
             <a:ext cx="3657600" cy="3657600"/>
           </a:xfrm>
           <a:prstGeom prst="ellipse">
             <a:avLst/>
           </a:prstGeom>
-        </p:spPr>
-        <p:style>
-          <a:lnRef idx="1">
-            <a:schemeClr val="accent1"/>
-          </a:lnRef>
-          <a:fillRef idx="3">
-            <a:schemeClr val="accent1"/>
-          </a:fillRef>
-          <a:effectRef idx="2">
+          <a:solidFill>
+            <a:schemeClr val="accent1"/>
+          </a:solidFill>
+          <a:ln>
+            <a:noFill/>
+          </a:ln>
+        </p:spPr>
+        <p:style>
+          <a:lnRef idx="2">
+            <a:schemeClr val="accent1">
+              <a:shade val="50000"/>
+            </a:schemeClr>
+          </a:lnRef>
+          <a:fillRef idx="1">
+            <a:schemeClr val="accent1"/>
+          </a:fillRef>
+          <a:effectRef idx="0">
             <a:schemeClr val="accent1"/>
           </a:effectRef>
           <a:fontRef idx="minor">
@@ -6062,21 +6535,29 @@
         </p:nvSpPr>
         <p:spPr>
           <a:xfrm>
-            <a:off x="43760231" y="5165885"/>
-            <a:ext cx="238125" cy="1800224"/>
+            <a:off x="43760257" y="14185452"/>
+            <a:ext cx="238109" cy="1800179"/>
           </a:xfrm>
           <a:prstGeom prst="rect">
             <a:avLst/>
           </a:prstGeom>
-        </p:spPr>
-        <p:style>
-          <a:lnRef idx="1">
-            <a:schemeClr val="accent1"/>
-          </a:lnRef>
-          <a:fillRef idx="3">
-            <a:schemeClr val="accent1"/>
-          </a:fillRef>
-          <a:effectRef idx="2">
+          <a:solidFill>
+            <a:schemeClr val="bg1"/>
+          </a:solidFill>
+          <a:ln>
+            <a:noFill/>
+          </a:ln>
+        </p:spPr>
+        <p:style>
+          <a:lnRef idx="2">
+            <a:schemeClr val="accent1">
+              <a:shade val="50000"/>
+            </a:schemeClr>
+          </a:lnRef>
+          <a:fillRef idx="1">
+            <a:schemeClr val="accent1"/>
+          </a:fillRef>
+          <a:effectRef idx="0">
             <a:schemeClr val="accent1"/>
           </a:effectRef>
           <a:fontRef idx="minor">
@@ -6099,21 +6580,26 @@
         </p:nvSpPr>
         <p:spPr>
           <a:xfrm>
-            <a:off x="42976800" y="3396342"/>
+            <a:off x="42976800" y="18424337"/>
             <a:ext cx="1828800" cy="1828800"/>
           </a:xfrm>
           <a:prstGeom prst="ellipse">
             <a:avLst/>
           </a:prstGeom>
-        </p:spPr>
-        <p:style>
-          <a:lnRef idx="1">
-            <a:schemeClr val="accent1"/>
-          </a:lnRef>
-          <a:fillRef idx="3">
-            <a:schemeClr val="accent1"/>
-          </a:fillRef>
-          <a:effectRef idx="2">
+          <a:solidFill>
+            <a:schemeClr val="bg1"/>
+          </a:solidFill>
+        </p:spPr>
+        <p:style>
+          <a:lnRef idx="2">
+            <a:schemeClr val="accent1">
+              <a:shade val="50000"/>
+            </a:schemeClr>
+          </a:lnRef>
+          <a:fillRef idx="1">
+            <a:schemeClr val="accent1"/>
+          </a:fillRef>
+          <a:effectRef idx="0">
             <a:schemeClr val="accent1"/>
           </a:effectRef>
           <a:fontRef idx="minor">
@@ -6136,21 +6622,40 @@
         </p:nvSpPr>
         <p:spPr>
           <a:xfrm>
-            <a:off x="1828800" y="3396342"/>
+            <a:off x="1828800" y="18424337"/>
             <a:ext cx="42062400" cy="1828800"/>
           </a:xfrm>
           <a:prstGeom prst="rect">
             <a:avLst/>
           </a:prstGeom>
-        </p:spPr>
-        <p:style>
-          <a:lnRef idx="1">
-            <a:schemeClr val="accent1"/>
-          </a:lnRef>
-          <a:fillRef idx="3">
-            <a:schemeClr val="accent1"/>
-          </a:fillRef>
-          <a:effectRef idx="2">
+          <a:gradFill flip="none" rotWithShape="1">
+            <a:gsLst>
+              <a:gs pos="0">
+                <a:schemeClr val="accent1"/>
+              </a:gs>
+              <a:gs pos="71000">
+                <a:schemeClr val="bg1"/>
+              </a:gs>
+              <a:gs pos="69000">
+                <a:schemeClr val="accent1"/>
+              </a:gs>
+              <a:gs pos="100000">
+                <a:schemeClr val="bg1"/>
+              </a:gs>
+            </a:gsLst>
+            <a:lin ang="0" scaled="0"/>
+          </a:gradFill>
+        </p:spPr>
+        <p:style>
+          <a:lnRef idx="2">
+            <a:schemeClr val="accent1">
+              <a:shade val="50000"/>
+            </a:schemeClr>
+          </a:lnRef>
+          <a:fillRef idx="1">
+            <a:schemeClr val="accent1"/>
+          </a:fillRef>
+          <a:effectRef idx="0">
             <a:schemeClr val="accent1"/>
           </a:effectRef>
           <a:fontRef idx="minor">
@@ -6173,21 +6678,29 @@
         </p:nvSpPr>
         <p:spPr>
           <a:xfrm>
-            <a:off x="0" y="2481942"/>
+            <a:off x="0" y="17509937"/>
             <a:ext cx="3657600" cy="3657600"/>
           </a:xfrm>
           <a:prstGeom prst="ellipse">
             <a:avLst/>
           </a:prstGeom>
-        </p:spPr>
-        <p:style>
-          <a:lnRef idx="1">
-            <a:schemeClr val="accent1"/>
-          </a:lnRef>
-          <a:fillRef idx="3">
-            <a:schemeClr val="accent1"/>
-          </a:fillRef>
-          <a:effectRef idx="2">
+          <a:solidFill>
+            <a:schemeClr val="accent1"/>
+          </a:solidFill>
+          <a:ln>
+            <a:noFill/>
+          </a:ln>
+        </p:spPr>
+        <p:style>
+          <a:lnRef idx="2">
+            <a:schemeClr val="accent1">
+              <a:shade val="50000"/>
+            </a:schemeClr>
+          </a:lnRef>
+          <a:fillRef idx="1">
+            <a:schemeClr val="accent1"/>
+          </a:fillRef>
+          <a:effectRef idx="0">
             <a:schemeClr val="accent1"/>
           </a:effectRef>
           <a:fontRef idx="minor">
@@ -6210,21 +6723,29 @@
         </p:nvSpPr>
         <p:spPr>
           <a:xfrm>
-            <a:off x="43760231" y="5165885"/>
-            <a:ext cx="238125" cy="1800224"/>
+            <a:off x="43760257" y="18441619"/>
+            <a:ext cx="238109" cy="1800179"/>
           </a:xfrm>
           <a:prstGeom prst="rect">
             <a:avLst/>
           </a:prstGeom>
-        </p:spPr>
-        <p:style>
-          <a:lnRef idx="1">
-            <a:schemeClr val="accent1"/>
-          </a:lnRef>
-          <a:fillRef idx="3">
-            <a:schemeClr val="accent1"/>
-          </a:fillRef>
-          <a:effectRef idx="2">
+          <a:solidFill>
+            <a:schemeClr val="bg1"/>
+          </a:solidFill>
+          <a:ln>
+            <a:noFill/>
+          </a:ln>
+        </p:spPr>
+        <p:style>
+          <a:lnRef idx="2">
+            <a:schemeClr val="accent1">
+              <a:shade val="50000"/>
+            </a:schemeClr>
+          </a:lnRef>
+          <a:fillRef idx="1">
+            <a:schemeClr val="accent1"/>
+          </a:fillRef>
+          <a:effectRef idx="0">
             <a:schemeClr val="accent1"/>
           </a:effectRef>
           <a:fontRef idx="minor">
@@ -6247,21 +6768,26 @@
         </p:nvSpPr>
         <p:spPr>
           <a:xfrm>
-            <a:off x="42976800" y="3396342"/>
+            <a:off x="42976800" y="22680503"/>
             <a:ext cx="1828800" cy="1828800"/>
           </a:xfrm>
           <a:prstGeom prst="ellipse">
             <a:avLst/>
           </a:prstGeom>
-        </p:spPr>
-        <p:style>
-          <a:lnRef idx="1">
-            <a:schemeClr val="accent1"/>
-          </a:lnRef>
-          <a:fillRef idx="3">
-            <a:schemeClr val="accent1"/>
-          </a:fillRef>
-          <a:effectRef idx="2">
+          <a:solidFill>
+            <a:schemeClr val="bg1"/>
+          </a:solidFill>
+        </p:spPr>
+        <p:style>
+          <a:lnRef idx="2">
+            <a:schemeClr val="accent1">
+              <a:shade val="50000"/>
+            </a:schemeClr>
+          </a:lnRef>
+          <a:fillRef idx="1">
+            <a:schemeClr val="accent1"/>
+          </a:fillRef>
+          <a:effectRef idx="0">
             <a:schemeClr val="accent1"/>
           </a:effectRef>
           <a:fontRef idx="minor">
@@ -6284,21 +6810,40 @@
         </p:nvSpPr>
         <p:spPr>
           <a:xfrm>
-            <a:off x="1828800" y="3396342"/>
+            <a:off x="1828800" y="22680503"/>
             <a:ext cx="42062400" cy="1828800"/>
           </a:xfrm>
           <a:prstGeom prst="rect">
             <a:avLst/>
           </a:prstGeom>
-        </p:spPr>
-        <p:style>
-          <a:lnRef idx="1">
-            <a:schemeClr val="accent1"/>
-          </a:lnRef>
-          <a:fillRef idx="3">
-            <a:schemeClr val="accent1"/>
-          </a:fillRef>
-          <a:effectRef idx="2">
+          <a:gradFill flip="none" rotWithShape="1">
+            <a:gsLst>
+              <a:gs pos="0">
+                <a:schemeClr val="accent1"/>
+              </a:gs>
+              <a:gs pos="76000">
+                <a:schemeClr val="bg1"/>
+              </a:gs>
+              <a:gs pos="74000">
+                <a:schemeClr val="accent1"/>
+              </a:gs>
+              <a:gs pos="100000">
+                <a:schemeClr val="bg1"/>
+              </a:gs>
+            </a:gsLst>
+            <a:lin ang="0" scaled="0"/>
+          </a:gradFill>
+        </p:spPr>
+        <p:style>
+          <a:lnRef idx="2">
+            <a:schemeClr val="accent1">
+              <a:shade val="50000"/>
+            </a:schemeClr>
+          </a:lnRef>
+          <a:fillRef idx="1">
+            <a:schemeClr val="accent1"/>
+          </a:fillRef>
+          <a:effectRef idx="0">
             <a:schemeClr val="accent1"/>
           </a:effectRef>
           <a:fontRef idx="minor">
@@ -6321,21 +6866,29 @@
         </p:nvSpPr>
         <p:spPr>
           <a:xfrm>
-            <a:off x="0" y="2481942"/>
+            <a:off x="0" y="21766103"/>
             <a:ext cx="3657600" cy="3657600"/>
           </a:xfrm>
           <a:prstGeom prst="ellipse">
             <a:avLst/>
           </a:prstGeom>
-        </p:spPr>
-        <p:style>
-          <a:lnRef idx="1">
-            <a:schemeClr val="accent1"/>
-          </a:lnRef>
-          <a:fillRef idx="3">
-            <a:schemeClr val="accent1"/>
-          </a:fillRef>
-          <a:effectRef idx="2">
+          <a:solidFill>
+            <a:schemeClr val="accent1"/>
+          </a:solidFill>
+          <a:ln>
+            <a:noFill/>
+          </a:ln>
+        </p:spPr>
+        <p:style>
+          <a:lnRef idx="2">
+            <a:schemeClr val="accent1">
+              <a:shade val="50000"/>
+            </a:schemeClr>
+          </a:lnRef>
+          <a:fillRef idx="1">
+            <a:schemeClr val="accent1"/>
+          </a:fillRef>
+          <a:effectRef idx="0">
             <a:schemeClr val="accent1"/>
           </a:effectRef>
           <a:fontRef idx="minor">
@@ -6358,21 +6911,29 @@
         </p:nvSpPr>
         <p:spPr>
           <a:xfrm>
-            <a:off x="43760231" y="5165885"/>
-            <a:ext cx="238125" cy="1800224"/>
+            <a:off x="43760257" y="22697785"/>
+            <a:ext cx="238109" cy="1800179"/>
           </a:xfrm>
           <a:prstGeom prst="rect">
             <a:avLst/>
           </a:prstGeom>
-        </p:spPr>
-        <p:style>
-          <a:lnRef idx="1">
-            <a:schemeClr val="accent1"/>
-          </a:lnRef>
-          <a:fillRef idx="3">
-            <a:schemeClr val="accent1"/>
-          </a:fillRef>
-          <a:effectRef idx="2">
+          <a:solidFill>
+            <a:schemeClr val="bg1"/>
+          </a:solidFill>
+          <a:ln>
+            <a:noFill/>
+          </a:ln>
+        </p:spPr>
+        <p:style>
+          <a:lnRef idx="2">
+            <a:schemeClr val="accent1">
+              <a:shade val="50000"/>
+            </a:schemeClr>
+          </a:lnRef>
+          <a:fillRef idx="1">
+            <a:schemeClr val="accent1"/>
+          </a:fillRef>
+          <a:effectRef idx="0">
             <a:schemeClr val="accent1"/>
           </a:effectRef>
           <a:fontRef idx="minor">
@@ -6395,21 +6956,26 @@
         </p:nvSpPr>
         <p:spPr>
           <a:xfrm>
-            <a:off x="42976800" y="3396342"/>
+            <a:off x="42976800" y="26936669"/>
             <a:ext cx="1828800" cy="1828800"/>
           </a:xfrm>
           <a:prstGeom prst="ellipse">
             <a:avLst/>
           </a:prstGeom>
-        </p:spPr>
-        <p:style>
-          <a:lnRef idx="1">
-            <a:schemeClr val="accent1"/>
-          </a:lnRef>
-          <a:fillRef idx="3">
-            <a:schemeClr val="accent1"/>
-          </a:fillRef>
-          <a:effectRef idx="2">
+          <a:solidFill>
+            <a:schemeClr val="bg1"/>
+          </a:solidFill>
+        </p:spPr>
+        <p:style>
+          <a:lnRef idx="2">
+            <a:schemeClr val="accent1">
+              <a:shade val="50000"/>
+            </a:schemeClr>
+          </a:lnRef>
+          <a:fillRef idx="1">
+            <a:schemeClr val="accent1"/>
+          </a:fillRef>
+          <a:effectRef idx="0">
             <a:schemeClr val="accent1"/>
           </a:effectRef>
           <a:fontRef idx="minor">
@@ -6432,21 +6998,40 @@
         </p:nvSpPr>
         <p:spPr>
           <a:xfrm>
-            <a:off x="1828800" y="3396342"/>
+            <a:off x="1828800" y="26936669"/>
             <a:ext cx="42062400" cy="1828800"/>
           </a:xfrm>
           <a:prstGeom prst="rect">
             <a:avLst/>
           </a:prstGeom>
-        </p:spPr>
-        <p:style>
-          <a:lnRef idx="1">
-            <a:schemeClr val="accent1"/>
-          </a:lnRef>
-          <a:fillRef idx="3">
-            <a:schemeClr val="accent1"/>
-          </a:fillRef>
-          <a:effectRef idx="2">
+          <a:gradFill flip="none" rotWithShape="1">
+            <a:gsLst>
+              <a:gs pos="0">
+                <a:schemeClr val="accent1"/>
+              </a:gs>
+              <a:gs pos="82000">
+                <a:schemeClr val="bg1"/>
+              </a:gs>
+              <a:gs pos="80000">
+                <a:schemeClr val="accent1"/>
+              </a:gs>
+              <a:gs pos="100000">
+                <a:schemeClr val="bg1"/>
+              </a:gs>
+            </a:gsLst>
+            <a:lin ang="0" scaled="0"/>
+          </a:gradFill>
+        </p:spPr>
+        <p:style>
+          <a:lnRef idx="2">
+            <a:schemeClr val="accent1">
+              <a:shade val="50000"/>
+            </a:schemeClr>
+          </a:lnRef>
+          <a:fillRef idx="1">
+            <a:schemeClr val="accent1"/>
+          </a:fillRef>
+          <a:effectRef idx="0">
             <a:schemeClr val="accent1"/>
           </a:effectRef>
           <a:fontRef idx="minor">
@@ -6469,21 +7054,29 @@
         </p:nvSpPr>
         <p:spPr>
           <a:xfrm>
-            <a:off x="0" y="2481942"/>
+            <a:off x="0" y="26022269"/>
             <a:ext cx="3657600" cy="3657600"/>
           </a:xfrm>
           <a:prstGeom prst="ellipse">
             <a:avLst/>
           </a:prstGeom>
-        </p:spPr>
-        <p:style>
-          <a:lnRef idx="1">
-            <a:schemeClr val="accent1"/>
-          </a:lnRef>
-          <a:fillRef idx="3">
-            <a:schemeClr val="accent1"/>
-          </a:fillRef>
-          <a:effectRef idx="2">
+          <a:solidFill>
+            <a:schemeClr val="accent1"/>
+          </a:solidFill>
+          <a:ln>
+            <a:noFill/>
+          </a:ln>
+        </p:spPr>
+        <p:style>
+          <a:lnRef idx="2">
+            <a:schemeClr val="accent1">
+              <a:shade val="50000"/>
+            </a:schemeClr>
+          </a:lnRef>
+          <a:fillRef idx="1">
+            <a:schemeClr val="accent1"/>
+          </a:fillRef>
+          <a:effectRef idx="0">
             <a:schemeClr val="accent1"/>
           </a:effectRef>
           <a:fontRef idx="minor">
@@ -6506,21 +7099,29 @@
         </p:nvSpPr>
         <p:spPr>
           <a:xfrm>
-            <a:off x="43760231" y="5165885"/>
-            <a:ext cx="238125" cy="1800224"/>
+            <a:off x="43760257" y="26953951"/>
+            <a:ext cx="238109" cy="1800179"/>
           </a:xfrm>
           <a:prstGeom prst="rect">
             <a:avLst/>
           </a:prstGeom>
-        </p:spPr>
-        <p:style>
-          <a:lnRef idx="1">
-            <a:schemeClr val="accent1"/>
-          </a:lnRef>
-          <a:fillRef idx="3">
-            <a:schemeClr val="accent1"/>
-          </a:fillRef>
-          <a:effectRef idx="2">
+          <a:solidFill>
+            <a:schemeClr val="bg1"/>
+          </a:solidFill>
+          <a:ln>
+            <a:noFill/>
+          </a:ln>
+        </p:spPr>
+        <p:style>
+          <a:lnRef idx="2">
+            <a:schemeClr val="accent1">
+              <a:shade val="50000"/>
+            </a:schemeClr>
+          </a:lnRef>
+          <a:fillRef idx="1">
+            <a:schemeClr val="accent1"/>
+          </a:fillRef>
+          <a:effectRef idx="0">
             <a:schemeClr val="accent1"/>
           </a:effectRef>
           <a:fontRef idx="minor">
@@ -6543,21 +7144,26 @@
         </p:nvSpPr>
         <p:spPr>
           <a:xfrm>
-            <a:off x="42976800" y="3396342"/>
+            <a:off x="42976800" y="31192927"/>
             <a:ext cx="1828800" cy="1828800"/>
           </a:xfrm>
           <a:prstGeom prst="ellipse">
             <a:avLst/>
           </a:prstGeom>
-        </p:spPr>
-        <p:style>
-          <a:lnRef idx="1">
-            <a:schemeClr val="accent1"/>
-          </a:lnRef>
-          <a:fillRef idx="3">
-            <a:schemeClr val="accent1"/>
-          </a:fillRef>
-          <a:effectRef idx="2">
+          <a:solidFill>
+            <a:schemeClr val="bg1"/>
+          </a:solidFill>
+        </p:spPr>
+        <p:style>
+          <a:lnRef idx="2">
+            <a:schemeClr val="accent1">
+              <a:shade val="50000"/>
+            </a:schemeClr>
+          </a:lnRef>
+          <a:fillRef idx="1">
+            <a:schemeClr val="accent1"/>
+          </a:fillRef>
+          <a:effectRef idx="0">
             <a:schemeClr val="accent1"/>
           </a:effectRef>
           <a:fontRef idx="minor">
@@ -6580,21 +7186,40 @@
         </p:nvSpPr>
         <p:spPr>
           <a:xfrm>
-            <a:off x="1828800" y="3396342"/>
+            <a:off x="1828800" y="31192927"/>
             <a:ext cx="42062400" cy="1828800"/>
           </a:xfrm>
           <a:prstGeom prst="rect">
             <a:avLst/>
           </a:prstGeom>
-        </p:spPr>
-        <p:style>
-          <a:lnRef idx="1">
-            <a:schemeClr val="accent1"/>
-          </a:lnRef>
-          <a:fillRef idx="3">
-            <a:schemeClr val="accent1"/>
-          </a:fillRef>
-          <a:effectRef idx="2">
+          <a:gradFill flip="none" rotWithShape="1">
+            <a:gsLst>
+              <a:gs pos="0">
+                <a:schemeClr val="accent1"/>
+              </a:gs>
+              <a:gs pos="86000">
+                <a:schemeClr val="bg1"/>
+              </a:gs>
+              <a:gs pos="85000">
+                <a:schemeClr val="accent1"/>
+              </a:gs>
+              <a:gs pos="100000">
+                <a:schemeClr val="bg1"/>
+              </a:gs>
+            </a:gsLst>
+            <a:lin ang="0" scaled="0"/>
+          </a:gradFill>
+        </p:spPr>
+        <p:style>
+          <a:lnRef idx="2">
+            <a:schemeClr val="accent1">
+              <a:shade val="50000"/>
+            </a:schemeClr>
+          </a:lnRef>
+          <a:fillRef idx="1">
+            <a:schemeClr val="accent1"/>
+          </a:fillRef>
+          <a:effectRef idx="0">
             <a:schemeClr val="accent1"/>
           </a:effectRef>
           <a:fontRef idx="minor">
@@ -6617,21 +7242,29 @@
         </p:nvSpPr>
         <p:spPr>
           <a:xfrm>
-            <a:off x="0" y="2481942"/>
+            <a:off x="0" y="30278527"/>
             <a:ext cx="3657600" cy="3657600"/>
           </a:xfrm>
           <a:prstGeom prst="ellipse">
             <a:avLst/>
           </a:prstGeom>
-        </p:spPr>
-        <p:style>
-          <a:lnRef idx="1">
-            <a:schemeClr val="accent1"/>
-          </a:lnRef>
-          <a:fillRef idx="3">
-            <a:schemeClr val="accent1"/>
-          </a:fillRef>
-          <a:effectRef idx="2">
+          <a:solidFill>
+            <a:schemeClr val="accent1"/>
+          </a:solidFill>
+          <a:ln>
+            <a:noFill/>
+          </a:ln>
+        </p:spPr>
+        <p:style>
+          <a:lnRef idx="2">
+            <a:schemeClr val="accent1">
+              <a:shade val="50000"/>
+            </a:schemeClr>
+          </a:lnRef>
+          <a:fillRef idx="1">
+            <a:schemeClr val="accent1"/>
+          </a:fillRef>
+          <a:effectRef idx="0">
             <a:schemeClr val="accent1"/>
           </a:effectRef>
           <a:fontRef idx="minor">
@@ -6654,21 +7287,29 @@
         </p:nvSpPr>
         <p:spPr>
           <a:xfrm>
-            <a:off x="43760231" y="5165885"/>
-            <a:ext cx="238125" cy="1800224"/>
+            <a:off x="43760257" y="31210209"/>
+            <a:ext cx="238109" cy="1800179"/>
           </a:xfrm>
           <a:prstGeom prst="rect">
             <a:avLst/>
           </a:prstGeom>
-        </p:spPr>
-        <p:style>
-          <a:lnRef idx="1">
-            <a:schemeClr val="accent1"/>
-          </a:lnRef>
-          <a:fillRef idx="3">
-            <a:schemeClr val="accent1"/>
-          </a:fillRef>
-          <a:effectRef idx="2">
+          <a:solidFill>
+            <a:schemeClr val="bg1"/>
+          </a:solidFill>
+          <a:ln>
+            <a:noFill/>
+          </a:ln>
+        </p:spPr>
+        <p:style>
+          <a:lnRef idx="2">
+            <a:schemeClr val="accent1">
+              <a:shade val="50000"/>
+            </a:schemeClr>
+          </a:lnRef>
+          <a:fillRef idx="1">
+            <a:schemeClr val="accent1"/>
+          </a:fillRef>
+          <a:effectRef idx="0">
             <a:schemeClr val="accent1"/>
           </a:effectRef>
           <a:fontRef idx="minor">
@@ -6691,21 +7332,26 @@
         </p:nvSpPr>
         <p:spPr>
           <a:xfrm>
-            <a:off x="42976800" y="3396342"/>
+            <a:off x="42976800" y="35449093"/>
             <a:ext cx="1828800" cy="1828800"/>
           </a:xfrm>
           <a:prstGeom prst="ellipse">
             <a:avLst/>
           </a:prstGeom>
-        </p:spPr>
-        <p:style>
-          <a:lnRef idx="1">
-            <a:schemeClr val="accent1"/>
-          </a:lnRef>
-          <a:fillRef idx="3">
-            <a:schemeClr val="accent1"/>
-          </a:fillRef>
-          <a:effectRef idx="2">
+          <a:solidFill>
+            <a:schemeClr val="bg1"/>
+          </a:solidFill>
+        </p:spPr>
+        <p:style>
+          <a:lnRef idx="2">
+            <a:schemeClr val="accent1">
+              <a:shade val="50000"/>
+            </a:schemeClr>
+          </a:lnRef>
+          <a:fillRef idx="1">
+            <a:schemeClr val="accent1"/>
+          </a:fillRef>
+          <a:effectRef idx="0">
             <a:schemeClr val="accent1"/>
           </a:effectRef>
           <a:fontRef idx="minor">
@@ -6728,21 +7374,40 @@
         </p:nvSpPr>
         <p:spPr>
           <a:xfrm>
-            <a:off x="1828800" y="3396342"/>
+            <a:off x="1828800" y="35449093"/>
             <a:ext cx="42062400" cy="1828800"/>
           </a:xfrm>
           <a:prstGeom prst="rect">
             <a:avLst/>
           </a:prstGeom>
-        </p:spPr>
-        <p:style>
-          <a:lnRef idx="1">
-            <a:schemeClr val="accent1"/>
-          </a:lnRef>
-          <a:fillRef idx="3">
-            <a:schemeClr val="accent1"/>
-          </a:fillRef>
-          <a:effectRef idx="2">
+          <a:gradFill flip="none" rotWithShape="1">
+            <a:gsLst>
+              <a:gs pos="0">
+                <a:schemeClr val="accent1"/>
+              </a:gs>
+              <a:gs pos="92000">
+                <a:schemeClr val="bg1"/>
+              </a:gs>
+              <a:gs pos="90000">
+                <a:schemeClr val="accent1"/>
+              </a:gs>
+              <a:gs pos="100000">
+                <a:schemeClr val="bg1"/>
+              </a:gs>
+            </a:gsLst>
+            <a:lin ang="0" scaled="0"/>
+          </a:gradFill>
+        </p:spPr>
+        <p:style>
+          <a:lnRef idx="2">
+            <a:schemeClr val="accent1">
+              <a:shade val="50000"/>
+            </a:schemeClr>
+          </a:lnRef>
+          <a:fillRef idx="1">
+            <a:schemeClr val="accent1"/>
+          </a:fillRef>
+          <a:effectRef idx="0">
             <a:schemeClr val="accent1"/>
           </a:effectRef>
           <a:fontRef idx="minor">
@@ -6765,21 +7430,29 @@
         </p:nvSpPr>
         <p:spPr>
           <a:xfrm>
-            <a:off x="0" y="2481942"/>
+            <a:off x="0" y="34534693"/>
             <a:ext cx="3657600" cy="3657600"/>
           </a:xfrm>
           <a:prstGeom prst="ellipse">
             <a:avLst/>
           </a:prstGeom>
-        </p:spPr>
-        <p:style>
-          <a:lnRef idx="1">
-            <a:schemeClr val="accent1"/>
-          </a:lnRef>
-          <a:fillRef idx="3">
-            <a:schemeClr val="accent1"/>
-          </a:fillRef>
-          <a:effectRef idx="2">
+          <a:solidFill>
+            <a:schemeClr val="accent1"/>
+          </a:solidFill>
+          <a:ln>
+            <a:noFill/>
+          </a:ln>
+        </p:spPr>
+        <p:style>
+          <a:lnRef idx="2">
+            <a:schemeClr val="accent1">
+              <a:shade val="50000"/>
+            </a:schemeClr>
+          </a:lnRef>
+          <a:fillRef idx="1">
+            <a:schemeClr val="accent1"/>
+          </a:fillRef>
+          <a:effectRef idx="0">
             <a:schemeClr val="accent1"/>
           </a:effectRef>
           <a:fontRef idx="minor">
@@ -6802,69 +7475,70 @@
         </p:nvSpPr>
         <p:spPr>
           <a:xfrm>
-            <a:off x="43760231" y="5165885"/>
-            <a:ext cx="238125" cy="1800224"/>
+            <a:off x="43760257" y="35466375"/>
+            <a:ext cx="238109" cy="1800179"/>
           </a:xfrm>
           <a:prstGeom prst="rect">
             <a:avLst/>
           </a:prstGeom>
-        </p:spPr>
-        <p:style>
-          <a:lnRef idx="1">
-            <a:schemeClr val="accent1"/>
-          </a:lnRef>
-          <a:fillRef idx="3">
-            <a:schemeClr val="accent1"/>
-          </a:fillRef>
-          <a:effectRef idx="2">
-            <a:schemeClr val="accent1"/>
-          </a:effectRef>
-          <a:fontRef idx="minor">
-            <a:schemeClr val="lt1"/>
-          </a:fontRef>
-        </p:style>
-        <p:txBody>
-          <a:bodyPr rtlCol="0" anchor="ctr"/>
-          <a:lstStyle/>
-          <a:p>
-            <a:pPr algn="ctr"/>
-          </a:p>
-        </p:txBody>
-      </p:sp>
-      <p:sp>
-        <p:nvSpPr>
-          <p:cNvPr id="38" name="Rectangle 37"/>
-          <p:cNvSpPr/>
-          <p:nvPr/>
-        </p:nvSpPr>
-        <p:spPr>
-          <a:xfrm>
-            <a:off x="45589031" y="1205947"/>
-            <a:ext cx="4236244" cy="2215991"/>
+          <a:solidFill>
+            <a:schemeClr val="bg1"/>
+          </a:solidFill>
+          <a:ln>
+            <a:noFill/>
+          </a:ln>
+        </p:spPr>
+        <p:style>
+          <a:lnRef idx="2">
+            <a:schemeClr val="accent1">
+              <a:shade val="50000"/>
+            </a:schemeClr>
+          </a:lnRef>
+          <a:fillRef idx="1">
+            <a:schemeClr val="accent1"/>
+          </a:fillRef>
+          <a:effectRef idx="0">
+            <a:schemeClr val="accent1"/>
+          </a:effectRef>
+          <a:fontRef idx="minor">
+            <a:schemeClr val="lt1"/>
+          </a:fontRef>
+        </p:style>
+        <p:txBody>
+          <a:bodyPr rtlCol="0" anchor="ctr"/>
+          <a:lstStyle/>
+          <a:p>
+            <a:pPr algn="ctr"/>
+          </a:p>
+        </p:txBody>
+      </p:sp>
+      <p:sp>
+        <p:nvSpPr>
+          <p:cNvPr id="38" name="TextBox 37"/>
+          <p:cNvSpPr txBox="1"/>
+          <p:nvPr/>
+        </p:nvSpPr>
+        <p:spPr>
+          <a:xfrm>
+            <a:off x="45589057" y="1205910"/>
+            <a:ext cx="4236232" cy="2215956"/>
           </a:xfrm>
           <a:prstGeom prst="rect">
             <a:avLst/>
           </a:prstGeom>
-        </p:spPr>
-        <p:style>
-          <a:lnRef idx="1">
-            <a:schemeClr val="accent1"/>
-          </a:lnRef>
-          <a:fillRef idx="3">
-            <a:schemeClr val="accent1"/>
-          </a:fillRef>
-          <a:effectRef idx="2">
-            <a:schemeClr val="accent1"/>
-          </a:effectRef>
-          <a:fontRef idx="minor">
-            <a:schemeClr val="lt1"/>
-          </a:fontRef>
-        </p:style>
-        <p:txBody>
-          <a:bodyPr rtlCol="0" anchor="ctr"/>
-          <a:lstStyle/>
-          <a:p>
+          <a:noFill/>
+        </p:spPr>
+        <p:txBody>
+          <a:bodyPr wrap="square">
+            <a:spAutoFit/>
+          </a:bodyPr>
+          <a:lstStyle/>
+          <a:p>
+            <a:pPr>
+              <a:buNone/>
+            </a:pPr>
             <a:r>
+              <a:rPr sz="13800"/>
               <a:t>50%</a:t>
             </a:r>
           </a:p>
@@ -6872,38 +7546,31 @@
       </p:sp>
       <p:sp>
         <p:nvSpPr>
-          <p:cNvPr id="39" name="Rectangle 38"/>
-          <p:cNvSpPr/>
-          <p:nvPr/>
-        </p:nvSpPr>
-        <p:spPr>
-          <a:xfrm>
-            <a:off x="45720000" y="5462142"/>
-            <a:ext cx="4236244" cy="2215991"/>
+          <p:cNvPr id="39" name="TextBox 38"/>
+          <p:cNvSpPr txBox="1"/>
+          <p:nvPr/>
+        </p:nvSpPr>
+        <p:spPr>
+          <a:xfrm>
+            <a:off x="45720000" y="5462168"/>
+            <a:ext cx="4236232" cy="2215956"/>
           </a:xfrm>
           <a:prstGeom prst="rect">
             <a:avLst/>
           </a:prstGeom>
-        </p:spPr>
-        <p:style>
-          <a:lnRef idx="1">
-            <a:schemeClr val="accent1"/>
-          </a:lnRef>
-          <a:fillRef idx="3">
-            <a:schemeClr val="accent1"/>
-          </a:fillRef>
-          <a:effectRef idx="2">
-            <a:schemeClr val="accent1"/>
-          </a:effectRef>
-          <a:fontRef idx="minor">
-            <a:schemeClr val="lt1"/>
-          </a:fontRef>
-        </p:style>
-        <p:txBody>
-          <a:bodyPr rtlCol="0" anchor="ctr"/>
-          <a:lstStyle/>
-          <a:p>
+          <a:noFill/>
+        </p:spPr>
+        <p:txBody>
+          <a:bodyPr wrap="square">
+            <a:spAutoFit/>
+          </a:bodyPr>
+          <a:lstStyle/>
+          <a:p>
+            <a:pPr>
+              <a:buNone/>
+            </a:pPr>
             <a:r>
+              <a:rPr sz="13800"/>
               <a:t>55%</a:t>
             </a:r>
           </a:p>
@@ -6911,38 +7578,31 @@
       </p:sp>
       <p:sp>
         <p:nvSpPr>
-          <p:cNvPr id="40" name="Rectangle 39"/>
-          <p:cNvSpPr/>
-          <p:nvPr/>
-        </p:nvSpPr>
-        <p:spPr>
-          <a:xfrm>
-            <a:off x="45720000" y="9718337"/>
-            <a:ext cx="4236244" cy="2215991"/>
+          <p:cNvPr id="40" name="TextBox 39"/>
+          <p:cNvSpPr txBox="1"/>
+          <p:nvPr/>
+        </p:nvSpPr>
+        <p:spPr>
+          <a:xfrm>
+            <a:off x="45720000" y="9718334"/>
+            <a:ext cx="4236232" cy="2215956"/>
           </a:xfrm>
           <a:prstGeom prst="rect">
             <a:avLst/>
           </a:prstGeom>
-        </p:spPr>
-        <p:style>
-          <a:lnRef idx="1">
-            <a:schemeClr val="accent1"/>
-          </a:lnRef>
-          <a:fillRef idx="3">
-            <a:schemeClr val="accent1"/>
-          </a:fillRef>
-          <a:effectRef idx="2">
-            <a:schemeClr val="accent1"/>
-          </a:effectRef>
-          <a:fontRef idx="minor">
-            <a:schemeClr val="lt1"/>
-          </a:fontRef>
-        </p:style>
-        <p:txBody>
-          <a:bodyPr rtlCol="0" anchor="ctr"/>
-          <a:lstStyle/>
-          <a:p>
+          <a:noFill/>
+        </p:spPr>
+        <p:txBody>
+          <a:bodyPr wrap="square">
+            <a:spAutoFit/>
+          </a:bodyPr>
+          <a:lstStyle/>
+          <a:p>
+            <a:pPr>
+              <a:buNone/>
+            </a:pPr>
             <a:r>
+              <a:rPr sz="13800"/>
               <a:t>60%</a:t>
             </a:r>
           </a:p>
@@ -6950,38 +7610,31 @@
       </p:sp>
       <p:sp>
         <p:nvSpPr>
-          <p:cNvPr id="41" name="Rectangle 40"/>
-          <p:cNvSpPr/>
-          <p:nvPr/>
-        </p:nvSpPr>
-        <p:spPr>
-          <a:xfrm>
-            <a:off x="45458062" y="13974898"/>
-            <a:ext cx="4236244" cy="2215991"/>
+          <p:cNvPr id="41" name="TextBox 40"/>
+          <p:cNvSpPr txBox="1"/>
+          <p:nvPr/>
+        </p:nvSpPr>
+        <p:spPr>
+          <a:xfrm>
+            <a:off x="45458024" y="13974866"/>
+            <a:ext cx="4236232" cy="2215956"/>
           </a:xfrm>
           <a:prstGeom prst="rect">
             <a:avLst/>
           </a:prstGeom>
-        </p:spPr>
-        <p:style>
-          <a:lnRef idx="1">
-            <a:schemeClr val="accent1"/>
-          </a:lnRef>
-          <a:fillRef idx="3">
-            <a:schemeClr val="accent1"/>
-          </a:fillRef>
-          <a:effectRef idx="2">
-            <a:schemeClr val="accent1"/>
-          </a:effectRef>
-          <a:fontRef idx="minor">
-            <a:schemeClr val="lt1"/>
-          </a:fontRef>
-        </p:style>
-        <p:txBody>
-          <a:bodyPr rtlCol="0" anchor="ctr"/>
-          <a:lstStyle/>
-          <a:p>
+          <a:noFill/>
+        </p:spPr>
+        <p:txBody>
+          <a:bodyPr wrap="square">
+            <a:spAutoFit/>
+          </a:bodyPr>
+          <a:lstStyle/>
+          <a:p>
+            <a:pPr>
+              <a:buNone/>
+            </a:pPr>
             <a:r>
+              <a:rPr sz="13800"/>
               <a:t>65%</a:t>
             </a:r>
           </a:p>
@@ -6989,38 +7642,31 @@
       </p:sp>
       <p:sp>
         <p:nvSpPr>
-          <p:cNvPr id="42" name="Rectangle 41"/>
-          <p:cNvSpPr/>
-          <p:nvPr/>
-        </p:nvSpPr>
-        <p:spPr>
-          <a:xfrm>
-            <a:off x="45589031" y="18231093"/>
-            <a:ext cx="4236244" cy="2215991"/>
+          <p:cNvPr id="42" name="TextBox 41"/>
+          <p:cNvSpPr txBox="1"/>
+          <p:nvPr/>
+        </p:nvSpPr>
+        <p:spPr>
+          <a:xfrm>
+            <a:off x="45589057" y="18231124"/>
+            <a:ext cx="4236232" cy="2215956"/>
           </a:xfrm>
           <a:prstGeom prst="rect">
             <a:avLst/>
           </a:prstGeom>
-        </p:spPr>
-        <p:style>
-          <a:lnRef idx="1">
-            <a:schemeClr val="accent1"/>
-          </a:lnRef>
-          <a:fillRef idx="3">
-            <a:schemeClr val="accent1"/>
-          </a:fillRef>
-          <a:effectRef idx="2">
-            <a:schemeClr val="accent1"/>
-          </a:effectRef>
-          <a:fontRef idx="minor">
-            <a:schemeClr val="lt1"/>
-          </a:fontRef>
-        </p:style>
-        <p:txBody>
-          <a:bodyPr rtlCol="0" anchor="ctr"/>
-          <a:lstStyle/>
-          <a:p>
+          <a:noFill/>
+        </p:spPr>
+        <p:txBody>
+          <a:bodyPr wrap="square">
+            <a:spAutoFit/>
+          </a:bodyPr>
+          <a:lstStyle/>
+          <a:p>
+            <a:pPr>
+              <a:buNone/>
+            </a:pPr>
             <a:r>
+              <a:rPr sz="13800"/>
               <a:t>70%</a:t>
             </a:r>
           </a:p>
@@ -7028,38 +7674,31 @@
       </p:sp>
       <p:sp>
         <p:nvSpPr>
-          <p:cNvPr id="43" name="Rectangle 42"/>
-          <p:cNvSpPr/>
-          <p:nvPr/>
-        </p:nvSpPr>
-        <p:spPr>
-          <a:xfrm>
-            <a:off x="45667613" y="22487288"/>
-            <a:ext cx="4236244" cy="2215991"/>
+          <p:cNvPr id="43" name="TextBox 42"/>
+          <p:cNvSpPr txBox="1"/>
+          <p:nvPr/>
+        </p:nvSpPr>
+        <p:spPr>
+          <a:xfrm>
+            <a:off x="45667604" y="22487290"/>
+            <a:ext cx="4236232" cy="2215956"/>
           </a:xfrm>
           <a:prstGeom prst="rect">
             <a:avLst/>
           </a:prstGeom>
-        </p:spPr>
-        <p:style>
-          <a:lnRef idx="1">
-            <a:schemeClr val="accent1"/>
-          </a:lnRef>
-          <a:fillRef idx="3">
-            <a:schemeClr val="accent1"/>
-          </a:fillRef>
-          <a:effectRef idx="2">
-            <a:schemeClr val="accent1"/>
-          </a:effectRef>
-          <a:fontRef idx="minor">
-            <a:schemeClr val="lt1"/>
-          </a:fontRef>
-        </p:style>
-        <p:txBody>
-          <a:bodyPr rtlCol="0" anchor="ctr"/>
-          <a:lstStyle/>
-          <a:p>
+          <a:noFill/>
+        </p:spPr>
+        <p:txBody>
+          <a:bodyPr wrap="square">
+            <a:spAutoFit/>
+          </a:bodyPr>
+          <a:lstStyle/>
+          <a:p>
+            <a:pPr>
+              <a:buNone/>
+            </a:pPr>
             <a:r>
+              <a:rPr sz="13800"/>
               <a:t>75%</a:t>
             </a:r>
           </a:p>
@@ -7067,38 +7706,31 @@
       </p:sp>
       <p:sp>
         <p:nvSpPr>
-          <p:cNvPr id="44" name="Rectangle 43"/>
-          <p:cNvSpPr/>
-          <p:nvPr/>
-        </p:nvSpPr>
-        <p:spPr>
-          <a:xfrm>
-            <a:off x="45667613" y="26743483"/>
-            <a:ext cx="4236244" cy="2215991"/>
+          <p:cNvPr id="44" name="TextBox 43"/>
+          <p:cNvSpPr txBox="1"/>
+          <p:nvPr/>
+        </p:nvSpPr>
+        <p:spPr>
+          <a:xfrm>
+            <a:off x="45667604" y="26743456"/>
+            <a:ext cx="4236232" cy="2215956"/>
           </a:xfrm>
           <a:prstGeom prst="rect">
             <a:avLst/>
           </a:prstGeom>
-        </p:spPr>
-        <p:style>
-          <a:lnRef idx="1">
-            <a:schemeClr val="accent1"/>
-          </a:lnRef>
-          <a:fillRef idx="3">
-            <a:schemeClr val="accent1"/>
-          </a:fillRef>
-          <a:effectRef idx="2">
-            <a:schemeClr val="accent1"/>
-          </a:effectRef>
-          <a:fontRef idx="minor">
-            <a:schemeClr val="lt1"/>
-          </a:fontRef>
-        </p:style>
-        <p:txBody>
-          <a:bodyPr rtlCol="0" anchor="ctr"/>
-          <a:lstStyle/>
-          <a:p>
+          <a:noFill/>
+        </p:spPr>
+        <p:txBody>
+          <a:bodyPr wrap="square">
+            <a:spAutoFit/>
+          </a:bodyPr>
+          <a:lstStyle/>
+          <a:p>
+            <a:pPr>
+              <a:buNone/>
+            </a:pPr>
             <a:r>
+              <a:rPr sz="13800"/>
               <a:t>80%</a:t>
             </a:r>
           </a:p>
@@ -7106,38 +7738,31 @@
       </p:sp>
       <p:sp>
         <p:nvSpPr>
-          <p:cNvPr id="45" name="Rectangle 44"/>
-          <p:cNvSpPr/>
-          <p:nvPr/>
-        </p:nvSpPr>
-        <p:spPr>
-          <a:xfrm>
-            <a:off x="45405675" y="31000044"/>
-            <a:ext cx="4236244" cy="2215991"/>
+          <p:cNvPr id="45" name="TextBox 44"/>
+          <p:cNvSpPr txBox="1"/>
+          <p:nvPr/>
+        </p:nvSpPr>
+        <p:spPr>
+          <a:xfrm>
+            <a:off x="45405629" y="31000080"/>
+            <a:ext cx="4236232" cy="2215956"/>
           </a:xfrm>
           <a:prstGeom prst="rect">
             <a:avLst/>
           </a:prstGeom>
-        </p:spPr>
-        <p:style>
-          <a:lnRef idx="1">
-            <a:schemeClr val="accent1"/>
-          </a:lnRef>
-          <a:fillRef idx="3">
-            <a:schemeClr val="accent1"/>
-          </a:fillRef>
-          <a:effectRef idx="2">
-            <a:schemeClr val="accent1"/>
-          </a:effectRef>
-          <a:fontRef idx="minor">
-            <a:schemeClr val="lt1"/>
-          </a:fontRef>
-        </p:style>
-        <p:txBody>
-          <a:bodyPr rtlCol="0" anchor="ctr"/>
-          <a:lstStyle/>
-          <a:p>
+          <a:noFill/>
+        </p:spPr>
+        <p:txBody>
+          <a:bodyPr wrap="square">
+            <a:spAutoFit/>
+          </a:bodyPr>
+          <a:lstStyle/>
+          <a:p>
+            <a:pPr>
+              <a:buNone/>
+            </a:pPr>
             <a:r>
+              <a:rPr sz="13800"/>
               <a:t>85%</a:t>
             </a:r>
           </a:p>
@@ -7145,38 +7770,31 @@
       </p:sp>
       <p:sp>
         <p:nvSpPr>
-          <p:cNvPr id="46" name="Rectangle 45"/>
-          <p:cNvSpPr/>
-          <p:nvPr/>
-        </p:nvSpPr>
-        <p:spPr>
-          <a:xfrm>
-            <a:off x="45536644" y="35256239"/>
-            <a:ext cx="4236244" cy="2215991"/>
+          <p:cNvPr id="46" name="TextBox 45"/>
+          <p:cNvSpPr txBox="1"/>
+          <p:nvPr/>
+        </p:nvSpPr>
+        <p:spPr>
+          <a:xfrm>
+            <a:off x="45536662" y="35256246"/>
+            <a:ext cx="4236232" cy="2215956"/>
           </a:xfrm>
           <a:prstGeom prst="rect">
             <a:avLst/>
           </a:prstGeom>
-        </p:spPr>
-        <p:style>
-          <a:lnRef idx="1">
-            <a:schemeClr val="accent1"/>
-          </a:lnRef>
-          <a:fillRef idx="3">
-            <a:schemeClr val="accent1"/>
-          </a:fillRef>
-          <a:effectRef idx="2">
-            <a:schemeClr val="accent1"/>
-          </a:effectRef>
-          <a:fontRef idx="minor">
-            <a:schemeClr val="lt1"/>
-          </a:fontRef>
-        </p:style>
-        <p:txBody>
-          <a:bodyPr rtlCol="0" anchor="ctr"/>
-          <a:lstStyle/>
-          <a:p>
+          <a:noFill/>
+        </p:spPr>
+        <p:txBody>
+          <a:bodyPr wrap="square">
+            <a:spAutoFit/>
+          </a:bodyPr>
+          <a:lstStyle/>
+          <a:p>
+            <a:pPr>
+              <a:buNone/>
+            </a:pPr>
             <a:r>
+              <a:rPr sz="13800"/>
               <a:t>90%</a:t>
             </a:r>
           </a:p>
@@ -7190,21 +7808,26 @@
         </p:nvSpPr>
         <p:spPr>
           <a:xfrm>
-            <a:off x="42976800" y="3396342"/>
+            <a:off x="42898253" y="39705259"/>
             <a:ext cx="1828800" cy="1828800"/>
           </a:xfrm>
           <a:prstGeom prst="ellipse">
             <a:avLst/>
           </a:prstGeom>
-        </p:spPr>
-        <p:style>
-          <a:lnRef idx="1">
-            <a:schemeClr val="accent1"/>
-          </a:lnRef>
-          <a:fillRef idx="3">
-            <a:schemeClr val="accent1"/>
-          </a:fillRef>
-          <a:effectRef idx="2">
+          <a:solidFill>
+            <a:schemeClr val="bg1"/>
+          </a:solidFill>
+        </p:spPr>
+        <p:style>
+          <a:lnRef idx="2">
+            <a:schemeClr val="accent1">
+              <a:shade val="50000"/>
+            </a:schemeClr>
+          </a:lnRef>
+          <a:fillRef idx="1">
+            <a:schemeClr val="accent1"/>
+          </a:fillRef>
+          <a:effectRef idx="0">
             <a:schemeClr val="accent1"/>
           </a:effectRef>
           <a:fontRef idx="minor">
@@ -7227,21 +7850,40 @@
         </p:nvSpPr>
         <p:spPr>
           <a:xfrm>
-            <a:off x="1828800" y="3396342"/>
+            <a:off x="1750253" y="39705259"/>
             <a:ext cx="42062400" cy="1828800"/>
           </a:xfrm>
           <a:prstGeom prst="rect">
             <a:avLst/>
           </a:prstGeom>
-        </p:spPr>
-        <p:style>
-          <a:lnRef idx="1">
-            <a:schemeClr val="accent1"/>
-          </a:lnRef>
-          <a:fillRef idx="3">
-            <a:schemeClr val="accent1"/>
-          </a:fillRef>
-          <a:effectRef idx="2">
+          <a:gradFill flip="none" rotWithShape="1">
+            <a:gsLst>
+              <a:gs pos="0">
+                <a:schemeClr val="accent1"/>
+              </a:gs>
+              <a:gs pos="98000">
+                <a:schemeClr val="bg1"/>
+              </a:gs>
+              <a:gs pos="96000">
+                <a:schemeClr val="accent1"/>
+              </a:gs>
+              <a:gs pos="100000">
+                <a:schemeClr val="bg1"/>
+              </a:gs>
+            </a:gsLst>
+            <a:lin ang="0" scaled="0"/>
+          </a:gradFill>
+        </p:spPr>
+        <p:style>
+          <a:lnRef idx="2">
+            <a:schemeClr val="accent1">
+              <a:shade val="50000"/>
+            </a:schemeClr>
+          </a:lnRef>
+          <a:fillRef idx="1">
+            <a:schemeClr val="accent1"/>
+          </a:fillRef>
+          <a:effectRef idx="0">
             <a:schemeClr val="accent1"/>
           </a:effectRef>
           <a:fontRef idx="minor">
@@ -7264,21 +7906,29 @@
         </p:nvSpPr>
         <p:spPr>
           <a:xfrm>
-            <a:off x="0" y="2481942"/>
+            <a:off x="-78546" y="38790859"/>
             <a:ext cx="3657600" cy="3657600"/>
           </a:xfrm>
           <a:prstGeom prst="ellipse">
             <a:avLst/>
           </a:prstGeom>
-        </p:spPr>
-        <p:style>
-          <a:lnRef idx="1">
-            <a:schemeClr val="accent1"/>
-          </a:lnRef>
-          <a:fillRef idx="3">
-            <a:schemeClr val="accent1"/>
-          </a:fillRef>
-          <a:effectRef idx="2">
+          <a:solidFill>
+            <a:schemeClr val="accent1"/>
+          </a:solidFill>
+          <a:ln>
+            <a:noFill/>
+          </a:ln>
+        </p:spPr>
+        <p:style>
+          <a:lnRef idx="2">
+            <a:schemeClr val="accent1">
+              <a:shade val="50000"/>
+            </a:schemeClr>
+          </a:lnRef>
+          <a:fillRef idx="1">
+            <a:schemeClr val="accent1"/>
+          </a:fillRef>
+          <a:effectRef idx="0">
             <a:schemeClr val="accent1"/>
           </a:effectRef>
           <a:fontRef idx="minor">
@@ -7301,21 +7951,29 @@
         </p:nvSpPr>
         <p:spPr>
           <a:xfrm>
-            <a:off x="43760231" y="5165885"/>
-            <a:ext cx="238125" cy="1800224"/>
+            <a:off x="43681710" y="39722541"/>
+            <a:ext cx="238109" cy="1800179"/>
           </a:xfrm>
           <a:prstGeom prst="rect">
             <a:avLst/>
           </a:prstGeom>
-        </p:spPr>
-        <p:style>
-          <a:lnRef idx="1">
-            <a:schemeClr val="accent1"/>
-          </a:lnRef>
-          <a:fillRef idx="3">
-            <a:schemeClr val="accent1"/>
-          </a:fillRef>
-          <a:effectRef idx="2">
+          <a:solidFill>
+            <a:schemeClr val="bg1"/>
+          </a:solidFill>
+          <a:ln>
+            <a:noFill/>
+          </a:ln>
+        </p:spPr>
+        <p:style>
+          <a:lnRef idx="2">
+            <a:schemeClr val="accent1">
+              <a:shade val="50000"/>
+            </a:schemeClr>
+          </a:lnRef>
+          <a:fillRef idx="1">
+            <a:schemeClr val="accent1"/>
+          </a:fillRef>
+          <a:effectRef idx="0">
             <a:schemeClr val="accent1"/>
           </a:effectRef>
           <a:fontRef idx="minor">
@@ -7338,21 +7996,26 @@
         </p:nvSpPr>
         <p:spPr>
           <a:xfrm>
-            <a:off x="42976800" y="3396342"/>
+            <a:off x="42898253" y="43961517"/>
             <a:ext cx="1828800" cy="1828800"/>
           </a:xfrm>
           <a:prstGeom prst="ellipse">
             <a:avLst/>
           </a:prstGeom>
-        </p:spPr>
-        <p:style>
-          <a:lnRef idx="1">
-            <a:schemeClr val="accent1"/>
-          </a:lnRef>
-          <a:fillRef idx="3">
-            <a:schemeClr val="accent1"/>
-          </a:fillRef>
-          <a:effectRef idx="2">
+          <a:solidFill>
+            <a:schemeClr val="bg1"/>
+          </a:solidFill>
+        </p:spPr>
+        <p:style>
+          <a:lnRef idx="2">
+            <a:schemeClr val="accent1">
+              <a:shade val="50000"/>
+            </a:schemeClr>
+          </a:lnRef>
+          <a:fillRef idx="1">
+            <a:schemeClr val="accent1"/>
+          </a:fillRef>
+          <a:effectRef idx="0">
             <a:schemeClr val="accent1"/>
           </a:effectRef>
           <a:fontRef idx="minor">
@@ -7375,21 +8038,26 @@
         </p:nvSpPr>
         <p:spPr>
           <a:xfrm>
-            <a:off x="1828800" y="3396342"/>
+            <a:off x="1750253" y="43961517"/>
             <a:ext cx="42062400" cy="1828800"/>
           </a:xfrm>
           <a:prstGeom prst="rect">
             <a:avLst/>
           </a:prstGeom>
-        </p:spPr>
-        <p:style>
-          <a:lnRef idx="1">
-            <a:schemeClr val="accent1"/>
-          </a:lnRef>
-          <a:fillRef idx="3">
-            <a:schemeClr val="accent1"/>
-          </a:fillRef>
-          <a:effectRef idx="2">
+          <a:solidFill>
+            <a:schemeClr val="accent1"/>
+          </a:solidFill>
+        </p:spPr>
+        <p:style>
+          <a:lnRef idx="2">
+            <a:schemeClr val="accent1">
+              <a:shade val="50000"/>
+            </a:schemeClr>
+          </a:lnRef>
+          <a:fillRef idx="1">
+            <a:schemeClr val="accent1"/>
+          </a:fillRef>
+          <a:effectRef idx="0">
             <a:schemeClr val="accent1"/>
           </a:effectRef>
           <a:fontRef idx="minor">
@@ -7412,69 +8080,70 @@
         </p:nvSpPr>
         <p:spPr>
           <a:xfrm>
-            <a:off x="0" y="2481942"/>
+            <a:off x="-78546" y="43047117"/>
             <a:ext cx="3657600" cy="3657600"/>
           </a:xfrm>
           <a:prstGeom prst="ellipse">
             <a:avLst/>
           </a:prstGeom>
-        </p:spPr>
-        <p:style>
-          <a:lnRef idx="1">
-            <a:schemeClr val="accent1"/>
-          </a:lnRef>
-          <a:fillRef idx="3">
-            <a:schemeClr val="accent1"/>
-          </a:fillRef>
-          <a:effectRef idx="2">
-            <a:schemeClr val="accent1"/>
-          </a:effectRef>
-          <a:fontRef idx="minor">
-            <a:schemeClr val="lt1"/>
-          </a:fontRef>
-        </p:style>
-        <p:txBody>
-          <a:bodyPr rtlCol="0" anchor="ctr"/>
-          <a:lstStyle/>
-          <a:p>
-            <a:pPr algn="ctr"/>
-          </a:p>
-        </p:txBody>
-      </p:sp>
-      <p:sp>
-        <p:nvSpPr>
-          <p:cNvPr id="54" name="Rectangle 53"/>
-          <p:cNvSpPr/>
-          <p:nvPr/>
-        </p:nvSpPr>
-        <p:spPr>
-          <a:xfrm>
-            <a:off x="45327093" y="39512434"/>
-            <a:ext cx="4236244" cy="2215991"/>
+          <a:solidFill>
+            <a:schemeClr val="accent1"/>
+          </a:solidFill>
+          <a:ln>
+            <a:noFill/>
+          </a:ln>
+        </p:spPr>
+        <p:style>
+          <a:lnRef idx="2">
+            <a:schemeClr val="accent1">
+              <a:shade val="50000"/>
+            </a:schemeClr>
+          </a:lnRef>
+          <a:fillRef idx="1">
+            <a:schemeClr val="accent1"/>
+          </a:fillRef>
+          <a:effectRef idx="0">
+            <a:schemeClr val="accent1"/>
+          </a:effectRef>
+          <a:fontRef idx="minor">
+            <a:schemeClr val="lt1"/>
+          </a:fontRef>
+        </p:style>
+        <p:txBody>
+          <a:bodyPr rtlCol="0" anchor="ctr"/>
+          <a:lstStyle/>
+          <a:p>
+            <a:pPr algn="ctr"/>
+          </a:p>
+        </p:txBody>
+      </p:sp>
+      <p:sp>
+        <p:nvSpPr>
+          <p:cNvPr id="54" name="TextBox 53"/>
+          <p:cNvSpPr txBox="1"/>
+          <p:nvPr/>
+        </p:nvSpPr>
+        <p:spPr>
+          <a:xfrm>
+            <a:off x="45327082" y="39512412"/>
+            <a:ext cx="4236232" cy="2215956"/>
           </a:xfrm>
           <a:prstGeom prst="rect">
             <a:avLst/>
           </a:prstGeom>
-        </p:spPr>
-        <p:style>
-          <a:lnRef idx="1">
-            <a:schemeClr val="accent1"/>
-          </a:lnRef>
-          <a:fillRef idx="3">
-            <a:schemeClr val="accent1"/>
-          </a:fillRef>
-          <a:effectRef idx="2">
-            <a:schemeClr val="accent1"/>
-          </a:effectRef>
-          <a:fontRef idx="minor">
-            <a:schemeClr val="lt1"/>
-          </a:fontRef>
-        </p:style>
-        <p:txBody>
-          <a:bodyPr rtlCol="0" anchor="ctr"/>
-          <a:lstStyle/>
-          <a:p>
+          <a:noFill/>
+        </p:spPr>
+        <p:txBody>
+          <a:bodyPr wrap="square">
+            <a:spAutoFit/>
+          </a:bodyPr>
+          <a:lstStyle/>
+          <a:p>
+            <a:pPr>
+              <a:buNone/>
+            </a:pPr>
             <a:r>
+              <a:rPr sz="13800"/>
               <a:t>95%</a:t>
             </a:r>
           </a:p>
@@ -7482,38 +8151,31 @@
       </p:sp>
       <p:sp>
         <p:nvSpPr>
-          <p:cNvPr id="55" name="Rectangle 54"/>
-          <p:cNvSpPr/>
-          <p:nvPr/>
-        </p:nvSpPr>
-        <p:spPr>
-          <a:xfrm>
-            <a:off x="45458062" y="43768629"/>
-            <a:ext cx="4236244" cy="2215991"/>
+          <p:cNvPr id="55" name="TextBox 54"/>
+          <p:cNvSpPr txBox="1"/>
+          <p:nvPr/>
+        </p:nvSpPr>
+        <p:spPr>
+          <a:xfrm>
+            <a:off x="45458024" y="43768670"/>
+            <a:ext cx="4236232" cy="2215956"/>
           </a:xfrm>
           <a:prstGeom prst="rect">
             <a:avLst/>
           </a:prstGeom>
-        </p:spPr>
-        <p:style>
-          <a:lnRef idx="1">
-            <a:schemeClr val="accent1"/>
-          </a:lnRef>
-          <a:fillRef idx="3">
-            <a:schemeClr val="accent1"/>
-          </a:fillRef>
-          <a:effectRef idx="2">
-            <a:schemeClr val="accent1"/>
-          </a:effectRef>
-          <a:fontRef idx="minor">
-            <a:schemeClr val="lt1"/>
-          </a:fontRef>
-        </p:style>
-        <p:txBody>
-          <a:bodyPr rtlCol="0" anchor="ctr"/>
-          <a:lstStyle/>
-          <a:p>
+          <a:noFill/>
+        </p:spPr>
+        <p:txBody>
+          <a:bodyPr wrap="square">
+            <a:spAutoFit/>
+          </a:bodyPr>
+          <a:lstStyle/>
+          <a:p>
+            <a:pPr>
+              <a:buNone/>
+            </a:pPr>
             <a:r>
+              <a:rPr sz="13800"/>
               <a:t>98%</a:t>
             </a:r>
           </a:p>
@@ -7527,21 +8189,29 @@
         </p:nvSpPr>
         <p:spPr>
           <a:xfrm>
-            <a:off x="42976800" y="3396342"/>
+            <a:off x="42767219" y="48217683"/>
             <a:ext cx="1828800" cy="1828800"/>
           </a:xfrm>
           <a:prstGeom prst="ellipse">
             <a:avLst/>
           </a:prstGeom>
-        </p:spPr>
-        <p:style>
-          <a:lnRef idx="1">
-            <a:schemeClr val="accent1"/>
-          </a:lnRef>
-          <a:fillRef idx="3">
-            <a:schemeClr val="accent1"/>
-          </a:fillRef>
-          <a:effectRef idx="2">
+          <a:solidFill>
+            <a:schemeClr val="accent1"/>
+          </a:solidFill>
+          <a:ln>
+            <a:noFill/>
+          </a:ln>
+        </p:spPr>
+        <p:style>
+          <a:lnRef idx="2">
+            <a:schemeClr val="accent1">
+              <a:shade val="50000"/>
+            </a:schemeClr>
+          </a:lnRef>
+          <a:fillRef idx="1">
+            <a:schemeClr val="accent1"/>
+          </a:fillRef>
+          <a:effectRef idx="0">
             <a:schemeClr val="accent1"/>
           </a:effectRef>
           <a:fontRef idx="minor">
@@ -7564,21 +8234,29 @@
         </p:nvSpPr>
         <p:spPr>
           <a:xfrm>
-            <a:off x="1828800" y="3396342"/>
+            <a:off x="1619219" y="48217683"/>
             <a:ext cx="42062400" cy="1828800"/>
           </a:xfrm>
           <a:prstGeom prst="rect">
             <a:avLst/>
           </a:prstGeom>
-        </p:spPr>
-        <p:style>
-          <a:lnRef idx="1">
-            <a:schemeClr val="accent1"/>
-          </a:lnRef>
-          <a:fillRef idx="3">
-            <a:schemeClr val="accent1"/>
-          </a:fillRef>
-          <a:effectRef idx="2">
+          <a:solidFill>
+            <a:schemeClr val="accent1"/>
+          </a:solidFill>
+          <a:ln>
+            <a:noFill/>
+          </a:ln>
+        </p:spPr>
+        <p:style>
+          <a:lnRef idx="2">
+            <a:schemeClr val="accent1">
+              <a:shade val="50000"/>
+            </a:schemeClr>
+          </a:lnRef>
+          <a:fillRef idx="1">
+            <a:schemeClr val="accent1"/>
+          </a:fillRef>
+          <a:effectRef idx="0">
             <a:schemeClr val="accent1"/>
           </a:effectRef>
           <a:fontRef idx="minor">
@@ -7601,69 +8279,70 @@
         </p:nvSpPr>
         <p:spPr>
           <a:xfrm>
-            <a:off x="0" y="2481942"/>
+            <a:off x="-209580" y="47303283"/>
             <a:ext cx="3657600" cy="3657600"/>
           </a:xfrm>
           <a:prstGeom prst="ellipse">
             <a:avLst/>
           </a:prstGeom>
-        </p:spPr>
-        <p:style>
-          <a:lnRef idx="1">
-            <a:schemeClr val="accent1"/>
-          </a:lnRef>
-          <a:fillRef idx="3">
-            <a:schemeClr val="accent1"/>
-          </a:fillRef>
-          <a:effectRef idx="2">
-            <a:schemeClr val="accent1"/>
-          </a:effectRef>
-          <a:fontRef idx="minor">
-            <a:schemeClr val="lt1"/>
-          </a:fontRef>
-        </p:style>
-        <p:txBody>
-          <a:bodyPr rtlCol="0" anchor="ctr"/>
-          <a:lstStyle/>
-          <a:p>
-            <a:pPr algn="ctr"/>
-          </a:p>
-        </p:txBody>
-      </p:sp>
-      <p:sp>
-        <p:nvSpPr>
-          <p:cNvPr id="59" name="Rectangle 58"/>
-          <p:cNvSpPr/>
-          <p:nvPr/>
-        </p:nvSpPr>
-        <p:spPr>
-          <a:xfrm>
-            <a:off x="45327093" y="48024824"/>
-            <a:ext cx="4236244" cy="2215991"/>
+          <a:solidFill>
+            <a:schemeClr val="accent1"/>
+          </a:solidFill>
+          <a:ln>
+            <a:noFill/>
+          </a:ln>
+        </p:spPr>
+        <p:style>
+          <a:lnRef idx="2">
+            <a:schemeClr val="accent1">
+              <a:shade val="50000"/>
+            </a:schemeClr>
+          </a:lnRef>
+          <a:fillRef idx="1">
+            <a:schemeClr val="accent1"/>
+          </a:fillRef>
+          <a:effectRef idx="0">
+            <a:schemeClr val="accent1"/>
+          </a:effectRef>
+          <a:fontRef idx="minor">
+            <a:schemeClr val="lt1"/>
+          </a:fontRef>
+        </p:style>
+        <p:txBody>
+          <a:bodyPr rtlCol="0" anchor="ctr"/>
+          <a:lstStyle/>
+          <a:p>
+            <a:pPr algn="ctr"/>
+          </a:p>
+        </p:txBody>
+      </p:sp>
+      <p:sp>
+        <p:nvSpPr>
+          <p:cNvPr id="59" name="TextBox 58"/>
+          <p:cNvSpPr txBox="1"/>
+          <p:nvPr/>
+        </p:nvSpPr>
+        <p:spPr>
+          <a:xfrm>
+            <a:off x="45327082" y="48024836"/>
+            <a:ext cx="4236232" cy="2215956"/>
           </a:xfrm>
           <a:prstGeom prst="rect">
             <a:avLst/>
           </a:prstGeom>
-        </p:spPr>
-        <p:style>
-          <a:lnRef idx="1">
-            <a:schemeClr val="accent1"/>
-          </a:lnRef>
-          <a:fillRef idx="3">
-            <a:schemeClr val="accent1"/>
-          </a:fillRef>
-          <a:effectRef idx="2">
-            <a:schemeClr val="accent1"/>
-          </a:effectRef>
-          <a:fontRef idx="minor">
-            <a:schemeClr val="lt1"/>
-          </a:fontRef>
-        </p:style>
-        <p:txBody>
-          <a:bodyPr rtlCol="0" anchor="ctr"/>
-          <a:lstStyle/>
-          <a:p>
+          <a:noFill/>
+        </p:spPr>
+        <p:txBody>
+          <a:bodyPr wrap="square">
+            <a:spAutoFit/>
+          </a:bodyPr>
+          <a:lstStyle/>
+          <a:p>
+            <a:pPr>
+              <a:buNone/>
+            </a:pPr>
             <a:r>
+              <a:rPr sz="13800"/>
               <a:t>100%</a:t>
             </a:r>
           </a:p>
@@ -7680,7 +8359,7 @@
 <file path=ppt/theme/theme1.xml><?xml version="1.0" encoding="utf-8"?>
 <a:theme xmlns:a="http://schemas.openxmlformats.org/drawingml/2006/main" name="Office Theme">
   <a:themeElements>
-    <a:clrScheme name="Office">
+    <a:clrScheme name="Office Theme">
       <a:dk1>
         <a:sysClr val="windowText" lastClr="000000"/>
       </a:dk1>
@@ -7688,44 +8367,44 @@
         <a:sysClr val="window" lastClr="FFFFFF"/>
       </a:lt1>
       <a:dk2>
-        <a:srgbClr val="1F497D"/>
+        <a:srgbClr val="44546A"/>
       </a:dk2>
       <a:lt2>
-        <a:srgbClr val="EEECE1"/>
+        <a:srgbClr val="E7E6E6"/>
       </a:lt2>
       <a:accent1>
-        <a:srgbClr val="4F81BD"/>
+        <a:srgbClr val="4472C4"/>
       </a:accent1>
       <a:accent2>
-        <a:srgbClr val="C0504D"/>
+        <a:srgbClr val="ED7D31"/>
       </a:accent2>
       <a:accent3>
-        <a:srgbClr val="9BBB59"/>
+        <a:srgbClr val="A5A5A5"/>
       </a:accent3>
       <a:accent4>
-        <a:srgbClr val="8064A2"/>
+        <a:srgbClr val="FFC000"/>
       </a:accent4>
       <a:accent5>
-        <a:srgbClr val="4BACC6"/>
+        <a:srgbClr val="5B9BD5"/>
       </a:accent5>
       <a:accent6>
-        <a:srgbClr val="F79646"/>
+        <a:srgbClr val="70AD47"/>
       </a:accent6>
       <a:hlink>
-        <a:srgbClr val="0000FF"/>
+        <a:srgbClr val="0563C1"/>
       </a:hlink>
       <a:folHlink>
-        <a:srgbClr val="800080"/>
+        <a:srgbClr val="954F72"/>
       </a:folHlink>
     </a:clrScheme>
-    <a:fontScheme name="Office">
+    <a:fontScheme name="Office Theme">
       <a:majorFont>
-        <a:latin typeface="Calibri"/>
+        <a:latin typeface="Calibri Light" panose="020F0302020204030204"/>
         <a:ea typeface=""/>
         <a:cs typeface=""/>
-        <a:font script="Jpan" typeface="ＭＳ Ｐゴシック"/>
+        <a:font script="Jpan" typeface="游ゴシック Light"/>
         <a:font script="Hang" typeface="맑은 고딕"/>
-        <a:font script="Hans" typeface="宋体"/>
+        <a:font script="Hans" typeface="等线 Light"/>
         <a:font script="Hant" typeface="新細明體"/>
         <a:font script="Arab" typeface="Times New Roman"/>
         <a:font script="Hebr" typeface="Times New Roman"/>
@@ -7755,12 +8434,12 @@
         <a:font script="Geor" typeface="Sylfaen"/>
       </a:majorFont>
       <a:minorFont>
-        <a:latin typeface="Calibri"/>
+        <a:latin typeface="Calibri" panose="020F0502020204030204"/>
         <a:ea typeface=""/>
         <a:cs typeface=""/>
-        <a:font script="Jpan" typeface="ＭＳ Ｐゴシック"/>
+        <a:font script="Jpan" typeface="游ゴシック"/>
         <a:font script="Hang" typeface="맑은 고딕"/>
-        <a:font script="Hans" typeface="宋体"/>
+        <a:font script="Hans" typeface="等线"/>
         <a:font script="Hant" typeface="新細明體"/>
         <a:font script="Arab" typeface="Arial"/>
         <a:font script="Hebr" typeface="Arial"/>
@@ -7790,7 +8469,7 @@
         <a:font script="Geor" typeface="Sylfaen"/>
       </a:minorFont>
     </a:fontScheme>
-    <a:fmtScheme name="Office">
+    <a:fmtScheme name="Office Theme">
       <a:fillStyleLst>
         <a:solidFill>
           <a:schemeClr val="phClr"/>
@@ -7799,200 +8478,141 @@
           <a:gsLst>
             <a:gs pos="0">
               <a:schemeClr val="phClr">
-                <a:tint val="50000"/>
-                <a:satMod val="300000"/>
+                <a:lumMod val="110000"/>
+                <a:satMod val="105000"/>
+                <a:tint val="67000"/>
               </a:schemeClr>
             </a:gs>
-            <a:gs pos="35000">
+            <a:gs pos="50000">
               <a:schemeClr val="phClr">
-                <a:tint val="37000"/>
-                <a:satMod val="300000"/>
+                <a:lumMod val="105000"/>
+                <a:satMod val="103000"/>
+                <a:tint val="73000"/>
               </a:schemeClr>
             </a:gs>
             <a:gs pos="100000">
               <a:schemeClr val="phClr">
-                <a:tint val="15000"/>
-                <a:satMod val="350000"/>
+                <a:lumMod val="105000"/>
+                <a:satMod val="109000"/>
+                <a:tint val="81000"/>
               </a:schemeClr>
             </a:gs>
           </a:gsLst>
-          <a:lin ang="16200000" scaled="1"/>
+          <a:lin ang="5400000" scaled="0"/>
         </a:gradFill>
         <a:gradFill rotWithShape="1">
           <a:gsLst>
             <a:gs pos="0">
               <a:schemeClr val="phClr">
-                <a:tint val="100000"/>
+                <a:satMod val="103000"/>
+                <a:lumMod val="102000"/>
+                <a:tint val="94000"/>
+              </a:schemeClr>
+            </a:gs>
+            <a:gs pos="50000">
+              <a:schemeClr val="phClr">
+                <a:satMod val="110000"/>
+                <a:lumMod val="100000"/>
                 <a:shade val="100000"/>
-                <a:satMod val="130000"/>
               </a:schemeClr>
             </a:gs>
             <a:gs pos="100000">
               <a:schemeClr val="phClr">
-                <a:tint val="50000"/>
-                <a:shade val="100000"/>
-                <a:satMod val="350000"/>
+                <a:lumMod val="99000"/>
+                <a:satMod val="120000"/>
+                <a:shade val="78000"/>
               </a:schemeClr>
             </a:gs>
           </a:gsLst>
-          <a:lin ang="16200000" scaled="0"/>
+          <a:lin ang="5400000" scaled="0"/>
         </a:gradFill>
       </a:fillStyleLst>
       <a:lnStyleLst>
-        <a:ln w="9525" cap="flat" cmpd="sng" algn="ctr">
-          <a:solidFill>
-            <a:schemeClr val="phClr">
-              <a:shade val="95000"/>
-              <a:satMod val="105000"/>
-            </a:schemeClr>
+        <a:ln w="6350" cap="flat" cmpd="sng" algn="ctr">
+          <a:solidFill>
+            <a:schemeClr val="phClr"/>
           </a:solidFill>
           <a:prstDash val="solid"/>
+          <a:miter lim="800000"/>
         </a:ln>
-        <a:ln w="25400" cap="flat" cmpd="sng" algn="ctr">
+        <a:ln w="12700" cap="flat" cmpd="sng" algn="ctr">
           <a:solidFill>
             <a:schemeClr val="phClr"/>
           </a:solidFill>
           <a:prstDash val="solid"/>
+          <a:miter lim="800000"/>
         </a:ln>
-        <a:ln w="38100" cap="flat" cmpd="sng" algn="ctr">
+        <a:ln w="19050" cap="flat" cmpd="sng" algn="ctr">
           <a:solidFill>
             <a:schemeClr val="phClr"/>
           </a:solidFill>
           <a:prstDash val="solid"/>
+          <a:miter lim="800000"/>
         </a:ln>
       </a:lnStyleLst>
       <a:effectStyleLst>
         <a:effectStyle>
+          <a:effectLst/>
+        </a:effectStyle>
+        <a:effectStyle>
+          <a:effectLst/>
+        </a:effectStyle>
+        <a:effectStyle>
           <a:effectLst>
-            <a:outerShdw blurRad="40000" dist="20000" dir="5400000" rotWithShape="0">
+            <a:outerShdw blurRad="57150" dist="19050" dir="5400000" algn="ctr" rotWithShape="0">
               <a:srgbClr val="000000">
-                <a:alpha val="38000"/>
+                <a:alpha val="63000"/>
               </a:srgbClr>
             </a:outerShdw>
           </a:effectLst>
-        </a:effectStyle>
-        <a:effectStyle>
-          <a:effectLst>
-            <a:outerShdw blurRad="40000" dist="23000" dir="5400000" rotWithShape="0">
-              <a:srgbClr val="000000">
-                <a:alpha val="35000"/>
-              </a:srgbClr>
-            </a:outerShdw>
-          </a:effectLst>
-        </a:effectStyle>
-        <a:effectStyle>
-          <a:effectLst>
-            <a:outerShdw blurRad="40000" dist="23000" dir="5400000" rotWithShape="0">
-              <a:srgbClr val="000000">
-                <a:alpha val="35000"/>
-              </a:srgbClr>
-            </a:outerShdw>
-          </a:effectLst>
-          <a:scene3d>
-            <a:camera prst="orthographicFront">
-              <a:rot lat="0" lon="0" rev="0"/>
-            </a:camera>
-            <a:lightRig rig="threePt" dir="t">
-              <a:rot lat="0" lon="0" rev="1200000"/>
-            </a:lightRig>
-          </a:scene3d>
-          <a:sp3d>
-            <a:bevelT w="63500" h="25400"/>
-          </a:sp3d>
         </a:effectStyle>
       </a:effectStyleLst>
       <a:bgFillStyleLst>
         <a:solidFill>
           <a:schemeClr val="phClr"/>
         </a:solidFill>
+        <a:solidFill>
+          <a:schemeClr val="phClr">
+            <a:tint val="95000"/>
+            <a:satMod val="170000"/>
+          </a:schemeClr>
+        </a:solidFill>
         <a:gradFill rotWithShape="1">
           <a:gsLst>
             <a:gs pos="0">
               <a:schemeClr val="phClr">
-                <a:tint val="40000"/>
-                <a:satMod val="350000"/>
+                <a:tint val="93000"/>
+                <a:satMod val="150000"/>
+                <a:shade val="98000"/>
+                <a:lumMod val="102000"/>
               </a:schemeClr>
             </a:gs>
-            <a:gs pos="40000">
+            <a:gs pos="50000">
               <a:schemeClr val="phClr">
-                <a:tint val="45000"/>
-                <a:shade val="99000"/>
-                <a:satMod val="350000"/>
+                <a:tint val="98000"/>
+                <a:satMod val="130000"/>
+                <a:shade val="90000"/>
+                <a:lumMod val="103000"/>
               </a:schemeClr>
             </a:gs>
             <a:gs pos="100000">
               <a:schemeClr val="phClr">
-                <a:shade val="20000"/>
-                <a:satMod val="255000"/>
+                <a:shade val="63000"/>
+                <a:satMod val="120000"/>
               </a:schemeClr>
             </a:gs>
           </a:gsLst>
-          <a:path path="circle">
-            <a:fillToRect l="50000" t="-80000" r="50000" b="180000"/>
-          </a:path>
-        </a:gradFill>
-        <a:gradFill rotWithShape="1">
-          <a:gsLst>
-            <a:gs pos="0">
-              <a:schemeClr val="phClr">
-                <a:tint val="80000"/>
-                <a:satMod val="300000"/>
-              </a:schemeClr>
-            </a:gs>
-            <a:gs pos="100000">
-              <a:schemeClr val="phClr">
-                <a:shade val="30000"/>
-                <a:satMod val="200000"/>
-              </a:schemeClr>
-            </a:gs>
-          </a:gsLst>
-          <a:path path="circle">
-            <a:fillToRect l="50000" t="50000" r="50000" b="50000"/>
-          </a:path>
+          <a:lin ang="5400000" scaled="0"/>
         </a:gradFill>
       </a:bgFillStyleLst>
     </a:fmtScheme>
   </a:themeElements>
-  <a:objectDefaults>
-    <a:spDef>
-      <a:spPr/>
-      <a:bodyPr/>
-      <a:lstStyle/>
-      <a:style>
-        <a:lnRef idx="1">
-          <a:schemeClr val="accent1"/>
-        </a:lnRef>
-        <a:fillRef idx="3">
-          <a:schemeClr val="accent1"/>
-        </a:fillRef>
-        <a:effectRef idx="2">
-          <a:schemeClr val="accent1"/>
-        </a:effectRef>
-        <a:fontRef idx="minor">
-          <a:schemeClr val="lt1"/>
-        </a:fontRef>
-      </a:style>
-    </a:spDef>
-    <a:lnDef>
-      <a:spPr/>
-      <a:bodyPr/>
-      <a:lstStyle/>
-      <a:style>
-        <a:lnRef idx="2">
-          <a:schemeClr val="accent1"/>
-        </a:lnRef>
-        <a:fillRef idx="0">
-          <a:schemeClr val="accent1"/>
-        </a:fillRef>
-        <a:effectRef idx="1">
-          <a:schemeClr val="accent1"/>
-        </a:effectRef>
-        <a:fontRef idx="minor">
-          <a:schemeClr val="tx1"/>
-        </a:fontRef>
-      </a:style>
-    </a:lnDef>
-  </a:objectDefaults>
+  <a:objectDefaults/>
   <a:extraClrSchemeLst/>
+  <a:extLst>
+    <a:ext uri="{05A4C25C-085E-4340-85A3-A5531E510DB2}">
+      <thm15:themeFamily xmlns:thm15="http://schemas.microsoft.com/office/thememl/2012/main" name="Office Theme" id="{62F939B6-93AF-4DB8-9C6B-D6C7DFDC589F}" vid="{4A3C46E8-61CC-4603-A589-7422A47A8E4A}"/>
+    </a:ext>
+  </a:extLst>
 </a:theme>
 </file>